--- a/clases/10/teoria/clase-10.pptx
+++ b/clases/10/teoria/clase-10.pptx
@@ -5,7 +5,7 @@
     <p:sldMasterId id="2147483699" r:id="rId1"/>
   </p:sldMasterIdLst>
   <p:notesMasterIdLst>
-    <p:notesMasterId r:id="rId31"/>
+    <p:notesMasterId r:id="rId38"/>
   </p:notesMasterIdLst>
   <p:sldIdLst>
     <p:sldId id="281" r:id="rId2"/>
@@ -35,8 +35,15 @@
     <p:sldId id="619" r:id="rId26"/>
     <p:sldId id="620" r:id="rId27"/>
     <p:sldId id="621" r:id="rId28"/>
-    <p:sldId id="310" r:id="rId29"/>
-    <p:sldId id="277" r:id="rId30"/>
+    <p:sldId id="623" r:id="rId29"/>
+    <p:sldId id="624" r:id="rId30"/>
+    <p:sldId id="625" r:id="rId31"/>
+    <p:sldId id="626" r:id="rId32"/>
+    <p:sldId id="627" r:id="rId33"/>
+    <p:sldId id="628" r:id="rId34"/>
+    <p:sldId id="310" r:id="rId35"/>
+    <p:sldId id="622" r:id="rId36"/>
+    <p:sldId id="277" r:id="rId37"/>
   </p:sldIdLst>
   <p:sldSz cx="9144000" cy="6858000" type="screen4x3"/>
   <p:notesSz cx="6858000" cy="9144000"/>
@@ -22095,7 +22102,7 @@
       </p:grpSpPr>
       <p:sp>
         <p:nvSpPr>
-          <p:cNvPr id="5" name="Title 4"/>
+          <p:cNvPr id="5" name="4 Título"/>
           <p:cNvSpPr>
             <a:spLocks noGrp="1"/>
           </p:cNvSpPr>
@@ -22105,242 +22112,358 @@
         </p:nvSpPr>
         <p:spPr>
           <a:xfrm>
-            <a:off x="107504" y="23817"/>
-            <a:ext cx="7886700" cy="812895"/>
+            <a:off x="308782" y="116632"/>
+            <a:ext cx="8835218" cy="720452"/>
           </a:xfrm>
         </p:spPr>
         <p:txBody>
           <a:bodyPr>
-            <a:normAutofit/>
+            <a:noAutofit/>
           </a:bodyPr>
           <a:lstStyle/>
           <a:p>
             <a:r>
-              <a:rPr lang="en-US" sz="4000" dirty="0"/>
-              <a:t>Referencias</a:t>
+              <a:rPr lang="es-MX" sz="3600" dirty="0"/>
+              <a:t>Resolución de problemas complejos</a:t>
             </a:r>
           </a:p>
         </p:txBody>
       </p:sp>
       <p:sp>
         <p:nvSpPr>
-          <p:cNvPr id="2" name="Content Placeholder 1"/>
-          <p:cNvSpPr>
-            <a:spLocks noGrp="1"/>
-          </p:cNvSpPr>
-          <p:nvPr>
-            <p:ph idx="1"/>
-          </p:nvPr>
+          <p:cNvPr id="13" name="12 Rectángulo"/>
+          <p:cNvSpPr/>
+          <p:nvPr/>
         </p:nvSpPr>
         <p:spPr>
           <a:xfrm>
-            <a:off x="251520" y="1088740"/>
-            <a:ext cx="8424936" cy="5148572"/>
+            <a:off x="179512" y="839028"/>
+            <a:ext cx="8835218" cy="4985980"/>
           </a:xfrm>
+          <a:prstGeom prst="rect">
+            <a:avLst/>
+          </a:prstGeom>
         </p:spPr>
         <p:txBody>
-          <a:bodyPr>
-            <a:normAutofit fontScale="92500" lnSpcReduction="10000"/>
+          <a:bodyPr wrap="square">
+            <a:spAutoFit/>
           </a:bodyPr>
           <a:lstStyle/>
           <a:p>
-            <a:pPr marL="457200" indent="-457200">
-              <a:buFont typeface="+mj-lt"/>
-              <a:buAutoNum type="arabicPeriod"/>
+            <a:pPr marL="342900" indent="-342900">
+              <a:buFont typeface="Arial" panose="020B0604020202020204" pitchFamily="34" charset="0"/>
+              <a:buChar char="•"/>
             </a:pPr>
             <a:r>
-              <a:rPr lang="es-CO" sz="2000" dirty="0">
-                <a:hlinkClick r:id="rId2"/>
-              </a:rPr>
-              <a:t>https://ellibrodepython.com/</a:t>
-            </a:r>
-            <a:endParaRPr lang="es-CO" sz="2000" dirty="0"/>
-          </a:p>
-          <a:p>
-            <a:pPr marL="457200" indent="-457200">
-              <a:buFont typeface="+mj-lt"/>
-              <a:buAutoNum type="arabicPeriod"/>
+              <a:rPr lang="es-MX" sz="2000" b="1" dirty="0"/>
+              <a:t>¿Y si el problema es grande? ¿Por dónde empiezo?</a:t>
+            </a:r>
+          </a:p>
+          <a:p>
+            <a:pPr marL="342900" indent="-342900">
+              <a:buFont typeface="Arial" panose="020B0604020202020204" pitchFamily="34" charset="0"/>
+              <a:buChar char="•"/>
             </a:pPr>
             <a:r>
-              <a:rPr lang="es-CO" sz="2000" dirty="0">
-                <a:hlinkClick r:id="rId3"/>
-              </a:rPr>
-              <a:t>https://www.w3resource.com/index.php</a:t>
-            </a:r>
-            <a:endParaRPr lang="es-CO" sz="2000" dirty="0"/>
-          </a:p>
-          <a:p>
-            <a:pPr marL="457200" indent="-457200">
-              <a:buFont typeface="+mj-lt"/>
-              <a:buAutoNum type="arabicPeriod"/>
+              <a:rPr lang="es-MX" sz="2000" b="1" dirty="0"/>
+              <a:t>Divide y vencerás</a:t>
+            </a:r>
+            <a:r>
+              <a:rPr lang="es-MX" sz="2000" dirty="0"/>
+              <a:t>: dividir un problema complejo en subproblemas más sencillos, y estos a su vez en otros más simples, hasta que cada uno sea fácil de resolver.</a:t>
+            </a:r>
+          </a:p>
+          <a:p>
+            <a:pPr marL="342900" indent="-342900">
+              <a:buFont typeface="Arial" panose="020B0604020202020204" pitchFamily="34" charset="0"/>
+              <a:buChar char="•"/>
             </a:pPr>
             <a:r>
-              <a:rPr lang="es-CO" sz="2000" dirty="0">
+              <a:rPr lang="es-MX" sz="2000" b="1" dirty="0"/>
+              <a:t>Diseño top-</a:t>
+            </a:r>
+            <a:r>
+              <a:rPr lang="es-MX" sz="2000" b="1" dirty="0" err="1"/>
+              <a:t>down</a:t>
+            </a:r>
+            <a:r>
+              <a:rPr lang="es-MX" sz="2000" b="1" dirty="0"/>
+              <a:t> (descendente)</a:t>
+            </a:r>
+            <a:r>
+              <a:rPr lang="es-MX" sz="2000" dirty="0"/>
+              <a:t>: se parte del problema completo (arriba) y se baja, nivel por nivel, hasta las piezas más pequeñas.</a:t>
+            </a:r>
+          </a:p>
+          <a:p>
+            <a:pPr marL="342900" indent="-342900">
+              <a:buFont typeface="Arial" panose="020B0604020202020204" pitchFamily="34" charset="0"/>
+              <a:buChar char="•"/>
+            </a:pPr>
+            <a:endParaRPr lang="es-MX" sz="2000" dirty="0"/>
+          </a:p>
+          <a:p>
+            <a:pPr marL="342900" indent="-342900">
+              <a:buFont typeface="Arial" panose="020B0604020202020204" pitchFamily="34" charset="0"/>
+              <a:buChar char="•"/>
+            </a:pPr>
+            <a:endParaRPr lang="es-MX" sz="2000" dirty="0"/>
+          </a:p>
+          <a:p>
+            <a:pPr marL="342900" indent="-342900">
+              <a:buFont typeface="Arial" panose="020B0604020202020204" pitchFamily="34" charset="0"/>
+              <a:buChar char="•"/>
+            </a:pPr>
+            <a:endParaRPr lang="es-MX" sz="2000" dirty="0"/>
+          </a:p>
+          <a:p>
+            <a:pPr marL="342900" indent="-342900">
+              <a:buFont typeface="Arial" panose="020B0604020202020204" pitchFamily="34" charset="0"/>
+              <a:buChar char="•"/>
+            </a:pPr>
+            <a:endParaRPr lang="es-MX" sz="2000" dirty="0"/>
+          </a:p>
+          <a:p>
+            <a:pPr marL="342900" indent="-342900">
+              <a:buFont typeface="Arial" panose="020B0604020202020204" pitchFamily="34" charset="0"/>
+              <a:buChar char="•"/>
+            </a:pPr>
+            <a:endParaRPr lang="es-MX" sz="2000" dirty="0"/>
+          </a:p>
+          <a:p>
+            <a:pPr marL="342900" indent="-342900">
+              <a:buFont typeface="Arial" panose="020B0604020202020204" pitchFamily="34" charset="0"/>
+              <a:buChar char="•"/>
+            </a:pPr>
+            <a:endParaRPr lang="es-MX" sz="2000" dirty="0"/>
+          </a:p>
+          <a:p>
+            <a:pPr marL="342900" indent="-342900">
+              <a:buFont typeface="Arial" panose="020B0604020202020204" pitchFamily="34" charset="0"/>
+              <a:buChar char="•"/>
+            </a:pPr>
+            <a:endParaRPr lang="es-MX" sz="2000" dirty="0"/>
+          </a:p>
+          <a:p>
+            <a:pPr marL="342900" indent="-342900">
+              <a:buFont typeface="Arial" panose="020B0604020202020204" pitchFamily="34" charset="0"/>
+              <a:buChar char="•"/>
+            </a:pPr>
+            <a:endParaRPr lang="es-MX" sz="2000" dirty="0"/>
+          </a:p>
+          <a:p>
+            <a:pPr marL="342900" indent="-342900">
+              <a:buFont typeface="Arial" panose="020B0604020202020204" pitchFamily="34" charset="0"/>
+              <a:buChar char="•"/>
+            </a:pPr>
+            <a:endParaRPr lang="es-MX" sz="2000" dirty="0"/>
+          </a:p>
+          <a:p>
+            <a:pPr marL="342900" indent="-342900">
+              <a:buFont typeface="Arial" panose="020B0604020202020204" pitchFamily="34" charset="0"/>
+              <a:buChar char="•"/>
+            </a:pPr>
+            <a:endParaRPr lang="es-MX" dirty="0"/>
+          </a:p>
+        </p:txBody>
+      </p:sp>
+      <p:pic>
+        <p:nvPicPr>
+          <p:cNvPr id="6" name="Picture 2" descr="esquema top-down">
+            <a:extLst>
+              <a:ext uri="{FF2B5EF4-FFF2-40B4-BE49-F238E27FC236}">
+                <a16:creationId xmlns:a16="http://schemas.microsoft.com/office/drawing/2014/main" id="{69BCE1C3-120F-4720-8A26-46A22ABB1E89}"/>
+              </a:ext>
+            </a:extLst>
+          </p:cNvPr>
+          <p:cNvPicPr>
+            <a:picLocks noChangeAspect="1" noChangeArrowheads="1"/>
+          </p:cNvPicPr>
+          <p:nvPr/>
+        </p:nvPicPr>
+        <p:blipFill>
+          <a:blip r:embed="rId2">
+            <a:extLst>
+              <a:ext uri="{28A0092B-C50C-407E-A947-70E740481C1C}">
+                <a14:useLocalDpi xmlns:a14="http://schemas.microsoft.com/office/drawing/2010/main" val="0"/>
+              </a:ext>
+            </a:extLst>
+          </a:blip>
+          <a:srcRect/>
+          <a:stretch>
+            <a:fillRect/>
+          </a:stretch>
+        </p:blipFill>
+        <p:spPr bwMode="auto">
+          <a:xfrm>
+            <a:off x="961907" y="3222381"/>
+            <a:ext cx="7858565" cy="2438867"/>
+          </a:xfrm>
+          <a:prstGeom prst="rect">
+            <a:avLst/>
+          </a:prstGeom>
+          <a:noFill/>
+          <a:extLst>
+            <a:ext uri="{909E8E84-426E-40DD-AFC4-6F175D3DCCD1}">
+              <a14:hiddenFill xmlns:a14="http://schemas.microsoft.com/office/drawing/2010/main">
+                <a:solidFill>
+                  <a:srgbClr val="FFFFFF"/>
+                </a:solidFill>
+              </a14:hiddenFill>
+            </a:ext>
+          </a:extLst>
+        </p:spPr>
+      </p:pic>
+      <p:pic>
+        <p:nvPicPr>
+          <p:cNvPr id="7" name="Picture 1">
+            <a:extLst>
+              <a:ext uri="{FF2B5EF4-FFF2-40B4-BE49-F238E27FC236}">
+                <a16:creationId xmlns:a16="http://schemas.microsoft.com/office/drawing/2014/main" id="{4093F735-9854-4635-94C0-9D1BF029EA76}"/>
+              </a:ext>
+            </a:extLst>
+          </p:cNvPr>
+          <p:cNvPicPr>
+            <a:picLocks noChangeAspect="1" noChangeArrowheads="1"/>
+          </p:cNvPicPr>
+          <p:nvPr/>
+        </p:nvPicPr>
+        <p:blipFill>
+          <a:blip r:embed="rId3">
+            <a:extLst>
+              <a:ext uri="{28A0092B-C50C-407E-A947-70E740481C1C}">
+                <a14:useLocalDpi xmlns:a14="http://schemas.microsoft.com/office/drawing/2010/main" val="0"/>
+              </a:ext>
+            </a:extLst>
+          </a:blip>
+          <a:srcRect/>
+          <a:stretch>
+            <a:fillRect/>
+          </a:stretch>
+        </p:blipFill>
+        <p:spPr bwMode="auto">
+          <a:xfrm>
+            <a:off x="594131" y="3039341"/>
+            <a:ext cx="1961645" cy="1613795"/>
+          </a:xfrm>
+          <a:prstGeom prst="rect">
+            <a:avLst/>
+          </a:prstGeom>
+          <a:noFill/>
+          <a:ln>
+            <a:noFill/>
+          </a:ln>
+          <a:extLst>
+            <a:ext uri="{909E8E84-426E-40DD-AFC4-6F175D3DCCD1}">
+              <a14:hiddenFill xmlns:a14="http://schemas.microsoft.com/office/drawing/2010/main">
+                <a:solidFill>
+                  <a:schemeClr val="accent1"/>
+                </a:solidFill>
+              </a14:hiddenFill>
+            </a:ext>
+            <a:ext uri="{91240B29-F687-4F45-9708-019B960494DF}">
+              <a14:hiddenLine xmlns:a14="http://schemas.microsoft.com/office/drawing/2010/main" w="9525">
+                <a:solidFill>
+                  <a:schemeClr val="tx1"/>
+                </a:solidFill>
+                <a:miter lim="800000"/>
+                <a:headEnd/>
+                <a:tailEnd/>
+              </a14:hiddenLine>
+            </a:ext>
+          </a:extLst>
+        </p:spPr>
+      </p:pic>
+      <p:sp>
+        <p:nvSpPr>
+          <p:cNvPr id="10" name="CuadroTexto 9">
+            <a:extLst>
+              <a:ext uri="{FF2B5EF4-FFF2-40B4-BE49-F238E27FC236}">
+                <a16:creationId xmlns:a16="http://schemas.microsoft.com/office/drawing/2014/main" id="{B673CC65-DEEB-4F99-925B-E7F47922A62E}"/>
+              </a:ext>
+            </a:extLst>
+          </p:cNvPr>
+          <p:cNvSpPr txBox="1"/>
+          <p:nvPr/>
+        </p:nvSpPr>
+        <p:spPr>
+          <a:xfrm>
+            <a:off x="251520" y="6309320"/>
+            <a:ext cx="8695542" cy="369332"/>
+          </a:xfrm>
+          <a:prstGeom prst="rect">
+            <a:avLst/>
+          </a:prstGeom>
+          <a:solidFill>
+            <a:schemeClr val="accent2">
+              <a:lumMod val="20000"/>
+              <a:lumOff val="80000"/>
+            </a:schemeClr>
+          </a:solidFill>
+        </p:spPr>
+        <p:txBody>
+          <a:bodyPr wrap="square">
+            <a:spAutoFit/>
+          </a:bodyPr>
+          <a:lstStyle/>
+          <a:p>
+            <a:r>
+              <a:rPr lang="es-CO" b="1" dirty="0"/>
+              <a:t>Idea clave</a:t>
+            </a:r>
+            <a:r>
+              <a:rPr lang="es-CO" dirty="0"/>
+              <a:t>: no se resuelve el problema grande. Se resuelven muchos problemas pequeños.</a:t>
+            </a:r>
+          </a:p>
+        </p:txBody>
+      </p:sp>
+      <p:sp>
+        <p:nvSpPr>
+          <p:cNvPr id="11" name="CuadroTexto 10">
+            <a:extLst>
+              <a:ext uri="{FF2B5EF4-FFF2-40B4-BE49-F238E27FC236}">
+                <a16:creationId xmlns:a16="http://schemas.microsoft.com/office/drawing/2014/main" id="{1D8D8314-2095-4265-8B03-89DB2BAF2078}"/>
+              </a:ext>
+            </a:extLst>
+          </p:cNvPr>
+          <p:cNvSpPr txBox="1"/>
+          <p:nvPr/>
+        </p:nvSpPr>
+        <p:spPr>
+          <a:xfrm>
+            <a:off x="2311121" y="5682734"/>
+            <a:ext cx="4572000" cy="307777"/>
+          </a:xfrm>
+          <a:prstGeom prst="rect">
+            <a:avLst/>
+          </a:prstGeom>
+          <a:noFill/>
+        </p:spPr>
+        <p:txBody>
+          <a:bodyPr wrap="square">
+            <a:spAutoFit/>
+          </a:bodyPr>
+          <a:lstStyle/>
+          <a:p>
+            <a:pPr algn="ctr"/>
+            <a:r>
+              <a:rPr lang="es-CO" sz="1400" b="1" dirty="0"/>
+              <a:t>Diseño Top-Down para conquistar las Galias</a:t>
+            </a:r>
+            <a:r>
+              <a:rPr lang="es-CO" sz="1400" dirty="0"/>
+              <a:t> (</a:t>
+            </a:r>
+            <a:r>
+              <a:rPr lang="es-CO" sz="1400" dirty="0">
                 <a:hlinkClick r:id="rId4"/>
               </a:rPr>
-              <a:t>https://realpython.com/</a:t>
-            </a:r>
-            <a:endParaRPr lang="es-CO" sz="2000" dirty="0"/>
-          </a:p>
-          <a:p>
-            <a:pPr marL="457200" indent="-457200">
-              <a:buFont typeface="+mj-lt"/>
-              <a:buAutoNum type="arabicPeriod"/>
-            </a:pPr>
-            <a:r>
-              <a:rPr lang="es-CO" sz="2000" dirty="0">
-                <a:hlinkClick r:id="rId5"/>
-              </a:rPr>
-              <a:t>https://curriculumresources.edu.gh/wp-content/uploads/2025/01/</a:t>
-            </a:r>
-            <a:endParaRPr lang="es-CO" sz="2000" dirty="0"/>
-          </a:p>
-          <a:p>
-            <a:pPr marL="457200" indent="-457200">
-              <a:buFont typeface="+mj-lt"/>
-              <a:buAutoNum type="arabicPeriod"/>
-            </a:pPr>
-            <a:r>
-              <a:rPr lang="es-CO" sz="2000" dirty="0">
-                <a:hlinkClick r:id="rId6"/>
-              </a:rPr>
-              <a:t>https://python-course.eu/</a:t>
-            </a:r>
-            <a:endParaRPr lang="es-CO" sz="2000" dirty="0"/>
-          </a:p>
-          <a:p>
-            <a:pPr marL="457200" indent="-457200">
-              <a:buFont typeface="+mj-lt"/>
-              <a:buAutoNum type="arabicPeriod"/>
-            </a:pPr>
-            <a:r>
-              <a:rPr lang="es-CO" sz="2000" dirty="0">
-                <a:hlinkClick r:id="rId7"/>
-              </a:rPr>
-              <a:t>https://realpython.com/cheatsheets/python/</a:t>
-            </a:r>
-            <a:endParaRPr lang="es-CO" sz="2000" dirty="0"/>
-          </a:p>
-          <a:p>
-            <a:pPr marL="457200" indent="-457200">
-              <a:buFont typeface="+mj-lt"/>
-              <a:buAutoNum type="arabicPeriod"/>
-            </a:pPr>
-            <a:r>
-              <a:rPr lang="es-CO" sz="2000" dirty="0">
-                <a:hlinkClick r:id="rId8"/>
-              </a:rPr>
-              <a:t>https://realpython.com/defining-your-own-python-function/</a:t>
-            </a:r>
-            <a:r>
-              <a:rPr lang="es-CO" sz="2000" dirty="0"/>
-              <a:t>    </a:t>
-            </a:r>
-          </a:p>
-          <a:p>
-            <a:pPr marL="457200" indent="-457200">
-              <a:buFont typeface="+mj-lt"/>
-              <a:buAutoNum type="arabicPeriod"/>
-            </a:pPr>
-            <a:r>
-              <a:rPr lang="es-CO" sz="2000" dirty="0">
-                <a:hlinkClick r:id="rId9"/>
-              </a:rPr>
-              <a:t>https://realpython.com/python-built-in-functions/</a:t>
-            </a:r>
-            <a:endParaRPr lang="es-CO" sz="2000" dirty="0"/>
-          </a:p>
-          <a:p>
-            <a:pPr marL="457200" indent="-457200">
-              <a:buFont typeface="+mj-lt"/>
-              <a:buAutoNum type="arabicPeriod"/>
-            </a:pPr>
-            <a:r>
-              <a:rPr lang="es-CO" sz="2000" dirty="0">
-                <a:hlinkClick r:id="rId10"/>
-              </a:rPr>
-              <a:t>https://realpython.com/ref/best-practices/functions/</a:t>
-            </a:r>
-            <a:r>
-              <a:rPr lang="es-CO" sz="2000" dirty="0"/>
-              <a:t> </a:t>
-            </a:r>
-          </a:p>
-          <a:p>
-            <a:pPr marL="457200" indent="-457200">
-              <a:buFont typeface="+mj-lt"/>
-              <a:buAutoNum type="arabicPeriod"/>
-            </a:pPr>
-            <a:r>
-              <a:rPr lang="es-CO" sz="2000" dirty="0">
-                <a:hlinkClick r:id="rId11"/>
-              </a:rPr>
-              <a:t>https://makecode.microbit.org/courses/csintro</a:t>
-            </a:r>
-            <a:r>
-              <a:rPr lang="es-CO" sz="2000" dirty="0"/>
-              <a:t>   </a:t>
-            </a:r>
-          </a:p>
-          <a:p>
-            <a:pPr marL="457200" indent="-457200">
-              <a:buFont typeface="+mj-lt"/>
-              <a:buAutoNum type="arabicPeriod"/>
-            </a:pPr>
-            <a:r>
-              <a:rPr lang="en-US" sz="2000" dirty="0">
-                <a:hlinkClick r:id="rId12"/>
-              </a:rPr>
-              <a:t>https://makecode.microbit.org/courses</a:t>
-            </a:r>
-            <a:r>
-              <a:rPr lang="en-US" sz="2000" dirty="0"/>
-              <a:t> </a:t>
-            </a:r>
-          </a:p>
-          <a:p>
-            <a:pPr marL="457200" indent="-457200">
-              <a:buFont typeface="+mj-lt"/>
-              <a:buAutoNum type="arabicPeriod"/>
-            </a:pPr>
-            <a:r>
-              <a:rPr lang="en-US" sz="2000" dirty="0">
-                <a:hlinkClick r:id="rId13"/>
-              </a:rPr>
-              <a:t>https://realpython.com/python-while-loop/</a:t>
-            </a:r>
-            <a:endParaRPr lang="en-US" sz="2000" dirty="0"/>
-          </a:p>
-          <a:p>
-            <a:pPr marL="457200" indent="-457200">
-              <a:buFont typeface="+mj-lt"/>
-              <a:buAutoNum type="arabicPeriod"/>
-            </a:pPr>
-            <a:r>
-              <a:rPr lang="en-US" sz="2000" dirty="0">
-                <a:hlinkClick r:id="rId14"/>
-              </a:rPr>
-              <a:t>https://realpython.com/ref/keywords/while/</a:t>
-            </a:r>
-            <a:r>
-              <a:rPr lang="en-US" sz="2000" dirty="0"/>
-              <a:t> </a:t>
-            </a:r>
-          </a:p>
-          <a:p>
-            <a:pPr marL="457200" indent="-457200">
-              <a:buFont typeface="+mj-lt"/>
-              <a:buAutoNum type="arabicPeriod"/>
-            </a:pPr>
-            <a:r>
-              <a:rPr lang="en-US" sz="2000" dirty="0">
-                <a:hlinkClick r:id="rId15"/>
-              </a:rPr>
-              <a:t>https://cs.stanford.edu/people/nick/py/</a:t>
-            </a:r>
-            <a:r>
-              <a:rPr lang="en-US" sz="2000" dirty="0"/>
-              <a:t> </a:t>
+              <a:t>link</a:t>
+            </a:r>
+            <a:r>
+              <a:rPr lang="es-CO" sz="1400" dirty="0"/>
+              <a:t>).</a:t>
             </a:r>
           </a:p>
         </p:txBody>
@@ -22348,7 +22471,7 @@
     </p:spTree>
     <p:extLst>
       <p:ext uri="{BB962C8B-B14F-4D97-AF65-F5344CB8AC3E}">
-        <p14:creationId xmlns:p14="http://schemas.microsoft.com/office/powerpoint/2010/main" val="1023164851"/>
+        <p14:creationId xmlns:p14="http://schemas.microsoft.com/office/powerpoint/2010/main" val="4073108364"/>
       </p:ext>
     </p:extLst>
   </p:cSld>
@@ -22377,7 +22500,7 @@
       </p:grpSpPr>
       <p:sp>
         <p:nvSpPr>
-          <p:cNvPr id="2" name="Title 1"/>
+          <p:cNvPr id="5" name="4 Título"/>
           <p:cNvSpPr>
             <a:spLocks noGrp="1"/>
           </p:cNvSpPr>
@@ -22387,85 +22510,33 @@
         </p:nvSpPr>
         <p:spPr>
           <a:xfrm>
-            <a:off x="323528" y="180617"/>
-            <a:ext cx="8191822" cy="728103"/>
+            <a:off x="308782" y="116632"/>
+            <a:ext cx="8835218" cy="720452"/>
           </a:xfrm>
         </p:spPr>
         <p:txBody>
-          <a:bodyPr/>
+          <a:bodyPr>
+            <a:noAutofit/>
+          </a:bodyPr>
           <a:lstStyle/>
           <a:p>
             <a:r>
-              <a:rPr lang="es-CO" dirty="0"/>
-              <a:t>Eso es todo amigos</a:t>
-            </a:r>
-            <a:endParaRPr lang="en-US" dirty="0"/>
+              <a:rPr lang="es-MX" sz="3600" dirty="0"/>
+              <a:t>El primer nivel: entrada, proceso y salida</a:t>
+            </a:r>
           </a:p>
         </p:txBody>
       </p:sp>
-      <p:pic>
-        <p:nvPicPr>
-          <p:cNvPr id="4" name="Picture 4">
-            <a:extLst>
-              <a:ext uri="{FF2B5EF4-FFF2-40B4-BE49-F238E27FC236}">
-                <a16:creationId xmlns:a16="http://schemas.microsoft.com/office/drawing/2014/main" id="{7F35EEF4-F126-467F-A5BB-259AA64991BD}"/>
-              </a:ext>
-            </a:extLst>
-          </p:cNvPr>
-          <p:cNvPicPr>
-            <a:picLocks noChangeAspect="1" noChangeArrowheads="1"/>
-          </p:cNvPicPr>
-          <p:nvPr/>
-        </p:nvPicPr>
-        <p:blipFill>
-          <a:blip r:embed="rId2">
-            <a:extLst>
-              <a:ext uri="{28A0092B-C50C-407E-A947-70E740481C1C}">
-                <a14:useLocalDpi xmlns:a14="http://schemas.microsoft.com/office/drawing/2010/main" val="0"/>
-              </a:ext>
-            </a:extLst>
-          </a:blip>
-          <a:srcRect/>
-          <a:stretch>
-            <a:fillRect/>
-          </a:stretch>
-        </p:blipFill>
-        <p:spPr bwMode="auto">
-          <a:xfrm>
-            <a:off x="4211960" y="912200"/>
-            <a:ext cx="4113633" cy="5868856"/>
-          </a:xfrm>
-          <a:prstGeom prst="rect">
-            <a:avLst/>
-          </a:prstGeom>
-          <a:noFill/>
-          <a:extLst>
-            <a:ext uri="{909E8E84-426E-40DD-AFC4-6F175D3DCCD1}">
-              <a14:hiddenFill xmlns:a14="http://schemas.microsoft.com/office/drawing/2010/main">
-                <a:solidFill>
-                  <a:srgbClr val="FFFFFF"/>
-                </a:solidFill>
-              </a14:hiddenFill>
-            </a:ext>
-          </a:extLst>
-        </p:spPr>
-      </p:pic>
       <p:sp>
         <p:nvSpPr>
-          <p:cNvPr id="5" name="7 Rectángulo">
-            <a:extLst>
-              <a:ext uri="{FF2B5EF4-FFF2-40B4-BE49-F238E27FC236}">
-                <a16:creationId xmlns:a16="http://schemas.microsoft.com/office/drawing/2014/main" id="{27C7AA4C-274E-4F17-B614-41C209AA98D3}"/>
-              </a:ext>
-            </a:extLst>
-          </p:cNvPr>
+          <p:cNvPr id="13" name="12 Rectángulo"/>
           <p:cNvSpPr/>
           <p:nvPr/>
         </p:nvSpPr>
         <p:spPr>
           <a:xfrm>
-            <a:off x="101021" y="6519446"/>
-            <a:ext cx="3678892" cy="261610"/>
+            <a:off x="179512" y="717664"/>
+            <a:ext cx="8835218" cy="1631216"/>
           </a:xfrm>
           <a:prstGeom prst="rect">
             <a:avLst/>
@@ -22477,70 +22548,185 @@
           </a:bodyPr>
           <a:lstStyle/>
           <a:p>
-            <a:r>
-              <a:rPr lang="es-CO" sz="1100" dirty="0">
-                <a:hlinkClick r:id="rId3"/>
-              </a:rPr>
-              <a:t>https://phdcomics.com/comics/archive.php?comicid=1431</a:t>
-            </a:r>
-            <a:r>
-              <a:rPr lang="es-CO" sz="1100" dirty="0"/>
-              <a:t> </a:t>
+            <a:pPr marL="342900" indent="-342900" rtl="0">
+              <a:buFont typeface="Arial" panose="020B0604020202020204" pitchFamily="34" charset="0"/>
+              <a:buChar char="•"/>
+            </a:pPr>
+            <a:r>
+              <a:rPr lang="es-MX" sz="2000" dirty="0"/>
+              <a:t>Casi todo programa se divide primero en las mismas tres partes ya vistas: </a:t>
+            </a:r>
+          </a:p>
+          <a:p>
+            <a:pPr rtl="0"/>
+            <a:endParaRPr lang="es-MX" sz="2000" b="1" dirty="0"/>
+          </a:p>
+          <a:p>
+            <a:pPr algn="ctr" rtl="0"/>
+            <a:r>
+              <a:rPr lang="es-MX" sz="2000" b="1" dirty="0"/>
+              <a:t>entrada → proceso → salida</a:t>
+            </a:r>
+            <a:r>
+              <a:rPr lang="es-MX" sz="2000" dirty="0"/>
+              <a:t>.</a:t>
+            </a:r>
+          </a:p>
+          <a:p>
+            <a:pPr algn="ctr" rtl="0"/>
+            <a:endParaRPr lang="es-MX" sz="2000" dirty="0"/>
+          </a:p>
+          <a:p>
+            <a:pPr marL="342900" indent="-342900" rtl="0">
+              <a:buFont typeface="Arial" panose="020B0604020202020204" pitchFamily="34" charset="0"/>
+              <a:buChar char="•"/>
+            </a:pPr>
+            <a:r>
+              <a:rPr lang="es-MX" sz="2000" dirty="0"/>
+              <a:t>El programa de temperaturas ya era </a:t>
+            </a:r>
+            <a:r>
+              <a:rPr lang="es-MX" sz="2000" b="1" dirty="0"/>
+              <a:t>top-</a:t>
+            </a:r>
+            <a:r>
+              <a:rPr lang="es-MX" sz="2000" b="1" dirty="0" err="1"/>
+              <a:t>down</a:t>
+            </a:r>
+            <a:r>
+              <a:rPr lang="es-MX" sz="2000" dirty="0"/>
+              <a:t>:</a:t>
+            </a:r>
+            <a:endParaRPr lang="es-MX" dirty="0"/>
+          </a:p>
+        </p:txBody>
+      </p:sp>
+      <p:sp>
+        <p:nvSpPr>
+          <p:cNvPr id="10" name="CuadroTexto 9">
+            <a:extLst>
+              <a:ext uri="{FF2B5EF4-FFF2-40B4-BE49-F238E27FC236}">
+                <a16:creationId xmlns:a16="http://schemas.microsoft.com/office/drawing/2014/main" id="{B673CC65-DEEB-4F99-925B-E7F47922A62E}"/>
+              </a:ext>
+            </a:extLst>
+          </p:cNvPr>
+          <p:cNvSpPr txBox="1"/>
+          <p:nvPr/>
+        </p:nvSpPr>
+        <p:spPr>
+          <a:xfrm>
+            <a:off x="251520" y="6093296"/>
+            <a:ext cx="8695542" cy="646331"/>
+          </a:xfrm>
+          <a:prstGeom prst="rect">
+            <a:avLst/>
+          </a:prstGeom>
+          <a:solidFill>
+            <a:schemeClr val="accent2">
+              <a:lumMod val="20000"/>
+              <a:lumOff val="80000"/>
+            </a:schemeClr>
+          </a:solidFill>
+        </p:spPr>
+        <p:txBody>
+          <a:bodyPr wrap="square">
+            <a:spAutoFit/>
+          </a:bodyPr>
+          <a:lstStyle/>
+          <a:p>
+            <a:r>
+              <a:rPr lang="es-MX" b="1" dirty="0"/>
+              <a:t>No es un método nuevo: </a:t>
+            </a:r>
+            <a:r>
+              <a:rPr lang="es-MX" dirty="0"/>
+              <a:t>es lo que se hizo previamente con temperaturas. Ahora tiene nombre.</a:t>
             </a:r>
           </a:p>
         </p:txBody>
       </p:sp>
       <p:pic>
         <p:nvPicPr>
-          <p:cNvPr id="2050" name="Picture 2" descr="Ouch Images – Browse 81,244 Stock Photos, Vectors, and Video | Adobe Stock">
+          <p:cNvPr id="3" name="Imagen 2">
             <a:extLst>
               <a:ext uri="{FF2B5EF4-FFF2-40B4-BE49-F238E27FC236}">
-                <a16:creationId xmlns:a16="http://schemas.microsoft.com/office/drawing/2014/main" id="{190AEE93-FCB4-45D0-A740-34697C5E7782}"/>
+                <a16:creationId xmlns:a16="http://schemas.microsoft.com/office/drawing/2014/main" id="{37B98D33-7CCB-41E3-90FC-F4379A9BB1C3}"/>
               </a:ext>
             </a:extLst>
           </p:cNvPr>
           <p:cNvPicPr>
-            <a:picLocks noChangeAspect="1" noChangeArrowheads="1"/>
+            <a:picLocks noChangeAspect="1"/>
           </p:cNvPicPr>
           <p:nvPr/>
         </p:nvPicPr>
         <p:blipFill>
-          <a:blip r:embed="rId4">
-            <a:extLst>
-              <a:ext uri="{28A0092B-C50C-407E-A947-70E740481C1C}">
-                <a14:useLocalDpi xmlns:a14="http://schemas.microsoft.com/office/drawing/2010/main" val="0"/>
-              </a:ext>
-            </a:extLst>
-          </a:blip>
-          <a:srcRect/>
+          <a:blip r:embed="rId2"/>
           <a:stretch>
             <a:fillRect/>
           </a:stretch>
         </p:blipFill>
-        <p:spPr bwMode="auto">
+        <p:spPr>
           <a:xfrm>
-            <a:off x="297451" y="2496793"/>
-            <a:ext cx="3563955" cy="2434580"/>
+            <a:off x="971600" y="2276872"/>
+            <a:ext cx="7200800" cy="3398777"/>
+          </a:xfrm>
+          <a:prstGeom prst="rect">
+            <a:avLst/>
+          </a:prstGeom>
+        </p:spPr>
+      </p:pic>
+      <p:sp>
+        <p:nvSpPr>
+          <p:cNvPr id="14" name="CuadroTexto 13">
+            <a:extLst>
+              <a:ext uri="{FF2B5EF4-FFF2-40B4-BE49-F238E27FC236}">
+                <a16:creationId xmlns:a16="http://schemas.microsoft.com/office/drawing/2014/main" id="{026C3336-30AD-429B-8D85-6797BECC2F78}"/>
+              </a:ext>
+            </a:extLst>
+          </p:cNvPr>
+          <p:cNvSpPr txBox="1"/>
+          <p:nvPr/>
+        </p:nvSpPr>
+        <p:spPr>
+          <a:xfrm>
+            <a:off x="467544" y="5579948"/>
+            <a:ext cx="8407510" cy="369332"/>
           </a:xfrm>
           <a:prstGeom prst="rect">
             <a:avLst/>
           </a:prstGeom>
           <a:noFill/>
-          <a:extLst>
-            <a:ext uri="{909E8E84-426E-40DD-AFC4-6F175D3DCCD1}">
-              <a14:hiddenFill xmlns:a14="http://schemas.microsoft.com/office/drawing/2010/main">
-                <a:solidFill>
-                  <a:srgbClr val="FFFFFF"/>
-                </a:solidFill>
-              </a14:hiddenFill>
-            </a:ext>
-          </a:extLst>
         </p:spPr>
-      </p:pic>
+        <p:txBody>
+          <a:bodyPr wrap="square">
+            <a:spAutoFit/>
+          </a:bodyPr>
+          <a:lstStyle/>
+          <a:p>
+            <a:pPr algn="ctr"/>
+            <a:r>
+              <a:rPr lang="es-CO" b="1" dirty="0"/>
+              <a:t>Diagrama top-</a:t>
+            </a:r>
+            <a:r>
+              <a:rPr lang="es-CO" b="1" dirty="0" err="1"/>
+              <a:t>down</a:t>
+            </a:r>
+            <a:r>
+              <a:rPr lang="es-CO" b="1" dirty="0"/>
+              <a:t> temperaturas</a:t>
+            </a:r>
+            <a:r>
+              <a:rPr lang="es-CO" dirty="0"/>
+              <a:t>: ¿Dónde está cada parte en temperaturas_v2.py?</a:t>
+            </a:r>
+          </a:p>
+        </p:txBody>
+      </p:sp>
     </p:spTree>
     <p:extLst>
       <p:ext uri="{BB962C8B-B14F-4D97-AF65-F5344CB8AC3E}">
-        <p14:creationId xmlns:p14="http://schemas.microsoft.com/office/powerpoint/2010/main" val="3024962735"/>
+        <p14:creationId xmlns:p14="http://schemas.microsoft.com/office/powerpoint/2010/main" val="1069985901"/>
       </p:ext>
     </p:extLst>
   </p:cSld>
@@ -23117,6 +23303,2378 @@
     <p:extLst>
       <p:ext uri="{BB962C8B-B14F-4D97-AF65-F5344CB8AC3E}">
         <p14:creationId xmlns:p14="http://schemas.microsoft.com/office/powerpoint/2010/main" val="106452970"/>
+      </p:ext>
+    </p:extLst>
+  </p:cSld>
+  <p:clrMapOvr>
+    <a:masterClrMapping/>
+  </p:clrMapOvr>
+</p:sld>
+</file>
+
+<file path=ppt/slides/slide30.xml><?xml version="1.0" encoding="utf-8"?>
+<p:sld xmlns:a="http://schemas.openxmlformats.org/drawingml/2006/main" xmlns:r="http://schemas.openxmlformats.org/officeDocument/2006/relationships" xmlns:p="http://schemas.openxmlformats.org/presentationml/2006/main">
+  <p:cSld>
+    <p:spTree>
+      <p:nvGrpSpPr>
+        <p:cNvPr id="1" name=""/>
+        <p:cNvGrpSpPr/>
+        <p:nvPr/>
+      </p:nvGrpSpPr>
+      <p:grpSpPr>
+        <a:xfrm>
+          <a:off x="0" y="0"/>
+          <a:ext cx="0" cy="0"/>
+          <a:chOff x="0" y="0"/>
+          <a:chExt cx="0" cy="0"/>
+        </a:xfrm>
+      </p:grpSpPr>
+      <p:sp>
+        <p:nvSpPr>
+          <p:cNvPr id="5" name="4 Título"/>
+          <p:cNvSpPr>
+            <a:spLocks noGrp="1"/>
+          </p:cNvSpPr>
+          <p:nvPr>
+            <p:ph type="title"/>
+          </p:nvPr>
+        </p:nvSpPr>
+        <p:spPr>
+          <a:xfrm>
+            <a:off x="308782" y="116632"/>
+            <a:ext cx="8835218" cy="720452"/>
+          </a:xfrm>
+        </p:spPr>
+        <p:txBody>
+          <a:bodyPr>
+            <a:noAutofit/>
+          </a:bodyPr>
+          <a:lstStyle/>
+          <a:p>
+            <a:r>
+              <a:rPr lang="es-MX" sz="3600" dirty="0"/>
+              <a:t>¿Hasta dónde dividir?</a:t>
+            </a:r>
+          </a:p>
+        </p:txBody>
+      </p:sp>
+      <p:sp>
+        <p:nvSpPr>
+          <p:cNvPr id="13" name="12 Rectángulo"/>
+          <p:cNvSpPr/>
+          <p:nvPr/>
+        </p:nvSpPr>
+        <p:spPr>
+          <a:xfrm>
+            <a:off x="179512" y="717664"/>
+            <a:ext cx="8835218" cy="1323439"/>
+          </a:xfrm>
+          <a:prstGeom prst="rect">
+            <a:avLst/>
+          </a:prstGeom>
+        </p:spPr>
+        <p:txBody>
+          <a:bodyPr wrap="square">
+            <a:spAutoFit/>
+          </a:bodyPr>
+          <a:lstStyle/>
+          <a:p>
+            <a:pPr rtl="0"/>
+            <a:r>
+              <a:rPr lang="es-MX" sz="2000" b="1" dirty="0"/>
+              <a:t>Ejemplo:</a:t>
+            </a:r>
+            <a:r>
+              <a:rPr lang="es-MX" sz="2000" dirty="0"/>
+              <a:t> </a:t>
+            </a:r>
+            <a:r>
+              <a:rPr lang="es-CO" sz="2000" dirty="0"/>
+              <a:t>Hacer un programa que despliegue un calendario para un mes del año dado. El programa solicita al usuario que ingrese el año y el mes, y entonces despliega el calendario entero para ese mes tal y como lo muestra la siguiente figura:</a:t>
+            </a:r>
+            <a:endParaRPr lang="es-MX" sz="2000" dirty="0"/>
+          </a:p>
+        </p:txBody>
+      </p:sp>
+      <p:sp>
+        <p:nvSpPr>
+          <p:cNvPr id="14" name="CuadroTexto 13">
+            <a:extLst>
+              <a:ext uri="{FF2B5EF4-FFF2-40B4-BE49-F238E27FC236}">
+                <a16:creationId xmlns:a16="http://schemas.microsoft.com/office/drawing/2014/main" id="{026C3336-30AD-429B-8D85-6797BECC2F78}"/>
+              </a:ext>
+            </a:extLst>
+          </p:cNvPr>
+          <p:cNvSpPr txBox="1"/>
+          <p:nvPr/>
+        </p:nvSpPr>
+        <p:spPr>
+          <a:xfrm>
+            <a:off x="467544" y="5579948"/>
+            <a:ext cx="8208912" cy="369332"/>
+          </a:xfrm>
+          <a:prstGeom prst="rect">
+            <a:avLst/>
+          </a:prstGeom>
+          <a:solidFill>
+            <a:schemeClr val="accent6">
+              <a:lumMod val="20000"/>
+              <a:lumOff val="80000"/>
+            </a:schemeClr>
+          </a:solidFill>
+        </p:spPr>
+        <p:txBody>
+          <a:bodyPr wrap="square">
+            <a:spAutoFit/>
+          </a:bodyPr>
+          <a:lstStyle/>
+          <a:p>
+            <a:r>
+              <a:rPr lang="es-MX" b="1" dirty="0"/>
+              <a:t>Antes de ver la solución:</a:t>
+            </a:r>
+            <a:r>
+              <a:rPr lang="es-MX" dirty="0"/>
+              <a:t> ¿en qué partes dividirían este problema?</a:t>
+            </a:r>
+            <a:endParaRPr lang="es-CO" dirty="0"/>
+          </a:p>
+        </p:txBody>
+      </p:sp>
+      <p:pic>
+        <p:nvPicPr>
+          <p:cNvPr id="7" name="Picture 2">
+            <a:extLst>
+              <a:ext uri="{FF2B5EF4-FFF2-40B4-BE49-F238E27FC236}">
+                <a16:creationId xmlns:a16="http://schemas.microsoft.com/office/drawing/2014/main" id="{B7DBF9EF-FE6D-4839-85E5-F5EB76D21D87}"/>
+              </a:ext>
+            </a:extLst>
+          </p:cNvPr>
+          <p:cNvPicPr>
+            <a:picLocks noChangeAspect="1" noChangeArrowheads="1"/>
+          </p:cNvPicPr>
+          <p:nvPr/>
+        </p:nvPicPr>
+        <p:blipFill>
+          <a:blip r:embed="rId2">
+            <a:extLst>
+              <a:ext uri="{28A0092B-C50C-407E-A947-70E740481C1C}">
+                <a14:useLocalDpi xmlns:a14="http://schemas.microsoft.com/office/drawing/2010/main" val="0"/>
+              </a:ext>
+            </a:extLst>
+          </a:blip>
+          <a:srcRect/>
+          <a:stretch>
+            <a:fillRect/>
+          </a:stretch>
+        </p:blipFill>
+        <p:spPr bwMode="auto">
+          <a:xfrm>
+            <a:off x="611560" y="2119746"/>
+            <a:ext cx="8064896" cy="2748625"/>
+          </a:xfrm>
+          <a:prstGeom prst="rect">
+            <a:avLst/>
+          </a:prstGeom>
+          <a:noFill/>
+          <a:ln>
+            <a:noFill/>
+          </a:ln>
+          <a:extLst>
+            <a:ext uri="{909E8E84-426E-40DD-AFC4-6F175D3DCCD1}">
+              <a14:hiddenFill xmlns:a14="http://schemas.microsoft.com/office/drawing/2010/main">
+                <a:solidFill>
+                  <a:schemeClr val="accent1"/>
+                </a:solidFill>
+              </a14:hiddenFill>
+            </a:ext>
+            <a:ext uri="{91240B29-F687-4F45-9708-019B960494DF}">
+              <a14:hiddenLine xmlns:a14="http://schemas.microsoft.com/office/drawing/2010/main" w="9525">
+                <a:solidFill>
+                  <a:schemeClr val="tx1"/>
+                </a:solidFill>
+                <a:miter lim="800000"/>
+                <a:headEnd/>
+                <a:tailEnd/>
+              </a14:hiddenLine>
+            </a:ext>
+          </a:extLst>
+        </p:spPr>
+      </p:pic>
+    </p:spTree>
+    <p:extLst>
+      <p:ext uri="{BB962C8B-B14F-4D97-AF65-F5344CB8AC3E}">
+        <p14:creationId xmlns:p14="http://schemas.microsoft.com/office/powerpoint/2010/main" val="749932190"/>
+      </p:ext>
+    </p:extLst>
+  </p:cSld>
+  <p:clrMapOvr>
+    <a:masterClrMapping/>
+  </p:clrMapOvr>
+</p:sld>
+</file>
+
+<file path=ppt/slides/slide31.xml><?xml version="1.0" encoding="utf-8"?>
+<p:sld xmlns:a="http://schemas.openxmlformats.org/drawingml/2006/main" xmlns:r="http://schemas.openxmlformats.org/officeDocument/2006/relationships" xmlns:p="http://schemas.openxmlformats.org/presentationml/2006/main">
+  <p:cSld>
+    <p:spTree>
+      <p:nvGrpSpPr>
+        <p:cNvPr id="1" name=""/>
+        <p:cNvGrpSpPr/>
+        <p:nvPr/>
+      </p:nvGrpSpPr>
+      <p:grpSpPr>
+        <a:xfrm>
+          <a:off x="0" y="0"/>
+          <a:ext cx="0" cy="0"/>
+          <a:chOff x="0" y="0"/>
+          <a:chExt cx="0" cy="0"/>
+        </a:xfrm>
+      </p:grpSpPr>
+      <p:sp>
+        <p:nvSpPr>
+          <p:cNvPr id="5" name="4 Título"/>
+          <p:cNvSpPr>
+            <a:spLocks noGrp="1"/>
+          </p:cNvSpPr>
+          <p:nvPr>
+            <p:ph type="title"/>
+          </p:nvPr>
+        </p:nvSpPr>
+        <p:spPr>
+          <a:xfrm>
+            <a:off x="308782" y="116632"/>
+            <a:ext cx="8835218" cy="720452"/>
+          </a:xfrm>
+        </p:spPr>
+        <p:txBody>
+          <a:bodyPr>
+            <a:noAutofit/>
+          </a:bodyPr>
+          <a:lstStyle/>
+          <a:p>
+            <a:r>
+              <a:rPr lang="es-MX" sz="3600" dirty="0"/>
+              <a:t>¿Hasta dónde dividir?</a:t>
+            </a:r>
+          </a:p>
+        </p:txBody>
+      </p:sp>
+      <p:sp>
+        <p:nvSpPr>
+          <p:cNvPr id="13" name="12 Rectángulo"/>
+          <p:cNvSpPr/>
+          <p:nvPr/>
+        </p:nvSpPr>
+        <p:spPr>
+          <a:xfrm>
+            <a:off x="179512" y="717664"/>
+            <a:ext cx="8835218" cy="1631216"/>
+          </a:xfrm>
+          <a:prstGeom prst="rect">
+            <a:avLst/>
+          </a:prstGeom>
+        </p:spPr>
+        <p:txBody>
+          <a:bodyPr wrap="square">
+            <a:spAutoFit/>
+          </a:bodyPr>
+          <a:lstStyle/>
+          <a:p>
+            <a:pPr rtl="0"/>
+            <a:r>
+              <a:rPr lang="es-CO" sz="2000" b="1" dirty="0"/>
+              <a:t>Diagrama Top-Down</a:t>
+            </a:r>
+            <a:r>
+              <a:rPr lang="es-CO" sz="2000" dirty="0"/>
+              <a:t>:</a:t>
+            </a:r>
+          </a:p>
+          <a:p>
+            <a:pPr marL="342900" indent="-342900" rtl="0">
+              <a:buFont typeface="Arial" panose="020B0604020202020204" pitchFamily="34" charset="0"/>
+              <a:buChar char="•"/>
+            </a:pPr>
+            <a:r>
+              <a:rPr lang="es-MX" sz="2000" dirty="0"/>
+              <a:t>Se divide hasta que cada pieza haga una sola cosa y su nombre lo diga.</a:t>
+            </a:r>
+          </a:p>
+          <a:p>
+            <a:pPr marL="342900" indent="-342900" rtl="0">
+              <a:buFont typeface="Arial" panose="020B0604020202020204" pitchFamily="34" charset="0"/>
+              <a:buChar char="•"/>
+            </a:pPr>
+            <a:r>
+              <a:rPr lang="es-MX" sz="2000" b="1" dirty="0"/>
+              <a:t>Algunas piezas ya son conocidas</a:t>
+            </a:r>
+            <a:r>
+              <a:rPr lang="es-MX" sz="2000" dirty="0"/>
+              <a:t>: </a:t>
+            </a:r>
+            <a:r>
+              <a:rPr lang="es-MX" sz="1600" b="1" dirty="0" err="1">
+                <a:latin typeface="Consolas" panose="020B0609020204030204" pitchFamily="49" charset="0"/>
+              </a:rPr>
+              <a:t>es_bisiesto</a:t>
+            </a:r>
+            <a:r>
+              <a:rPr lang="es-MX" sz="2000" dirty="0"/>
+              <a:t> es el ejemplo de la clase 7.</a:t>
+            </a:r>
+          </a:p>
+          <a:p>
+            <a:pPr marL="342900" indent="-342900" rtl="0">
+              <a:buFont typeface="Arial" panose="020B0604020202020204" pitchFamily="34" charset="0"/>
+              <a:buChar char="•"/>
+            </a:pPr>
+            <a:r>
+              <a:rPr lang="es-MX" sz="2000" b="1" dirty="0"/>
+              <a:t>Una misma función puede ser usada por varias</a:t>
+            </a:r>
+            <a:r>
+              <a:rPr lang="es-MX" sz="2000" dirty="0"/>
+              <a:t>: </a:t>
+            </a:r>
+            <a:r>
+              <a:rPr lang="es-MX" b="1" dirty="0" err="1">
+                <a:latin typeface="Consolas" panose="020B0609020204030204" pitchFamily="49" charset="0"/>
+              </a:rPr>
+              <a:t>obtener_dias_mes</a:t>
+            </a:r>
+            <a:r>
+              <a:rPr lang="es-MX" sz="2000" dirty="0"/>
+              <a:t> aparece en dos ramas. Eso es reutilización.</a:t>
+            </a:r>
+          </a:p>
+        </p:txBody>
+      </p:sp>
+      <p:pic>
+        <p:nvPicPr>
+          <p:cNvPr id="4" name="Imagen 3">
+            <a:extLst>
+              <a:ext uri="{FF2B5EF4-FFF2-40B4-BE49-F238E27FC236}">
+                <a16:creationId xmlns:a16="http://schemas.microsoft.com/office/drawing/2014/main" id="{22855065-2A59-4C93-A3C4-DB0C88805A3D}"/>
+              </a:ext>
+            </a:extLst>
+          </p:cNvPr>
+          <p:cNvPicPr>
+            <a:picLocks noChangeAspect="1"/>
+          </p:cNvPicPr>
+          <p:nvPr/>
+        </p:nvPicPr>
+        <p:blipFill>
+          <a:blip r:embed="rId2"/>
+          <a:stretch>
+            <a:fillRect/>
+          </a:stretch>
+        </p:blipFill>
+        <p:spPr>
+          <a:xfrm>
+            <a:off x="1331641" y="2306216"/>
+            <a:ext cx="6905836" cy="4219128"/>
+          </a:xfrm>
+          <a:prstGeom prst="rect">
+            <a:avLst/>
+          </a:prstGeom>
+        </p:spPr>
+      </p:pic>
+      <p:sp>
+        <p:nvSpPr>
+          <p:cNvPr id="15" name="CuadroTexto 14">
+            <a:extLst>
+              <a:ext uri="{FF2B5EF4-FFF2-40B4-BE49-F238E27FC236}">
+                <a16:creationId xmlns:a16="http://schemas.microsoft.com/office/drawing/2014/main" id="{33C4FF9D-126A-43C8-8615-C2375C01EB92}"/>
+              </a:ext>
+            </a:extLst>
+          </p:cNvPr>
+          <p:cNvSpPr txBox="1"/>
+          <p:nvPr/>
+        </p:nvSpPr>
+        <p:spPr>
+          <a:xfrm>
+            <a:off x="39835" y="6474822"/>
+            <a:ext cx="9034891" cy="338554"/>
+          </a:xfrm>
+          <a:prstGeom prst="rect">
+            <a:avLst/>
+          </a:prstGeom>
+          <a:solidFill>
+            <a:schemeClr val="accent2">
+              <a:lumMod val="20000"/>
+              <a:lumOff val="80000"/>
+            </a:schemeClr>
+          </a:solidFill>
+        </p:spPr>
+        <p:txBody>
+          <a:bodyPr wrap="square">
+            <a:spAutoFit/>
+          </a:bodyPr>
+          <a:lstStyle/>
+          <a:p>
+            <a:r>
+              <a:rPr lang="es-MX" sz="1600" dirty="0"/>
+              <a:t>No todo subproblema necesita ser una función: si es una sola línea, puede quedarse dentro de otra.</a:t>
+            </a:r>
+          </a:p>
+        </p:txBody>
+      </p:sp>
+    </p:spTree>
+    <p:extLst>
+      <p:ext uri="{BB962C8B-B14F-4D97-AF65-F5344CB8AC3E}">
+        <p14:creationId xmlns:p14="http://schemas.microsoft.com/office/powerpoint/2010/main" val="2624402780"/>
+      </p:ext>
+    </p:extLst>
+  </p:cSld>
+  <p:clrMapOvr>
+    <a:masterClrMapping/>
+  </p:clrMapOvr>
+</p:sld>
+</file>
+
+<file path=ppt/slides/slide32.xml><?xml version="1.0" encoding="utf-8"?>
+<p:sld xmlns:a="http://schemas.openxmlformats.org/drawingml/2006/main" xmlns:r="http://schemas.openxmlformats.org/officeDocument/2006/relationships" xmlns:p="http://schemas.openxmlformats.org/presentationml/2006/main">
+  <p:cSld>
+    <p:spTree>
+      <p:nvGrpSpPr>
+        <p:cNvPr id="1" name=""/>
+        <p:cNvGrpSpPr/>
+        <p:nvPr/>
+      </p:nvGrpSpPr>
+      <p:grpSpPr>
+        <a:xfrm>
+          <a:off x="0" y="0"/>
+          <a:ext cx="0" cy="0"/>
+          <a:chOff x="0" y="0"/>
+          <a:chExt cx="0" cy="0"/>
+        </a:xfrm>
+      </p:grpSpPr>
+      <p:sp>
+        <p:nvSpPr>
+          <p:cNvPr id="5" name="4 Título"/>
+          <p:cNvSpPr>
+            <a:spLocks noGrp="1"/>
+          </p:cNvSpPr>
+          <p:nvPr>
+            <p:ph type="title"/>
+          </p:nvPr>
+        </p:nvSpPr>
+        <p:spPr>
+          <a:xfrm>
+            <a:off x="308782" y="116632"/>
+            <a:ext cx="8835218" cy="720452"/>
+          </a:xfrm>
+        </p:spPr>
+        <p:txBody>
+          <a:bodyPr>
+            <a:noAutofit/>
+          </a:bodyPr>
+          <a:lstStyle/>
+          <a:p>
+            <a:r>
+              <a:rPr lang="en-US" sz="3600" dirty="0"/>
+              <a:t>¿Cómo se construye? Top-down y bottom-up</a:t>
+            </a:r>
+            <a:endParaRPr lang="es-MX" sz="3600" dirty="0"/>
+          </a:p>
+        </p:txBody>
+      </p:sp>
+      <p:sp>
+        <p:nvSpPr>
+          <p:cNvPr id="13" name="12 Rectángulo"/>
+          <p:cNvSpPr/>
+          <p:nvPr/>
+        </p:nvSpPr>
+        <p:spPr>
+          <a:xfrm>
+            <a:off x="179512" y="796642"/>
+            <a:ext cx="8835218" cy="5324535"/>
+          </a:xfrm>
+          <a:prstGeom prst="rect">
+            <a:avLst/>
+          </a:prstGeom>
+        </p:spPr>
+        <p:txBody>
+          <a:bodyPr wrap="square">
+            <a:spAutoFit/>
+          </a:bodyPr>
+          <a:lstStyle/>
+          <a:p>
+            <a:pPr marL="342900" indent="-342900" rtl="0">
+              <a:buFont typeface="Arial" panose="020B0604020202020204" pitchFamily="34" charset="0"/>
+              <a:buChar char="•"/>
+            </a:pPr>
+            <a:r>
+              <a:rPr lang="es-MX" sz="2000" dirty="0"/>
+              <a:t>La siguiente tabla ilustra los principales aspectos a tener en cuenta para abordar un problema complejo ya sea mediante </a:t>
+            </a:r>
+            <a:r>
+              <a:rPr lang="es-MX" sz="2000" b="1" dirty="0"/>
+              <a:t>top-</a:t>
+            </a:r>
+            <a:r>
+              <a:rPr lang="es-MX" sz="2000" b="1" dirty="0" err="1"/>
+              <a:t>down</a:t>
+            </a:r>
+            <a:r>
+              <a:rPr lang="es-MX" sz="2000" dirty="0"/>
+              <a:t> o mediante </a:t>
+            </a:r>
+            <a:r>
+              <a:rPr lang="es-MX" sz="2000" b="1" dirty="0" err="1"/>
+              <a:t>bottom</a:t>
+            </a:r>
+            <a:r>
+              <a:rPr lang="es-MX" sz="2000" b="1" dirty="0"/>
+              <a:t>-up</a:t>
+            </a:r>
+            <a:r>
+              <a:rPr lang="es-MX" sz="2000" dirty="0"/>
+              <a:t>.</a:t>
+            </a:r>
+          </a:p>
+          <a:p>
+            <a:pPr marL="342900" indent="-342900" rtl="0">
+              <a:buFont typeface="Arial" panose="020B0604020202020204" pitchFamily="34" charset="0"/>
+              <a:buChar char="•"/>
+            </a:pPr>
+            <a:endParaRPr lang="es-MX" sz="2000" dirty="0"/>
+          </a:p>
+          <a:p>
+            <a:pPr marL="342900" indent="-342900" rtl="0">
+              <a:buFont typeface="Arial" panose="020B0604020202020204" pitchFamily="34" charset="0"/>
+              <a:buChar char="•"/>
+            </a:pPr>
+            <a:endParaRPr lang="es-MX" sz="2000" dirty="0"/>
+          </a:p>
+          <a:p>
+            <a:pPr marL="342900" indent="-342900" rtl="0">
+              <a:buFont typeface="Arial" panose="020B0604020202020204" pitchFamily="34" charset="0"/>
+              <a:buChar char="•"/>
+            </a:pPr>
+            <a:endParaRPr lang="es-MX" sz="2000" dirty="0"/>
+          </a:p>
+          <a:p>
+            <a:pPr marL="342900" indent="-342900" rtl="0">
+              <a:buFont typeface="Arial" panose="020B0604020202020204" pitchFamily="34" charset="0"/>
+              <a:buChar char="•"/>
+            </a:pPr>
+            <a:endParaRPr lang="es-MX" sz="2000" dirty="0"/>
+          </a:p>
+          <a:p>
+            <a:pPr marL="342900" indent="-342900" rtl="0">
+              <a:buFont typeface="Arial" panose="020B0604020202020204" pitchFamily="34" charset="0"/>
+              <a:buChar char="•"/>
+            </a:pPr>
+            <a:endParaRPr lang="es-MX" sz="2000" dirty="0"/>
+          </a:p>
+          <a:p>
+            <a:pPr marL="342900" indent="-342900" rtl="0">
+              <a:buFont typeface="Arial" panose="020B0604020202020204" pitchFamily="34" charset="0"/>
+              <a:buChar char="•"/>
+            </a:pPr>
+            <a:endParaRPr lang="es-MX" sz="2000" dirty="0"/>
+          </a:p>
+          <a:p>
+            <a:pPr marL="342900" indent="-342900" rtl="0">
+              <a:buFont typeface="Arial" panose="020B0604020202020204" pitchFamily="34" charset="0"/>
+              <a:buChar char="•"/>
+            </a:pPr>
+            <a:endParaRPr lang="es-MX" sz="2000" dirty="0"/>
+          </a:p>
+          <a:p>
+            <a:pPr marL="342900" indent="-342900" rtl="0">
+              <a:buFont typeface="Arial" panose="020B0604020202020204" pitchFamily="34" charset="0"/>
+              <a:buChar char="•"/>
+            </a:pPr>
+            <a:endParaRPr lang="es-MX" sz="2000" dirty="0"/>
+          </a:p>
+          <a:p>
+            <a:pPr marL="342900" indent="-342900" rtl="0">
+              <a:buFont typeface="Arial" panose="020B0604020202020204" pitchFamily="34" charset="0"/>
+              <a:buChar char="•"/>
+            </a:pPr>
+            <a:endParaRPr lang="es-MX" sz="2000" dirty="0"/>
+          </a:p>
+          <a:p>
+            <a:pPr marL="342900" indent="-342900" rtl="0">
+              <a:buFont typeface="Arial" panose="020B0604020202020204" pitchFamily="34" charset="0"/>
+              <a:buChar char="•"/>
+            </a:pPr>
+            <a:endParaRPr lang="es-MX" sz="2000" dirty="0"/>
+          </a:p>
+          <a:p>
+            <a:pPr marL="342900" indent="-342900" rtl="0">
+              <a:buFont typeface="Arial" panose="020B0604020202020204" pitchFamily="34" charset="0"/>
+              <a:buChar char="•"/>
+            </a:pPr>
+            <a:endParaRPr lang="es-MX" sz="2000" dirty="0"/>
+          </a:p>
+          <a:p>
+            <a:pPr marL="342900" indent="-342900" rtl="0">
+              <a:buFont typeface="Arial" panose="020B0604020202020204" pitchFamily="34" charset="0"/>
+              <a:buChar char="•"/>
+            </a:pPr>
+            <a:endParaRPr lang="es-MX" sz="2000" dirty="0"/>
+          </a:p>
+          <a:p>
+            <a:pPr marL="342900" indent="-342900" rtl="0">
+              <a:buFont typeface="Arial" panose="020B0604020202020204" pitchFamily="34" charset="0"/>
+              <a:buChar char="•"/>
+            </a:pPr>
+            <a:r>
+              <a:rPr lang="es-MX" sz="2000" b="1" dirty="0"/>
+              <a:t>Lo que tienen en común</a:t>
+            </a:r>
+            <a:r>
+              <a:rPr lang="es-MX" sz="2000" dirty="0"/>
+              <a:t>: “los dos construyen una función a la vez, ayudan a aislar los errores y facilitan la depuración” (Liang, </a:t>
+            </a:r>
+            <a:r>
+              <a:rPr lang="es-CO" sz="2000" dirty="0"/>
+              <a:t>§6.13</a:t>
+            </a:r>
+            <a:r>
+              <a:rPr lang="es-MX" sz="2000" dirty="0"/>
+              <a:t>).</a:t>
+            </a:r>
+          </a:p>
+          <a:p>
+            <a:pPr marL="342900" indent="-342900" rtl="0">
+              <a:buFont typeface="Arial" panose="020B0604020202020204" pitchFamily="34" charset="0"/>
+              <a:buChar char="•"/>
+            </a:pPr>
+            <a:r>
+              <a:rPr lang="es-MX" sz="2000" dirty="0"/>
+              <a:t>Nunca se escribe todo para probarlo al final.</a:t>
+            </a:r>
+          </a:p>
+        </p:txBody>
+      </p:sp>
+      <p:graphicFrame>
+        <p:nvGraphicFramePr>
+          <p:cNvPr id="2" name="Tabla 1">
+            <a:extLst>
+              <a:ext uri="{FF2B5EF4-FFF2-40B4-BE49-F238E27FC236}">
+                <a16:creationId xmlns:a16="http://schemas.microsoft.com/office/drawing/2014/main" id="{8C462719-C3C9-4A70-A8F0-02BB0B1E60DB}"/>
+              </a:ext>
+            </a:extLst>
+          </p:cNvPr>
+          <p:cNvGraphicFramePr>
+            <a:graphicFrameLocks noGrp="1"/>
+          </p:cNvGraphicFramePr>
+          <p:nvPr>
+            <p:extLst>
+              <p:ext uri="{D42A27DB-BD31-4B8C-83A1-F6EECF244321}">
+                <p14:modId xmlns:p14="http://schemas.microsoft.com/office/powerpoint/2010/main" val="3363121036"/>
+              </p:ext>
+            </p:extLst>
+          </p:nvPr>
+        </p:nvGraphicFramePr>
+        <p:xfrm>
+          <a:off x="539552" y="1772816"/>
+          <a:ext cx="8208912" cy="3108960"/>
+        </p:xfrm>
+        <a:graphic>
+          <a:graphicData uri="http://schemas.openxmlformats.org/drawingml/2006/table">
+            <a:tbl>
+              <a:tblPr/>
+              <a:tblGrid>
+                <a:gridCol w="2736304">
+                  <a:extLst>
+                    <a:ext uri="{9D8B030D-6E8A-4147-A177-3AD203B41FA5}">
+                      <a16:colId xmlns:a16="http://schemas.microsoft.com/office/drawing/2014/main" val="3568930428"/>
+                    </a:ext>
+                  </a:extLst>
+                </a:gridCol>
+                <a:gridCol w="2736304">
+                  <a:extLst>
+                    <a:ext uri="{9D8B030D-6E8A-4147-A177-3AD203B41FA5}">
+                      <a16:colId xmlns:a16="http://schemas.microsoft.com/office/drawing/2014/main" val="4124702210"/>
+                    </a:ext>
+                  </a:extLst>
+                </a:gridCol>
+                <a:gridCol w="2736304">
+                  <a:extLst>
+                    <a:ext uri="{9D8B030D-6E8A-4147-A177-3AD203B41FA5}">
+                      <a16:colId xmlns:a16="http://schemas.microsoft.com/office/drawing/2014/main" val="3675448163"/>
+                    </a:ext>
+                  </a:extLst>
+                </a:gridCol>
+              </a:tblGrid>
+              <a:tr h="0">
+                <a:tc>
+                  <a:txBody>
+                    <a:bodyPr/>
+                    <a:lstStyle/>
+                    <a:p>
+                      <a:endParaRPr lang="es-CO"/>
+                    </a:p>
+                  </a:txBody>
+                  <a:tcPr anchor="ctr">
+                    <a:lnL>
+                      <a:noFill/>
+                    </a:lnL>
+                    <a:lnR w="12700" cap="flat" cmpd="sng" algn="ctr">
+                      <a:solidFill>
+                        <a:schemeClr val="tx1"/>
+                      </a:solidFill>
+                      <a:prstDash val="solid"/>
+                      <a:round/>
+                      <a:headEnd type="none" w="med" len="med"/>
+                      <a:tailEnd type="none" w="med" len="med"/>
+                    </a:lnR>
+                    <a:lnT>
+                      <a:noFill/>
+                    </a:lnT>
+                    <a:lnB w="12700" cap="flat" cmpd="sng" algn="ctr">
+                      <a:solidFill>
+                        <a:schemeClr val="tx1"/>
+                      </a:solidFill>
+                      <a:prstDash val="solid"/>
+                      <a:round/>
+                      <a:headEnd type="none" w="med" len="med"/>
+                      <a:tailEnd type="none" w="med" len="med"/>
+                    </a:lnB>
+                  </a:tcPr>
+                </a:tc>
+                <a:tc>
+                  <a:txBody>
+                    <a:bodyPr/>
+                    <a:lstStyle/>
+                    <a:p>
+                      <a:r>
+                        <a:rPr lang="es-CO" b="1" dirty="0"/>
+                        <a:t>Top-</a:t>
+                      </a:r>
+                      <a:r>
+                        <a:rPr lang="es-CO" b="1" dirty="0" err="1"/>
+                        <a:t>down</a:t>
+                      </a:r>
+                      <a:endParaRPr lang="es-CO" dirty="0"/>
+                    </a:p>
+                  </a:txBody>
+                  <a:tcPr anchor="ctr">
+                    <a:lnL w="12700" cap="flat" cmpd="sng" algn="ctr">
+                      <a:solidFill>
+                        <a:schemeClr val="tx1"/>
+                      </a:solidFill>
+                      <a:prstDash val="solid"/>
+                      <a:round/>
+                      <a:headEnd type="none" w="med" len="med"/>
+                      <a:tailEnd type="none" w="med" len="med"/>
+                    </a:lnL>
+                    <a:lnR w="12700" cap="flat" cmpd="sng" algn="ctr">
+                      <a:solidFill>
+                        <a:schemeClr val="tx1"/>
+                      </a:solidFill>
+                      <a:prstDash val="solid"/>
+                      <a:round/>
+                      <a:headEnd type="none" w="med" len="med"/>
+                      <a:tailEnd type="none" w="med" len="med"/>
+                    </a:lnR>
+                    <a:lnT w="12700" cap="flat" cmpd="sng" algn="ctr">
+                      <a:solidFill>
+                        <a:schemeClr val="tx1"/>
+                      </a:solidFill>
+                      <a:prstDash val="solid"/>
+                      <a:round/>
+                      <a:headEnd type="none" w="med" len="med"/>
+                      <a:tailEnd type="none" w="med" len="med"/>
+                    </a:lnT>
+                    <a:lnB w="12700" cap="flat" cmpd="sng" algn="ctr">
+                      <a:solidFill>
+                        <a:schemeClr val="tx1"/>
+                      </a:solidFill>
+                      <a:prstDash val="solid"/>
+                      <a:round/>
+                      <a:headEnd type="none" w="med" len="med"/>
+                      <a:tailEnd type="none" w="med" len="med"/>
+                    </a:lnB>
+                    <a:solidFill>
+                      <a:schemeClr val="bg1">
+                        <a:lumMod val="95000"/>
+                      </a:schemeClr>
+                    </a:solidFill>
+                  </a:tcPr>
+                </a:tc>
+                <a:tc>
+                  <a:txBody>
+                    <a:bodyPr/>
+                    <a:lstStyle/>
+                    <a:p>
+                      <a:r>
+                        <a:rPr lang="es-CO" b="1" dirty="0" err="1"/>
+                        <a:t>Bottom</a:t>
+                      </a:r>
+                      <a:r>
+                        <a:rPr lang="es-CO" b="1" dirty="0"/>
+                        <a:t>-up</a:t>
+                      </a:r>
+                      <a:endParaRPr lang="es-CO" dirty="0"/>
+                    </a:p>
+                  </a:txBody>
+                  <a:tcPr anchor="ctr">
+                    <a:lnL w="12700" cap="flat" cmpd="sng" algn="ctr">
+                      <a:solidFill>
+                        <a:schemeClr val="tx1"/>
+                      </a:solidFill>
+                      <a:prstDash val="solid"/>
+                      <a:round/>
+                      <a:headEnd type="none" w="med" len="med"/>
+                      <a:tailEnd type="none" w="med" len="med"/>
+                    </a:lnL>
+                    <a:lnR w="12700" cap="flat" cmpd="sng" algn="ctr">
+                      <a:solidFill>
+                        <a:schemeClr val="tx1"/>
+                      </a:solidFill>
+                      <a:prstDash val="solid"/>
+                      <a:round/>
+                      <a:headEnd type="none" w="med" len="med"/>
+                      <a:tailEnd type="none" w="med" len="med"/>
+                    </a:lnR>
+                    <a:lnT w="12700" cap="flat" cmpd="sng" algn="ctr">
+                      <a:solidFill>
+                        <a:schemeClr val="tx1"/>
+                      </a:solidFill>
+                      <a:prstDash val="solid"/>
+                      <a:round/>
+                      <a:headEnd type="none" w="med" len="med"/>
+                      <a:tailEnd type="none" w="med" len="med"/>
+                    </a:lnT>
+                    <a:lnB w="12700" cap="flat" cmpd="sng" algn="ctr">
+                      <a:solidFill>
+                        <a:schemeClr val="tx1"/>
+                      </a:solidFill>
+                      <a:prstDash val="solid"/>
+                      <a:round/>
+                      <a:headEnd type="none" w="med" len="med"/>
+                      <a:tailEnd type="none" w="med" len="med"/>
+                    </a:lnB>
+                    <a:solidFill>
+                      <a:schemeClr val="bg1">
+                        <a:lumMod val="95000"/>
+                      </a:schemeClr>
+                    </a:solidFill>
+                  </a:tcPr>
+                </a:tc>
+                <a:extLst>
+                  <a:ext uri="{0D108BD9-81ED-4DB2-BD59-A6C34878D82A}">
+                    <a16:rowId xmlns:a16="http://schemas.microsoft.com/office/drawing/2014/main" val="2616112531"/>
+                  </a:ext>
+                </a:extLst>
+              </a:tr>
+              <a:tr h="0">
+                <a:tc>
+                  <a:txBody>
+                    <a:bodyPr/>
+                    <a:lstStyle/>
+                    <a:p>
+                      <a:r>
+                        <a:rPr lang="es-CO" b="1" dirty="0"/>
+                        <a:t>Orden</a:t>
+                      </a:r>
+                      <a:endParaRPr lang="es-CO" dirty="0"/>
+                    </a:p>
+                  </a:txBody>
+                  <a:tcPr anchor="ctr">
+                    <a:lnL w="12700" cap="flat" cmpd="sng" algn="ctr">
+                      <a:solidFill>
+                        <a:schemeClr val="tx1"/>
+                      </a:solidFill>
+                      <a:prstDash val="solid"/>
+                      <a:round/>
+                      <a:headEnd type="none" w="med" len="med"/>
+                      <a:tailEnd type="none" w="med" len="med"/>
+                    </a:lnL>
+                    <a:lnR w="12700" cap="flat" cmpd="sng" algn="ctr">
+                      <a:solidFill>
+                        <a:schemeClr val="tx1"/>
+                      </a:solidFill>
+                      <a:prstDash val="solid"/>
+                      <a:round/>
+                      <a:headEnd type="none" w="med" len="med"/>
+                      <a:tailEnd type="none" w="med" len="med"/>
+                    </a:lnR>
+                    <a:lnT w="12700" cap="flat" cmpd="sng" algn="ctr">
+                      <a:solidFill>
+                        <a:schemeClr val="tx1"/>
+                      </a:solidFill>
+                      <a:prstDash val="solid"/>
+                      <a:round/>
+                      <a:headEnd type="none" w="med" len="med"/>
+                      <a:tailEnd type="none" w="med" len="med"/>
+                    </a:lnT>
+                    <a:lnB w="12700" cap="flat" cmpd="sng" algn="ctr">
+                      <a:solidFill>
+                        <a:schemeClr val="tx1"/>
+                      </a:solidFill>
+                      <a:prstDash val="solid"/>
+                      <a:round/>
+                      <a:headEnd type="none" w="med" len="med"/>
+                      <a:tailEnd type="none" w="med" len="med"/>
+                    </a:lnB>
+                    <a:solidFill>
+                      <a:schemeClr val="bg1">
+                        <a:lumMod val="95000"/>
+                      </a:schemeClr>
+                    </a:solidFill>
+                  </a:tcPr>
+                </a:tc>
+                <a:tc>
+                  <a:txBody>
+                    <a:bodyPr/>
+                    <a:lstStyle/>
+                    <a:p>
+                      <a:r>
+                        <a:rPr lang="es-MX" b="1" dirty="0"/>
+                        <a:t>De arriba hacia abajo</a:t>
+                      </a:r>
+                      <a:r>
+                        <a:rPr lang="es-MX" dirty="0"/>
+                        <a:t>: primero el programa principal</a:t>
+                      </a:r>
+                    </a:p>
+                  </a:txBody>
+                  <a:tcPr anchor="ctr">
+                    <a:lnL w="12700" cap="flat" cmpd="sng" algn="ctr">
+                      <a:solidFill>
+                        <a:schemeClr val="tx1"/>
+                      </a:solidFill>
+                      <a:prstDash val="solid"/>
+                      <a:round/>
+                      <a:headEnd type="none" w="med" len="med"/>
+                      <a:tailEnd type="none" w="med" len="med"/>
+                    </a:lnL>
+                    <a:lnR w="12700" cap="flat" cmpd="sng" algn="ctr">
+                      <a:solidFill>
+                        <a:schemeClr val="tx1"/>
+                      </a:solidFill>
+                      <a:prstDash val="solid"/>
+                      <a:round/>
+                      <a:headEnd type="none" w="med" len="med"/>
+                      <a:tailEnd type="none" w="med" len="med"/>
+                    </a:lnR>
+                    <a:lnT w="12700" cap="flat" cmpd="sng" algn="ctr">
+                      <a:solidFill>
+                        <a:schemeClr val="tx1"/>
+                      </a:solidFill>
+                      <a:prstDash val="solid"/>
+                      <a:round/>
+                      <a:headEnd type="none" w="med" len="med"/>
+                      <a:tailEnd type="none" w="med" len="med"/>
+                    </a:lnT>
+                    <a:lnB w="12700" cap="flat" cmpd="sng" algn="ctr">
+                      <a:solidFill>
+                        <a:schemeClr val="tx1"/>
+                      </a:solidFill>
+                      <a:prstDash val="solid"/>
+                      <a:round/>
+                      <a:headEnd type="none" w="med" len="med"/>
+                      <a:tailEnd type="none" w="med" len="med"/>
+                    </a:lnB>
+                  </a:tcPr>
+                </a:tc>
+                <a:tc>
+                  <a:txBody>
+                    <a:bodyPr/>
+                    <a:lstStyle/>
+                    <a:p>
+                      <a:r>
+                        <a:rPr lang="es-MX" b="1" dirty="0"/>
+                        <a:t>De abajo hacia arriba</a:t>
+                      </a:r>
+                      <a:r>
+                        <a:rPr lang="es-MX" dirty="0"/>
+                        <a:t>: primero las funciones más pequeñas</a:t>
+                      </a:r>
+                    </a:p>
+                  </a:txBody>
+                  <a:tcPr anchor="ctr">
+                    <a:lnL w="12700" cap="flat" cmpd="sng" algn="ctr">
+                      <a:solidFill>
+                        <a:schemeClr val="tx1"/>
+                      </a:solidFill>
+                      <a:prstDash val="solid"/>
+                      <a:round/>
+                      <a:headEnd type="none" w="med" len="med"/>
+                      <a:tailEnd type="none" w="med" len="med"/>
+                    </a:lnL>
+                    <a:lnR w="12700" cap="flat" cmpd="sng" algn="ctr">
+                      <a:solidFill>
+                        <a:schemeClr val="tx1"/>
+                      </a:solidFill>
+                      <a:prstDash val="solid"/>
+                      <a:round/>
+                      <a:headEnd type="none" w="med" len="med"/>
+                      <a:tailEnd type="none" w="med" len="med"/>
+                    </a:lnR>
+                    <a:lnT w="12700" cap="flat" cmpd="sng" algn="ctr">
+                      <a:solidFill>
+                        <a:schemeClr val="tx1"/>
+                      </a:solidFill>
+                      <a:prstDash val="solid"/>
+                      <a:round/>
+                      <a:headEnd type="none" w="med" len="med"/>
+                      <a:tailEnd type="none" w="med" len="med"/>
+                    </a:lnT>
+                    <a:lnB w="12700" cap="flat" cmpd="sng" algn="ctr">
+                      <a:solidFill>
+                        <a:schemeClr val="tx1"/>
+                      </a:solidFill>
+                      <a:prstDash val="solid"/>
+                      <a:round/>
+                      <a:headEnd type="none" w="med" len="med"/>
+                      <a:tailEnd type="none" w="med" len="med"/>
+                    </a:lnB>
+                  </a:tcPr>
+                </a:tc>
+                <a:extLst>
+                  <a:ext uri="{0D108BD9-81ED-4DB2-BD59-A6C34878D82A}">
+                    <a16:rowId xmlns:a16="http://schemas.microsoft.com/office/drawing/2014/main" val="1502789637"/>
+                  </a:ext>
+                </a:extLst>
+              </a:tr>
+              <a:tr h="0">
+                <a:tc>
+                  <a:txBody>
+                    <a:bodyPr/>
+                    <a:lstStyle/>
+                    <a:p>
+                      <a:r>
+                        <a:rPr lang="es-MX" b="1" dirty="0"/>
+                        <a:t>Lo que falta se reemplaza por…</a:t>
+                      </a:r>
+                      <a:endParaRPr lang="es-MX" dirty="0"/>
+                    </a:p>
+                  </a:txBody>
+                  <a:tcPr anchor="ctr">
+                    <a:lnL w="12700" cap="flat" cmpd="sng" algn="ctr">
+                      <a:solidFill>
+                        <a:schemeClr val="tx1"/>
+                      </a:solidFill>
+                      <a:prstDash val="solid"/>
+                      <a:round/>
+                      <a:headEnd type="none" w="med" len="med"/>
+                      <a:tailEnd type="none" w="med" len="med"/>
+                    </a:lnL>
+                    <a:lnR w="12700" cap="flat" cmpd="sng" algn="ctr">
+                      <a:solidFill>
+                        <a:schemeClr val="tx1"/>
+                      </a:solidFill>
+                      <a:prstDash val="solid"/>
+                      <a:round/>
+                      <a:headEnd type="none" w="med" len="med"/>
+                      <a:tailEnd type="none" w="med" len="med"/>
+                    </a:lnR>
+                    <a:lnT w="12700" cap="flat" cmpd="sng" algn="ctr">
+                      <a:solidFill>
+                        <a:schemeClr val="tx1"/>
+                      </a:solidFill>
+                      <a:prstDash val="solid"/>
+                      <a:round/>
+                      <a:headEnd type="none" w="med" len="med"/>
+                      <a:tailEnd type="none" w="med" len="med"/>
+                    </a:lnT>
+                    <a:lnB w="12700" cap="flat" cmpd="sng" algn="ctr">
+                      <a:solidFill>
+                        <a:schemeClr val="tx1"/>
+                      </a:solidFill>
+                      <a:prstDash val="solid"/>
+                      <a:round/>
+                      <a:headEnd type="none" w="med" len="med"/>
+                      <a:tailEnd type="none" w="med" len="med"/>
+                    </a:lnB>
+                    <a:solidFill>
+                      <a:schemeClr val="bg1">
+                        <a:lumMod val="95000"/>
+                      </a:schemeClr>
+                    </a:solidFill>
+                  </a:tcPr>
+                </a:tc>
+                <a:tc>
+                  <a:txBody>
+                    <a:bodyPr/>
+                    <a:lstStyle/>
+                    <a:p>
+                      <a:r>
+                        <a:rPr lang="es-MX" b="1"/>
+                        <a:t>Stubs:</a:t>
+                      </a:r>
+                      <a:r>
+                        <a:rPr lang="es-MX"/>
+                        <a:t> versiones provisionales e incompletas de una función</a:t>
+                      </a:r>
+                    </a:p>
+                  </a:txBody>
+                  <a:tcPr anchor="ctr">
+                    <a:lnL w="12700" cap="flat" cmpd="sng" algn="ctr">
+                      <a:solidFill>
+                        <a:schemeClr val="tx1"/>
+                      </a:solidFill>
+                      <a:prstDash val="solid"/>
+                      <a:round/>
+                      <a:headEnd type="none" w="med" len="med"/>
+                      <a:tailEnd type="none" w="med" len="med"/>
+                    </a:lnL>
+                    <a:lnR w="12700" cap="flat" cmpd="sng" algn="ctr">
+                      <a:solidFill>
+                        <a:schemeClr val="tx1"/>
+                      </a:solidFill>
+                      <a:prstDash val="solid"/>
+                      <a:round/>
+                      <a:headEnd type="none" w="med" len="med"/>
+                      <a:tailEnd type="none" w="med" len="med"/>
+                    </a:lnR>
+                    <a:lnT w="12700" cap="flat" cmpd="sng" algn="ctr">
+                      <a:solidFill>
+                        <a:schemeClr val="tx1"/>
+                      </a:solidFill>
+                      <a:prstDash val="solid"/>
+                      <a:round/>
+                      <a:headEnd type="none" w="med" len="med"/>
+                      <a:tailEnd type="none" w="med" len="med"/>
+                    </a:lnT>
+                    <a:lnB w="12700" cap="flat" cmpd="sng" algn="ctr">
+                      <a:solidFill>
+                        <a:schemeClr val="tx1"/>
+                      </a:solidFill>
+                      <a:prstDash val="solid"/>
+                      <a:round/>
+                      <a:headEnd type="none" w="med" len="med"/>
+                      <a:tailEnd type="none" w="med" len="med"/>
+                    </a:lnB>
+                  </a:tcPr>
+                </a:tc>
+                <a:tc>
+                  <a:txBody>
+                    <a:bodyPr/>
+                    <a:lstStyle/>
+                    <a:p>
+                      <a:r>
+                        <a:rPr lang="es-MX" b="1" dirty="0"/>
+                        <a:t>Drivers:</a:t>
+                      </a:r>
+                      <a:r>
+                        <a:rPr lang="es-MX" dirty="0"/>
+                        <a:t> pequeños programas de prueba, como nuestros assert</a:t>
+                      </a:r>
+                    </a:p>
+                  </a:txBody>
+                  <a:tcPr anchor="ctr">
+                    <a:lnL w="12700" cap="flat" cmpd="sng" algn="ctr">
+                      <a:solidFill>
+                        <a:schemeClr val="tx1"/>
+                      </a:solidFill>
+                      <a:prstDash val="solid"/>
+                      <a:round/>
+                      <a:headEnd type="none" w="med" len="med"/>
+                      <a:tailEnd type="none" w="med" len="med"/>
+                    </a:lnL>
+                    <a:lnR w="12700" cap="flat" cmpd="sng" algn="ctr">
+                      <a:solidFill>
+                        <a:schemeClr val="tx1"/>
+                      </a:solidFill>
+                      <a:prstDash val="solid"/>
+                      <a:round/>
+                      <a:headEnd type="none" w="med" len="med"/>
+                      <a:tailEnd type="none" w="med" len="med"/>
+                    </a:lnR>
+                    <a:lnT w="12700" cap="flat" cmpd="sng" algn="ctr">
+                      <a:solidFill>
+                        <a:schemeClr val="tx1"/>
+                      </a:solidFill>
+                      <a:prstDash val="solid"/>
+                      <a:round/>
+                      <a:headEnd type="none" w="med" len="med"/>
+                      <a:tailEnd type="none" w="med" len="med"/>
+                    </a:lnT>
+                    <a:lnB w="12700" cap="flat" cmpd="sng" algn="ctr">
+                      <a:solidFill>
+                        <a:schemeClr val="tx1"/>
+                      </a:solidFill>
+                      <a:prstDash val="solid"/>
+                      <a:round/>
+                      <a:headEnd type="none" w="med" len="med"/>
+                      <a:tailEnd type="none" w="med" len="med"/>
+                    </a:lnB>
+                  </a:tcPr>
+                </a:tc>
+                <a:extLst>
+                  <a:ext uri="{0D108BD9-81ED-4DB2-BD59-A6C34878D82A}">
+                    <a16:rowId xmlns:a16="http://schemas.microsoft.com/office/drawing/2014/main" val="2090159382"/>
+                  </a:ext>
+                </a:extLst>
+              </a:tr>
+              <a:tr h="0">
+                <a:tc>
+                  <a:txBody>
+                    <a:bodyPr/>
+                    <a:lstStyle/>
+                    <a:p>
+                      <a:r>
+                        <a:rPr lang="es-CO" b="1" dirty="0"/>
+                        <a:t>Ventaja</a:t>
+                      </a:r>
+                      <a:endParaRPr lang="es-CO" dirty="0"/>
+                    </a:p>
+                  </a:txBody>
+                  <a:tcPr anchor="ctr">
+                    <a:lnL w="12700" cap="flat" cmpd="sng" algn="ctr">
+                      <a:solidFill>
+                        <a:schemeClr val="tx1"/>
+                      </a:solidFill>
+                      <a:prstDash val="solid"/>
+                      <a:round/>
+                      <a:headEnd type="none" w="med" len="med"/>
+                      <a:tailEnd type="none" w="med" len="med"/>
+                    </a:lnL>
+                    <a:lnR w="12700" cap="flat" cmpd="sng" algn="ctr">
+                      <a:solidFill>
+                        <a:schemeClr val="tx1"/>
+                      </a:solidFill>
+                      <a:prstDash val="solid"/>
+                      <a:round/>
+                      <a:headEnd type="none" w="med" len="med"/>
+                      <a:tailEnd type="none" w="med" len="med"/>
+                    </a:lnR>
+                    <a:lnT w="12700" cap="flat" cmpd="sng" algn="ctr">
+                      <a:solidFill>
+                        <a:schemeClr val="tx1"/>
+                      </a:solidFill>
+                      <a:prstDash val="solid"/>
+                      <a:round/>
+                      <a:headEnd type="none" w="med" len="med"/>
+                      <a:tailEnd type="none" w="med" len="med"/>
+                    </a:lnT>
+                    <a:lnB w="12700" cap="flat" cmpd="sng" algn="ctr">
+                      <a:solidFill>
+                        <a:schemeClr val="tx1"/>
+                      </a:solidFill>
+                      <a:prstDash val="solid"/>
+                      <a:round/>
+                      <a:headEnd type="none" w="med" len="med"/>
+                      <a:tailEnd type="none" w="med" len="med"/>
+                    </a:lnB>
+                    <a:solidFill>
+                      <a:schemeClr val="bg1">
+                        <a:lumMod val="95000"/>
+                      </a:schemeClr>
+                    </a:solidFill>
+                  </a:tcPr>
+                </a:tc>
+                <a:tc>
+                  <a:txBody>
+                    <a:bodyPr/>
+                    <a:lstStyle/>
+                    <a:p>
+                      <a:r>
+                        <a:rPr lang="es-MX" dirty="0"/>
+                        <a:t>El programa corre desde el primer momento</a:t>
+                      </a:r>
+                    </a:p>
+                  </a:txBody>
+                  <a:tcPr anchor="ctr">
+                    <a:lnL w="12700" cap="flat" cmpd="sng" algn="ctr">
+                      <a:solidFill>
+                        <a:schemeClr val="tx1"/>
+                      </a:solidFill>
+                      <a:prstDash val="solid"/>
+                      <a:round/>
+                      <a:headEnd type="none" w="med" len="med"/>
+                      <a:tailEnd type="none" w="med" len="med"/>
+                    </a:lnL>
+                    <a:lnR w="12700" cap="flat" cmpd="sng" algn="ctr">
+                      <a:solidFill>
+                        <a:schemeClr val="tx1"/>
+                      </a:solidFill>
+                      <a:prstDash val="solid"/>
+                      <a:round/>
+                      <a:headEnd type="none" w="med" len="med"/>
+                      <a:tailEnd type="none" w="med" len="med"/>
+                    </a:lnR>
+                    <a:lnT w="12700" cap="flat" cmpd="sng" algn="ctr">
+                      <a:solidFill>
+                        <a:schemeClr val="tx1"/>
+                      </a:solidFill>
+                      <a:prstDash val="solid"/>
+                      <a:round/>
+                      <a:headEnd type="none" w="med" len="med"/>
+                      <a:tailEnd type="none" w="med" len="med"/>
+                    </a:lnT>
+                    <a:lnB w="12700" cap="flat" cmpd="sng" algn="ctr">
+                      <a:solidFill>
+                        <a:schemeClr val="tx1"/>
+                      </a:solidFill>
+                      <a:prstDash val="solid"/>
+                      <a:round/>
+                      <a:headEnd type="none" w="med" len="med"/>
+                      <a:tailEnd type="none" w="med" len="med"/>
+                    </a:lnB>
+                  </a:tcPr>
+                </a:tc>
+                <a:tc>
+                  <a:txBody>
+                    <a:bodyPr/>
+                    <a:lstStyle/>
+                    <a:p>
+                      <a:r>
+                        <a:rPr lang="es-MX" dirty="0"/>
+                        <a:t>Cada pieza llega probada a la integración</a:t>
+                      </a:r>
+                    </a:p>
+                  </a:txBody>
+                  <a:tcPr anchor="ctr">
+                    <a:lnL w="12700" cap="flat" cmpd="sng" algn="ctr">
+                      <a:solidFill>
+                        <a:schemeClr val="tx1"/>
+                      </a:solidFill>
+                      <a:prstDash val="solid"/>
+                      <a:round/>
+                      <a:headEnd type="none" w="med" len="med"/>
+                      <a:tailEnd type="none" w="med" len="med"/>
+                    </a:lnL>
+                    <a:lnR w="12700" cap="flat" cmpd="sng" algn="ctr">
+                      <a:solidFill>
+                        <a:schemeClr val="tx1"/>
+                      </a:solidFill>
+                      <a:prstDash val="solid"/>
+                      <a:round/>
+                      <a:headEnd type="none" w="med" len="med"/>
+                      <a:tailEnd type="none" w="med" len="med"/>
+                    </a:lnR>
+                    <a:lnT w="12700" cap="flat" cmpd="sng" algn="ctr">
+                      <a:solidFill>
+                        <a:schemeClr val="tx1"/>
+                      </a:solidFill>
+                      <a:prstDash val="solid"/>
+                      <a:round/>
+                      <a:headEnd type="none" w="med" len="med"/>
+                      <a:tailEnd type="none" w="med" len="med"/>
+                    </a:lnT>
+                    <a:lnB w="12700" cap="flat" cmpd="sng" algn="ctr">
+                      <a:solidFill>
+                        <a:schemeClr val="tx1"/>
+                      </a:solidFill>
+                      <a:prstDash val="solid"/>
+                      <a:round/>
+                      <a:headEnd type="none" w="med" len="med"/>
+                      <a:tailEnd type="none" w="med" len="med"/>
+                    </a:lnB>
+                  </a:tcPr>
+                </a:tc>
+                <a:extLst>
+                  <a:ext uri="{0D108BD9-81ED-4DB2-BD59-A6C34878D82A}">
+                    <a16:rowId xmlns:a16="http://schemas.microsoft.com/office/drawing/2014/main" val="998547987"/>
+                  </a:ext>
+                </a:extLst>
+              </a:tr>
+            </a:tbl>
+          </a:graphicData>
+        </a:graphic>
+      </p:graphicFrame>
+    </p:spTree>
+    <p:extLst>
+      <p:ext uri="{BB962C8B-B14F-4D97-AF65-F5344CB8AC3E}">
+        <p14:creationId xmlns:p14="http://schemas.microsoft.com/office/powerpoint/2010/main" val="2476027586"/>
+      </p:ext>
+    </p:extLst>
+  </p:cSld>
+  <p:clrMapOvr>
+    <a:masterClrMapping/>
+  </p:clrMapOvr>
+</p:sld>
+</file>
+
+<file path=ppt/slides/slide33.xml><?xml version="1.0" encoding="utf-8"?>
+<p:sld xmlns:a="http://schemas.openxmlformats.org/drawingml/2006/main" xmlns:r="http://schemas.openxmlformats.org/officeDocument/2006/relationships" xmlns:p="http://schemas.openxmlformats.org/presentationml/2006/main">
+  <p:cSld>
+    <p:spTree>
+      <p:nvGrpSpPr>
+        <p:cNvPr id="1" name=""/>
+        <p:cNvGrpSpPr/>
+        <p:nvPr/>
+      </p:nvGrpSpPr>
+      <p:grpSpPr>
+        <a:xfrm>
+          <a:off x="0" y="0"/>
+          <a:ext cx="0" cy="0"/>
+          <a:chOff x="0" y="0"/>
+          <a:chExt cx="0" cy="0"/>
+        </a:xfrm>
+      </p:grpSpPr>
+      <p:sp>
+        <p:nvSpPr>
+          <p:cNvPr id="5" name="4 Título"/>
+          <p:cNvSpPr>
+            <a:spLocks noGrp="1"/>
+          </p:cNvSpPr>
+          <p:nvPr>
+            <p:ph type="title"/>
+          </p:nvPr>
+        </p:nvSpPr>
+        <p:spPr>
+          <a:xfrm>
+            <a:off x="308782" y="116632"/>
+            <a:ext cx="8835218" cy="720452"/>
+          </a:xfrm>
+        </p:spPr>
+        <p:txBody>
+          <a:bodyPr>
+            <a:noAutofit/>
+          </a:bodyPr>
+          <a:lstStyle/>
+          <a:p>
+            <a:r>
+              <a:rPr lang="en-US" sz="3600" dirty="0"/>
+              <a:t>Top-down: Del planteamiento al </a:t>
+            </a:r>
+            <a:r>
+              <a:rPr lang="en-US" sz="3600" dirty="0" err="1"/>
+              <a:t>código</a:t>
+            </a:r>
+            <a:endParaRPr lang="es-MX" sz="3600" dirty="0"/>
+          </a:p>
+        </p:txBody>
+      </p:sp>
+      <p:sp>
+        <p:nvSpPr>
+          <p:cNvPr id="13" name="12 Rectángulo"/>
+          <p:cNvSpPr/>
+          <p:nvPr/>
+        </p:nvSpPr>
+        <p:spPr>
+          <a:xfrm>
+            <a:off x="179512" y="796642"/>
+            <a:ext cx="8835218" cy="5324535"/>
+          </a:xfrm>
+          <a:prstGeom prst="rect">
+            <a:avLst/>
+          </a:prstGeom>
+        </p:spPr>
+        <p:txBody>
+          <a:bodyPr wrap="square">
+            <a:spAutoFit/>
+          </a:bodyPr>
+          <a:lstStyle/>
+          <a:p>
+            <a:pPr marL="342900" indent="-342900" rtl="0">
+              <a:buFont typeface="Arial" panose="020B0604020202020204" pitchFamily="34" charset="0"/>
+              <a:buChar char="•"/>
+            </a:pPr>
+            <a:r>
+              <a:rPr lang="es-MX" sz="2000" dirty="0"/>
+              <a:t>La siguiente tabla ilustra los principales aspectos a tener en cuenta para abordar un problema complejo ya sea mediante </a:t>
+            </a:r>
+            <a:r>
+              <a:rPr lang="es-MX" sz="2000" b="1" dirty="0"/>
+              <a:t>top-</a:t>
+            </a:r>
+            <a:r>
+              <a:rPr lang="es-MX" sz="2000" b="1" dirty="0" err="1"/>
+              <a:t>down</a:t>
+            </a:r>
+            <a:r>
+              <a:rPr lang="es-MX" sz="2000" dirty="0"/>
+              <a:t> o mediante </a:t>
+            </a:r>
+            <a:r>
+              <a:rPr lang="es-MX" sz="2000" b="1" dirty="0" err="1"/>
+              <a:t>bottom</a:t>
+            </a:r>
+            <a:r>
+              <a:rPr lang="es-MX" sz="2000" b="1" dirty="0"/>
+              <a:t>-up</a:t>
+            </a:r>
+            <a:r>
+              <a:rPr lang="es-MX" sz="2000" dirty="0"/>
+              <a:t>.</a:t>
+            </a:r>
+          </a:p>
+          <a:p>
+            <a:pPr marL="342900" indent="-342900" rtl="0">
+              <a:buFont typeface="Arial" panose="020B0604020202020204" pitchFamily="34" charset="0"/>
+              <a:buChar char="•"/>
+            </a:pPr>
+            <a:endParaRPr lang="es-MX" sz="2000" dirty="0"/>
+          </a:p>
+          <a:p>
+            <a:pPr marL="342900" indent="-342900" rtl="0">
+              <a:buFont typeface="Arial" panose="020B0604020202020204" pitchFamily="34" charset="0"/>
+              <a:buChar char="•"/>
+            </a:pPr>
+            <a:endParaRPr lang="es-MX" sz="2000" dirty="0"/>
+          </a:p>
+          <a:p>
+            <a:pPr marL="342900" indent="-342900" rtl="0">
+              <a:buFont typeface="Arial" panose="020B0604020202020204" pitchFamily="34" charset="0"/>
+              <a:buChar char="•"/>
+            </a:pPr>
+            <a:endParaRPr lang="es-MX" sz="2000" dirty="0"/>
+          </a:p>
+          <a:p>
+            <a:pPr marL="342900" indent="-342900" rtl="0">
+              <a:buFont typeface="Arial" panose="020B0604020202020204" pitchFamily="34" charset="0"/>
+              <a:buChar char="•"/>
+            </a:pPr>
+            <a:endParaRPr lang="es-MX" sz="2000" dirty="0"/>
+          </a:p>
+          <a:p>
+            <a:pPr marL="342900" indent="-342900" rtl="0">
+              <a:buFont typeface="Arial" panose="020B0604020202020204" pitchFamily="34" charset="0"/>
+              <a:buChar char="•"/>
+            </a:pPr>
+            <a:endParaRPr lang="es-MX" sz="2000" dirty="0"/>
+          </a:p>
+          <a:p>
+            <a:pPr marL="342900" indent="-342900" rtl="0">
+              <a:buFont typeface="Arial" panose="020B0604020202020204" pitchFamily="34" charset="0"/>
+              <a:buChar char="•"/>
+            </a:pPr>
+            <a:endParaRPr lang="es-MX" sz="2000" dirty="0"/>
+          </a:p>
+          <a:p>
+            <a:pPr marL="342900" indent="-342900" rtl="0">
+              <a:buFont typeface="Arial" panose="020B0604020202020204" pitchFamily="34" charset="0"/>
+              <a:buChar char="•"/>
+            </a:pPr>
+            <a:endParaRPr lang="es-MX" sz="2000" dirty="0"/>
+          </a:p>
+          <a:p>
+            <a:pPr marL="342900" indent="-342900" rtl="0">
+              <a:buFont typeface="Arial" panose="020B0604020202020204" pitchFamily="34" charset="0"/>
+              <a:buChar char="•"/>
+            </a:pPr>
+            <a:endParaRPr lang="es-MX" sz="2000" dirty="0"/>
+          </a:p>
+          <a:p>
+            <a:pPr marL="342900" indent="-342900" rtl="0">
+              <a:buFont typeface="Arial" panose="020B0604020202020204" pitchFamily="34" charset="0"/>
+              <a:buChar char="•"/>
+            </a:pPr>
+            <a:endParaRPr lang="es-MX" sz="2000" dirty="0"/>
+          </a:p>
+          <a:p>
+            <a:pPr marL="342900" indent="-342900" rtl="0">
+              <a:buFont typeface="Arial" panose="020B0604020202020204" pitchFamily="34" charset="0"/>
+              <a:buChar char="•"/>
+            </a:pPr>
+            <a:endParaRPr lang="es-MX" sz="2000" dirty="0"/>
+          </a:p>
+          <a:p>
+            <a:pPr marL="342900" indent="-342900" rtl="0">
+              <a:buFont typeface="Arial" panose="020B0604020202020204" pitchFamily="34" charset="0"/>
+              <a:buChar char="•"/>
+            </a:pPr>
+            <a:endParaRPr lang="es-MX" sz="2000" dirty="0"/>
+          </a:p>
+          <a:p>
+            <a:pPr marL="342900" indent="-342900" rtl="0">
+              <a:buFont typeface="Arial" panose="020B0604020202020204" pitchFamily="34" charset="0"/>
+              <a:buChar char="•"/>
+            </a:pPr>
+            <a:endParaRPr lang="es-MX" sz="2000" dirty="0"/>
+          </a:p>
+          <a:p>
+            <a:pPr marL="342900" indent="-342900" rtl="0">
+              <a:buFont typeface="Arial" panose="020B0604020202020204" pitchFamily="34" charset="0"/>
+              <a:buChar char="•"/>
+            </a:pPr>
+            <a:r>
+              <a:rPr lang="es-MX" sz="2000" b="1" dirty="0"/>
+              <a:t>Lo que tienen en común</a:t>
+            </a:r>
+            <a:r>
+              <a:rPr lang="es-MX" sz="2000" dirty="0"/>
+              <a:t>: “los dos construyen una función a la vez, ayudan a aislar los errores y facilitan la depuración” (Liang, </a:t>
+            </a:r>
+            <a:r>
+              <a:rPr lang="es-CO" sz="2000" dirty="0"/>
+              <a:t>§6.13</a:t>
+            </a:r>
+            <a:r>
+              <a:rPr lang="es-MX" sz="2000" dirty="0"/>
+              <a:t>).</a:t>
+            </a:r>
+          </a:p>
+          <a:p>
+            <a:pPr marL="342900" indent="-342900" rtl="0">
+              <a:buFont typeface="Arial" panose="020B0604020202020204" pitchFamily="34" charset="0"/>
+              <a:buChar char="•"/>
+            </a:pPr>
+            <a:r>
+              <a:rPr lang="es-MX" sz="2000" dirty="0"/>
+              <a:t>Nunca se escribe todo para probarlo al final.</a:t>
+            </a:r>
+          </a:p>
+        </p:txBody>
+      </p:sp>
+    </p:spTree>
+    <p:extLst>
+      <p:ext uri="{BB962C8B-B14F-4D97-AF65-F5344CB8AC3E}">
+        <p14:creationId xmlns:p14="http://schemas.microsoft.com/office/powerpoint/2010/main" val="3763786917"/>
+      </p:ext>
+    </p:extLst>
+  </p:cSld>
+  <p:clrMapOvr>
+    <a:masterClrMapping/>
+  </p:clrMapOvr>
+</p:sld>
+</file>
+
+<file path=ppt/slides/slide34.xml><?xml version="1.0" encoding="utf-8"?>
+<p:sld xmlns:a="http://schemas.openxmlformats.org/drawingml/2006/main" xmlns:r="http://schemas.openxmlformats.org/officeDocument/2006/relationships" xmlns:p="http://schemas.openxmlformats.org/presentationml/2006/main">
+  <p:cSld>
+    <p:spTree>
+      <p:nvGrpSpPr>
+        <p:cNvPr id="1" name=""/>
+        <p:cNvGrpSpPr/>
+        <p:nvPr/>
+      </p:nvGrpSpPr>
+      <p:grpSpPr>
+        <a:xfrm>
+          <a:off x="0" y="0"/>
+          <a:ext cx="0" cy="0"/>
+          <a:chOff x="0" y="0"/>
+          <a:chExt cx="0" cy="0"/>
+        </a:xfrm>
+      </p:grpSpPr>
+      <p:sp>
+        <p:nvSpPr>
+          <p:cNvPr id="5" name="Title 4"/>
+          <p:cNvSpPr>
+            <a:spLocks noGrp="1"/>
+          </p:cNvSpPr>
+          <p:nvPr>
+            <p:ph type="title"/>
+          </p:nvPr>
+        </p:nvSpPr>
+        <p:spPr>
+          <a:xfrm>
+            <a:off x="107504" y="23817"/>
+            <a:ext cx="7886700" cy="812895"/>
+          </a:xfrm>
+        </p:spPr>
+        <p:txBody>
+          <a:bodyPr>
+            <a:normAutofit/>
+          </a:bodyPr>
+          <a:lstStyle/>
+          <a:p>
+            <a:r>
+              <a:rPr lang="en-US" sz="4000" dirty="0"/>
+              <a:t>Referencias</a:t>
+            </a:r>
+          </a:p>
+        </p:txBody>
+      </p:sp>
+      <p:sp>
+        <p:nvSpPr>
+          <p:cNvPr id="2" name="Content Placeholder 1"/>
+          <p:cNvSpPr>
+            <a:spLocks noGrp="1"/>
+          </p:cNvSpPr>
+          <p:nvPr>
+            <p:ph idx="1"/>
+          </p:nvPr>
+        </p:nvSpPr>
+        <p:spPr>
+          <a:xfrm>
+            <a:off x="179512" y="692696"/>
+            <a:ext cx="8712968" cy="6048672"/>
+          </a:xfrm>
+        </p:spPr>
+        <p:txBody>
+          <a:bodyPr>
+            <a:noAutofit/>
+          </a:bodyPr>
+          <a:lstStyle/>
+          <a:p>
+            <a:pPr rtl="0">
+              <a:buFont typeface="Arial" panose="020B0604020202020204" pitchFamily="34" charset="0"/>
+              <a:buChar char="•"/>
+            </a:pPr>
+            <a:r>
+              <a:rPr lang="es-MX" sz="2000" dirty="0"/>
+              <a:t>Aprender a Programar: Abstracción en programación. Concepto. Diseño top-</a:t>
+            </a:r>
+            <a:r>
+              <a:rPr lang="es-MX" sz="2000" dirty="0" err="1"/>
+              <a:t>down</a:t>
+            </a:r>
+            <a:r>
+              <a:rPr lang="es-MX" sz="2000" dirty="0"/>
+              <a:t> de algoritmos y programas. Ejemplos (CU00225A) </a:t>
+            </a:r>
+            <a:r>
+              <a:rPr lang="es-MX" sz="2000" dirty="0">
+                <a:hlinkClick r:id="rId2"/>
+              </a:rPr>
+              <a:t>https://www.aprenderaprogramar.com/index.php?option=com_content&amp;view=category&amp;id=36&amp;Itemid=60</a:t>
+            </a:r>
+            <a:r>
+              <a:rPr lang="es-MX" sz="2000" dirty="0"/>
+              <a:t>  </a:t>
+            </a:r>
+          </a:p>
+          <a:p>
+            <a:pPr rtl="0">
+              <a:buFont typeface="Arial" panose="020B0604020202020204" pitchFamily="34" charset="0"/>
+              <a:buChar char="•"/>
+            </a:pPr>
+            <a:r>
+              <a:rPr lang="es-MX" sz="2000" dirty="0"/>
+              <a:t>Stanford CS106A, </a:t>
+            </a:r>
+            <a:r>
+              <a:rPr lang="es-MX" sz="2000" i="1" dirty="0"/>
+              <a:t>Karel Reader</a:t>
+            </a:r>
+            <a:r>
+              <a:rPr lang="es-MX" sz="2000" dirty="0"/>
+              <a:t>, cap. 8: </a:t>
+            </a:r>
+            <a:r>
+              <a:rPr lang="es-MX" sz="2000" i="1" dirty="0" err="1"/>
+              <a:t>Stepwise</a:t>
+            </a:r>
+            <a:r>
+              <a:rPr lang="es-MX" sz="2000" i="1" dirty="0"/>
+              <a:t> </a:t>
+            </a:r>
+            <a:r>
+              <a:rPr lang="es-MX" sz="2000" i="1" dirty="0" err="1"/>
+              <a:t>Refinement</a:t>
+            </a:r>
+            <a:br>
+              <a:rPr lang="es-MX" sz="2000" dirty="0"/>
+            </a:br>
+            <a:r>
+              <a:rPr lang="es-MX" sz="2000" dirty="0">
+                <a:hlinkClick r:id="rId3"/>
+              </a:rPr>
+              <a:t>https://compedu.stanford.edu/karel-reader/docs/python/en/chapter8.html</a:t>
+            </a:r>
+            <a:endParaRPr lang="es-MX" sz="2000" dirty="0"/>
+          </a:p>
+          <a:p>
+            <a:pPr rtl="0">
+              <a:buFont typeface="Arial" panose="020B0604020202020204" pitchFamily="34" charset="0"/>
+              <a:buChar char="•"/>
+            </a:pPr>
+            <a:r>
+              <a:rPr lang="es-MX" sz="2000" dirty="0"/>
+              <a:t>Stanford CS106A, lección 3: </a:t>
+            </a:r>
+            <a:r>
+              <a:rPr lang="es-MX" sz="2000" i="1" dirty="0" err="1"/>
+              <a:t>Decomposition</a:t>
+            </a:r>
+            <a:br>
+              <a:rPr lang="es-MX" sz="2000" dirty="0"/>
+            </a:br>
+            <a:r>
+              <a:rPr lang="es-MX" sz="2000" dirty="0">
+                <a:hlinkClick r:id="rId4"/>
+              </a:rPr>
+              <a:t>https://web.stanford.edu/class/archive/cs/cs106a/cs106a.1226/lectures/03-decomposition/3-Decomposition.pdf</a:t>
+            </a:r>
+            <a:endParaRPr lang="es-MX" sz="2000" dirty="0"/>
+          </a:p>
+          <a:p>
+            <a:pPr rtl="0">
+              <a:buFont typeface="Arial" panose="020B0604020202020204" pitchFamily="34" charset="0"/>
+              <a:buChar char="•"/>
+            </a:pPr>
+            <a:r>
+              <a:rPr lang="es-MX" sz="2000" dirty="0"/>
+              <a:t>MIT 6.100L, lección 7: </a:t>
+            </a:r>
+            <a:r>
+              <a:rPr lang="es-MX" sz="2000" i="1" dirty="0" err="1"/>
+              <a:t>Decomposition</a:t>
+            </a:r>
+            <a:r>
+              <a:rPr lang="es-MX" sz="2000" i="1" dirty="0"/>
+              <a:t>, </a:t>
+            </a:r>
+            <a:r>
+              <a:rPr lang="es-MX" sz="2000" i="1" dirty="0" err="1"/>
+              <a:t>Abstraction</a:t>
+            </a:r>
+            <a:r>
+              <a:rPr lang="es-MX" sz="2000" i="1" dirty="0"/>
+              <a:t>, </a:t>
+            </a:r>
+            <a:r>
+              <a:rPr lang="es-MX" sz="2000" i="1" dirty="0" err="1"/>
+              <a:t>Functions</a:t>
+            </a:r>
+            <a:r>
+              <a:rPr lang="es-MX" sz="2000" dirty="0"/>
+              <a:t> (diapositivas)</a:t>
+            </a:r>
+            <a:br>
+              <a:rPr lang="es-MX" sz="2000" dirty="0"/>
+            </a:br>
+            <a:r>
+              <a:rPr lang="es-MX" sz="2000" dirty="0">
+                <a:hlinkClick r:id="rId5"/>
+              </a:rPr>
+              <a:t>https://ocw.mit.edu/courses/6-100l-introduction-to-cs-and-programming-using-python-fall-2022/resources/mit6_100l_f22_lec07_pdf/</a:t>
+            </a:r>
+            <a:endParaRPr lang="es-MX" sz="2000" dirty="0"/>
+          </a:p>
+          <a:p>
+            <a:pPr rtl="0">
+              <a:buFont typeface="Arial" panose="020B0604020202020204" pitchFamily="34" charset="0"/>
+              <a:buChar char="•"/>
+            </a:pPr>
+            <a:r>
+              <a:rPr lang="es-MX" sz="2000" dirty="0"/>
+              <a:t>MIT 6.100L, lección 7 (video)</a:t>
+            </a:r>
+            <a:br>
+              <a:rPr lang="es-MX" sz="2000" dirty="0"/>
+            </a:br>
+            <a:r>
+              <a:rPr lang="es-MX" sz="2000" dirty="0">
+                <a:hlinkClick r:id="rId6"/>
+              </a:rPr>
+              <a:t>https://ocw.mit.edu/courses/6-100l-introduction-to-cs-and-programming-using-python-fall-2022/resources/6100l-lecture-7-multi_mp4/</a:t>
+            </a:r>
+            <a:endParaRPr lang="es-MX" sz="2000" dirty="0"/>
+          </a:p>
+          <a:p>
+            <a:pPr rtl="0">
+              <a:buFont typeface="Arial" panose="020B0604020202020204" pitchFamily="34" charset="0"/>
+              <a:buChar char="•"/>
+            </a:pPr>
+            <a:r>
+              <a:rPr lang="es-MX" sz="2000" dirty="0"/>
+              <a:t>CS50P, lección 0: </a:t>
+            </a:r>
+            <a:r>
+              <a:rPr lang="es-MX" sz="2000" i="1" dirty="0" err="1"/>
+              <a:t>Functions</a:t>
+            </a:r>
+            <a:r>
+              <a:rPr lang="es-MX" sz="2000" i="1" dirty="0"/>
+              <a:t>, Variables</a:t>
+            </a:r>
+            <a:br>
+              <a:rPr lang="es-MX" sz="2000" dirty="0"/>
+            </a:br>
+            <a:r>
+              <a:rPr lang="es-MX" sz="2000" dirty="0">
+                <a:hlinkClick r:id="rId7"/>
+              </a:rPr>
+              <a:t>https://cs50.harvard.edu/python/notes/0/</a:t>
+            </a:r>
+            <a:endParaRPr lang="es-MX" sz="2000" dirty="0"/>
+          </a:p>
+          <a:p>
+            <a:pPr rtl="0"/>
+            <a:r>
+              <a:rPr lang="en-US" sz="2000" dirty="0"/>
+              <a:t>Liang, Y. D. </a:t>
+            </a:r>
+            <a:r>
+              <a:rPr lang="en-US" sz="2000" i="1" dirty="0"/>
+              <a:t>Introduction to Programming Using Python</a:t>
+            </a:r>
+            <a:r>
+              <a:rPr lang="en-US" sz="2000" dirty="0"/>
+              <a:t>, §6.13 </a:t>
+            </a:r>
+            <a:r>
+              <a:rPr lang="en-US" sz="2000" i="1" dirty="0"/>
+              <a:t>Function Abstraction and Stepwise Refinement</a:t>
+            </a:r>
+            <a:endParaRPr lang="es-MX" sz="2000" dirty="0"/>
+          </a:p>
+        </p:txBody>
+      </p:sp>
+    </p:spTree>
+    <p:extLst>
+      <p:ext uri="{BB962C8B-B14F-4D97-AF65-F5344CB8AC3E}">
+        <p14:creationId xmlns:p14="http://schemas.microsoft.com/office/powerpoint/2010/main" val="1023164851"/>
+      </p:ext>
+    </p:extLst>
+  </p:cSld>
+  <p:clrMapOvr>
+    <a:masterClrMapping/>
+  </p:clrMapOvr>
+</p:sld>
+</file>
+
+<file path=ppt/slides/slide35.xml><?xml version="1.0" encoding="utf-8"?>
+<p:sld xmlns:a="http://schemas.openxmlformats.org/drawingml/2006/main" xmlns:r="http://schemas.openxmlformats.org/officeDocument/2006/relationships" xmlns:p="http://schemas.openxmlformats.org/presentationml/2006/main">
+  <p:cSld>
+    <p:spTree>
+      <p:nvGrpSpPr>
+        <p:cNvPr id="1" name=""/>
+        <p:cNvGrpSpPr/>
+        <p:nvPr/>
+      </p:nvGrpSpPr>
+      <p:grpSpPr>
+        <a:xfrm>
+          <a:off x="0" y="0"/>
+          <a:ext cx="0" cy="0"/>
+          <a:chOff x="0" y="0"/>
+          <a:chExt cx="0" cy="0"/>
+        </a:xfrm>
+      </p:grpSpPr>
+      <p:sp>
+        <p:nvSpPr>
+          <p:cNvPr id="5" name="Title 4"/>
+          <p:cNvSpPr>
+            <a:spLocks noGrp="1"/>
+          </p:cNvSpPr>
+          <p:nvPr>
+            <p:ph type="title"/>
+          </p:nvPr>
+        </p:nvSpPr>
+        <p:spPr>
+          <a:xfrm>
+            <a:off x="107504" y="23817"/>
+            <a:ext cx="7886700" cy="812895"/>
+          </a:xfrm>
+        </p:spPr>
+        <p:txBody>
+          <a:bodyPr>
+            <a:normAutofit/>
+          </a:bodyPr>
+          <a:lstStyle/>
+          <a:p>
+            <a:r>
+              <a:rPr lang="en-US" sz="4000" dirty="0"/>
+              <a:t>Referencias</a:t>
+            </a:r>
+          </a:p>
+        </p:txBody>
+      </p:sp>
+      <p:sp>
+        <p:nvSpPr>
+          <p:cNvPr id="2" name="Content Placeholder 1"/>
+          <p:cNvSpPr>
+            <a:spLocks noGrp="1"/>
+          </p:cNvSpPr>
+          <p:nvPr>
+            <p:ph idx="1"/>
+          </p:nvPr>
+        </p:nvSpPr>
+        <p:spPr>
+          <a:xfrm>
+            <a:off x="251520" y="1088740"/>
+            <a:ext cx="8424936" cy="5148572"/>
+          </a:xfrm>
+        </p:spPr>
+        <p:txBody>
+          <a:bodyPr>
+            <a:normAutofit fontScale="92500" lnSpcReduction="10000"/>
+          </a:bodyPr>
+          <a:lstStyle/>
+          <a:p>
+            <a:pPr marL="457200" indent="-457200">
+              <a:buFont typeface="+mj-lt"/>
+              <a:buAutoNum type="arabicPeriod"/>
+            </a:pPr>
+            <a:r>
+              <a:rPr lang="es-CO" sz="2000" dirty="0">
+                <a:hlinkClick r:id="rId2"/>
+              </a:rPr>
+              <a:t>https://ellibrodepython.com/</a:t>
+            </a:r>
+            <a:endParaRPr lang="es-CO" sz="2000" dirty="0"/>
+          </a:p>
+          <a:p>
+            <a:pPr marL="457200" indent="-457200">
+              <a:buFont typeface="+mj-lt"/>
+              <a:buAutoNum type="arabicPeriod"/>
+            </a:pPr>
+            <a:r>
+              <a:rPr lang="es-CO" sz="2000" dirty="0">
+                <a:hlinkClick r:id="rId3"/>
+              </a:rPr>
+              <a:t>https://www.w3resource.com/index.php</a:t>
+            </a:r>
+            <a:endParaRPr lang="es-CO" sz="2000" dirty="0"/>
+          </a:p>
+          <a:p>
+            <a:pPr marL="457200" indent="-457200">
+              <a:buFont typeface="+mj-lt"/>
+              <a:buAutoNum type="arabicPeriod"/>
+            </a:pPr>
+            <a:r>
+              <a:rPr lang="es-CO" sz="2000" dirty="0">
+                <a:hlinkClick r:id="rId4"/>
+              </a:rPr>
+              <a:t>https://realpython.com/</a:t>
+            </a:r>
+            <a:endParaRPr lang="es-CO" sz="2000" dirty="0"/>
+          </a:p>
+          <a:p>
+            <a:pPr marL="457200" indent="-457200">
+              <a:buFont typeface="+mj-lt"/>
+              <a:buAutoNum type="arabicPeriod"/>
+            </a:pPr>
+            <a:r>
+              <a:rPr lang="es-CO" sz="2000" dirty="0">
+                <a:hlinkClick r:id="rId5"/>
+              </a:rPr>
+              <a:t>https://curriculumresources.edu.gh/wp-content/uploads/2025/01/</a:t>
+            </a:r>
+            <a:endParaRPr lang="es-CO" sz="2000" dirty="0"/>
+          </a:p>
+          <a:p>
+            <a:pPr marL="457200" indent="-457200">
+              <a:buFont typeface="+mj-lt"/>
+              <a:buAutoNum type="arabicPeriod"/>
+            </a:pPr>
+            <a:r>
+              <a:rPr lang="es-CO" sz="2000" dirty="0">
+                <a:hlinkClick r:id="rId6"/>
+              </a:rPr>
+              <a:t>https://python-course.eu/</a:t>
+            </a:r>
+            <a:endParaRPr lang="es-CO" sz="2000" dirty="0"/>
+          </a:p>
+          <a:p>
+            <a:pPr marL="457200" indent="-457200">
+              <a:buFont typeface="+mj-lt"/>
+              <a:buAutoNum type="arabicPeriod"/>
+            </a:pPr>
+            <a:r>
+              <a:rPr lang="es-CO" sz="2000" dirty="0">
+                <a:hlinkClick r:id="rId7"/>
+              </a:rPr>
+              <a:t>https://realpython.com/cheatsheets/python/</a:t>
+            </a:r>
+            <a:endParaRPr lang="es-CO" sz="2000" dirty="0"/>
+          </a:p>
+          <a:p>
+            <a:pPr marL="457200" indent="-457200">
+              <a:buFont typeface="+mj-lt"/>
+              <a:buAutoNum type="arabicPeriod"/>
+            </a:pPr>
+            <a:r>
+              <a:rPr lang="es-CO" sz="2000" dirty="0">
+                <a:hlinkClick r:id="rId8"/>
+              </a:rPr>
+              <a:t>https://realpython.com/defining-your-own-python-function/</a:t>
+            </a:r>
+            <a:r>
+              <a:rPr lang="es-CO" sz="2000" dirty="0"/>
+              <a:t>    </a:t>
+            </a:r>
+          </a:p>
+          <a:p>
+            <a:pPr marL="457200" indent="-457200">
+              <a:buFont typeface="+mj-lt"/>
+              <a:buAutoNum type="arabicPeriod"/>
+            </a:pPr>
+            <a:r>
+              <a:rPr lang="es-CO" sz="2000" dirty="0">
+                <a:hlinkClick r:id="rId9"/>
+              </a:rPr>
+              <a:t>https://realpython.com/python-built-in-functions/</a:t>
+            </a:r>
+            <a:endParaRPr lang="es-CO" sz="2000" dirty="0"/>
+          </a:p>
+          <a:p>
+            <a:pPr marL="457200" indent="-457200">
+              <a:buFont typeface="+mj-lt"/>
+              <a:buAutoNum type="arabicPeriod"/>
+            </a:pPr>
+            <a:r>
+              <a:rPr lang="es-CO" sz="2000" dirty="0">
+                <a:hlinkClick r:id="rId10"/>
+              </a:rPr>
+              <a:t>https://realpython.com/ref/best-practices/functions/</a:t>
+            </a:r>
+            <a:r>
+              <a:rPr lang="es-CO" sz="2000" dirty="0"/>
+              <a:t> </a:t>
+            </a:r>
+          </a:p>
+          <a:p>
+            <a:pPr marL="457200" indent="-457200">
+              <a:buFont typeface="+mj-lt"/>
+              <a:buAutoNum type="arabicPeriod"/>
+            </a:pPr>
+            <a:r>
+              <a:rPr lang="es-CO" sz="2000" dirty="0">
+                <a:hlinkClick r:id="rId11"/>
+              </a:rPr>
+              <a:t>https://makecode.microbit.org/courses/csintro</a:t>
+            </a:r>
+            <a:r>
+              <a:rPr lang="es-CO" sz="2000" dirty="0"/>
+              <a:t>   </a:t>
+            </a:r>
+          </a:p>
+          <a:p>
+            <a:pPr marL="457200" indent="-457200">
+              <a:buFont typeface="+mj-lt"/>
+              <a:buAutoNum type="arabicPeriod"/>
+            </a:pPr>
+            <a:r>
+              <a:rPr lang="en-US" sz="2000" dirty="0">
+                <a:hlinkClick r:id="rId12"/>
+              </a:rPr>
+              <a:t>https://makecode.microbit.org/courses</a:t>
+            </a:r>
+            <a:r>
+              <a:rPr lang="en-US" sz="2000" dirty="0"/>
+              <a:t> </a:t>
+            </a:r>
+          </a:p>
+          <a:p>
+            <a:pPr marL="457200" indent="-457200">
+              <a:buFont typeface="+mj-lt"/>
+              <a:buAutoNum type="arabicPeriod"/>
+            </a:pPr>
+            <a:r>
+              <a:rPr lang="en-US" sz="2000" dirty="0">
+                <a:hlinkClick r:id="rId13"/>
+              </a:rPr>
+              <a:t>https://realpython.com/python-while-loop/</a:t>
+            </a:r>
+            <a:endParaRPr lang="en-US" sz="2000" dirty="0"/>
+          </a:p>
+          <a:p>
+            <a:pPr marL="457200" indent="-457200">
+              <a:buFont typeface="+mj-lt"/>
+              <a:buAutoNum type="arabicPeriod"/>
+            </a:pPr>
+            <a:r>
+              <a:rPr lang="en-US" sz="2000" dirty="0">
+                <a:hlinkClick r:id="rId14"/>
+              </a:rPr>
+              <a:t>https://realpython.com/ref/keywords/while/</a:t>
+            </a:r>
+            <a:r>
+              <a:rPr lang="en-US" sz="2000" dirty="0"/>
+              <a:t> </a:t>
+            </a:r>
+          </a:p>
+          <a:p>
+            <a:pPr marL="457200" indent="-457200">
+              <a:buFont typeface="+mj-lt"/>
+              <a:buAutoNum type="arabicPeriod"/>
+            </a:pPr>
+            <a:r>
+              <a:rPr lang="en-US" sz="2000" dirty="0">
+                <a:hlinkClick r:id="rId15"/>
+              </a:rPr>
+              <a:t>https://cs.stanford.edu/people/nick/py/</a:t>
+            </a:r>
+            <a:r>
+              <a:rPr lang="en-US" sz="2000" dirty="0"/>
+              <a:t> </a:t>
+            </a:r>
+          </a:p>
+        </p:txBody>
+      </p:sp>
+    </p:spTree>
+    <p:extLst>
+      <p:ext uri="{BB962C8B-B14F-4D97-AF65-F5344CB8AC3E}">
+        <p14:creationId xmlns:p14="http://schemas.microsoft.com/office/powerpoint/2010/main" val="568862748"/>
+      </p:ext>
+    </p:extLst>
+  </p:cSld>
+  <p:clrMapOvr>
+    <a:masterClrMapping/>
+  </p:clrMapOvr>
+</p:sld>
+</file>
+
+<file path=ppt/slides/slide36.xml><?xml version="1.0" encoding="utf-8"?>
+<p:sld xmlns:a="http://schemas.openxmlformats.org/drawingml/2006/main" xmlns:r="http://schemas.openxmlformats.org/officeDocument/2006/relationships" xmlns:p="http://schemas.openxmlformats.org/presentationml/2006/main">
+  <p:cSld>
+    <p:spTree>
+      <p:nvGrpSpPr>
+        <p:cNvPr id="1" name=""/>
+        <p:cNvGrpSpPr/>
+        <p:nvPr/>
+      </p:nvGrpSpPr>
+      <p:grpSpPr>
+        <a:xfrm>
+          <a:off x="0" y="0"/>
+          <a:ext cx="0" cy="0"/>
+          <a:chOff x="0" y="0"/>
+          <a:chExt cx="0" cy="0"/>
+        </a:xfrm>
+      </p:grpSpPr>
+      <p:sp>
+        <p:nvSpPr>
+          <p:cNvPr id="2" name="Title 1"/>
+          <p:cNvSpPr>
+            <a:spLocks noGrp="1"/>
+          </p:cNvSpPr>
+          <p:nvPr>
+            <p:ph type="title"/>
+          </p:nvPr>
+        </p:nvSpPr>
+        <p:spPr>
+          <a:xfrm>
+            <a:off x="323528" y="180617"/>
+            <a:ext cx="8191822" cy="728103"/>
+          </a:xfrm>
+        </p:spPr>
+        <p:txBody>
+          <a:bodyPr/>
+          <a:lstStyle/>
+          <a:p>
+            <a:r>
+              <a:rPr lang="es-CO" dirty="0"/>
+              <a:t>Eso es todo amigos</a:t>
+            </a:r>
+            <a:endParaRPr lang="en-US" dirty="0"/>
+          </a:p>
+        </p:txBody>
+      </p:sp>
+      <p:pic>
+        <p:nvPicPr>
+          <p:cNvPr id="4" name="Picture 4">
+            <a:extLst>
+              <a:ext uri="{FF2B5EF4-FFF2-40B4-BE49-F238E27FC236}">
+                <a16:creationId xmlns:a16="http://schemas.microsoft.com/office/drawing/2014/main" id="{7F35EEF4-F126-467F-A5BB-259AA64991BD}"/>
+              </a:ext>
+            </a:extLst>
+          </p:cNvPr>
+          <p:cNvPicPr>
+            <a:picLocks noChangeAspect="1" noChangeArrowheads="1"/>
+          </p:cNvPicPr>
+          <p:nvPr/>
+        </p:nvPicPr>
+        <p:blipFill>
+          <a:blip r:embed="rId2">
+            <a:extLst>
+              <a:ext uri="{28A0092B-C50C-407E-A947-70E740481C1C}">
+                <a14:useLocalDpi xmlns:a14="http://schemas.microsoft.com/office/drawing/2010/main" val="0"/>
+              </a:ext>
+            </a:extLst>
+          </a:blip>
+          <a:srcRect/>
+          <a:stretch>
+            <a:fillRect/>
+          </a:stretch>
+        </p:blipFill>
+        <p:spPr bwMode="auto">
+          <a:xfrm>
+            <a:off x="4211960" y="912200"/>
+            <a:ext cx="4113633" cy="5868856"/>
+          </a:xfrm>
+          <a:prstGeom prst="rect">
+            <a:avLst/>
+          </a:prstGeom>
+          <a:noFill/>
+          <a:extLst>
+            <a:ext uri="{909E8E84-426E-40DD-AFC4-6F175D3DCCD1}">
+              <a14:hiddenFill xmlns:a14="http://schemas.microsoft.com/office/drawing/2010/main">
+                <a:solidFill>
+                  <a:srgbClr val="FFFFFF"/>
+                </a:solidFill>
+              </a14:hiddenFill>
+            </a:ext>
+          </a:extLst>
+        </p:spPr>
+      </p:pic>
+      <p:sp>
+        <p:nvSpPr>
+          <p:cNvPr id="5" name="7 Rectángulo">
+            <a:extLst>
+              <a:ext uri="{FF2B5EF4-FFF2-40B4-BE49-F238E27FC236}">
+                <a16:creationId xmlns:a16="http://schemas.microsoft.com/office/drawing/2014/main" id="{27C7AA4C-274E-4F17-B614-41C209AA98D3}"/>
+              </a:ext>
+            </a:extLst>
+          </p:cNvPr>
+          <p:cNvSpPr/>
+          <p:nvPr/>
+        </p:nvSpPr>
+        <p:spPr>
+          <a:xfrm>
+            <a:off x="101021" y="6519446"/>
+            <a:ext cx="3678892" cy="261610"/>
+          </a:xfrm>
+          <a:prstGeom prst="rect">
+            <a:avLst/>
+          </a:prstGeom>
+        </p:spPr>
+        <p:txBody>
+          <a:bodyPr wrap="square">
+            <a:spAutoFit/>
+          </a:bodyPr>
+          <a:lstStyle/>
+          <a:p>
+            <a:r>
+              <a:rPr lang="es-CO" sz="1100" dirty="0">
+                <a:hlinkClick r:id="rId3"/>
+              </a:rPr>
+              <a:t>https://phdcomics.com/comics/archive.php?comicid=1431</a:t>
+            </a:r>
+            <a:r>
+              <a:rPr lang="es-CO" sz="1100" dirty="0"/>
+              <a:t> </a:t>
+            </a:r>
+          </a:p>
+        </p:txBody>
+      </p:sp>
+      <p:pic>
+        <p:nvPicPr>
+          <p:cNvPr id="2050" name="Picture 2" descr="Ouch Images – Browse 81,244 Stock Photos, Vectors, and Video | Adobe Stock">
+            <a:extLst>
+              <a:ext uri="{FF2B5EF4-FFF2-40B4-BE49-F238E27FC236}">
+                <a16:creationId xmlns:a16="http://schemas.microsoft.com/office/drawing/2014/main" id="{190AEE93-FCB4-45D0-A740-34697C5E7782}"/>
+              </a:ext>
+            </a:extLst>
+          </p:cNvPr>
+          <p:cNvPicPr>
+            <a:picLocks noChangeAspect="1" noChangeArrowheads="1"/>
+          </p:cNvPicPr>
+          <p:nvPr/>
+        </p:nvPicPr>
+        <p:blipFill>
+          <a:blip r:embed="rId4">
+            <a:extLst>
+              <a:ext uri="{28A0092B-C50C-407E-A947-70E740481C1C}">
+                <a14:useLocalDpi xmlns:a14="http://schemas.microsoft.com/office/drawing/2010/main" val="0"/>
+              </a:ext>
+            </a:extLst>
+          </a:blip>
+          <a:srcRect/>
+          <a:stretch>
+            <a:fillRect/>
+          </a:stretch>
+        </p:blipFill>
+        <p:spPr bwMode="auto">
+          <a:xfrm>
+            <a:off x="297451" y="2496793"/>
+            <a:ext cx="3563955" cy="2434580"/>
+          </a:xfrm>
+          <a:prstGeom prst="rect">
+            <a:avLst/>
+          </a:prstGeom>
+          <a:noFill/>
+          <a:extLst>
+            <a:ext uri="{909E8E84-426E-40DD-AFC4-6F175D3DCCD1}">
+              <a14:hiddenFill xmlns:a14="http://schemas.microsoft.com/office/drawing/2010/main">
+                <a:solidFill>
+                  <a:srgbClr val="FFFFFF"/>
+                </a:solidFill>
+              </a14:hiddenFill>
+            </a:ext>
+          </a:extLst>
+        </p:spPr>
+      </p:pic>
+    </p:spTree>
+    <p:extLst>
+      <p:ext uri="{BB962C8B-B14F-4D97-AF65-F5344CB8AC3E}">
+        <p14:creationId xmlns:p14="http://schemas.microsoft.com/office/powerpoint/2010/main" val="3024962735"/>
       </p:ext>
     </p:extLst>
   </p:cSld>

--- a/clases/10/teoria/clase-10.pptx
+++ b/clases/10/teoria/clase-10.pptx
@@ -5,7 +5,7 @@
     <p:sldMasterId id="2147483699" r:id="rId1"/>
   </p:sldMasterIdLst>
   <p:notesMasterIdLst>
-    <p:notesMasterId r:id="rId51"/>
+    <p:notesMasterId r:id="rId62"/>
   </p:notesMasterIdLst>
   <p:sldIdLst>
     <p:sldId id="281" r:id="rId2"/>
@@ -54,9 +54,20 @@
     <p:sldId id="640" r:id="rId45"/>
     <p:sldId id="639" r:id="rId46"/>
     <p:sldId id="641" r:id="rId47"/>
-    <p:sldId id="310" r:id="rId48"/>
-    <p:sldId id="622" r:id="rId49"/>
-    <p:sldId id="277" r:id="rId50"/>
+    <p:sldId id="642" r:id="rId48"/>
+    <p:sldId id="643" r:id="rId49"/>
+    <p:sldId id="644" r:id="rId50"/>
+    <p:sldId id="645" r:id="rId51"/>
+    <p:sldId id="646" r:id="rId52"/>
+    <p:sldId id="647" r:id="rId53"/>
+    <p:sldId id="648" r:id="rId54"/>
+    <p:sldId id="649" r:id="rId55"/>
+    <p:sldId id="650" r:id="rId56"/>
+    <p:sldId id="651" r:id="rId57"/>
+    <p:sldId id="652" r:id="rId58"/>
+    <p:sldId id="310" r:id="rId59"/>
+    <p:sldId id="622" r:id="rId60"/>
+    <p:sldId id="277" r:id="rId61"/>
   </p:sldIdLst>
   <p:sldSz cx="9144000" cy="6858000" type="screen4x3"/>
   <p:notesSz cx="6858000" cy="9144000"/>
@@ -3676,7 +3687,7 @@
           <a:p>
             <a:fld id="{30943A3E-55B9-4706-BA6E-9364B5247742}" type="datetimeFigureOut">
               <a:rPr lang="es-CO" smtClean="0"/>
-              <a:t>10/10/2026</a:t>
+              <a:t>12/10/2026</a:t>
             </a:fld>
             <a:endParaRPr lang="es-CO"/>
           </a:p>
@@ -4075,7 +4086,7 @@
           <a:p>
             <a:fld id="{78FAE389-1891-4C1C-AE7B-96446A92669F}" type="datetime1">
               <a:rPr lang="es-CO" smtClean="0"/>
-              <a:t>10/10/2026</a:t>
+              <a:t>12/10/2026</a:t>
             </a:fld>
             <a:endParaRPr lang="es-CO" dirty="0"/>
           </a:p>
@@ -4247,7 +4258,7 @@
           <a:p>
             <a:fld id="{169921E5-6957-4C84-BD80-156D13F58C59}" type="datetime1">
               <a:rPr lang="es-CO" smtClean="0"/>
-              <a:t>10/10/2026</a:t>
+              <a:t>12/10/2026</a:t>
             </a:fld>
             <a:endParaRPr lang="es-CO"/>
           </a:p>
@@ -4427,7 +4438,7 @@
           <a:p>
             <a:fld id="{A7BB61D7-E979-4A0B-B106-A9203ABD6AA5}" type="datetime1">
               <a:rPr lang="es-CO" smtClean="0"/>
-              <a:t>10/10/2026</a:t>
+              <a:t>12/10/2026</a:t>
             </a:fld>
             <a:endParaRPr lang="es-CO"/>
           </a:p>
@@ -4597,7 +4608,7 @@
           <a:p>
             <a:fld id="{BC197211-2E02-4E34-9D1C-742DBBA2E713}" type="datetime1">
               <a:rPr lang="es-CO" smtClean="0"/>
-              <a:t>10/10/2026</a:t>
+              <a:t>12/10/2026</a:t>
             </a:fld>
             <a:endParaRPr lang="es-CO"/>
           </a:p>
@@ -4767,7 +4778,7 @@
           <a:p>
             <a:fld id="{BC197211-2E02-4E34-9D1C-742DBBA2E713}" type="datetime1">
               <a:rPr lang="es-CO" smtClean="0"/>
-              <a:t>10/10/2026</a:t>
+              <a:t>12/10/2026</a:t>
             </a:fld>
             <a:endParaRPr lang="es-CO"/>
           </a:p>
@@ -5011,7 +5022,7 @@
           <a:p>
             <a:fld id="{F84A16AA-8F92-4F8D-9FF5-AE4F5F025475}" type="datetime1">
               <a:rPr lang="es-CO" smtClean="0"/>
-              <a:t>10/10/2026</a:t>
+              <a:t>12/10/2026</a:t>
             </a:fld>
             <a:endParaRPr lang="es-CO"/>
           </a:p>
@@ -5243,7 +5254,7 @@
           <a:p>
             <a:fld id="{58A2889A-C4A3-4C6C-A514-E9566A95FF0B}" type="datetime1">
               <a:rPr lang="es-CO" smtClean="0"/>
-              <a:t>10/10/2026</a:t>
+              <a:t>12/10/2026</a:t>
             </a:fld>
             <a:endParaRPr lang="es-CO"/>
           </a:p>
@@ -5610,7 +5621,7 @@
           <a:p>
             <a:fld id="{CFC549B8-F78E-4015-8DD3-99AC842EEF5C}" type="datetime1">
               <a:rPr lang="es-CO" smtClean="0"/>
-              <a:t>10/10/2026</a:t>
+              <a:t>12/10/2026</a:t>
             </a:fld>
             <a:endParaRPr lang="es-CO"/>
           </a:p>
@@ -5728,7 +5739,7 @@
           <a:p>
             <a:fld id="{78FAE389-1891-4C1C-AE7B-96446A92669F}" type="datetime1">
               <a:rPr lang="es-CO" smtClean="0"/>
-              <a:t>10/10/2026</a:t>
+              <a:t>12/10/2026</a:t>
             </a:fld>
             <a:endParaRPr lang="es-CO" dirty="0"/>
           </a:p>
@@ -5825,7 +5836,7 @@
           <a:p>
             <a:fld id="{C2375FDE-4F9B-4FF4-9D4F-6D3ED15F62CE}" type="datetime1">
               <a:rPr lang="es-CO" smtClean="0"/>
-              <a:t>10/10/2026</a:t>
+              <a:t>12/10/2026</a:t>
             </a:fld>
             <a:endParaRPr lang="es-CO"/>
           </a:p>
@@ -6102,7 +6113,7 @@
           <a:p>
             <a:fld id="{7AF392FA-6414-43D4-857F-1D16849F2AFB}" type="datetime1">
               <a:rPr lang="es-CO" smtClean="0"/>
-              <a:t>10/10/2026</a:t>
+              <a:t>12/10/2026</a:t>
             </a:fld>
             <a:endParaRPr lang="es-CO"/>
           </a:p>
@@ -6359,7 +6370,7 @@
           <a:p>
             <a:fld id="{E2F1ADB1-43E6-4CC5-8BA6-A3F5A7E6EF55}" type="datetime1">
               <a:rPr lang="es-CO" smtClean="0"/>
-              <a:t>10/10/2026</a:t>
+              <a:t>12/10/2026</a:t>
             </a:fld>
             <a:endParaRPr lang="es-CO"/>
           </a:p>
@@ -6572,7 +6583,7 @@
           <a:p>
             <a:fld id="{78FAE389-1891-4C1C-AE7B-96446A92669F}" type="datetime1">
               <a:rPr lang="es-CO" smtClean="0"/>
-              <a:t>10/10/2026</a:t>
+              <a:t>12/10/2026</a:t>
             </a:fld>
             <a:endParaRPr lang="es-CO" dirty="0"/>
           </a:p>
@@ -7037,8 +7048,8 @@
           <a:lstStyle/>
           <a:p>
             <a:r>
-              <a:rPr lang="es-CO" sz="3200" b="1" dirty="0"/>
-              <a:t>Funciones - Introducción</a:t>
+              <a:rPr lang="es-MX" sz="3200" b="1" dirty="0"/>
+              <a:t>Funciones: diseño, librerías y módulos</a:t>
             </a:r>
           </a:p>
           <a:p>
@@ -13634,7 +13645,7 @@
               <a:t> justo debajo del </a:t>
             </a:r>
             <a:r>
-              <a:rPr lang="es-MX" b="1" dirty="0" err="1">
+              <a:rPr lang="es-MX" b="1" dirty="0">
                 <a:latin typeface="Consolas" panose="020B0609020204030204" pitchFamily="49" charset="0"/>
               </a:rPr>
               <a:t>def</a:t>
@@ -17868,16 +17879,10 @@
           </a:p>
           <a:p>
             <a:r>
-              <a:rPr lang="es-MX" sz="1200" dirty="0" err="1">
-                <a:latin typeface="Consolas" panose="020B0609020204030204" pitchFamily="49" charset="0"/>
-              </a:rPr>
-              <a:t>def</a:t>
-            </a:r>
-            <a:r>
               <a:rPr lang="es-MX" sz="1200" dirty="0">
                 <a:latin typeface="Consolas" panose="020B0609020204030204" pitchFamily="49" charset="0"/>
               </a:rPr>
-              <a:t> </a:t>
+              <a:t>def </a:t>
             </a:r>
             <a:r>
               <a:rPr lang="es-MX" sz="1200" dirty="0" err="1">
@@ -18908,16 +18913,10 @@
           </a:p>
           <a:p>
             <a:r>
-              <a:rPr lang="es-MX" sz="1200" dirty="0" err="1">
-                <a:latin typeface="Consolas" panose="020B0609020204030204" pitchFamily="49" charset="0"/>
-              </a:rPr>
-              <a:t>def</a:t>
-            </a:r>
-            <a:r>
               <a:rPr lang="es-MX" sz="1200" dirty="0">
                 <a:latin typeface="Consolas" panose="020B0609020204030204" pitchFamily="49" charset="0"/>
               </a:rPr>
-              <a:t> </a:t>
+              <a:t>def </a:t>
             </a:r>
             <a:r>
               <a:rPr lang="es-MX" sz="1200" dirty="0" err="1">
@@ -20087,8 +20086,8 @@
           </a:p>
         </p:txBody>
       </p:sp>
-      <mc:AlternateContent xmlns:mc="http://schemas.openxmlformats.org/markup-compatibility/2006">
-        <mc:Choice xmlns:a14="http://schemas.microsoft.com/office/drawing/2010/main" Requires="a14">
+      <mc:AlternateContent xmlns:mc="http://schemas.openxmlformats.org/markup-compatibility/2006" xmlns:a14="http://schemas.microsoft.com/office/drawing/2010/main">
+        <mc:Choice Requires="a14">
           <p:sp>
             <p:nvSpPr>
               <p:cNvPr id="3" name="CuadroTexto 2">
@@ -20117,6 +20116,7 @@
               </a:bodyPr>
               <a:lstStyle/>
               <a:p>
+                <a:pPr/>
                 <a14:m>
                   <m:oMathPara xmlns:m="http://schemas.openxmlformats.org/officeDocument/2006/math">
                     <m:oMathParaPr>
@@ -20338,7 +20338,7 @@
             </p:txBody>
           </p:sp>
         </mc:Choice>
-        <mc:Fallback>
+        <mc:Fallback xmlns="">
           <p:sp>
             <p:nvSpPr>
               <p:cNvPr id="3" name="CuadroTexto 2">
@@ -20769,22 +20769,13 @@
               <a:t>los parámetros con valor por defecto van al final. </a:t>
             </a:r>
             <a:r>
-              <a:rPr lang="es-MX" sz="1400" b="1" dirty="0" err="1">
-                <a:solidFill>
-                  <a:schemeClr val="accent5"/>
-                </a:solidFill>
-                <a:latin typeface="Consolas" panose="020B0609020204030204" pitchFamily="49" charset="0"/>
-              </a:rPr>
-              <a:t>def</a:t>
-            </a:r>
-            <a:r>
               <a:rPr lang="es-MX" sz="1400" b="1" dirty="0">
                 <a:solidFill>
                   <a:schemeClr val="accent5"/>
                 </a:solidFill>
                 <a:latin typeface="Consolas" panose="020B0609020204030204" pitchFamily="49" charset="0"/>
               </a:rPr>
-              <a:t> seno(n=10, x)</a:t>
+              <a:t>def seno(n=10, x)</a:t>
             </a:r>
             <a:r>
               <a:rPr lang="es-MX" sz="1600" dirty="0"/>
@@ -30418,7 +30409,7 @@
               <a:t>A partir de esta clase se utiliza el módulo </a:t>
             </a:r>
             <a:r>
-              <a:rPr lang="es-MX" b="1" dirty="0" err="1">
+              <a:rPr lang="es-MX" b="1" dirty="0">
                 <a:latin typeface="Consolas" panose="020B0609020204030204" pitchFamily="49" charset="0"/>
               </a:rPr>
               <a:t>math</a:t>
@@ -30442,10 +30433,16 @@
               <a:t> puede reemplazarse por </a:t>
             </a:r>
             <a:r>
+              <a:rPr lang="es-MX" sz="1600" b="1" dirty="0" err="1">
+                <a:latin typeface="Consolas" panose="020B0609020204030204" pitchFamily="49" charset="0"/>
+              </a:rPr>
+              <a:t>math.sqrt</a:t>
+            </a:r>
+            <a:r>
               <a:rPr lang="es-MX" sz="1600" b="1" dirty="0">
                 <a:latin typeface="Consolas" panose="020B0609020204030204" pitchFamily="49" charset="0"/>
               </a:rPr>
-              <a:t>math.sqrt()</a:t>
+              <a:t>()</a:t>
             </a:r>
             <a:r>
               <a:rPr lang="es-MX" dirty="0"/>
@@ -31369,14 +31366,11 @@
               <a:t>Modulo </a:t>
             </a:r>
             <a:r>
-              <a:rPr lang="es-MX" sz="3200" dirty="0" err="1">
+              <a:rPr lang="es-MX" sz="3200" dirty="0">
                 <a:latin typeface="Consolas" panose="020B0609020204030204" pitchFamily="49" charset="0"/>
               </a:rPr>
               <a:t>math</a:t>
             </a:r>
-            <a:endParaRPr lang="es-MX" sz="3200" dirty="0">
-              <a:latin typeface="Consolas" panose="020B0609020204030204" pitchFamily="49" charset="0"/>
-            </a:endParaRPr>
           </a:p>
         </p:txBody>
       </p:sp>
@@ -31407,15 +31401,7 @@
             </a:pPr>
             <a:r>
               <a:rPr lang="es-MX" sz="2000" dirty="0"/>
-              <a:t>El módulo </a:t>
-            </a:r>
-            <a:r>
-              <a:rPr lang="es-MX" sz="2000" dirty="0" err="1"/>
-              <a:t>math</a:t>
-            </a:r>
-            <a:r>
-              <a:rPr lang="es-MX" sz="2000" dirty="0"/>
-              <a:t> reúne funciones y constantes matemáticas de uso frecuente.</a:t>
+              <a:t>El módulo math reúne funciones y constantes matemáticas de uso frecuente.</a:t>
             </a:r>
           </a:p>
           <a:p>
@@ -31425,23 +31411,7 @@
             </a:pPr>
             <a:r>
               <a:rPr lang="es-MX" sz="2000" dirty="0"/>
-              <a:t>Para utilizarlo se escribe import </a:t>
-            </a:r>
-            <a:r>
-              <a:rPr lang="es-MX" sz="2000" dirty="0" err="1"/>
-              <a:t>math</a:t>
-            </a:r>
-            <a:r>
-              <a:rPr lang="es-MX" sz="2000" dirty="0"/>
-              <a:t> al inicio del programa, y cada función se invoca con el prefijo </a:t>
-            </a:r>
-            <a:r>
-              <a:rPr lang="es-MX" sz="2000" dirty="0" err="1"/>
-              <a:t>math</a:t>
-            </a:r>
-            <a:r>
-              <a:rPr lang="es-MX" sz="2000" dirty="0"/>
-              <a:t>.</a:t>
+              <a:t>Para utilizarlo se escribe import math al inicio del programa, y cada función se invoca con el prefijo math.</a:t>
             </a:r>
           </a:p>
           <a:p>
@@ -31559,19 +31529,7 @@
               <a:rPr lang="es-MX" b="1" dirty="0">
                 <a:latin typeface="Consolas" panose="020B0609020204030204" pitchFamily="49" charset="0"/>
               </a:rPr>
-              <a:t>help(</a:t>
-            </a:r>
-            <a:r>
-              <a:rPr lang="es-MX" b="1" dirty="0" err="1">
-                <a:latin typeface="Consolas" panose="020B0609020204030204" pitchFamily="49" charset="0"/>
-              </a:rPr>
-              <a:t>math</a:t>
-            </a:r>
-            <a:r>
-              <a:rPr lang="es-MX" b="1" dirty="0">
-                <a:latin typeface="Consolas" panose="020B0609020204030204" pitchFamily="49" charset="0"/>
-              </a:rPr>
-              <a:t>)</a:t>
+              <a:t>help(math)</a:t>
             </a:r>
             <a:r>
               <a:rPr lang="es-MX" sz="2000" dirty="0"/>
@@ -31632,7 +31590,7 @@
               <a:t>: Antes de escribir una función matemática, conviene revisar si ya existe en </a:t>
             </a:r>
             <a:r>
-              <a:rPr lang="es-MX" sz="1600" b="1" dirty="0" err="1">
+              <a:rPr lang="es-MX" sz="1600" b="1" dirty="0">
                 <a:latin typeface="Consolas" panose="020B0609020204030204" pitchFamily="49" charset="0"/>
               </a:rPr>
               <a:t>math</a:t>
@@ -33430,15 +33388,7 @@
             </a:pPr>
             <a:r>
               <a:rPr lang="es-MX" sz="2000" dirty="0"/>
-              <a:t>El módulo </a:t>
-            </a:r>
-            <a:r>
-              <a:rPr lang="es-MX" sz="2000" dirty="0" err="1"/>
-              <a:t>math</a:t>
-            </a:r>
-            <a:r>
-              <a:rPr lang="es-MX" sz="2000" dirty="0"/>
-              <a:t> ofrece una función equivalente: </a:t>
+              <a:t>El módulo math ofrece una función equivalente: </a:t>
             </a:r>
             <a:r>
               <a:rPr lang="es-MX" b="1" dirty="0" err="1">
@@ -35111,20 +35061,14 @@
               <a:rPr lang="es-MX" sz="1600" b="1" dirty="0">
                 <a:latin typeface="Consolas" panose="020B0609020204030204" pitchFamily="49" charset="0"/>
               </a:rPr>
-              <a:t>import </a:t>
-            </a:r>
-            <a:r>
-              <a:rPr lang="es-MX" sz="1600" b="1" dirty="0" err="1">
-                <a:latin typeface="Consolas" panose="020B0609020204030204" pitchFamily="49" charset="0"/>
-              </a:rPr>
-              <a:t>math</a:t>
+              <a:t>import math</a:t>
             </a:r>
             <a:r>
               <a:rPr lang="es-MX" dirty="0"/>
               <a:t>. El prefijo </a:t>
             </a:r>
             <a:r>
-              <a:rPr lang="es-MX" sz="1600" b="1" dirty="0" err="1">
+              <a:rPr lang="es-MX" sz="1600" b="1" dirty="0">
                 <a:latin typeface="Consolas" panose="020B0609020204030204" pitchFamily="49" charset="0"/>
               </a:rPr>
               <a:t>math</a:t>
@@ -37235,14 +37179,11 @@
           <a:p>
             <a:r>
               <a:rPr lang="es-MX" sz="3600" dirty="0"/>
-              <a:t>Módulo </a:t>
-            </a:r>
-            <a:r>
-              <a:rPr lang="es-MX" sz="3200" dirty="0">
-                <a:latin typeface="Consolas" panose="020B0609020204030204" pitchFamily="49" charset="0"/>
-              </a:rPr>
-              <a:t>random</a:t>
-            </a:r>
+              <a:t>Ejercicio de repaso: adivina el número</a:t>
+            </a:r>
+            <a:endParaRPr lang="es-MX" sz="3200" dirty="0">
+              <a:latin typeface="Consolas" panose="020B0609020204030204" pitchFamily="49" charset="0"/>
+            </a:endParaRPr>
           </a:p>
         </p:txBody>
       </p:sp>
@@ -37255,7 +37196,7 @@
         <p:spPr>
           <a:xfrm>
             <a:off x="144639" y="764704"/>
-            <a:ext cx="8835218" cy="4708981"/>
+            <a:ext cx="8835218" cy="5940088"/>
           </a:xfrm>
           <a:prstGeom prst="rect">
             <a:avLst/>
@@ -37273,25 +37214,7 @@
             </a:pPr>
             <a:r>
               <a:rPr lang="es-MX" sz="2000" dirty="0"/>
-              <a:t>El módulo </a:t>
-            </a:r>
-            <a:r>
-              <a:rPr lang="es-MX" b="1" dirty="0">
-                <a:latin typeface="Consolas" panose="020B0609020204030204" pitchFamily="49" charset="0"/>
-              </a:rPr>
-              <a:t>random</a:t>
-            </a:r>
-            <a:r>
-              <a:rPr lang="es-MX" sz="2000" dirty="0"/>
-              <a:t> genera números </a:t>
-            </a:r>
-            <a:r>
-              <a:rPr lang="es-MX" sz="2000" b="1" dirty="0"/>
-              <a:t>pseudoaleatorios</a:t>
-            </a:r>
-            <a:r>
-              <a:rPr lang="es-MX" sz="2000" dirty="0"/>
-              <a:t>: parecen elegidos al azar, pero son calculados por un algoritmo.</a:t>
+              <a:t>El programa elige un número entero al azar entre 1 y 100, y el usuario intenta adivinarlo con las pistas mayor o menor.</a:t>
             </a:r>
           </a:p>
           <a:p>
@@ -37300,8 +37223,110 @@
               <a:buChar char="•"/>
             </a:pPr>
             <a:r>
+              <a:rPr lang="es-MX" sz="2000" b="1" dirty="0"/>
+              <a:t>Aplique el procedimiento completo</a:t>
+            </a:r>
+            <a:r>
               <a:rPr lang="es-MX" sz="2000" dirty="0"/>
-              <a:t>Se utiliza en juegos, simulaciones y en la generación de datos de prueba.</a:t>
+              <a:t>: </a:t>
+            </a:r>
+          </a:p>
+          <a:p>
+            <a:pPr marL="914400" lvl="1" indent="-457200">
+              <a:buFont typeface="+mj-lt"/>
+              <a:buAutoNum type="arabicPeriod"/>
+            </a:pPr>
+            <a:r>
+              <a:rPr lang="es-MX" sz="2000" dirty="0"/>
+              <a:t>Entender</a:t>
+            </a:r>
+          </a:p>
+          <a:p>
+            <a:pPr marL="914400" lvl="1" indent="-457200">
+              <a:buFont typeface="+mj-lt"/>
+              <a:buAutoNum type="arabicPeriod"/>
+            </a:pPr>
+            <a:r>
+              <a:rPr lang="es-MX" sz="2000" dirty="0"/>
+              <a:t>diseñar (top-</a:t>
+            </a:r>
+            <a:r>
+              <a:rPr lang="es-MX" sz="2000" dirty="0" err="1"/>
+              <a:t>down</a:t>
+            </a:r>
+            <a:r>
+              <a:rPr lang="es-MX" sz="2000" dirty="0"/>
+              <a:t>)</a:t>
+            </a:r>
+          </a:p>
+          <a:p>
+            <a:pPr marL="914400" lvl="1" indent="-457200">
+              <a:buFont typeface="+mj-lt"/>
+              <a:buAutoNum type="arabicPeriod"/>
+            </a:pPr>
+            <a:r>
+              <a:rPr lang="es-MX" sz="2000" dirty="0"/>
+              <a:t>Especificar</a:t>
+            </a:r>
+          </a:p>
+          <a:p>
+            <a:pPr marL="914400" lvl="1" indent="-457200">
+              <a:buFont typeface="+mj-lt"/>
+              <a:buAutoNum type="arabicPeriod"/>
+            </a:pPr>
+            <a:r>
+              <a:rPr lang="es-MX" sz="2000" dirty="0"/>
+              <a:t>Implementar con stubs </a:t>
+            </a:r>
+          </a:p>
+          <a:p>
+            <a:pPr marL="914400" lvl="1" indent="-457200">
+              <a:buFont typeface="+mj-lt"/>
+              <a:buAutoNum type="arabicPeriod"/>
+            </a:pPr>
+            <a:r>
+              <a:rPr lang="es-MX" sz="2000" dirty="0"/>
+              <a:t>probar con </a:t>
+            </a:r>
+            <a:r>
+              <a:rPr lang="es-MX" dirty="0" err="1">
+                <a:latin typeface="Consolas" panose="020B0609020204030204" pitchFamily="49" charset="0"/>
+              </a:rPr>
+              <a:t>random.seed</a:t>
+            </a:r>
+            <a:r>
+              <a:rPr lang="es-MX" dirty="0">
+                <a:latin typeface="Consolas" panose="020B0609020204030204" pitchFamily="49" charset="0"/>
+              </a:rPr>
+              <a:t>()</a:t>
+            </a:r>
+            <a:r>
+              <a:rPr lang="es-MX" sz="2000" dirty="0"/>
+              <a:t>.</a:t>
+            </a:r>
+          </a:p>
+          <a:p>
+            <a:pPr marL="342900" indent="-342900" rtl="0">
+              <a:buFont typeface="Arial" panose="020B0604020202020204" pitchFamily="34" charset="0"/>
+              <a:buChar char="•"/>
+            </a:pPr>
+            <a:r>
+              <a:rPr lang="es-MX" sz="2000" b="1" dirty="0"/>
+              <a:t>Guía autocontenida</a:t>
+            </a:r>
+            <a:r>
+              <a:rPr lang="es-MX" sz="2000" dirty="0"/>
+              <a:t>: (</a:t>
+            </a:r>
+            <a:r>
+              <a:rPr lang="es-MX" sz="2000" dirty="0">
+                <a:hlinkClick r:id="rId2"/>
+              </a:rPr>
+              <a:t>link</a:t>
+            </a:r>
+            <a:r>
+              <a:rPr lang="es-MX" sz="2000" dirty="0"/>
+              <a:t>)</a:t>
             </a:r>
           </a:p>
           <a:p>
@@ -37374,1446 +37399,8 @@
             </a:pPr>
             <a:endParaRPr lang="es-MX" sz="2000" dirty="0"/>
           </a:p>
-          <a:p>
-            <a:pPr marL="342900" indent="-342900" rtl="0">
-              <a:buFont typeface="Arial" panose="020B0604020202020204" pitchFamily="34" charset="0"/>
-              <a:buChar char="•"/>
-            </a:pPr>
-            <a:endParaRPr lang="es-MX" sz="2000" dirty="0"/>
-          </a:p>
-          <a:p>
-            <a:pPr marL="342900" indent="-342900" rtl="0">
-              <a:buFont typeface="Arial" panose="020B0604020202020204" pitchFamily="34" charset="0"/>
-              <a:buChar char="•"/>
-            </a:pPr>
-            <a:endParaRPr lang="es-MX" sz="2000" dirty="0"/>
-          </a:p>
         </p:txBody>
       </p:sp>
-      <p:graphicFrame>
-        <p:nvGraphicFramePr>
-          <p:cNvPr id="3" name="Tabla 2">
-            <a:extLst>
-              <a:ext uri="{FF2B5EF4-FFF2-40B4-BE49-F238E27FC236}">
-                <a16:creationId xmlns:a16="http://schemas.microsoft.com/office/drawing/2014/main" id="{BB52E2A2-5D1A-4A4C-9F38-F83A509874BA}"/>
-              </a:ext>
-            </a:extLst>
-          </p:cNvPr>
-          <p:cNvGraphicFramePr>
-            <a:graphicFrameLocks noGrp="1"/>
-          </p:cNvGraphicFramePr>
-          <p:nvPr>
-            <p:extLst>
-              <p:ext uri="{D42A27DB-BD31-4B8C-83A1-F6EECF244321}">
-                <p14:modId xmlns:p14="http://schemas.microsoft.com/office/powerpoint/2010/main" val="375456864"/>
-              </p:ext>
-            </p:extLst>
-          </p:nvPr>
-        </p:nvGraphicFramePr>
-        <p:xfrm>
-          <a:off x="308159" y="2005140"/>
-          <a:ext cx="8512313" cy="3152052"/>
-        </p:xfrm>
-        <a:graphic>
-          <a:graphicData uri="http://schemas.openxmlformats.org/drawingml/2006/table">
-            <a:tbl>
-              <a:tblPr/>
-              <a:tblGrid>
-                <a:gridCol w="2016074">
-                  <a:extLst>
-                    <a:ext uri="{9D8B030D-6E8A-4147-A177-3AD203B41FA5}">
-                      <a16:colId xmlns:a16="http://schemas.microsoft.com/office/drawing/2014/main" val="2930217562"/>
-                    </a:ext>
-                  </a:extLst>
-                </a:gridCol>
-                <a:gridCol w="2448422">
-                  <a:extLst>
-                    <a:ext uri="{9D8B030D-6E8A-4147-A177-3AD203B41FA5}">
-                      <a16:colId xmlns:a16="http://schemas.microsoft.com/office/drawing/2014/main" val="423211645"/>
-                    </a:ext>
-                  </a:extLst>
-                </a:gridCol>
-                <a:gridCol w="2376264">
-                  <a:extLst>
-                    <a:ext uri="{9D8B030D-6E8A-4147-A177-3AD203B41FA5}">
-                      <a16:colId xmlns:a16="http://schemas.microsoft.com/office/drawing/2014/main" val="2391667900"/>
-                    </a:ext>
-                  </a:extLst>
-                </a:gridCol>
-                <a:gridCol w="1671553">
-                  <a:extLst>
-                    <a:ext uri="{9D8B030D-6E8A-4147-A177-3AD203B41FA5}">
-                      <a16:colId xmlns:a16="http://schemas.microsoft.com/office/drawing/2014/main" val="1691243045"/>
-                    </a:ext>
-                  </a:extLst>
-                </a:gridCol>
-              </a:tblGrid>
-              <a:tr h="255412">
-                <a:tc>
-                  <a:txBody>
-                    <a:bodyPr/>
-                    <a:lstStyle/>
-                    <a:p>
-                      <a:r>
-                        <a:rPr lang="es-CO" sz="1400" b="1"/>
-                        <a:t>Función</a:t>
-                      </a:r>
-                    </a:p>
-                  </a:txBody>
-                  <a:tcPr marL="63063" marR="63063" marT="31531" marB="31531" anchor="ctr">
-                    <a:lnL w="12700" cap="flat" cmpd="sng" algn="ctr">
-                      <a:solidFill>
-                        <a:schemeClr val="tx1"/>
-                      </a:solidFill>
-                      <a:prstDash val="solid"/>
-                      <a:round/>
-                      <a:headEnd type="none" w="med" len="med"/>
-                      <a:tailEnd type="none" w="med" len="med"/>
-                    </a:lnL>
-                    <a:lnR w="12700" cap="flat" cmpd="sng" algn="ctr">
-                      <a:solidFill>
-                        <a:schemeClr val="tx1"/>
-                      </a:solidFill>
-                      <a:prstDash val="solid"/>
-                      <a:round/>
-                      <a:headEnd type="none" w="med" len="med"/>
-                      <a:tailEnd type="none" w="med" len="med"/>
-                    </a:lnR>
-                    <a:lnT w="12700" cap="flat" cmpd="sng" algn="ctr">
-                      <a:solidFill>
-                        <a:schemeClr val="tx1"/>
-                      </a:solidFill>
-                      <a:prstDash val="solid"/>
-                      <a:round/>
-                      <a:headEnd type="none" w="med" len="med"/>
-                      <a:tailEnd type="none" w="med" len="med"/>
-                    </a:lnT>
-                    <a:lnB w="12700" cap="flat" cmpd="sng" algn="ctr">
-                      <a:solidFill>
-                        <a:schemeClr val="tx1"/>
-                      </a:solidFill>
-                      <a:prstDash val="solid"/>
-                      <a:round/>
-                      <a:headEnd type="none" w="med" len="med"/>
-                      <a:tailEnd type="none" w="med" len="med"/>
-                    </a:lnB>
-                    <a:solidFill>
-                      <a:schemeClr val="bg2"/>
-                    </a:solidFill>
-                  </a:tcPr>
-                </a:tc>
-                <a:tc>
-                  <a:txBody>
-                    <a:bodyPr/>
-                    <a:lstStyle/>
-                    <a:p>
-                      <a:r>
-                        <a:rPr lang="es-CO" sz="1400" b="1"/>
-                        <a:t>Descripción</a:t>
-                      </a:r>
-                    </a:p>
-                  </a:txBody>
-                  <a:tcPr marL="63063" marR="63063" marT="31531" marB="31531" anchor="ctr">
-                    <a:lnL w="12700" cap="flat" cmpd="sng" algn="ctr">
-                      <a:solidFill>
-                        <a:schemeClr val="tx1"/>
-                      </a:solidFill>
-                      <a:prstDash val="solid"/>
-                      <a:round/>
-                      <a:headEnd type="none" w="med" len="med"/>
-                      <a:tailEnd type="none" w="med" len="med"/>
-                    </a:lnL>
-                    <a:lnR w="12700" cap="flat" cmpd="sng" algn="ctr">
-                      <a:solidFill>
-                        <a:schemeClr val="tx1"/>
-                      </a:solidFill>
-                      <a:prstDash val="solid"/>
-                      <a:round/>
-                      <a:headEnd type="none" w="med" len="med"/>
-                      <a:tailEnd type="none" w="med" len="med"/>
-                    </a:lnR>
-                    <a:lnT w="12700" cap="flat" cmpd="sng" algn="ctr">
-                      <a:solidFill>
-                        <a:schemeClr val="tx1"/>
-                      </a:solidFill>
-                      <a:prstDash val="solid"/>
-                      <a:round/>
-                      <a:headEnd type="none" w="med" len="med"/>
-                      <a:tailEnd type="none" w="med" len="med"/>
-                    </a:lnT>
-                    <a:lnB w="12700" cap="flat" cmpd="sng" algn="ctr">
-                      <a:solidFill>
-                        <a:schemeClr val="tx1"/>
-                      </a:solidFill>
-                      <a:prstDash val="solid"/>
-                      <a:round/>
-                      <a:headEnd type="none" w="med" len="med"/>
-                      <a:tailEnd type="none" w="med" len="med"/>
-                    </a:lnB>
-                    <a:solidFill>
-                      <a:schemeClr val="bg2"/>
-                    </a:solidFill>
-                  </a:tcPr>
-                </a:tc>
-                <a:tc>
-                  <a:txBody>
-                    <a:bodyPr/>
-                    <a:lstStyle/>
-                    <a:p>
-                      <a:r>
-                        <a:rPr lang="es-CO" sz="1400" b="1"/>
-                        <a:t>Ejemplo</a:t>
-                      </a:r>
-                    </a:p>
-                  </a:txBody>
-                  <a:tcPr marL="63063" marR="63063" marT="31531" marB="31531" anchor="ctr">
-                    <a:lnL w="12700" cap="flat" cmpd="sng" algn="ctr">
-                      <a:solidFill>
-                        <a:schemeClr val="tx1"/>
-                      </a:solidFill>
-                      <a:prstDash val="solid"/>
-                      <a:round/>
-                      <a:headEnd type="none" w="med" len="med"/>
-                      <a:tailEnd type="none" w="med" len="med"/>
-                    </a:lnL>
-                    <a:lnR w="12700" cap="flat" cmpd="sng" algn="ctr">
-                      <a:solidFill>
-                        <a:schemeClr val="tx1"/>
-                      </a:solidFill>
-                      <a:prstDash val="solid"/>
-                      <a:round/>
-                      <a:headEnd type="none" w="med" len="med"/>
-                      <a:tailEnd type="none" w="med" len="med"/>
-                    </a:lnR>
-                    <a:lnT w="12700" cap="flat" cmpd="sng" algn="ctr">
-                      <a:solidFill>
-                        <a:schemeClr val="tx1"/>
-                      </a:solidFill>
-                      <a:prstDash val="solid"/>
-                      <a:round/>
-                      <a:headEnd type="none" w="med" len="med"/>
-                      <a:tailEnd type="none" w="med" len="med"/>
-                    </a:lnT>
-                    <a:lnB w="12700" cap="flat" cmpd="sng" algn="ctr">
-                      <a:solidFill>
-                        <a:schemeClr val="tx1"/>
-                      </a:solidFill>
-                      <a:prstDash val="solid"/>
-                      <a:round/>
-                      <a:headEnd type="none" w="med" len="med"/>
-                      <a:tailEnd type="none" w="med" len="med"/>
-                    </a:lnB>
-                    <a:solidFill>
-                      <a:schemeClr val="bg2"/>
-                    </a:solidFill>
-                  </a:tcPr>
-                </a:tc>
-                <a:tc>
-                  <a:txBody>
-                    <a:bodyPr/>
-                    <a:lstStyle/>
-                    <a:p>
-                      <a:r>
-                        <a:rPr lang="es-CO" sz="1400" b="1" dirty="0"/>
-                        <a:t>Posibles resultados</a:t>
-                      </a:r>
-                    </a:p>
-                  </a:txBody>
-                  <a:tcPr marL="63063" marR="63063" marT="31531" marB="31531" anchor="ctr">
-                    <a:lnL w="12700" cap="flat" cmpd="sng" algn="ctr">
-                      <a:solidFill>
-                        <a:schemeClr val="tx1"/>
-                      </a:solidFill>
-                      <a:prstDash val="solid"/>
-                      <a:round/>
-                      <a:headEnd type="none" w="med" len="med"/>
-                      <a:tailEnd type="none" w="med" len="med"/>
-                    </a:lnL>
-                    <a:lnR w="12700" cap="flat" cmpd="sng" algn="ctr">
-                      <a:solidFill>
-                        <a:schemeClr val="tx1"/>
-                      </a:solidFill>
-                      <a:prstDash val="solid"/>
-                      <a:round/>
-                      <a:headEnd type="none" w="med" len="med"/>
-                      <a:tailEnd type="none" w="med" len="med"/>
-                    </a:lnR>
-                    <a:lnT w="12700" cap="flat" cmpd="sng" algn="ctr">
-                      <a:solidFill>
-                        <a:schemeClr val="tx1"/>
-                      </a:solidFill>
-                      <a:prstDash val="solid"/>
-                      <a:round/>
-                      <a:headEnd type="none" w="med" len="med"/>
-                      <a:tailEnd type="none" w="med" len="med"/>
-                    </a:lnT>
-                    <a:lnB w="12700" cap="flat" cmpd="sng" algn="ctr">
-                      <a:solidFill>
-                        <a:schemeClr val="tx1"/>
-                      </a:solidFill>
-                      <a:prstDash val="solid"/>
-                      <a:round/>
-                      <a:headEnd type="none" w="med" len="med"/>
-                      <a:tailEnd type="none" w="med" len="med"/>
-                    </a:lnB>
-                    <a:solidFill>
-                      <a:schemeClr val="bg2"/>
-                    </a:solidFill>
-                  </a:tcPr>
-                </a:tc>
-                <a:extLst>
-                  <a:ext uri="{0D108BD9-81ED-4DB2-BD59-A6C34878D82A}">
-                    <a16:rowId xmlns:a16="http://schemas.microsoft.com/office/drawing/2014/main" val="2014776204"/>
-                  </a:ext>
-                </a:extLst>
-              </a:tr>
-              <a:tr h="452555">
-                <a:tc>
-                  <a:txBody>
-                    <a:bodyPr/>
-                    <a:lstStyle/>
-                    <a:p>
-                      <a:r>
-                        <a:rPr lang="es-CO" sz="1200" dirty="0" err="1">
-                          <a:latin typeface="Consolas" panose="020B0609020204030204" pitchFamily="49" charset="0"/>
-                        </a:rPr>
-                        <a:t>random.randint</a:t>
-                      </a:r>
-                      <a:r>
-                        <a:rPr lang="es-CO" sz="1200" dirty="0">
-                          <a:latin typeface="Consolas" panose="020B0609020204030204" pitchFamily="49" charset="0"/>
-                        </a:rPr>
-                        <a:t>(a, b)</a:t>
-                      </a:r>
-                    </a:p>
-                  </a:txBody>
-                  <a:tcPr marL="63063" marR="63063" marT="31531" marB="31531" anchor="ctr">
-                    <a:lnL w="12700" cap="flat" cmpd="sng" algn="ctr">
-                      <a:solidFill>
-                        <a:schemeClr val="tx1"/>
-                      </a:solidFill>
-                      <a:prstDash val="solid"/>
-                      <a:round/>
-                      <a:headEnd type="none" w="med" len="med"/>
-                      <a:tailEnd type="none" w="med" len="med"/>
-                    </a:lnL>
-                    <a:lnR w="12700" cap="flat" cmpd="sng" algn="ctr">
-                      <a:solidFill>
-                        <a:schemeClr val="tx1"/>
-                      </a:solidFill>
-                      <a:prstDash val="solid"/>
-                      <a:round/>
-                      <a:headEnd type="none" w="med" len="med"/>
-                      <a:tailEnd type="none" w="med" len="med"/>
-                    </a:lnR>
-                    <a:lnT w="12700" cap="flat" cmpd="sng" algn="ctr">
-                      <a:solidFill>
-                        <a:schemeClr val="tx1"/>
-                      </a:solidFill>
-                      <a:prstDash val="solid"/>
-                      <a:round/>
-                      <a:headEnd type="none" w="med" len="med"/>
-                      <a:tailEnd type="none" w="med" len="med"/>
-                    </a:lnT>
-                    <a:lnB w="12700" cap="flat" cmpd="sng" algn="ctr">
-                      <a:solidFill>
-                        <a:schemeClr val="tx1"/>
-                      </a:solidFill>
-                      <a:prstDash val="solid"/>
-                      <a:round/>
-                      <a:headEnd type="none" w="med" len="med"/>
-                      <a:tailEnd type="none" w="med" len="med"/>
-                    </a:lnB>
-                  </a:tcPr>
-                </a:tc>
-                <a:tc>
-                  <a:txBody>
-                    <a:bodyPr/>
-                    <a:lstStyle/>
-                    <a:p>
-                      <a:r>
-                        <a:rPr lang="es-MX" sz="1400"/>
-                        <a:t>Retorna un entero al azar entre a y b, </a:t>
-                      </a:r>
-                      <a:r>
-                        <a:rPr lang="es-MX" sz="1400" b="1"/>
-                        <a:t>ambos incluidos</a:t>
-                      </a:r>
-                      <a:endParaRPr lang="es-MX" sz="1400"/>
-                    </a:p>
-                  </a:txBody>
-                  <a:tcPr marL="63063" marR="63063" marT="31531" marB="31531" anchor="ctr">
-                    <a:lnL w="12700" cap="flat" cmpd="sng" algn="ctr">
-                      <a:solidFill>
-                        <a:schemeClr val="tx1"/>
-                      </a:solidFill>
-                      <a:prstDash val="solid"/>
-                      <a:round/>
-                      <a:headEnd type="none" w="med" len="med"/>
-                      <a:tailEnd type="none" w="med" len="med"/>
-                    </a:lnL>
-                    <a:lnR w="12700" cap="flat" cmpd="sng" algn="ctr">
-                      <a:solidFill>
-                        <a:schemeClr val="tx1"/>
-                      </a:solidFill>
-                      <a:prstDash val="solid"/>
-                      <a:round/>
-                      <a:headEnd type="none" w="med" len="med"/>
-                      <a:tailEnd type="none" w="med" len="med"/>
-                    </a:lnR>
-                    <a:lnT w="12700" cap="flat" cmpd="sng" algn="ctr">
-                      <a:solidFill>
-                        <a:schemeClr val="tx1"/>
-                      </a:solidFill>
-                      <a:prstDash val="solid"/>
-                      <a:round/>
-                      <a:headEnd type="none" w="med" len="med"/>
-                      <a:tailEnd type="none" w="med" len="med"/>
-                    </a:lnT>
-                    <a:lnB w="12700" cap="flat" cmpd="sng" algn="ctr">
-                      <a:solidFill>
-                        <a:schemeClr val="tx1"/>
-                      </a:solidFill>
-                      <a:prstDash val="solid"/>
-                      <a:round/>
-                      <a:headEnd type="none" w="med" len="med"/>
-                      <a:tailEnd type="none" w="med" len="med"/>
-                    </a:lnB>
-                  </a:tcPr>
-                </a:tc>
-                <a:tc>
-                  <a:txBody>
-                    <a:bodyPr/>
-                    <a:lstStyle/>
-                    <a:p>
-                      <a:r>
-                        <a:rPr lang="es-CO" sz="1200" dirty="0" err="1">
-                          <a:latin typeface="Consolas" panose="020B0609020204030204" pitchFamily="49" charset="0"/>
-                        </a:rPr>
-                        <a:t>random.randint</a:t>
-                      </a:r>
-                      <a:r>
-                        <a:rPr lang="es-CO" sz="1200" dirty="0">
-                          <a:latin typeface="Consolas" panose="020B0609020204030204" pitchFamily="49" charset="0"/>
-                        </a:rPr>
-                        <a:t>(1, 6)</a:t>
-                      </a:r>
-                    </a:p>
-                  </a:txBody>
-                  <a:tcPr marL="63063" marR="63063" marT="31531" marB="31531" anchor="ctr">
-                    <a:lnL w="12700" cap="flat" cmpd="sng" algn="ctr">
-                      <a:solidFill>
-                        <a:schemeClr val="tx1"/>
-                      </a:solidFill>
-                      <a:prstDash val="solid"/>
-                      <a:round/>
-                      <a:headEnd type="none" w="med" len="med"/>
-                      <a:tailEnd type="none" w="med" len="med"/>
-                    </a:lnL>
-                    <a:lnR w="12700" cap="flat" cmpd="sng" algn="ctr">
-                      <a:solidFill>
-                        <a:schemeClr val="tx1"/>
-                      </a:solidFill>
-                      <a:prstDash val="solid"/>
-                      <a:round/>
-                      <a:headEnd type="none" w="med" len="med"/>
-                      <a:tailEnd type="none" w="med" len="med"/>
-                    </a:lnR>
-                    <a:lnT w="12700" cap="flat" cmpd="sng" algn="ctr">
-                      <a:solidFill>
-                        <a:schemeClr val="tx1"/>
-                      </a:solidFill>
-                      <a:prstDash val="solid"/>
-                      <a:round/>
-                      <a:headEnd type="none" w="med" len="med"/>
-                      <a:tailEnd type="none" w="med" len="med"/>
-                    </a:lnT>
-                    <a:lnB w="12700" cap="flat" cmpd="sng" algn="ctr">
-                      <a:solidFill>
-                        <a:schemeClr val="tx1"/>
-                      </a:solidFill>
-                      <a:prstDash val="solid"/>
-                      <a:round/>
-                      <a:headEnd type="none" w="med" len="med"/>
-                      <a:tailEnd type="none" w="med" len="med"/>
-                    </a:lnB>
-                  </a:tcPr>
-                </a:tc>
-                <a:tc>
-                  <a:txBody>
-                    <a:bodyPr/>
-                    <a:lstStyle/>
-                    <a:p>
-                      <a:r>
-                        <a:rPr lang="pt-BR" sz="1400" dirty="0"/>
-                        <a:t>1, 2, 3, 4, 5 o 6</a:t>
-                      </a:r>
-                    </a:p>
-                  </a:txBody>
-                  <a:tcPr marL="63063" marR="63063" marT="31531" marB="31531" anchor="ctr">
-                    <a:lnL w="12700" cap="flat" cmpd="sng" algn="ctr">
-                      <a:solidFill>
-                        <a:schemeClr val="tx1"/>
-                      </a:solidFill>
-                      <a:prstDash val="solid"/>
-                      <a:round/>
-                      <a:headEnd type="none" w="med" len="med"/>
-                      <a:tailEnd type="none" w="med" len="med"/>
-                    </a:lnL>
-                    <a:lnR w="12700" cap="flat" cmpd="sng" algn="ctr">
-                      <a:solidFill>
-                        <a:schemeClr val="tx1"/>
-                      </a:solidFill>
-                      <a:prstDash val="solid"/>
-                      <a:round/>
-                      <a:headEnd type="none" w="med" len="med"/>
-                      <a:tailEnd type="none" w="med" len="med"/>
-                    </a:lnR>
-                    <a:lnT w="12700" cap="flat" cmpd="sng" algn="ctr">
-                      <a:solidFill>
-                        <a:schemeClr val="tx1"/>
-                      </a:solidFill>
-                      <a:prstDash val="solid"/>
-                      <a:round/>
-                      <a:headEnd type="none" w="med" len="med"/>
-                      <a:tailEnd type="none" w="med" len="med"/>
-                    </a:lnT>
-                    <a:lnB w="12700" cap="flat" cmpd="sng" algn="ctr">
-                      <a:solidFill>
-                        <a:schemeClr val="tx1"/>
-                      </a:solidFill>
-                      <a:prstDash val="solid"/>
-                      <a:round/>
-                      <a:headEnd type="none" w="med" len="med"/>
-                      <a:tailEnd type="none" w="med" len="med"/>
-                    </a:lnB>
-                  </a:tcPr>
-                </a:tc>
-                <a:extLst>
-                  <a:ext uri="{0D108BD9-81ED-4DB2-BD59-A6C34878D82A}">
-                    <a16:rowId xmlns:a16="http://schemas.microsoft.com/office/drawing/2014/main" val="3301056744"/>
-                  </a:ext>
-                </a:extLst>
-              </a:tr>
-              <a:tr h="649697">
-                <a:tc>
-                  <a:txBody>
-                    <a:bodyPr/>
-                    <a:lstStyle/>
-                    <a:p>
-                      <a:r>
-                        <a:rPr lang="es-CO" sz="1200" dirty="0" err="1">
-                          <a:latin typeface="Consolas" panose="020B0609020204030204" pitchFamily="49" charset="0"/>
-                        </a:rPr>
-                        <a:t>random.randrange</a:t>
-                      </a:r>
-                      <a:r>
-                        <a:rPr lang="es-CO" sz="1200" dirty="0">
-                          <a:latin typeface="Consolas" panose="020B0609020204030204" pitchFamily="49" charset="0"/>
-                        </a:rPr>
-                        <a:t>(a, b)</a:t>
-                      </a:r>
-                    </a:p>
-                  </a:txBody>
-                  <a:tcPr marL="63063" marR="63063" marT="31531" marB="31531" anchor="ctr">
-                    <a:lnL w="12700" cap="flat" cmpd="sng" algn="ctr">
-                      <a:solidFill>
-                        <a:schemeClr val="tx1"/>
-                      </a:solidFill>
-                      <a:prstDash val="solid"/>
-                      <a:round/>
-                      <a:headEnd type="none" w="med" len="med"/>
-                      <a:tailEnd type="none" w="med" len="med"/>
-                    </a:lnL>
-                    <a:lnR w="12700" cap="flat" cmpd="sng" algn="ctr">
-                      <a:solidFill>
-                        <a:schemeClr val="tx1"/>
-                      </a:solidFill>
-                      <a:prstDash val="solid"/>
-                      <a:round/>
-                      <a:headEnd type="none" w="med" len="med"/>
-                      <a:tailEnd type="none" w="med" len="med"/>
-                    </a:lnR>
-                    <a:lnT w="12700" cap="flat" cmpd="sng" algn="ctr">
-                      <a:solidFill>
-                        <a:schemeClr val="tx1"/>
-                      </a:solidFill>
-                      <a:prstDash val="solid"/>
-                      <a:round/>
-                      <a:headEnd type="none" w="med" len="med"/>
-                      <a:tailEnd type="none" w="med" len="med"/>
-                    </a:lnT>
-                    <a:lnB w="12700" cap="flat" cmpd="sng" algn="ctr">
-                      <a:solidFill>
-                        <a:schemeClr val="tx1"/>
-                      </a:solidFill>
-                      <a:prstDash val="solid"/>
-                      <a:round/>
-                      <a:headEnd type="none" w="med" len="med"/>
-                      <a:tailEnd type="none" w="med" len="med"/>
-                    </a:lnB>
-                  </a:tcPr>
-                </a:tc>
-                <a:tc>
-                  <a:txBody>
-                    <a:bodyPr/>
-                    <a:lstStyle/>
-                    <a:p>
-                      <a:r>
-                        <a:rPr lang="es-MX" sz="1400"/>
-                        <a:t>Retorna un entero al azar entre a y b, </a:t>
-                      </a:r>
-                      <a:r>
-                        <a:rPr lang="es-MX" sz="1400" b="1"/>
-                        <a:t>sin incluir b</a:t>
-                      </a:r>
-                      <a:r>
-                        <a:rPr lang="es-MX" sz="1400"/>
-                        <a:t> (igual que range)</a:t>
-                      </a:r>
-                    </a:p>
-                  </a:txBody>
-                  <a:tcPr marL="63063" marR="63063" marT="31531" marB="31531" anchor="ctr">
-                    <a:lnL w="12700" cap="flat" cmpd="sng" algn="ctr">
-                      <a:solidFill>
-                        <a:schemeClr val="tx1"/>
-                      </a:solidFill>
-                      <a:prstDash val="solid"/>
-                      <a:round/>
-                      <a:headEnd type="none" w="med" len="med"/>
-                      <a:tailEnd type="none" w="med" len="med"/>
-                    </a:lnL>
-                    <a:lnR w="12700" cap="flat" cmpd="sng" algn="ctr">
-                      <a:solidFill>
-                        <a:schemeClr val="tx1"/>
-                      </a:solidFill>
-                      <a:prstDash val="solid"/>
-                      <a:round/>
-                      <a:headEnd type="none" w="med" len="med"/>
-                      <a:tailEnd type="none" w="med" len="med"/>
-                    </a:lnR>
-                    <a:lnT w="12700" cap="flat" cmpd="sng" algn="ctr">
-                      <a:solidFill>
-                        <a:schemeClr val="tx1"/>
-                      </a:solidFill>
-                      <a:prstDash val="solid"/>
-                      <a:round/>
-                      <a:headEnd type="none" w="med" len="med"/>
-                      <a:tailEnd type="none" w="med" len="med"/>
-                    </a:lnT>
-                    <a:lnB w="12700" cap="flat" cmpd="sng" algn="ctr">
-                      <a:solidFill>
-                        <a:schemeClr val="tx1"/>
-                      </a:solidFill>
-                      <a:prstDash val="solid"/>
-                      <a:round/>
-                      <a:headEnd type="none" w="med" len="med"/>
-                      <a:tailEnd type="none" w="med" len="med"/>
-                    </a:lnB>
-                  </a:tcPr>
-                </a:tc>
-                <a:tc>
-                  <a:txBody>
-                    <a:bodyPr/>
-                    <a:lstStyle/>
-                    <a:p>
-                      <a:r>
-                        <a:rPr lang="es-CO" sz="1200" dirty="0" err="1">
-                          <a:latin typeface="Consolas" panose="020B0609020204030204" pitchFamily="49" charset="0"/>
-                        </a:rPr>
-                        <a:t>random.randrange</a:t>
-                      </a:r>
-                      <a:r>
-                        <a:rPr lang="es-CO" sz="1200" dirty="0">
-                          <a:latin typeface="Consolas" panose="020B0609020204030204" pitchFamily="49" charset="0"/>
-                        </a:rPr>
-                        <a:t>(1, 6)</a:t>
-                      </a:r>
-                    </a:p>
-                  </a:txBody>
-                  <a:tcPr marL="63063" marR="63063" marT="31531" marB="31531" anchor="ctr">
-                    <a:lnL w="12700" cap="flat" cmpd="sng" algn="ctr">
-                      <a:solidFill>
-                        <a:schemeClr val="tx1"/>
-                      </a:solidFill>
-                      <a:prstDash val="solid"/>
-                      <a:round/>
-                      <a:headEnd type="none" w="med" len="med"/>
-                      <a:tailEnd type="none" w="med" len="med"/>
-                    </a:lnL>
-                    <a:lnR w="12700" cap="flat" cmpd="sng" algn="ctr">
-                      <a:solidFill>
-                        <a:schemeClr val="tx1"/>
-                      </a:solidFill>
-                      <a:prstDash val="solid"/>
-                      <a:round/>
-                      <a:headEnd type="none" w="med" len="med"/>
-                      <a:tailEnd type="none" w="med" len="med"/>
-                    </a:lnR>
-                    <a:lnT w="12700" cap="flat" cmpd="sng" algn="ctr">
-                      <a:solidFill>
-                        <a:schemeClr val="tx1"/>
-                      </a:solidFill>
-                      <a:prstDash val="solid"/>
-                      <a:round/>
-                      <a:headEnd type="none" w="med" len="med"/>
-                      <a:tailEnd type="none" w="med" len="med"/>
-                    </a:lnT>
-                    <a:lnB w="12700" cap="flat" cmpd="sng" algn="ctr">
-                      <a:solidFill>
-                        <a:schemeClr val="tx1"/>
-                      </a:solidFill>
-                      <a:prstDash val="solid"/>
-                      <a:round/>
-                      <a:headEnd type="none" w="med" len="med"/>
-                      <a:tailEnd type="none" w="med" len="med"/>
-                    </a:lnB>
-                  </a:tcPr>
-                </a:tc>
-                <a:tc>
-                  <a:txBody>
-                    <a:bodyPr/>
-                    <a:lstStyle/>
-                    <a:p>
-                      <a:r>
-                        <a:rPr lang="pt-BR" sz="1400"/>
-                        <a:t>1, 2, 3, 4 o 5</a:t>
-                      </a:r>
-                    </a:p>
-                  </a:txBody>
-                  <a:tcPr marL="63063" marR="63063" marT="31531" marB="31531" anchor="ctr">
-                    <a:lnL w="12700" cap="flat" cmpd="sng" algn="ctr">
-                      <a:solidFill>
-                        <a:schemeClr val="tx1"/>
-                      </a:solidFill>
-                      <a:prstDash val="solid"/>
-                      <a:round/>
-                      <a:headEnd type="none" w="med" len="med"/>
-                      <a:tailEnd type="none" w="med" len="med"/>
-                    </a:lnL>
-                    <a:lnR w="12700" cap="flat" cmpd="sng" algn="ctr">
-                      <a:solidFill>
-                        <a:schemeClr val="tx1"/>
-                      </a:solidFill>
-                      <a:prstDash val="solid"/>
-                      <a:round/>
-                      <a:headEnd type="none" w="med" len="med"/>
-                      <a:tailEnd type="none" w="med" len="med"/>
-                    </a:lnR>
-                    <a:lnT w="12700" cap="flat" cmpd="sng" algn="ctr">
-                      <a:solidFill>
-                        <a:schemeClr val="tx1"/>
-                      </a:solidFill>
-                      <a:prstDash val="solid"/>
-                      <a:round/>
-                      <a:headEnd type="none" w="med" len="med"/>
-                      <a:tailEnd type="none" w="med" len="med"/>
-                    </a:lnT>
-                    <a:lnB w="12700" cap="flat" cmpd="sng" algn="ctr">
-                      <a:solidFill>
-                        <a:schemeClr val="tx1"/>
-                      </a:solidFill>
-                      <a:prstDash val="solid"/>
-                      <a:round/>
-                      <a:headEnd type="none" w="med" len="med"/>
-                      <a:tailEnd type="none" w="med" len="med"/>
-                    </a:lnB>
-                  </a:tcPr>
-                </a:tc>
-                <a:extLst>
-                  <a:ext uri="{0D108BD9-81ED-4DB2-BD59-A6C34878D82A}">
-                    <a16:rowId xmlns:a16="http://schemas.microsoft.com/office/drawing/2014/main" val="2748652102"/>
-                  </a:ext>
-                </a:extLst>
-              </a:tr>
-              <a:tr h="452555">
-                <a:tc>
-                  <a:txBody>
-                    <a:bodyPr/>
-                    <a:lstStyle/>
-                    <a:p>
-                      <a:r>
-                        <a:rPr lang="es-CO" sz="1200" dirty="0" err="1">
-                          <a:latin typeface="Consolas" panose="020B0609020204030204" pitchFamily="49" charset="0"/>
-                        </a:rPr>
-                        <a:t>random.random</a:t>
-                      </a:r>
-                      <a:r>
-                        <a:rPr lang="es-CO" sz="1200" dirty="0">
-                          <a:latin typeface="Consolas" panose="020B0609020204030204" pitchFamily="49" charset="0"/>
-                        </a:rPr>
-                        <a:t>()</a:t>
-                      </a:r>
-                    </a:p>
-                  </a:txBody>
-                  <a:tcPr marL="63063" marR="63063" marT="31531" marB="31531" anchor="ctr">
-                    <a:lnL w="12700" cap="flat" cmpd="sng" algn="ctr">
-                      <a:solidFill>
-                        <a:schemeClr val="tx1"/>
-                      </a:solidFill>
-                      <a:prstDash val="solid"/>
-                      <a:round/>
-                      <a:headEnd type="none" w="med" len="med"/>
-                      <a:tailEnd type="none" w="med" len="med"/>
-                    </a:lnL>
-                    <a:lnR w="12700" cap="flat" cmpd="sng" algn="ctr">
-                      <a:solidFill>
-                        <a:schemeClr val="tx1"/>
-                      </a:solidFill>
-                      <a:prstDash val="solid"/>
-                      <a:round/>
-                      <a:headEnd type="none" w="med" len="med"/>
-                      <a:tailEnd type="none" w="med" len="med"/>
-                    </a:lnR>
-                    <a:lnT w="12700" cap="flat" cmpd="sng" algn="ctr">
-                      <a:solidFill>
-                        <a:schemeClr val="tx1"/>
-                      </a:solidFill>
-                      <a:prstDash val="solid"/>
-                      <a:round/>
-                      <a:headEnd type="none" w="med" len="med"/>
-                      <a:tailEnd type="none" w="med" len="med"/>
-                    </a:lnT>
-                    <a:lnB w="12700" cap="flat" cmpd="sng" algn="ctr">
-                      <a:solidFill>
-                        <a:schemeClr val="tx1"/>
-                      </a:solidFill>
-                      <a:prstDash val="solid"/>
-                      <a:round/>
-                      <a:headEnd type="none" w="med" len="med"/>
-                      <a:tailEnd type="none" w="med" len="med"/>
-                    </a:lnB>
-                  </a:tcPr>
-                </a:tc>
-                <a:tc>
-                  <a:txBody>
-                    <a:bodyPr/>
-                    <a:lstStyle/>
-                    <a:p>
-                      <a:r>
-                        <a:rPr lang="es-MX" sz="1400"/>
-                        <a:t>Retorna un decimal al azar entre 0 (incluido) y 1 (excluido)</a:t>
-                      </a:r>
-                    </a:p>
-                  </a:txBody>
-                  <a:tcPr marL="63063" marR="63063" marT="31531" marB="31531" anchor="ctr">
-                    <a:lnL w="12700" cap="flat" cmpd="sng" algn="ctr">
-                      <a:solidFill>
-                        <a:schemeClr val="tx1"/>
-                      </a:solidFill>
-                      <a:prstDash val="solid"/>
-                      <a:round/>
-                      <a:headEnd type="none" w="med" len="med"/>
-                      <a:tailEnd type="none" w="med" len="med"/>
-                    </a:lnL>
-                    <a:lnR w="12700" cap="flat" cmpd="sng" algn="ctr">
-                      <a:solidFill>
-                        <a:schemeClr val="tx1"/>
-                      </a:solidFill>
-                      <a:prstDash val="solid"/>
-                      <a:round/>
-                      <a:headEnd type="none" w="med" len="med"/>
-                      <a:tailEnd type="none" w="med" len="med"/>
-                    </a:lnR>
-                    <a:lnT w="12700" cap="flat" cmpd="sng" algn="ctr">
-                      <a:solidFill>
-                        <a:schemeClr val="tx1"/>
-                      </a:solidFill>
-                      <a:prstDash val="solid"/>
-                      <a:round/>
-                      <a:headEnd type="none" w="med" len="med"/>
-                      <a:tailEnd type="none" w="med" len="med"/>
-                    </a:lnT>
-                    <a:lnB w="12700" cap="flat" cmpd="sng" algn="ctr">
-                      <a:solidFill>
-                        <a:schemeClr val="tx1"/>
-                      </a:solidFill>
-                      <a:prstDash val="solid"/>
-                      <a:round/>
-                      <a:headEnd type="none" w="med" len="med"/>
-                      <a:tailEnd type="none" w="med" len="med"/>
-                    </a:lnB>
-                  </a:tcPr>
-                </a:tc>
-                <a:tc>
-                  <a:txBody>
-                    <a:bodyPr/>
-                    <a:lstStyle/>
-                    <a:p>
-                      <a:r>
-                        <a:rPr lang="es-CO" sz="1200" dirty="0" err="1">
-                          <a:latin typeface="Consolas" panose="020B0609020204030204" pitchFamily="49" charset="0"/>
-                        </a:rPr>
-                        <a:t>random.random</a:t>
-                      </a:r>
-                      <a:r>
-                        <a:rPr lang="es-CO" sz="1200" dirty="0">
-                          <a:latin typeface="Consolas" panose="020B0609020204030204" pitchFamily="49" charset="0"/>
-                        </a:rPr>
-                        <a:t>()</a:t>
-                      </a:r>
-                    </a:p>
-                  </a:txBody>
-                  <a:tcPr marL="63063" marR="63063" marT="31531" marB="31531" anchor="ctr">
-                    <a:lnL w="12700" cap="flat" cmpd="sng" algn="ctr">
-                      <a:solidFill>
-                        <a:schemeClr val="tx1"/>
-                      </a:solidFill>
-                      <a:prstDash val="solid"/>
-                      <a:round/>
-                      <a:headEnd type="none" w="med" len="med"/>
-                      <a:tailEnd type="none" w="med" len="med"/>
-                    </a:lnL>
-                    <a:lnR w="12700" cap="flat" cmpd="sng" algn="ctr">
-                      <a:solidFill>
-                        <a:schemeClr val="tx1"/>
-                      </a:solidFill>
-                      <a:prstDash val="solid"/>
-                      <a:round/>
-                      <a:headEnd type="none" w="med" len="med"/>
-                      <a:tailEnd type="none" w="med" len="med"/>
-                    </a:lnR>
-                    <a:lnT w="12700" cap="flat" cmpd="sng" algn="ctr">
-                      <a:solidFill>
-                        <a:schemeClr val="tx1"/>
-                      </a:solidFill>
-                      <a:prstDash val="solid"/>
-                      <a:round/>
-                      <a:headEnd type="none" w="med" len="med"/>
-                      <a:tailEnd type="none" w="med" len="med"/>
-                    </a:lnT>
-                    <a:lnB w="12700" cap="flat" cmpd="sng" algn="ctr">
-                      <a:solidFill>
-                        <a:schemeClr val="tx1"/>
-                      </a:solidFill>
-                      <a:prstDash val="solid"/>
-                      <a:round/>
-                      <a:headEnd type="none" w="med" len="med"/>
-                      <a:tailEnd type="none" w="med" len="med"/>
-                    </a:lnB>
-                  </a:tcPr>
-                </a:tc>
-                <a:tc>
-                  <a:txBody>
-                    <a:bodyPr/>
-                    <a:lstStyle/>
-                    <a:p>
-                      <a:r>
-                        <a:rPr lang="es-CO" sz="1400"/>
-                        <a:t>Por ejemplo, 0.134…</a:t>
-                      </a:r>
-                    </a:p>
-                  </a:txBody>
-                  <a:tcPr marL="63063" marR="63063" marT="31531" marB="31531" anchor="ctr">
-                    <a:lnL w="12700" cap="flat" cmpd="sng" algn="ctr">
-                      <a:solidFill>
-                        <a:schemeClr val="tx1"/>
-                      </a:solidFill>
-                      <a:prstDash val="solid"/>
-                      <a:round/>
-                      <a:headEnd type="none" w="med" len="med"/>
-                      <a:tailEnd type="none" w="med" len="med"/>
-                    </a:lnL>
-                    <a:lnR w="12700" cap="flat" cmpd="sng" algn="ctr">
-                      <a:solidFill>
-                        <a:schemeClr val="tx1"/>
-                      </a:solidFill>
-                      <a:prstDash val="solid"/>
-                      <a:round/>
-                      <a:headEnd type="none" w="med" len="med"/>
-                      <a:tailEnd type="none" w="med" len="med"/>
-                    </a:lnR>
-                    <a:lnT w="12700" cap="flat" cmpd="sng" algn="ctr">
-                      <a:solidFill>
-                        <a:schemeClr val="tx1"/>
-                      </a:solidFill>
-                      <a:prstDash val="solid"/>
-                      <a:round/>
-                      <a:headEnd type="none" w="med" len="med"/>
-                      <a:tailEnd type="none" w="med" len="med"/>
-                    </a:lnT>
-                    <a:lnB w="12700" cap="flat" cmpd="sng" algn="ctr">
-                      <a:solidFill>
-                        <a:schemeClr val="tx1"/>
-                      </a:solidFill>
-                      <a:prstDash val="solid"/>
-                      <a:round/>
-                      <a:headEnd type="none" w="med" len="med"/>
-                      <a:tailEnd type="none" w="med" len="med"/>
-                    </a:lnB>
-                  </a:tcPr>
-                </a:tc>
-                <a:extLst>
-                  <a:ext uri="{0D108BD9-81ED-4DB2-BD59-A6C34878D82A}">
-                    <a16:rowId xmlns:a16="http://schemas.microsoft.com/office/drawing/2014/main" val="1790232926"/>
-                  </a:ext>
-                </a:extLst>
-              </a:tr>
-              <a:tr h="452555">
-                <a:tc>
-                  <a:txBody>
-                    <a:bodyPr/>
-                    <a:lstStyle/>
-                    <a:p>
-                      <a:r>
-                        <a:rPr lang="es-CO" sz="1200" dirty="0" err="1">
-                          <a:latin typeface="Consolas" panose="020B0609020204030204" pitchFamily="49" charset="0"/>
-                        </a:rPr>
-                        <a:t>random.uniform</a:t>
-                      </a:r>
-                      <a:r>
-                        <a:rPr lang="es-CO" sz="1200" dirty="0">
-                          <a:latin typeface="Consolas" panose="020B0609020204030204" pitchFamily="49" charset="0"/>
-                        </a:rPr>
-                        <a:t>(a, b)</a:t>
-                      </a:r>
-                    </a:p>
-                  </a:txBody>
-                  <a:tcPr marL="63063" marR="63063" marT="31531" marB="31531" anchor="ctr">
-                    <a:lnL w="12700" cap="flat" cmpd="sng" algn="ctr">
-                      <a:solidFill>
-                        <a:schemeClr val="tx1"/>
-                      </a:solidFill>
-                      <a:prstDash val="solid"/>
-                      <a:round/>
-                      <a:headEnd type="none" w="med" len="med"/>
-                      <a:tailEnd type="none" w="med" len="med"/>
-                    </a:lnL>
-                    <a:lnR w="12700" cap="flat" cmpd="sng" algn="ctr">
-                      <a:solidFill>
-                        <a:schemeClr val="tx1"/>
-                      </a:solidFill>
-                      <a:prstDash val="solid"/>
-                      <a:round/>
-                      <a:headEnd type="none" w="med" len="med"/>
-                      <a:tailEnd type="none" w="med" len="med"/>
-                    </a:lnR>
-                    <a:lnT w="12700" cap="flat" cmpd="sng" algn="ctr">
-                      <a:solidFill>
-                        <a:schemeClr val="tx1"/>
-                      </a:solidFill>
-                      <a:prstDash val="solid"/>
-                      <a:round/>
-                      <a:headEnd type="none" w="med" len="med"/>
-                      <a:tailEnd type="none" w="med" len="med"/>
-                    </a:lnT>
-                    <a:lnB w="12700" cap="flat" cmpd="sng" algn="ctr">
-                      <a:solidFill>
-                        <a:schemeClr val="tx1"/>
-                      </a:solidFill>
-                      <a:prstDash val="solid"/>
-                      <a:round/>
-                      <a:headEnd type="none" w="med" len="med"/>
-                      <a:tailEnd type="none" w="med" len="med"/>
-                    </a:lnB>
-                  </a:tcPr>
-                </a:tc>
-                <a:tc>
-                  <a:txBody>
-                    <a:bodyPr/>
-                    <a:lstStyle/>
-                    <a:p>
-                      <a:r>
-                        <a:rPr lang="es-MX" sz="1400"/>
-                        <a:t>Retorna un decimal al azar entre a y b</a:t>
-                      </a:r>
-                    </a:p>
-                  </a:txBody>
-                  <a:tcPr marL="63063" marR="63063" marT="31531" marB="31531" anchor="ctr">
-                    <a:lnL w="12700" cap="flat" cmpd="sng" algn="ctr">
-                      <a:solidFill>
-                        <a:schemeClr val="tx1"/>
-                      </a:solidFill>
-                      <a:prstDash val="solid"/>
-                      <a:round/>
-                      <a:headEnd type="none" w="med" len="med"/>
-                      <a:tailEnd type="none" w="med" len="med"/>
-                    </a:lnL>
-                    <a:lnR w="12700" cap="flat" cmpd="sng" algn="ctr">
-                      <a:solidFill>
-                        <a:schemeClr val="tx1"/>
-                      </a:solidFill>
-                      <a:prstDash val="solid"/>
-                      <a:round/>
-                      <a:headEnd type="none" w="med" len="med"/>
-                      <a:tailEnd type="none" w="med" len="med"/>
-                    </a:lnR>
-                    <a:lnT w="12700" cap="flat" cmpd="sng" algn="ctr">
-                      <a:solidFill>
-                        <a:schemeClr val="tx1"/>
-                      </a:solidFill>
-                      <a:prstDash val="solid"/>
-                      <a:round/>
-                      <a:headEnd type="none" w="med" len="med"/>
-                      <a:tailEnd type="none" w="med" len="med"/>
-                    </a:lnT>
-                    <a:lnB w="12700" cap="flat" cmpd="sng" algn="ctr">
-                      <a:solidFill>
-                        <a:schemeClr val="tx1"/>
-                      </a:solidFill>
-                      <a:prstDash val="solid"/>
-                      <a:round/>
-                      <a:headEnd type="none" w="med" len="med"/>
-                      <a:tailEnd type="none" w="med" len="med"/>
-                    </a:lnB>
-                  </a:tcPr>
-                </a:tc>
-                <a:tc>
-                  <a:txBody>
-                    <a:bodyPr/>
-                    <a:lstStyle/>
-                    <a:p>
-                      <a:r>
-                        <a:rPr lang="es-CO" sz="1200" dirty="0" err="1">
-                          <a:latin typeface="Consolas" panose="020B0609020204030204" pitchFamily="49" charset="0"/>
-                        </a:rPr>
-                        <a:t>random.uniform</a:t>
-                      </a:r>
-                      <a:r>
-                        <a:rPr lang="es-CO" sz="1200" dirty="0">
-                          <a:latin typeface="Consolas" panose="020B0609020204030204" pitchFamily="49" charset="0"/>
-                        </a:rPr>
-                        <a:t>(1.0, 5.0)</a:t>
-                      </a:r>
-                    </a:p>
-                  </a:txBody>
-                  <a:tcPr marL="63063" marR="63063" marT="31531" marB="31531" anchor="ctr">
-                    <a:lnL w="12700" cap="flat" cmpd="sng" algn="ctr">
-                      <a:solidFill>
-                        <a:schemeClr val="tx1"/>
-                      </a:solidFill>
-                      <a:prstDash val="solid"/>
-                      <a:round/>
-                      <a:headEnd type="none" w="med" len="med"/>
-                      <a:tailEnd type="none" w="med" len="med"/>
-                    </a:lnL>
-                    <a:lnR w="12700" cap="flat" cmpd="sng" algn="ctr">
-                      <a:solidFill>
-                        <a:schemeClr val="tx1"/>
-                      </a:solidFill>
-                      <a:prstDash val="solid"/>
-                      <a:round/>
-                      <a:headEnd type="none" w="med" len="med"/>
-                      <a:tailEnd type="none" w="med" len="med"/>
-                    </a:lnR>
-                    <a:lnT w="12700" cap="flat" cmpd="sng" algn="ctr">
-                      <a:solidFill>
-                        <a:schemeClr val="tx1"/>
-                      </a:solidFill>
-                      <a:prstDash val="solid"/>
-                      <a:round/>
-                      <a:headEnd type="none" w="med" len="med"/>
-                      <a:tailEnd type="none" w="med" len="med"/>
-                    </a:lnT>
-                    <a:lnB w="12700" cap="flat" cmpd="sng" algn="ctr">
-                      <a:solidFill>
-                        <a:schemeClr val="tx1"/>
-                      </a:solidFill>
-                      <a:prstDash val="solid"/>
-                      <a:round/>
-                      <a:headEnd type="none" w="med" len="med"/>
-                      <a:tailEnd type="none" w="med" len="med"/>
-                    </a:lnB>
-                  </a:tcPr>
-                </a:tc>
-                <a:tc>
-                  <a:txBody>
-                    <a:bodyPr/>
-                    <a:lstStyle/>
-                    <a:p>
-                      <a:r>
-                        <a:rPr lang="es-CO" sz="1400" dirty="0"/>
-                        <a:t>Por ejemplo, 1.537…</a:t>
-                      </a:r>
-                    </a:p>
-                  </a:txBody>
-                  <a:tcPr marL="63063" marR="63063" marT="31531" marB="31531" anchor="ctr">
-                    <a:lnL w="12700" cap="flat" cmpd="sng" algn="ctr">
-                      <a:solidFill>
-                        <a:schemeClr val="tx1"/>
-                      </a:solidFill>
-                      <a:prstDash val="solid"/>
-                      <a:round/>
-                      <a:headEnd type="none" w="med" len="med"/>
-                      <a:tailEnd type="none" w="med" len="med"/>
-                    </a:lnL>
-                    <a:lnR w="12700" cap="flat" cmpd="sng" algn="ctr">
-                      <a:solidFill>
-                        <a:schemeClr val="tx1"/>
-                      </a:solidFill>
-                      <a:prstDash val="solid"/>
-                      <a:round/>
-                      <a:headEnd type="none" w="med" len="med"/>
-                      <a:tailEnd type="none" w="med" len="med"/>
-                    </a:lnR>
-                    <a:lnT w="12700" cap="flat" cmpd="sng" algn="ctr">
-                      <a:solidFill>
-                        <a:schemeClr val="tx1"/>
-                      </a:solidFill>
-                      <a:prstDash val="solid"/>
-                      <a:round/>
-                      <a:headEnd type="none" w="med" len="med"/>
-                      <a:tailEnd type="none" w="med" len="med"/>
-                    </a:lnT>
-                    <a:lnB w="12700" cap="flat" cmpd="sng" algn="ctr">
-                      <a:solidFill>
-                        <a:schemeClr val="tx1"/>
-                      </a:solidFill>
-                      <a:prstDash val="solid"/>
-                      <a:round/>
-                      <a:headEnd type="none" w="med" len="med"/>
-                      <a:tailEnd type="none" w="med" len="med"/>
-                    </a:lnB>
-                  </a:tcPr>
-                </a:tc>
-                <a:extLst>
-                  <a:ext uri="{0D108BD9-81ED-4DB2-BD59-A6C34878D82A}">
-                    <a16:rowId xmlns:a16="http://schemas.microsoft.com/office/drawing/2014/main" val="2006825680"/>
-                  </a:ext>
-                </a:extLst>
-              </a:tr>
-              <a:tr h="649697">
-                <a:tc>
-                  <a:txBody>
-                    <a:bodyPr/>
-                    <a:lstStyle/>
-                    <a:p>
-                      <a:r>
-                        <a:rPr lang="es-CO" sz="1200" dirty="0" err="1">
-                          <a:latin typeface="Consolas" panose="020B0609020204030204" pitchFamily="49" charset="0"/>
-                        </a:rPr>
-                        <a:t>random.seed</a:t>
-                      </a:r>
-                      <a:r>
-                        <a:rPr lang="es-CO" sz="1200" dirty="0">
-                          <a:latin typeface="Consolas" panose="020B0609020204030204" pitchFamily="49" charset="0"/>
-                        </a:rPr>
-                        <a:t>(n)</a:t>
-                      </a:r>
-                    </a:p>
-                  </a:txBody>
-                  <a:tcPr marL="63063" marR="63063" marT="31531" marB="31531" anchor="ctr">
-                    <a:lnL w="12700" cap="flat" cmpd="sng" algn="ctr">
-                      <a:solidFill>
-                        <a:schemeClr val="tx1"/>
-                      </a:solidFill>
-                      <a:prstDash val="solid"/>
-                      <a:round/>
-                      <a:headEnd type="none" w="med" len="med"/>
-                      <a:tailEnd type="none" w="med" len="med"/>
-                    </a:lnL>
-                    <a:lnR w="12700" cap="flat" cmpd="sng" algn="ctr">
-                      <a:solidFill>
-                        <a:schemeClr val="tx1"/>
-                      </a:solidFill>
-                      <a:prstDash val="solid"/>
-                      <a:round/>
-                      <a:headEnd type="none" w="med" len="med"/>
-                      <a:tailEnd type="none" w="med" len="med"/>
-                    </a:lnR>
-                    <a:lnT w="12700" cap="flat" cmpd="sng" algn="ctr">
-                      <a:solidFill>
-                        <a:schemeClr val="tx1"/>
-                      </a:solidFill>
-                      <a:prstDash val="solid"/>
-                      <a:round/>
-                      <a:headEnd type="none" w="med" len="med"/>
-                      <a:tailEnd type="none" w="med" len="med"/>
-                    </a:lnT>
-                    <a:lnB w="12700" cap="flat" cmpd="sng" algn="ctr">
-                      <a:solidFill>
-                        <a:schemeClr val="tx1"/>
-                      </a:solidFill>
-                      <a:prstDash val="solid"/>
-                      <a:round/>
-                      <a:headEnd type="none" w="med" len="med"/>
-                      <a:tailEnd type="none" w="med" len="med"/>
-                    </a:lnB>
-                  </a:tcPr>
-                </a:tc>
-                <a:tc>
-                  <a:txBody>
-                    <a:bodyPr/>
-                    <a:lstStyle/>
-                    <a:p>
-                      <a:r>
-                        <a:rPr lang="es-MX" sz="1400" dirty="0"/>
-                        <a:t>Fija el punto de partida del generador; </a:t>
-                      </a:r>
-                      <a:r>
-                        <a:rPr lang="es-MX" sz="1400" b="1" dirty="0"/>
-                        <a:t>produce siempre la misma secuencia</a:t>
-                      </a:r>
-                      <a:endParaRPr lang="es-MX" sz="1400" dirty="0"/>
-                    </a:p>
-                  </a:txBody>
-                  <a:tcPr marL="63063" marR="63063" marT="31531" marB="31531" anchor="ctr">
-                    <a:lnL w="12700" cap="flat" cmpd="sng" algn="ctr">
-                      <a:solidFill>
-                        <a:schemeClr val="tx1"/>
-                      </a:solidFill>
-                      <a:prstDash val="solid"/>
-                      <a:round/>
-                      <a:headEnd type="none" w="med" len="med"/>
-                      <a:tailEnd type="none" w="med" len="med"/>
-                    </a:lnL>
-                    <a:lnR w="12700" cap="flat" cmpd="sng" algn="ctr">
-                      <a:solidFill>
-                        <a:schemeClr val="tx1"/>
-                      </a:solidFill>
-                      <a:prstDash val="solid"/>
-                      <a:round/>
-                      <a:headEnd type="none" w="med" len="med"/>
-                      <a:tailEnd type="none" w="med" len="med"/>
-                    </a:lnR>
-                    <a:lnT w="12700" cap="flat" cmpd="sng" algn="ctr">
-                      <a:solidFill>
-                        <a:schemeClr val="tx1"/>
-                      </a:solidFill>
-                      <a:prstDash val="solid"/>
-                      <a:round/>
-                      <a:headEnd type="none" w="med" len="med"/>
-                      <a:tailEnd type="none" w="med" len="med"/>
-                    </a:lnT>
-                    <a:lnB w="12700" cap="flat" cmpd="sng" algn="ctr">
-                      <a:solidFill>
-                        <a:schemeClr val="tx1"/>
-                      </a:solidFill>
-                      <a:prstDash val="solid"/>
-                      <a:round/>
-                      <a:headEnd type="none" w="med" len="med"/>
-                      <a:tailEnd type="none" w="med" len="med"/>
-                    </a:lnB>
-                  </a:tcPr>
-                </a:tc>
-                <a:tc>
-                  <a:txBody>
-                    <a:bodyPr/>
-                    <a:lstStyle/>
-                    <a:p>
-                      <a:r>
-                        <a:rPr lang="es-CO" sz="1200" dirty="0" err="1">
-                          <a:latin typeface="Consolas" panose="020B0609020204030204" pitchFamily="49" charset="0"/>
-                        </a:rPr>
-                        <a:t>random.seed</a:t>
-                      </a:r>
-                      <a:r>
-                        <a:rPr lang="es-CO" sz="1200" dirty="0">
-                          <a:latin typeface="Consolas" panose="020B0609020204030204" pitchFamily="49" charset="0"/>
-                        </a:rPr>
-                        <a:t>(1)</a:t>
-                      </a:r>
-                    </a:p>
-                  </a:txBody>
-                  <a:tcPr marL="63063" marR="63063" marT="31531" marB="31531" anchor="ctr">
-                    <a:lnL w="12700" cap="flat" cmpd="sng" algn="ctr">
-                      <a:solidFill>
-                        <a:schemeClr val="tx1"/>
-                      </a:solidFill>
-                      <a:prstDash val="solid"/>
-                      <a:round/>
-                      <a:headEnd type="none" w="med" len="med"/>
-                      <a:tailEnd type="none" w="med" len="med"/>
-                    </a:lnL>
-                    <a:lnR w="12700" cap="flat" cmpd="sng" algn="ctr">
-                      <a:solidFill>
-                        <a:schemeClr val="tx1"/>
-                      </a:solidFill>
-                      <a:prstDash val="solid"/>
-                      <a:round/>
-                      <a:headEnd type="none" w="med" len="med"/>
-                      <a:tailEnd type="none" w="med" len="med"/>
-                    </a:lnR>
-                    <a:lnT w="12700" cap="flat" cmpd="sng" algn="ctr">
-                      <a:solidFill>
-                        <a:schemeClr val="tx1"/>
-                      </a:solidFill>
-                      <a:prstDash val="solid"/>
-                      <a:round/>
-                      <a:headEnd type="none" w="med" len="med"/>
-                      <a:tailEnd type="none" w="med" len="med"/>
-                    </a:lnT>
-                    <a:lnB w="12700" cap="flat" cmpd="sng" algn="ctr">
-                      <a:solidFill>
-                        <a:schemeClr val="tx1"/>
-                      </a:solidFill>
-                      <a:prstDash val="solid"/>
-                      <a:round/>
-                      <a:headEnd type="none" w="med" len="med"/>
-                      <a:tailEnd type="none" w="med" len="med"/>
-                    </a:lnB>
-                  </a:tcPr>
-                </a:tc>
-                <a:tc>
-                  <a:txBody>
-                    <a:bodyPr/>
-                    <a:lstStyle/>
-                    <a:p>
-                      <a:r>
-                        <a:rPr lang="es-CO" sz="1400" dirty="0"/>
-                        <a:t>Ver ejemplo (</a:t>
-                      </a:r>
-                      <a:r>
-                        <a:rPr lang="es-CO" sz="1400" dirty="0">
-                          <a:hlinkClick r:id="rId2"/>
-                        </a:rPr>
-                        <a:t>link</a:t>
-                      </a:r>
-                      <a:r>
-                        <a:rPr lang="es-CO" sz="1400" dirty="0"/>
-                        <a:t>)</a:t>
-                      </a:r>
-                    </a:p>
-                  </a:txBody>
-                  <a:tcPr marL="63063" marR="63063" marT="31531" marB="31531" anchor="ctr">
-                    <a:lnL w="12700" cap="flat" cmpd="sng" algn="ctr">
-                      <a:solidFill>
-                        <a:schemeClr val="tx1"/>
-                      </a:solidFill>
-                      <a:prstDash val="solid"/>
-                      <a:round/>
-                      <a:headEnd type="none" w="med" len="med"/>
-                      <a:tailEnd type="none" w="med" len="med"/>
-                    </a:lnL>
-                    <a:lnR w="12700" cap="flat" cmpd="sng" algn="ctr">
-                      <a:solidFill>
-                        <a:schemeClr val="tx1"/>
-                      </a:solidFill>
-                      <a:prstDash val="solid"/>
-                      <a:round/>
-                      <a:headEnd type="none" w="med" len="med"/>
-                      <a:tailEnd type="none" w="med" len="med"/>
-                    </a:lnR>
-                    <a:lnT w="12700" cap="flat" cmpd="sng" algn="ctr">
-                      <a:solidFill>
-                        <a:schemeClr val="tx1"/>
-                      </a:solidFill>
-                      <a:prstDash val="solid"/>
-                      <a:round/>
-                      <a:headEnd type="none" w="med" len="med"/>
-                      <a:tailEnd type="none" w="med" len="med"/>
-                    </a:lnT>
-                    <a:lnB w="12700" cap="flat" cmpd="sng" algn="ctr">
-                      <a:solidFill>
-                        <a:schemeClr val="tx1"/>
-                      </a:solidFill>
-                      <a:prstDash val="solid"/>
-                      <a:round/>
-                      <a:headEnd type="none" w="med" len="med"/>
-                      <a:tailEnd type="none" w="med" len="med"/>
-                    </a:lnB>
-                  </a:tcPr>
-                </a:tc>
-                <a:extLst>
-                  <a:ext uri="{0D108BD9-81ED-4DB2-BD59-A6C34878D82A}">
-                    <a16:rowId xmlns:a16="http://schemas.microsoft.com/office/drawing/2014/main" val="37913335"/>
-                  </a:ext>
-                </a:extLst>
-              </a:tr>
-            </a:tbl>
-          </a:graphicData>
-        </a:graphic>
-      </p:graphicFrame>
       <p:sp>
         <p:nvSpPr>
           <p:cNvPr id="12" name="CuadroTexto 11">
@@ -38828,8 +37415,8 @@
         </p:nvSpPr>
         <p:spPr>
           <a:xfrm>
-            <a:off x="271888" y="5616481"/>
-            <a:ext cx="8389823" cy="646331"/>
+            <a:off x="290704" y="4005064"/>
+            <a:ext cx="8389823" cy="1754326"/>
           </a:xfrm>
           <a:prstGeom prst="rect">
             <a:avLst/>
@@ -38848,29 +37435,99 @@
           <a:lstStyle/>
           <a:p>
             <a:r>
-              <a:rPr lang="es-CO" b="1" dirty="0"/>
-              <a:t>Idea clave</a:t>
-            </a:r>
-            <a:r>
-              <a:rPr lang="es-CO" dirty="0"/>
-              <a:t>: con </a:t>
-            </a:r>
-            <a:r>
-              <a:rPr lang="es-CO" sz="1600" b="1" dirty="0" err="1">
-                <a:latin typeface="Consolas" panose="020B0609020204030204" pitchFamily="49" charset="0"/>
-              </a:rPr>
-              <a:t>random.seed</a:t>
-            </a:r>
-            <a:r>
-              <a:rPr lang="es-CO" sz="1600" b="1" dirty="0">
-                <a:latin typeface="Consolas" panose="020B0609020204030204" pitchFamily="49" charset="0"/>
-              </a:rPr>
-              <a:t>()</a:t>
-            </a:r>
-            <a:r>
-              <a:rPr lang="es-CO" dirty="0"/>
-              <a:t> los resultados se vuelven repetibles. Esto permite probar con assert un programa que utiliza números aleatorios.</a:t>
-            </a:r>
+              <a:rPr lang="es-MX" dirty="0"/>
+              <a:t>⚠️ </a:t>
+            </a:r>
+            <a:r>
+              <a:rPr lang="es-MX" b="1" dirty="0"/>
+              <a:t>Precaución</a:t>
+            </a:r>
+            <a:r>
+              <a:rPr lang="es-MX" dirty="0"/>
+              <a:t>: no nombre sus archivos </a:t>
+            </a:r>
+            <a:r>
+              <a:rPr lang="es-MX" sz="1600" dirty="0">
+                <a:latin typeface="Consolas" panose="020B0609020204030204" pitchFamily="49" charset="0"/>
+              </a:rPr>
+              <a:t>random.py</a:t>
+            </a:r>
+            <a:r>
+              <a:rPr lang="es-MX" dirty="0"/>
+              <a:t>. Si lo hace, </a:t>
+            </a:r>
+            <a:r>
+              <a:rPr lang="es-MX" sz="1600" dirty="0">
+                <a:latin typeface="Consolas" panose="020B0609020204030204" pitchFamily="49" charset="0"/>
+              </a:rPr>
+              <a:t>import random</a:t>
+            </a:r>
+            <a:r>
+              <a:rPr lang="es-MX" dirty="0"/>
+              <a:t> carga su propio archivo en lugar del módulo de Python, y aparece el error </a:t>
+            </a:r>
+            <a:r>
+              <a:rPr lang="es-MX" sz="1600" dirty="0" err="1">
+                <a:latin typeface="Consolas" panose="020B0609020204030204" pitchFamily="49" charset="0"/>
+              </a:rPr>
+              <a:t>AttributeError</a:t>
+            </a:r>
+            <a:r>
+              <a:rPr lang="es-MX" sz="1600" dirty="0">
+                <a:latin typeface="Consolas" panose="020B0609020204030204" pitchFamily="49" charset="0"/>
+              </a:rPr>
+              <a:t>: module 'random' has no </a:t>
+            </a:r>
+            <a:r>
+              <a:rPr lang="es-MX" sz="1600" dirty="0" err="1">
+                <a:latin typeface="Consolas" panose="020B0609020204030204" pitchFamily="49" charset="0"/>
+              </a:rPr>
+              <a:t>attribute</a:t>
+            </a:r>
+            <a:r>
+              <a:rPr lang="es-MX" sz="1600" dirty="0">
+                <a:latin typeface="Consolas" panose="020B0609020204030204" pitchFamily="49" charset="0"/>
+              </a:rPr>
+              <a:t> '</a:t>
+            </a:r>
+            <a:r>
+              <a:rPr lang="es-MX" sz="1600" dirty="0" err="1">
+                <a:latin typeface="Consolas" panose="020B0609020204030204" pitchFamily="49" charset="0"/>
+              </a:rPr>
+              <a:t>randint</a:t>
+            </a:r>
+            <a:r>
+              <a:rPr lang="es-MX" sz="1600" dirty="0">
+                <a:latin typeface="Consolas" panose="020B0609020204030204" pitchFamily="49" charset="0"/>
+              </a:rPr>
+              <a:t>’</a:t>
+            </a:r>
+            <a:r>
+              <a:rPr lang="es-MX" dirty="0"/>
+              <a:t>.</a:t>
+            </a:r>
+          </a:p>
+          <a:p>
+            <a:endParaRPr lang="es-MX" dirty="0"/>
+          </a:p>
+          <a:p>
+            <a:r>
+              <a:rPr lang="es-MX" b="1" dirty="0"/>
+              <a:t>Importante</a:t>
+            </a:r>
+            <a:r>
+              <a:rPr lang="es-MX" dirty="0"/>
+              <a:t>: este ejercicio integra todo lo visto en la clase: funciones, especificación, pruebas, top-</a:t>
+            </a:r>
+            <a:r>
+              <a:rPr lang="es-MX" dirty="0" err="1"/>
+              <a:t>down</a:t>
+            </a:r>
+            <a:r>
+              <a:rPr lang="es-MX" dirty="0"/>
+              <a:t> y librerías.</a:t>
+            </a:r>
+            <a:endParaRPr lang="es-CO" dirty="0"/>
           </a:p>
         </p:txBody>
       </p:sp>
@@ -38906,7 +37563,7 @@
       </p:grpSpPr>
       <p:sp>
         <p:nvSpPr>
-          <p:cNvPr id="5" name="Title 4"/>
+          <p:cNvPr id="5" name="4 Título"/>
           <p:cNvSpPr>
             <a:spLocks noGrp="1"/>
           </p:cNvSpPr>
@@ -38916,37 +37573,8 @@
         </p:nvSpPr>
         <p:spPr>
           <a:xfrm>
-            <a:off x="107504" y="23817"/>
-            <a:ext cx="7886700" cy="812895"/>
-          </a:xfrm>
-        </p:spPr>
-        <p:txBody>
-          <a:bodyPr>
-            <a:normAutofit/>
-          </a:bodyPr>
-          <a:lstStyle/>
-          <a:p>
-            <a:r>
-              <a:rPr lang="en-US" sz="4000" dirty="0"/>
-              <a:t>Referencias</a:t>
-            </a:r>
-          </a:p>
-        </p:txBody>
-      </p:sp>
-      <p:sp>
-        <p:nvSpPr>
-          <p:cNvPr id="2" name="Content Placeholder 1"/>
-          <p:cNvSpPr>
-            <a:spLocks noGrp="1"/>
-          </p:cNvSpPr>
-          <p:nvPr>
-            <p:ph idx="1"/>
-          </p:nvPr>
-        </p:nvSpPr>
-        <p:spPr>
-          <a:xfrm>
-            <a:off x="179512" y="692696"/>
-            <a:ext cx="8712968" cy="6048672"/>
+            <a:off x="308782" y="116632"/>
+            <a:ext cx="8506932" cy="794653"/>
           </a:xfrm>
         </p:spPr>
         <p:txBody>
@@ -38955,215 +37583,401 @@
           </a:bodyPr>
           <a:lstStyle/>
           <a:p>
-            <a:pPr rtl="0">
+            <a:r>
+              <a:rPr lang="es-MX" sz="3600" dirty="0"/>
+              <a:t>Dividir un programa en varios archivos</a:t>
+            </a:r>
+            <a:endParaRPr lang="es-MX" sz="3200" dirty="0">
+              <a:latin typeface="Consolas" panose="020B0609020204030204" pitchFamily="49" charset="0"/>
+            </a:endParaRPr>
+          </a:p>
+        </p:txBody>
+      </p:sp>
+      <p:sp>
+        <p:nvSpPr>
+          <p:cNvPr id="13" name="12 Rectángulo"/>
+          <p:cNvSpPr/>
+          <p:nvPr/>
+        </p:nvSpPr>
+        <p:spPr>
+          <a:xfrm>
+            <a:off x="144639" y="764704"/>
+            <a:ext cx="8835218" cy="4093428"/>
+          </a:xfrm>
+          <a:prstGeom prst="rect">
+            <a:avLst/>
+          </a:prstGeom>
+        </p:spPr>
+        <p:txBody>
+          <a:bodyPr wrap="square">
+            <a:spAutoFit/>
+          </a:bodyPr>
+          <a:lstStyle/>
+          <a:p>
+            <a:pPr marL="342900" indent="-342900" rtl="0">
               <a:buFont typeface="Arial" panose="020B0604020202020204" pitchFamily="34" charset="0"/>
               <a:buChar char="•"/>
             </a:pPr>
             <a:r>
               <a:rPr lang="es-MX" sz="2000" dirty="0"/>
-              <a:t>Aprender a Programar: Abstracción en programación. Concepto. Diseño top-</a:t>
-            </a:r>
-            <a:r>
-              <a:rPr lang="es-MX" sz="2000" dirty="0" err="1"/>
-              <a:t>down</a:t>
+              <a:t>Un módulo es un archivo </a:t>
+            </a:r>
+            <a:r>
+              <a:rPr lang="es-MX" sz="1600" b="1" dirty="0">
+                <a:latin typeface="Consolas" panose="020B0609020204030204" pitchFamily="49" charset="0"/>
+              </a:rPr>
+              <a:t>.py</a:t>
             </a:r>
             <a:r>
               <a:rPr lang="es-MX" sz="2000" dirty="0"/>
-              <a:t> de algoritmos y programas. Ejemplos (CU00225A) </a:t>
-            </a:r>
-            <a:r>
-              <a:rPr lang="es-MX" sz="2000" dirty="0">
-                <a:hlinkClick r:id="rId2"/>
-              </a:rPr>
-              <a:t>https://www.aprenderaprogramar.com/index.php?option=com_content&amp;view=category&amp;id=36&amp;Itemid=60</a:t>
-            </a:r>
-            <a:r>
-              <a:rPr lang="es-MX" sz="2000" dirty="0"/>
-              <a:t>  </a:t>
-            </a:r>
-          </a:p>
-          <a:p>
-            <a:pPr rtl="0">
+              <a:t> cuyas funciones pueden usarse desde otro archivo.</a:t>
+            </a:r>
+          </a:p>
+          <a:p>
+            <a:pPr marL="342900" indent="-342900" rtl="0">
               <a:buFont typeface="Arial" panose="020B0604020202020204" pitchFamily="34" charset="0"/>
               <a:buChar char="•"/>
             </a:pPr>
             <a:r>
               <a:rPr lang="es-MX" sz="2000" dirty="0"/>
-              <a:t>Stanford CS106A, </a:t>
-            </a:r>
-            <a:r>
-              <a:rPr lang="es-MX" sz="2000" i="1" dirty="0"/>
-              <a:t>Karel Reader</a:t>
+              <a:t>Se importa igual que </a:t>
+            </a:r>
+            <a:r>
+              <a:rPr lang="es-MX" sz="1600" b="1" dirty="0">
+                <a:latin typeface="Consolas" panose="020B0609020204030204" pitchFamily="49" charset="0"/>
+              </a:rPr>
+              <a:t>math</a:t>
             </a:r>
             <a:r>
               <a:rPr lang="es-MX" sz="2000" dirty="0"/>
-              <a:t>, cap. 8: </a:t>
-            </a:r>
-            <a:r>
-              <a:rPr lang="es-MX" sz="2000" i="1" dirty="0" err="1"/>
-              <a:t>Stepwise</a:t>
-            </a:r>
-            <a:r>
-              <a:rPr lang="es-MX" sz="2000" i="1" dirty="0"/>
-              <a:t> </a:t>
-            </a:r>
-            <a:r>
-              <a:rPr lang="es-MX" sz="2000" i="1" dirty="0" err="1"/>
-              <a:t>Refinement</a:t>
-            </a:r>
-            <a:br>
+              <a:t> o </a:t>
+            </a:r>
+            <a:r>
+              <a:rPr lang="es-MX" sz="1600" b="1" dirty="0"/>
+              <a:t>random</a:t>
+            </a:r>
+            <a:r>
               <a:rPr lang="es-MX" sz="2000" dirty="0"/>
-            </a:br>
-            <a:r>
-              <a:rPr lang="es-MX" sz="2000" dirty="0">
-                <a:hlinkClick r:id="rId3"/>
-              </a:rPr>
-              <a:t>https://compedu.stanford.edu/karel-reader/docs/python/en/chapter8.html</a:t>
-            </a:r>
-            <a:endParaRPr lang="es-MX" sz="2000" dirty="0"/>
-          </a:p>
-          <a:p>
-            <a:pPr rtl="0">
+              <a:t>, con el nombre del archivo sin la extensión </a:t>
+            </a:r>
+            <a:r>
+              <a:rPr lang="es-MX" dirty="0">
+                <a:latin typeface="Consolas" panose="020B0609020204030204" pitchFamily="49" charset="0"/>
+              </a:rPr>
+              <a:t>.py</a:t>
+            </a:r>
+            <a:r>
+              <a:rPr lang="es-MX" sz="2000" dirty="0"/>
+              <a:t>.</a:t>
+            </a:r>
+          </a:p>
+          <a:p>
+            <a:pPr marL="342900" indent="-342900" rtl="0">
               <a:buFont typeface="Arial" panose="020B0604020202020204" pitchFamily="34" charset="0"/>
               <a:buChar char="•"/>
             </a:pPr>
             <a:r>
               <a:rPr lang="es-MX" sz="2000" dirty="0"/>
-              <a:t>Stanford CS106A, lección 3: </a:t>
-            </a:r>
-            <a:r>
-              <a:rPr lang="es-MX" sz="2000" i="1" dirty="0" err="1"/>
-              <a:t>Decomposition</a:t>
-            </a:r>
-            <a:br>
-              <a:rPr lang="es-MX" sz="2000" dirty="0"/>
-            </a:br>
-            <a:r>
-              <a:rPr lang="es-MX" sz="2000" dirty="0">
-                <a:hlinkClick r:id="rId4"/>
-              </a:rPr>
-              <a:t>https://web.stanford.edu/class/archive/cs/cs106a/cs106a.1226/lectures/03-decomposition/3-Decomposition.pdf</a:t>
-            </a:r>
-            <a:endParaRPr lang="es-MX" sz="2000" dirty="0"/>
-          </a:p>
-          <a:p>
-            <a:pPr rtl="0">
+              <a:t>Ambos archivos deben estar en la misma carpeta.</a:t>
+            </a:r>
+          </a:p>
+          <a:p>
+            <a:pPr marL="342900" indent="-342900" rtl="0">
               <a:buFont typeface="Arial" panose="020B0604020202020204" pitchFamily="34" charset="0"/>
               <a:buChar char="•"/>
             </a:pPr>
-            <a:r>
-              <a:rPr lang="es-MX" sz="2000" dirty="0"/>
-              <a:t>MIT 6.100L, lección 7: </a:t>
-            </a:r>
-            <a:r>
-              <a:rPr lang="es-MX" sz="2000" i="1" dirty="0" err="1"/>
-              <a:t>Decomposition</a:t>
-            </a:r>
-            <a:r>
-              <a:rPr lang="es-MX" sz="2000" i="1" dirty="0"/>
-              <a:t>, </a:t>
-            </a:r>
-            <a:r>
-              <a:rPr lang="es-MX" sz="2000" i="1" dirty="0" err="1"/>
-              <a:t>Abstraction</a:t>
-            </a:r>
-            <a:r>
-              <a:rPr lang="es-MX" sz="2000" i="1" dirty="0"/>
-              <a:t>, </a:t>
-            </a:r>
-            <a:r>
-              <a:rPr lang="es-MX" sz="2000" i="1" dirty="0" err="1"/>
-              <a:t>Functions</a:t>
-            </a:r>
-            <a:r>
-              <a:rPr lang="es-MX" sz="2000" dirty="0"/>
-              <a:t> (diapositivas)</a:t>
-            </a:r>
-            <a:br>
-              <a:rPr lang="es-MX" sz="2000" dirty="0"/>
-            </a:br>
-            <a:r>
-              <a:rPr lang="es-MX" sz="2000" dirty="0">
-                <a:hlinkClick r:id="rId5"/>
-              </a:rPr>
-              <a:t>https://ocw.mit.edu/courses/6-100l-introduction-to-cs-and-programming-using-python-fall-2022/resources/mit6_100l_f22_lec07_pdf/</a:t>
-            </a:r>
             <a:endParaRPr lang="es-MX" sz="2000" dirty="0"/>
           </a:p>
           <a:p>
-            <a:pPr rtl="0">
+            <a:pPr marL="342900" indent="-342900" rtl="0">
               <a:buFont typeface="Arial" panose="020B0604020202020204" pitchFamily="34" charset="0"/>
               <a:buChar char="•"/>
             </a:pPr>
-            <a:r>
-              <a:rPr lang="es-MX" sz="2000" dirty="0"/>
-              <a:t>MIT 6.100L, lección 7 (video)</a:t>
-            </a:r>
-            <a:br>
-              <a:rPr lang="es-MX" sz="2000" dirty="0"/>
-            </a:br>
-            <a:r>
-              <a:rPr lang="es-MX" sz="2000" dirty="0">
-                <a:hlinkClick r:id="rId6"/>
-              </a:rPr>
-              <a:t>https://ocw.mit.edu/courses/6-100l-introduction-to-cs-and-programming-using-python-fall-2022/resources/6100l-lecture-7-multi_mp4/</a:t>
-            </a:r>
             <a:endParaRPr lang="es-MX" sz="2000" dirty="0"/>
           </a:p>
           <a:p>
-            <a:pPr rtl="0">
+            <a:pPr marL="342900" indent="-342900" rtl="0">
               <a:buFont typeface="Arial" panose="020B0604020202020204" pitchFamily="34" charset="0"/>
               <a:buChar char="•"/>
             </a:pPr>
-            <a:r>
-              <a:rPr lang="es-MX" sz="2000" dirty="0"/>
-              <a:t>CS50P, lección 0: </a:t>
-            </a:r>
-            <a:r>
-              <a:rPr lang="es-MX" sz="2000" i="1" dirty="0" err="1"/>
-              <a:t>Functions</a:t>
-            </a:r>
-            <a:r>
-              <a:rPr lang="es-MX" sz="2000" i="1" dirty="0"/>
-              <a:t>, Variables</a:t>
-            </a:r>
-            <a:br>
-              <a:rPr lang="es-MX" sz="2000" dirty="0"/>
-            </a:br>
-            <a:r>
-              <a:rPr lang="es-MX" sz="2000" dirty="0">
-                <a:hlinkClick r:id="rId7"/>
-              </a:rPr>
-              <a:t>https://cs50.harvard.edu/python/notes/0/</a:t>
-            </a:r>
             <a:endParaRPr lang="es-MX" sz="2000" dirty="0"/>
           </a:p>
           <a:p>
-            <a:pPr rtl="0"/>
-            <a:r>
-              <a:rPr lang="en-US" sz="2000" dirty="0"/>
-              <a:t>Liang, Y. D. </a:t>
-            </a:r>
-            <a:r>
-              <a:rPr lang="en-US" sz="2000" i="1" dirty="0"/>
-              <a:t>Introduction to Programming Using Python</a:t>
-            </a:r>
-            <a:r>
-              <a:rPr lang="en-US" sz="2000" dirty="0"/>
-              <a:t>, §6.13 </a:t>
-            </a:r>
-            <a:r>
-              <a:rPr lang="en-US" sz="2000" i="1" dirty="0"/>
-              <a:t>Function Abstraction and Stepwise Refinement</a:t>
-            </a:r>
+            <a:pPr marL="342900" indent="-342900" rtl="0">
+              <a:buFont typeface="Arial" panose="020B0604020202020204" pitchFamily="34" charset="0"/>
+              <a:buChar char="•"/>
+            </a:pPr>
             <a:endParaRPr lang="es-MX" sz="2000" dirty="0"/>
+          </a:p>
+          <a:p>
+            <a:pPr marL="342900" indent="-342900" rtl="0">
+              <a:buFont typeface="Arial" panose="020B0604020202020204" pitchFamily="34" charset="0"/>
+              <a:buChar char="•"/>
+            </a:pPr>
+            <a:endParaRPr lang="es-MX" sz="2000" dirty="0"/>
+          </a:p>
+          <a:p>
+            <a:pPr marL="342900" indent="-342900" rtl="0">
+              <a:buFont typeface="Arial" panose="020B0604020202020204" pitchFamily="34" charset="0"/>
+              <a:buChar char="•"/>
+            </a:pPr>
+            <a:endParaRPr lang="es-MX" sz="2000" dirty="0"/>
+          </a:p>
+          <a:p>
+            <a:pPr marL="342900" indent="-342900" rtl="0">
+              <a:buFont typeface="Arial" panose="020B0604020202020204" pitchFamily="34" charset="0"/>
+              <a:buChar char="•"/>
+            </a:pPr>
+            <a:endParaRPr lang="es-MX" sz="2000" dirty="0"/>
+          </a:p>
+          <a:p>
+            <a:pPr marL="342900" indent="-342900" rtl="0">
+              <a:buFont typeface="Arial" panose="020B0604020202020204" pitchFamily="34" charset="0"/>
+              <a:buChar char="•"/>
+            </a:pPr>
+            <a:endParaRPr lang="es-MX" sz="2000" dirty="0"/>
+          </a:p>
+          <a:p>
+            <a:pPr marL="342900" indent="-342900" rtl="0">
+              <a:buFont typeface="Arial" panose="020B0604020202020204" pitchFamily="34" charset="0"/>
+              <a:buChar char="•"/>
+            </a:pPr>
+            <a:r>
+              <a:rPr lang="it-IT" sz="2000" b="1" dirty="0"/>
+              <a:t>Archivo</a:t>
+            </a:r>
+            <a:r>
+              <a:rPr lang="it-IT" sz="2000" dirty="0"/>
+              <a:t>: </a:t>
+            </a:r>
+            <a:r>
+              <a:rPr lang="it-IT" sz="1600" dirty="0">
+                <a:latin typeface="Consolas" panose="020B0609020204030204" pitchFamily="49" charset="0"/>
+              </a:rPr>
+              <a:t>1_sin_guarda/main.py</a:t>
+            </a:r>
+            <a:endParaRPr lang="es-MX" dirty="0">
+              <a:latin typeface="Consolas" panose="020B0609020204030204" pitchFamily="49" charset="0"/>
+            </a:endParaRPr>
+          </a:p>
+        </p:txBody>
+      </p:sp>
+      <p:pic>
+        <p:nvPicPr>
+          <p:cNvPr id="3" name="Imagen 2">
+            <a:extLst>
+              <a:ext uri="{FF2B5EF4-FFF2-40B4-BE49-F238E27FC236}">
+                <a16:creationId xmlns:a16="http://schemas.microsoft.com/office/drawing/2014/main" id="{12E834B2-98BD-4903-A580-3766123E57B9}"/>
+              </a:ext>
+            </a:extLst>
+          </p:cNvPr>
+          <p:cNvPicPr>
+            <a:picLocks noChangeAspect="1"/>
+          </p:cNvPicPr>
+          <p:nvPr/>
+        </p:nvPicPr>
+        <p:blipFill>
+          <a:blip r:embed="rId2">
+            <a:extLst>
+              <a:ext uri="{28A0092B-C50C-407E-A947-70E740481C1C}">
+                <a14:useLocalDpi xmlns:a14="http://schemas.microsoft.com/office/drawing/2010/main" val="0"/>
+              </a:ext>
+            </a:extLst>
+          </a:blip>
+          <a:stretch>
+            <a:fillRect/>
+          </a:stretch>
+        </p:blipFill>
+        <p:spPr>
+          <a:xfrm>
+            <a:off x="1331640" y="2110025"/>
+            <a:ext cx="6336704" cy="2183071"/>
+          </a:xfrm>
+          <a:prstGeom prst="rect">
+            <a:avLst/>
+          </a:prstGeom>
+        </p:spPr>
+      </p:pic>
+      <p:sp>
+        <p:nvSpPr>
+          <p:cNvPr id="9" name="CuadroTexto 8">
+            <a:extLst>
+              <a:ext uri="{FF2B5EF4-FFF2-40B4-BE49-F238E27FC236}">
+                <a16:creationId xmlns:a16="http://schemas.microsoft.com/office/drawing/2014/main" id="{CEC4C591-D670-4243-B7E9-14D4E839D6C7}"/>
+              </a:ext>
+            </a:extLst>
+          </p:cNvPr>
+          <p:cNvSpPr txBox="1"/>
+          <p:nvPr/>
+        </p:nvSpPr>
+        <p:spPr>
+          <a:xfrm>
+            <a:off x="1907704" y="5086925"/>
+            <a:ext cx="5688632" cy="646331"/>
+          </a:xfrm>
+          <a:prstGeom prst="rect">
+            <a:avLst/>
+          </a:prstGeom>
+          <a:noFill/>
+          <a:ln>
+            <a:solidFill>
+              <a:schemeClr val="tx1"/>
+            </a:solidFill>
+          </a:ln>
+        </p:spPr>
+        <p:txBody>
+          <a:bodyPr wrap="square">
+            <a:spAutoFit/>
+          </a:bodyPr>
+          <a:lstStyle/>
+          <a:p>
+            <a:r>
+              <a:rPr lang="es-CO" sz="1200" dirty="0">
+                <a:latin typeface="Consolas" panose="020B0609020204030204" pitchFamily="49" charset="0"/>
+              </a:rPr>
+              <a:t> 4  </a:t>
+            </a:r>
+            <a:r>
+              <a:rPr lang="es-CO" sz="1200" dirty="0" err="1">
+                <a:latin typeface="Consolas" panose="020B0609020204030204" pitchFamily="49" charset="0"/>
+              </a:rPr>
+              <a:t>import</a:t>
+            </a:r>
+            <a:r>
+              <a:rPr lang="es-CO" sz="1200" dirty="0">
+                <a:latin typeface="Consolas" panose="020B0609020204030204" pitchFamily="49" charset="0"/>
+              </a:rPr>
+              <a:t> conversiones</a:t>
+            </a:r>
+          </a:p>
+          <a:p>
+            <a:r>
+              <a:rPr lang="es-CO" sz="1200" dirty="0">
+                <a:latin typeface="Consolas" panose="020B0609020204030204" pitchFamily="49" charset="0"/>
+              </a:rPr>
+              <a:t>...</a:t>
+            </a:r>
+          </a:p>
+          <a:p>
+            <a:r>
+              <a:rPr lang="es-CO" sz="1200" dirty="0">
+                <a:latin typeface="Consolas" panose="020B0609020204030204" pitchFamily="49" charset="0"/>
+              </a:rPr>
+              <a:t>15          </a:t>
+            </a:r>
+            <a:r>
+              <a:rPr lang="es-CO" sz="1200" dirty="0" err="1">
+                <a:latin typeface="Consolas" panose="020B0609020204030204" pitchFamily="49" charset="0"/>
+              </a:rPr>
+              <a:t>temp_f</a:t>
+            </a:r>
+            <a:r>
+              <a:rPr lang="es-CO" sz="1200" dirty="0">
+                <a:latin typeface="Consolas" panose="020B0609020204030204" pitchFamily="49" charset="0"/>
+              </a:rPr>
+              <a:t> = </a:t>
+            </a:r>
+            <a:r>
+              <a:rPr lang="es-CO" sz="1200" dirty="0" err="1">
+                <a:latin typeface="Consolas" panose="020B0609020204030204" pitchFamily="49" charset="0"/>
+              </a:rPr>
+              <a:t>conversiones.celsius_a_fahrenheit</a:t>
+            </a:r>
+            <a:r>
+              <a:rPr lang="es-CO" sz="1200" dirty="0">
+                <a:latin typeface="Consolas" panose="020B0609020204030204" pitchFamily="49" charset="0"/>
+              </a:rPr>
+              <a:t>(</a:t>
+            </a:r>
+            <a:r>
+              <a:rPr lang="es-CO" sz="1200" dirty="0" err="1">
+                <a:latin typeface="Consolas" panose="020B0609020204030204" pitchFamily="49" charset="0"/>
+              </a:rPr>
+              <a:t>temp_c</a:t>
+            </a:r>
+            <a:r>
+              <a:rPr lang="es-CO" sz="1200" dirty="0">
+                <a:latin typeface="Consolas" panose="020B0609020204030204" pitchFamily="49" charset="0"/>
+              </a:rPr>
+              <a:t>)</a:t>
+            </a:r>
+          </a:p>
+        </p:txBody>
+      </p:sp>
+      <p:sp>
+        <p:nvSpPr>
+          <p:cNvPr id="10" name="CuadroTexto 9">
+            <a:extLst>
+              <a:ext uri="{FF2B5EF4-FFF2-40B4-BE49-F238E27FC236}">
+                <a16:creationId xmlns:a16="http://schemas.microsoft.com/office/drawing/2014/main" id="{71EF99D5-BFD2-4E0D-9096-B360583F1740}"/>
+              </a:ext>
+            </a:extLst>
+          </p:cNvPr>
+          <p:cNvSpPr txBox="1"/>
+          <p:nvPr/>
+        </p:nvSpPr>
+        <p:spPr>
+          <a:xfrm>
+            <a:off x="56639" y="6023029"/>
+            <a:ext cx="8979857" cy="646331"/>
+          </a:xfrm>
+          <a:prstGeom prst="rect">
+            <a:avLst/>
+          </a:prstGeom>
+          <a:solidFill>
+            <a:schemeClr val="bg2"/>
+          </a:solidFill>
+        </p:spPr>
+        <p:txBody>
+          <a:bodyPr wrap="square">
+            <a:spAutoFit/>
+          </a:bodyPr>
+          <a:lstStyle/>
+          <a:p>
+            <a:r>
+              <a:rPr lang="es-MX" dirty="0"/>
+              <a:t>Para usar una función del módulo se escribe </a:t>
+            </a:r>
+            <a:r>
+              <a:rPr lang="es-MX" sz="1600" b="1" dirty="0" err="1">
+                <a:latin typeface="Consolas" panose="020B0609020204030204" pitchFamily="49" charset="0"/>
+              </a:rPr>
+              <a:t>nombre_del_módulo.nombre_de_la_función</a:t>
+            </a:r>
+            <a:r>
+              <a:rPr lang="es-MX" sz="1600" b="1" dirty="0">
+                <a:latin typeface="Consolas" panose="020B0609020204030204" pitchFamily="49" charset="0"/>
+              </a:rPr>
+              <a:t>(...)</a:t>
+            </a:r>
+            <a:r>
+              <a:rPr lang="es-MX" dirty="0"/>
+              <a:t>, de la misma forma que </a:t>
+            </a:r>
+            <a:r>
+              <a:rPr lang="es-MX" sz="1600" b="1" dirty="0" err="1">
+                <a:latin typeface="Consolas" panose="020B0609020204030204" pitchFamily="49" charset="0"/>
+              </a:rPr>
+              <a:t>math.sqrt</a:t>
+            </a:r>
+            <a:r>
+              <a:rPr lang="es-MX" sz="1600" b="1" dirty="0">
+                <a:latin typeface="Consolas" panose="020B0609020204030204" pitchFamily="49" charset="0"/>
+              </a:rPr>
+              <a:t>(...)</a:t>
+            </a:r>
+            <a:r>
+              <a:rPr lang="es-MX" dirty="0"/>
+              <a:t>. </a:t>
+            </a:r>
+            <a:endParaRPr lang="es-CO" dirty="0"/>
           </a:p>
         </p:txBody>
       </p:sp>
     </p:spTree>
     <p:extLst>
       <p:ext uri="{BB962C8B-B14F-4D97-AF65-F5344CB8AC3E}">
-        <p14:creationId xmlns:p14="http://schemas.microsoft.com/office/powerpoint/2010/main" val="1023164851"/>
+        <p14:creationId xmlns:p14="http://schemas.microsoft.com/office/powerpoint/2010/main" val="3977442186"/>
       </p:ext>
     </p:extLst>
   </p:cSld>
@@ -39192,7 +38006,7 @@
       </p:grpSpPr>
       <p:sp>
         <p:nvSpPr>
-          <p:cNvPr id="5" name="Title 4"/>
+          <p:cNvPr id="5" name="4 Título"/>
           <p:cNvSpPr>
             <a:spLocks noGrp="1"/>
           </p:cNvSpPr>
@@ -39202,250 +38016,456 @@
         </p:nvSpPr>
         <p:spPr>
           <a:xfrm>
-            <a:off x="107504" y="23817"/>
-            <a:ext cx="7886700" cy="812895"/>
+            <a:off x="308782" y="116632"/>
+            <a:ext cx="8506932" cy="794653"/>
           </a:xfrm>
         </p:spPr>
         <p:txBody>
           <a:bodyPr>
-            <a:normAutofit/>
+            <a:noAutofit/>
           </a:bodyPr>
           <a:lstStyle/>
           <a:p>
             <a:r>
-              <a:rPr lang="en-US" sz="4000" dirty="0"/>
-              <a:t>Referencias</a:t>
-            </a:r>
+              <a:rPr lang="es-MX" sz="3600" dirty="0"/>
+              <a:t>¿Qué ocurre al importar un módulo?</a:t>
+            </a:r>
+            <a:endParaRPr lang="es-MX" sz="3200" dirty="0">
+              <a:latin typeface="Consolas" panose="020B0609020204030204" pitchFamily="49" charset="0"/>
+            </a:endParaRPr>
           </a:p>
         </p:txBody>
       </p:sp>
       <p:sp>
         <p:nvSpPr>
-          <p:cNvPr id="2" name="Content Placeholder 1"/>
-          <p:cNvSpPr>
-            <a:spLocks noGrp="1"/>
-          </p:cNvSpPr>
-          <p:nvPr>
-            <p:ph idx="1"/>
-          </p:nvPr>
+          <p:cNvPr id="13" name="12 Rectángulo"/>
+          <p:cNvSpPr/>
+          <p:nvPr/>
         </p:nvSpPr>
         <p:spPr>
           <a:xfrm>
-            <a:off x="251520" y="1088740"/>
-            <a:ext cx="8424936" cy="5148572"/>
+            <a:off x="144639" y="775732"/>
+            <a:ext cx="8835218" cy="4093428"/>
           </a:xfrm>
+          <a:prstGeom prst="rect">
+            <a:avLst/>
+          </a:prstGeom>
         </p:spPr>
         <p:txBody>
-          <a:bodyPr>
-            <a:normAutofit fontScale="92500" lnSpcReduction="10000"/>
+          <a:bodyPr wrap="square">
+            <a:spAutoFit/>
           </a:bodyPr>
           <a:lstStyle/>
           <a:p>
-            <a:pPr marL="457200" indent="-457200">
-              <a:buFont typeface="+mj-lt"/>
-              <a:buAutoNum type="arabicPeriod"/>
+            <a:pPr marL="342900" indent="-342900" rtl="0">
+              <a:buFont typeface="Arial" panose="020B0604020202020204" pitchFamily="34" charset="0"/>
+              <a:buChar char="•"/>
             </a:pPr>
             <a:r>
-              <a:rPr lang="es-CO" sz="2000" dirty="0">
-                <a:hlinkClick r:id="rId2"/>
-              </a:rPr>
-              <a:t>https://ellibrodepython.com/</a:t>
-            </a:r>
-            <a:endParaRPr lang="es-CO" sz="2000" dirty="0"/>
-          </a:p>
-          <a:p>
-            <a:pPr marL="457200" indent="-457200">
-              <a:buFont typeface="+mj-lt"/>
-              <a:buAutoNum type="arabicPeriod"/>
+              <a:rPr lang="es-MX" b="1" dirty="0" err="1">
+                <a:latin typeface="Consolas" panose="020B0609020204030204" pitchFamily="49" charset="0"/>
+              </a:rPr>
+              <a:t>import</a:t>
+            </a:r>
+            <a:r>
+              <a:rPr lang="es-MX" b="1" dirty="0">
+                <a:latin typeface="Consolas" panose="020B0609020204030204" pitchFamily="49" charset="0"/>
+              </a:rPr>
+              <a:t> conversiones</a:t>
+            </a:r>
+            <a:r>
+              <a:rPr lang="es-MX" sz="2000" dirty="0"/>
+              <a:t> </a:t>
+            </a:r>
+            <a:r>
+              <a:rPr lang="es-MX" sz="2000" b="1" dirty="0"/>
+              <a:t>ejecuta todo el archivo</a:t>
+            </a:r>
+            <a:r>
+              <a:rPr lang="es-MX" sz="2000" dirty="0"/>
+              <a:t> de arriba hacia abajo, no solo las definiciones </a:t>
+            </a:r>
+            <a:r>
+              <a:rPr lang="es-MX" b="1" dirty="0">
+                <a:latin typeface="Consolas" panose="020B0609020204030204" pitchFamily="49" charset="0"/>
+              </a:rPr>
+              <a:t>def</a:t>
+            </a:r>
+            <a:r>
+              <a:rPr lang="es-MX" sz="2000" dirty="0"/>
+              <a:t>.</a:t>
+            </a:r>
+          </a:p>
+          <a:p>
+            <a:pPr marL="342900" indent="-342900" rtl="0">
+              <a:buFont typeface="Arial" panose="020B0604020202020204" pitchFamily="34" charset="0"/>
+              <a:buChar char="•"/>
             </a:pPr>
             <a:r>
-              <a:rPr lang="es-CO" sz="2000" dirty="0">
-                <a:hlinkClick r:id="rId3"/>
-              </a:rPr>
-              <a:t>https://www.w3resource.com/index.php</a:t>
-            </a:r>
-            <a:endParaRPr lang="es-CO" sz="2000" dirty="0"/>
-          </a:p>
-          <a:p>
-            <a:pPr marL="457200" indent="-457200">
-              <a:buFont typeface="+mj-lt"/>
-              <a:buAutoNum type="arabicPeriod"/>
+              <a:rPr lang="es-MX" sz="2000" dirty="0"/>
+              <a:t>Si las pruebas están al final del módulo, también se ejecutan al importarlo.</a:t>
+            </a:r>
+          </a:p>
+          <a:p>
+            <a:pPr marL="342900" indent="-342900" rtl="0">
+              <a:buFont typeface="Arial" panose="020B0604020202020204" pitchFamily="34" charset="0"/>
+              <a:buChar char="•"/>
             </a:pPr>
-            <a:r>
-              <a:rPr lang="es-CO" sz="2000" dirty="0">
-                <a:hlinkClick r:id="rId4"/>
-              </a:rPr>
-              <a:t>https://realpython.com/</a:t>
-            </a:r>
-            <a:endParaRPr lang="es-CO" sz="2000" dirty="0"/>
-          </a:p>
-          <a:p>
-            <a:pPr marL="457200" indent="-457200">
-              <a:buFont typeface="+mj-lt"/>
-              <a:buAutoNum type="arabicPeriod"/>
+            <a:endParaRPr lang="es-MX" sz="2000" dirty="0"/>
+          </a:p>
+          <a:p>
+            <a:pPr marL="342900" indent="-342900" rtl="0">
+              <a:buFont typeface="Arial" panose="020B0604020202020204" pitchFamily="34" charset="0"/>
+              <a:buChar char="•"/>
             </a:pPr>
-            <a:r>
-              <a:rPr lang="es-CO" sz="2000" dirty="0">
-                <a:hlinkClick r:id="rId5"/>
-              </a:rPr>
-              <a:t>https://curriculumresources.edu.gh/wp-content/uploads/2025/01/</a:t>
-            </a:r>
-            <a:endParaRPr lang="es-CO" sz="2000" dirty="0"/>
-          </a:p>
-          <a:p>
-            <a:pPr marL="457200" indent="-457200">
-              <a:buFont typeface="+mj-lt"/>
-              <a:buAutoNum type="arabicPeriod"/>
+            <a:endParaRPr lang="es-MX" sz="2000" dirty="0"/>
+          </a:p>
+          <a:p>
+            <a:pPr marL="342900" indent="-342900" rtl="0">
+              <a:buFont typeface="Arial" panose="020B0604020202020204" pitchFamily="34" charset="0"/>
+              <a:buChar char="•"/>
             </a:pPr>
-            <a:r>
-              <a:rPr lang="es-CO" sz="2000" dirty="0">
-                <a:hlinkClick r:id="rId6"/>
-              </a:rPr>
-              <a:t>https://python-course.eu/</a:t>
-            </a:r>
-            <a:endParaRPr lang="es-CO" sz="2000" dirty="0"/>
-          </a:p>
-          <a:p>
-            <a:pPr marL="457200" indent="-457200">
-              <a:buFont typeface="+mj-lt"/>
-              <a:buAutoNum type="arabicPeriod"/>
+            <a:endParaRPr lang="es-MX" sz="2000" dirty="0"/>
+          </a:p>
+          <a:p>
+            <a:pPr marL="342900" indent="-342900" rtl="0">
+              <a:buFont typeface="Arial" panose="020B0604020202020204" pitchFamily="34" charset="0"/>
+              <a:buChar char="•"/>
             </a:pPr>
-            <a:r>
-              <a:rPr lang="es-CO" sz="2000" dirty="0">
-                <a:hlinkClick r:id="rId7"/>
-              </a:rPr>
-              <a:t>https://realpython.com/cheatsheets/python/</a:t>
-            </a:r>
-            <a:endParaRPr lang="es-CO" sz="2000" dirty="0"/>
-          </a:p>
-          <a:p>
-            <a:pPr marL="457200" indent="-457200">
-              <a:buFont typeface="+mj-lt"/>
-              <a:buAutoNum type="arabicPeriod"/>
+            <a:endParaRPr lang="es-MX" sz="2000" dirty="0"/>
+          </a:p>
+          <a:p>
+            <a:pPr marL="342900" indent="-342900" rtl="0">
+              <a:buFont typeface="Arial" panose="020B0604020202020204" pitchFamily="34" charset="0"/>
+              <a:buChar char="•"/>
             </a:pPr>
-            <a:r>
-              <a:rPr lang="es-CO" sz="2000" dirty="0">
-                <a:hlinkClick r:id="rId8"/>
-              </a:rPr>
-              <a:t>https://realpython.com/defining-your-own-python-function/</a:t>
-            </a:r>
-            <a:r>
-              <a:rPr lang="es-CO" sz="2000" dirty="0"/>
-              <a:t>    </a:t>
-            </a:r>
-          </a:p>
-          <a:p>
-            <a:pPr marL="457200" indent="-457200">
-              <a:buFont typeface="+mj-lt"/>
-              <a:buAutoNum type="arabicPeriod"/>
+            <a:endParaRPr lang="es-MX" sz="2000" dirty="0"/>
+          </a:p>
+          <a:p>
+            <a:pPr marL="342900" indent="-342900" rtl="0">
+              <a:buFont typeface="Arial" panose="020B0604020202020204" pitchFamily="34" charset="0"/>
+              <a:buChar char="•"/>
             </a:pPr>
-            <a:r>
-              <a:rPr lang="es-CO" sz="2000" dirty="0">
-                <a:hlinkClick r:id="rId9"/>
-              </a:rPr>
-              <a:t>https://realpython.com/python-built-in-functions/</a:t>
-            </a:r>
-            <a:endParaRPr lang="es-CO" sz="2000" dirty="0"/>
-          </a:p>
-          <a:p>
-            <a:pPr marL="457200" indent="-457200">
-              <a:buFont typeface="+mj-lt"/>
-              <a:buAutoNum type="arabicPeriod"/>
+            <a:endParaRPr lang="es-MX" sz="2000" dirty="0"/>
+          </a:p>
+          <a:p>
+            <a:pPr marL="342900" indent="-342900" rtl="0">
+              <a:buFont typeface="Arial" panose="020B0604020202020204" pitchFamily="34" charset="0"/>
+              <a:buChar char="•"/>
             </a:pPr>
-            <a:r>
-              <a:rPr lang="es-CO" sz="2000" dirty="0">
-                <a:hlinkClick r:id="rId10"/>
-              </a:rPr>
-              <a:t>https://realpython.com/ref/best-practices/functions/</a:t>
-            </a:r>
-            <a:r>
-              <a:rPr lang="es-CO" sz="2000" dirty="0"/>
-              <a:t> </a:t>
-            </a:r>
-          </a:p>
-          <a:p>
-            <a:pPr marL="457200" indent="-457200">
-              <a:buFont typeface="+mj-lt"/>
-              <a:buAutoNum type="arabicPeriod"/>
+            <a:endParaRPr lang="es-MX" sz="2000" dirty="0"/>
+          </a:p>
+          <a:p>
+            <a:pPr marL="342900" indent="-342900" rtl="0">
+              <a:buFont typeface="Arial" panose="020B0604020202020204" pitchFamily="34" charset="0"/>
+              <a:buChar char="•"/>
             </a:pPr>
-            <a:r>
-              <a:rPr lang="es-CO" sz="2000" dirty="0">
-                <a:hlinkClick r:id="rId11"/>
-              </a:rPr>
-              <a:t>https://makecode.microbit.org/courses/csintro</a:t>
-            </a:r>
-            <a:r>
-              <a:rPr lang="es-CO" sz="2000" dirty="0"/>
-              <a:t>   </a:t>
-            </a:r>
-          </a:p>
-          <a:p>
-            <a:pPr marL="457200" indent="-457200">
-              <a:buFont typeface="+mj-lt"/>
-              <a:buAutoNum type="arabicPeriod"/>
+            <a:endParaRPr lang="es-MX" sz="2000" dirty="0"/>
+          </a:p>
+          <a:p>
+            <a:pPr marL="342900" indent="-342900" rtl="0">
+              <a:buFont typeface="Arial" panose="020B0604020202020204" pitchFamily="34" charset="0"/>
+              <a:buChar char="•"/>
             </a:pPr>
-            <a:r>
-              <a:rPr lang="en-US" sz="2000" dirty="0">
-                <a:hlinkClick r:id="rId12"/>
-              </a:rPr>
-              <a:t>https://makecode.microbit.org/courses</a:t>
-            </a:r>
-            <a:r>
-              <a:rPr lang="en-US" sz="2000" dirty="0"/>
-              <a:t> </a:t>
-            </a:r>
-          </a:p>
-          <a:p>
-            <a:pPr marL="457200" indent="-457200">
-              <a:buFont typeface="+mj-lt"/>
-              <a:buAutoNum type="arabicPeriod"/>
+            <a:endParaRPr lang="es-MX" sz="2000" dirty="0"/>
+          </a:p>
+          <a:p>
+            <a:pPr marL="342900" indent="-342900" rtl="0">
+              <a:buFont typeface="Arial" panose="020B0604020202020204" pitchFamily="34" charset="0"/>
+              <a:buChar char="•"/>
             </a:pPr>
             <a:r>
-              <a:rPr lang="en-US" sz="2000" dirty="0">
-                <a:hlinkClick r:id="rId13"/>
-              </a:rPr>
-              <a:t>https://realpython.com/python-while-loop/</a:t>
-            </a:r>
-            <a:endParaRPr lang="en-US" sz="2000" dirty="0"/>
-          </a:p>
-          <a:p>
-            <a:pPr marL="457200" indent="-457200">
-              <a:buFont typeface="+mj-lt"/>
-              <a:buAutoNum type="arabicPeriod"/>
-            </a:pPr>
-            <a:r>
-              <a:rPr lang="en-US" sz="2000" dirty="0">
-                <a:hlinkClick r:id="rId14"/>
-              </a:rPr>
-              <a:t>https://realpython.com/ref/keywords/while/</a:t>
-            </a:r>
-            <a:r>
-              <a:rPr lang="en-US" sz="2000" dirty="0"/>
-              <a:t> </a:t>
-            </a:r>
-          </a:p>
-          <a:p>
-            <a:pPr marL="457200" indent="-457200">
-              <a:buFont typeface="+mj-lt"/>
-              <a:buAutoNum type="arabicPeriod"/>
-            </a:pPr>
-            <a:r>
-              <a:rPr lang="en-US" sz="2000" dirty="0">
-                <a:hlinkClick r:id="rId15"/>
-              </a:rPr>
-              <a:t>https://cs.stanford.edu/people/nick/py/</a:t>
-            </a:r>
-            <a:r>
-              <a:rPr lang="en-US" sz="2000" dirty="0"/>
-              <a:t> </a:t>
-            </a:r>
+              <a:rPr lang="it-IT" sz="2000" b="1" dirty="0"/>
+              <a:t>Archivo</a:t>
+            </a:r>
+            <a:r>
+              <a:rPr lang="it-IT" sz="2000" dirty="0"/>
+              <a:t>: </a:t>
+            </a:r>
+            <a:r>
+              <a:rPr lang="it-IT" sz="1600" dirty="0">
+                <a:latin typeface="Consolas" panose="020B0609020204030204" pitchFamily="49" charset="0"/>
+              </a:rPr>
+              <a:t>1_sin_guarda/conversiones.py</a:t>
+            </a:r>
+            <a:endParaRPr lang="es-MX" dirty="0">
+              <a:latin typeface="Consolas" panose="020B0609020204030204" pitchFamily="49" charset="0"/>
+            </a:endParaRPr>
           </a:p>
         </p:txBody>
       </p:sp>
+      <p:sp>
+        <p:nvSpPr>
+          <p:cNvPr id="9" name="CuadroTexto 8">
+            <a:extLst>
+              <a:ext uri="{FF2B5EF4-FFF2-40B4-BE49-F238E27FC236}">
+                <a16:creationId xmlns:a16="http://schemas.microsoft.com/office/drawing/2014/main" id="{CEC4C591-D670-4243-B7E9-14D4E839D6C7}"/>
+              </a:ext>
+            </a:extLst>
+          </p:cNvPr>
+          <p:cNvSpPr txBox="1"/>
+          <p:nvPr/>
+        </p:nvSpPr>
+        <p:spPr>
+          <a:xfrm>
+            <a:off x="1907704" y="4892967"/>
+            <a:ext cx="5688632" cy="1200329"/>
+          </a:xfrm>
+          <a:prstGeom prst="rect">
+            <a:avLst/>
+          </a:prstGeom>
+          <a:noFill/>
+          <a:ln>
+            <a:solidFill>
+              <a:schemeClr val="tx1"/>
+            </a:solidFill>
+          </a:ln>
+        </p:spPr>
+        <p:txBody>
+          <a:bodyPr wrap="square">
+            <a:spAutoFit/>
+          </a:bodyPr>
+          <a:lstStyle/>
+          <a:p>
+            <a:r>
+              <a:rPr lang="es-CO" sz="1200" dirty="0">
+                <a:latin typeface="Consolas" panose="020B0609020204030204" pitchFamily="49" charset="0"/>
+              </a:rPr>
+              <a:t>31  ############ Pruebas ##############</a:t>
+            </a:r>
+          </a:p>
+          <a:p>
+            <a:r>
+              <a:rPr lang="es-CO" sz="1200" dirty="0">
+                <a:latin typeface="Consolas" panose="020B0609020204030204" pitchFamily="49" charset="0"/>
+              </a:rPr>
+              <a:t>32  </a:t>
+            </a:r>
+            <a:r>
+              <a:rPr lang="es-CO" sz="1200" dirty="0" err="1">
+                <a:latin typeface="Consolas" panose="020B0609020204030204" pitchFamily="49" charset="0"/>
+              </a:rPr>
+              <a:t>assert</a:t>
+            </a:r>
+            <a:r>
+              <a:rPr lang="es-CO" sz="1200" dirty="0">
+                <a:latin typeface="Consolas" panose="020B0609020204030204" pitchFamily="49" charset="0"/>
+              </a:rPr>
+              <a:t> round(</a:t>
+            </a:r>
+            <a:r>
+              <a:rPr lang="es-CO" sz="1200" dirty="0" err="1">
+                <a:latin typeface="Consolas" panose="020B0609020204030204" pitchFamily="49" charset="0"/>
+              </a:rPr>
+              <a:t>celsius_a_fahrenheit</a:t>
+            </a:r>
+            <a:r>
+              <a:rPr lang="es-CO" sz="1200" dirty="0">
+                <a:latin typeface="Consolas" panose="020B0609020204030204" pitchFamily="49" charset="0"/>
+              </a:rPr>
+              <a:t>(100), 2) == 212.0</a:t>
+            </a:r>
+          </a:p>
+          <a:p>
+            <a:r>
+              <a:rPr lang="es-CO" sz="1200" dirty="0">
+                <a:latin typeface="Consolas" panose="020B0609020204030204" pitchFamily="49" charset="0"/>
+              </a:rPr>
+              <a:t>33  </a:t>
+            </a:r>
+            <a:r>
+              <a:rPr lang="es-CO" sz="1200" dirty="0" err="1">
+                <a:latin typeface="Consolas" panose="020B0609020204030204" pitchFamily="49" charset="0"/>
+              </a:rPr>
+              <a:t>assert</a:t>
+            </a:r>
+            <a:r>
+              <a:rPr lang="es-CO" sz="1200" dirty="0">
+                <a:latin typeface="Consolas" panose="020B0609020204030204" pitchFamily="49" charset="0"/>
+              </a:rPr>
+              <a:t> round(</a:t>
+            </a:r>
+            <a:r>
+              <a:rPr lang="es-CO" sz="1200" dirty="0" err="1">
+                <a:latin typeface="Consolas" panose="020B0609020204030204" pitchFamily="49" charset="0"/>
+              </a:rPr>
+              <a:t>celsius_a_fahrenheit</a:t>
+            </a:r>
+            <a:r>
+              <a:rPr lang="es-CO" sz="1200" dirty="0">
+                <a:latin typeface="Consolas" panose="020B0609020204030204" pitchFamily="49" charset="0"/>
+              </a:rPr>
+              <a:t>(0), 2) == 32.0</a:t>
+            </a:r>
+          </a:p>
+          <a:p>
+            <a:r>
+              <a:rPr lang="es-CO" sz="1200" dirty="0">
+                <a:latin typeface="Consolas" panose="020B0609020204030204" pitchFamily="49" charset="0"/>
+              </a:rPr>
+              <a:t>34  </a:t>
+            </a:r>
+            <a:r>
+              <a:rPr lang="es-CO" sz="1200" dirty="0" err="1">
+                <a:latin typeface="Consolas" panose="020B0609020204030204" pitchFamily="49" charset="0"/>
+              </a:rPr>
+              <a:t>assert</a:t>
+            </a:r>
+            <a:r>
+              <a:rPr lang="es-CO" sz="1200" dirty="0">
+                <a:latin typeface="Consolas" panose="020B0609020204030204" pitchFamily="49" charset="0"/>
+              </a:rPr>
+              <a:t> round(</a:t>
+            </a:r>
+            <a:r>
+              <a:rPr lang="es-CO" sz="1200" dirty="0" err="1">
+                <a:latin typeface="Consolas" panose="020B0609020204030204" pitchFamily="49" charset="0"/>
+              </a:rPr>
+              <a:t>celsius_a_kelvin</a:t>
+            </a:r>
+            <a:r>
+              <a:rPr lang="es-CO" sz="1200" dirty="0">
+                <a:latin typeface="Consolas" panose="020B0609020204030204" pitchFamily="49" charset="0"/>
+              </a:rPr>
+              <a:t>(25), 2) == 298.15</a:t>
+            </a:r>
+          </a:p>
+          <a:p>
+            <a:r>
+              <a:rPr lang="es-CO" sz="1200" dirty="0">
+                <a:latin typeface="Consolas" panose="020B0609020204030204" pitchFamily="49" charset="0"/>
+              </a:rPr>
+              <a:t>35  </a:t>
+            </a:r>
+            <a:r>
+              <a:rPr lang="es-CO" sz="1200" dirty="0" err="1">
+                <a:latin typeface="Consolas" panose="020B0609020204030204" pitchFamily="49" charset="0"/>
+              </a:rPr>
+              <a:t>assert</a:t>
+            </a:r>
+            <a:r>
+              <a:rPr lang="es-CO" sz="1200" dirty="0">
+                <a:latin typeface="Consolas" panose="020B0609020204030204" pitchFamily="49" charset="0"/>
+              </a:rPr>
+              <a:t> round(</a:t>
+            </a:r>
+            <a:r>
+              <a:rPr lang="es-CO" sz="1200" dirty="0" err="1">
+                <a:latin typeface="Consolas" panose="020B0609020204030204" pitchFamily="49" charset="0"/>
+              </a:rPr>
+              <a:t>celsius_a_kelvin</a:t>
+            </a:r>
+            <a:r>
+              <a:rPr lang="es-CO" sz="1200" dirty="0">
+                <a:latin typeface="Consolas" panose="020B0609020204030204" pitchFamily="49" charset="0"/>
+              </a:rPr>
+              <a:t>(-273.15), 2) == 0.0</a:t>
+            </a:r>
+          </a:p>
+          <a:p>
+            <a:r>
+              <a:rPr lang="es-CO" sz="1200" dirty="0">
+                <a:latin typeface="Consolas" panose="020B0609020204030204" pitchFamily="49" charset="0"/>
+              </a:rPr>
+              <a:t>36  </a:t>
+            </a:r>
+            <a:r>
+              <a:rPr lang="es-CO" sz="1200" dirty="0" err="1">
+                <a:latin typeface="Consolas" panose="020B0609020204030204" pitchFamily="49" charset="0"/>
+              </a:rPr>
+              <a:t>print</a:t>
+            </a:r>
+            <a:r>
+              <a:rPr lang="es-CO" sz="1200" dirty="0">
+                <a:latin typeface="Consolas" panose="020B0609020204030204" pitchFamily="49" charset="0"/>
+              </a:rPr>
+              <a:t>("Pruebas de conversiones: todas pasaron")</a:t>
+            </a:r>
+          </a:p>
+        </p:txBody>
+      </p:sp>
+      <p:sp>
+        <p:nvSpPr>
+          <p:cNvPr id="10" name="CuadroTexto 9">
+            <a:extLst>
+              <a:ext uri="{FF2B5EF4-FFF2-40B4-BE49-F238E27FC236}">
+                <a16:creationId xmlns:a16="http://schemas.microsoft.com/office/drawing/2014/main" id="{71EF99D5-BFD2-4E0D-9096-B360583F1740}"/>
+              </a:ext>
+            </a:extLst>
+          </p:cNvPr>
+          <p:cNvSpPr txBox="1"/>
+          <p:nvPr/>
+        </p:nvSpPr>
+        <p:spPr>
+          <a:xfrm>
+            <a:off x="56639" y="6167045"/>
+            <a:ext cx="8979857" cy="646331"/>
+          </a:xfrm>
+          <a:prstGeom prst="rect">
+            <a:avLst/>
+          </a:prstGeom>
+          <a:solidFill>
+            <a:schemeClr val="bg2"/>
+          </a:solidFill>
+        </p:spPr>
+        <p:txBody>
+          <a:bodyPr wrap="square">
+            <a:spAutoFit/>
+          </a:bodyPr>
+          <a:lstStyle/>
+          <a:p>
+            <a:r>
+              <a:rPr lang="es-MX" b="1" dirty="0"/>
+              <a:t>Pregunta</a:t>
+            </a:r>
+            <a:r>
+              <a:rPr lang="es-MX" dirty="0"/>
+              <a:t>: ¿le interesa al usuario del menú ver el resultado de las pruebas? ¿Qué ocurriría si una de ellas fallara?</a:t>
+            </a:r>
+            <a:endParaRPr lang="es-CO" dirty="0"/>
+          </a:p>
+        </p:txBody>
+      </p:sp>
+      <p:pic>
+        <p:nvPicPr>
+          <p:cNvPr id="4" name="Imagen 3">
+            <a:extLst>
+              <a:ext uri="{FF2B5EF4-FFF2-40B4-BE49-F238E27FC236}">
+                <a16:creationId xmlns:a16="http://schemas.microsoft.com/office/drawing/2014/main" id="{736C0B0D-4086-4F82-8773-6EBDB59BA476}"/>
+              </a:ext>
+            </a:extLst>
+          </p:cNvPr>
+          <p:cNvPicPr>
+            <a:picLocks noChangeAspect="1"/>
+          </p:cNvPicPr>
+          <p:nvPr/>
+        </p:nvPicPr>
+        <p:blipFill>
+          <a:blip r:embed="rId2">
+            <a:extLst>
+              <a:ext uri="{28A0092B-C50C-407E-A947-70E740481C1C}">
+                <a14:useLocalDpi xmlns:a14="http://schemas.microsoft.com/office/drawing/2010/main" val="0"/>
+              </a:ext>
+            </a:extLst>
+          </a:blip>
+          <a:stretch>
+            <a:fillRect/>
+          </a:stretch>
+        </p:blipFill>
+        <p:spPr>
+          <a:xfrm>
+            <a:off x="683568" y="1772816"/>
+            <a:ext cx="7352769" cy="2736304"/>
+          </a:xfrm>
+          <a:prstGeom prst="rect">
+            <a:avLst/>
+          </a:prstGeom>
+        </p:spPr>
+      </p:pic>
     </p:spTree>
     <p:extLst>
       <p:ext uri="{BB962C8B-B14F-4D97-AF65-F5344CB8AC3E}">
-        <p14:creationId xmlns:p14="http://schemas.microsoft.com/office/powerpoint/2010/main" val="568862748"/>
+        <p14:creationId xmlns:p14="http://schemas.microsoft.com/office/powerpoint/2010/main" val="1355142356"/>
       </p:ext>
     </p:extLst>
   </p:cSld>
@@ -39474,7 +38494,7 @@
       </p:grpSpPr>
       <p:sp>
         <p:nvSpPr>
-          <p:cNvPr id="2" name="Title 1"/>
+          <p:cNvPr id="5" name="4 Título"/>
           <p:cNvSpPr>
             <a:spLocks noGrp="1"/>
           </p:cNvSpPr>
@@ -39484,33 +38504,342 @@
         </p:nvSpPr>
         <p:spPr>
           <a:xfrm>
-            <a:off x="323528" y="180617"/>
-            <a:ext cx="8191822" cy="728103"/>
+            <a:off x="323528" y="116632"/>
+            <a:ext cx="8675832" cy="794653"/>
           </a:xfrm>
         </p:spPr>
         <p:txBody>
-          <a:bodyPr/>
+          <a:bodyPr>
+            <a:noAutofit/>
+          </a:bodyPr>
           <a:lstStyle/>
           <a:p>
             <a:r>
-              <a:rPr lang="es-CO" dirty="0"/>
-              <a:t>Eso es todo amigos</a:t>
-            </a:r>
-            <a:endParaRPr lang="en-US" dirty="0"/>
+              <a:rPr lang="es-MX" sz="2800" dirty="0"/>
+              <a:t>¿Cómo sabe un archivo si fue ejecutado o importado?</a:t>
+            </a:r>
+            <a:endParaRPr lang="es-MX" sz="2400" dirty="0">
+              <a:latin typeface="Consolas" panose="020B0609020204030204" pitchFamily="49" charset="0"/>
+            </a:endParaRPr>
+          </a:p>
+        </p:txBody>
+      </p:sp>
+      <p:sp>
+        <p:nvSpPr>
+          <p:cNvPr id="13" name="12 Rectángulo"/>
+          <p:cNvSpPr/>
+          <p:nvPr/>
+        </p:nvSpPr>
+        <p:spPr>
+          <a:xfrm>
+            <a:off x="144639" y="775732"/>
+            <a:ext cx="8835218" cy="4955203"/>
+          </a:xfrm>
+          <a:prstGeom prst="rect">
+            <a:avLst/>
+          </a:prstGeom>
+        </p:spPr>
+        <p:txBody>
+          <a:bodyPr wrap="square">
+            <a:spAutoFit/>
+          </a:bodyPr>
+          <a:lstStyle/>
+          <a:p>
+            <a:pPr marL="342900" indent="-342900" rtl="0">
+              <a:buFont typeface="Arial" panose="020B0604020202020204" pitchFamily="34" charset="0"/>
+              <a:buChar char="•"/>
+            </a:pPr>
+            <a:r>
+              <a:rPr lang="es-MX" sz="2000" dirty="0"/>
+              <a:t>Python le asigna a cada archivo la variable especial </a:t>
+            </a:r>
+            <a:r>
+              <a:rPr lang="es-MX" b="1" dirty="0">
+                <a:latin typeface="Consolas" panose="020B0609020204030204" pitchFamily="49" charset="0"/>
+              </a:rPr>
+              <a:t>__name__</a:t>
+            </a:r>
+            <a:r>
+              <a:rPr lang="es-MX" sz="2000" dirty="0"/>
+              <a:t>:</a:t>
+            </a:r>
+          </a:p>
+          <a:p>
+            <a:pPr marL="800100" lvl="1" indent="-342900">
+              <a:buFont typeface="Arial" panose="020B0604020202020204" pitchFamily="34" charset="0"/>
+              <a:buChar char="•"/>
+            </a:pPr>
+            <a:r>
+              <a:rPr lang="es-MX" sz="2000" dirty="0"/>
+              <a:t>Vale </a:t>
+            </a:r>
+            <a:r>
+              <a:rPr lang="es-MX" b="1" dirty="0">
+                <a:latin typeface="Consolas" panose="020B0609020204030204" pitchFamily="49" charset="0"/>
+              </a:rPr>
+              <a:t>"__main__"</a:t>
+            </a:r>
+            <a:r>
+              <a:rPr lang="es-MX" sz="2000" dirty="0"/>
+              <a:t> si el archivo se ejecutó directamente.</a:t>
+            </a:r>
+          </a:p>
+          <a:p>
+            <a:pPr marL="800100" lvl="1" indent="-342900">
+              <a:buFont typeface="Arial" panose="020B0604020202020204" pitchFamily="34" charset="0"/>
+              <a:buChar char="•"/>
+            </a:pPr>
+            <a:r>
+              <a:rPr lang="es-MX" sz="2000" dirty="0"/>
+              <a:t>Vale el </a:t>
+            </a:r>
+            <a:r>
+              <a:rPr lang="es-MX" sz="2000" b="1" dirty="0"/>
+              <a:t>nombre del módulo</a:t>
+            </a:r>
+            <a:r>
+              <a:rPr lang="es-MX" sz="2000" dirty="0"/>
+              <a:t> (sin </a:t>
+            </a:r>
+            <a:r>
+              <a:rPr lang="es-MX" b="1" dirty="0">
+                <a:latin typeface="Consolas" panose="020B0609020204030204" pitchFamily="49" charset="0"/>
+              </a:rPr>
+              <a:t>.py</a:t>
+            </a:r>
+            <a:r>
+              <a:rPr lang="es-MX" sz="2000" dirty="0"/>
+              <a:t>) si el archivo fue importado.</a:t>
+            </a:r>
+          </a:p>
+          <a:p>
+            <a:pPr marL="342900" indent="-342900" rtl="0">
+              <a:buFont typeface="Arial" panose="020B0604020202020204" pitchFamily="34" charset="0"/>
+              <a:buChar char="•"/>
+            </a:pPr>
+            <a:endParaRPr lang="es-MX" sz="2000" dirty="0"/>
+          </a:p>
+          <a:p>
+            <a:pPr marL="342900" indent="-342900" rtl="0">
+              <a:buFont typeface="Arial" panose="020B0604020202020204" pitchFamily="34" charset="0"/>
+              <a:buChar char="•"/>
+            </a:pPr>
+            <a:endParaRPr lang="es-MX" sz="2000" dirty="0"/>
+          </a:p>
+          <a:p>
+            <a:pPr marL="342900" indent="-342900" rtl="0">
+              <a:buFont typeface="Arial" panose="020B0604020202020204" pitchFamily="34" charset="0"/>
+              <a:buChar char="•"/>
+            </a:pPr>
+            <a:endParaRPr lang="es-MX" sz="2000" dirty="0"/>
+          </a:p>
+          <a:p>
+            <a:pPr marL="342900" indent="-342900" rtl="0">
+              <a:buFont typeface="Arial" panose="020B0604020202020204" pitchFamily="34" charset="0"/>
+              <a:buChar char="•"/>
+            </a:pPr>
+            <a:endParaRPr lang="es-MX" sz="2000" dirty="0"/>
+          </a:p>
+          <a:p>
+            <a:pPr marL="342900" indent="-342900" rtl="0">
+              <a:buFont typeface="Arial" panose="020B0604020202020204" pitchFamily="34" charset="0"/>
+              <a:buChar char="•"/>
+            </a:pPr>
+            <a:endParaRPr lang="es-MX" sz="2000" dirty="0"/>
+          </a:p>
+          <a:p>
+            <a:pPr marL="342900" indent="-342900" rtl="0">
+              <a:buFont typeface="Arial" panose="020B0604020202020204" pitchFamily="34" charset="0"/>
+              <a:buChar char="•"/>
+            </a:pPr>
+            <a:endParaRPr lang="es-MX" sz="2000" dirty="0"/>
+          </a:p>
+          <a:p>
+            <a:pPr marL="342900" indent="-342900" rtl="0">
+              <a:buFont typeface="Arial" panose="020B0604020202020204" pitchFamily="34" charset="0"/>
+              <a:buChar char="•"/>
+            </a:pPr>
+            <a:endParaRPr lang="es-MX" sz="2000" dirty="0"/>
+          </a:p>
+          <a:p>
+            <a:pPr marL="342900" indent="-342900" rtl="0">
+              <a:buFont typeface="Arial" panose="020B0604020202020204" pitchFamily="34" charset="0"/>
+              <a:buChar char="•"/>
+            </a:pPr>
+            <a:endParaRPr lang="es-MX" sz="2000" dirty="0"/>
+          </a:p>
+          <a:p>
+            <a:pPr marL="342900" indent="-342900" rtl="0">
+              <a:buFont typeface="Arial" panose="020B0604020202020204" pitchFamily="34" charset="0"/>
+              <a:buChar char="•"/>
+            </a:pPr>
+            <a:r>
+              <a:rPr lang="es-CO" sz="2000" b="1" dirty="0"/>
+              <a:t>Archivo</a:t>
+            </a:r>
+            <a:r>
+              <a:rPr lang="es-CO" sz="2000" dirty="0"/>
+              <a:t>: </a:t>
+            </a:r>
+            <a:r>
+              <a:rPr lang="es-CO" dirty="0">
+                <a:latin typeface="Consolas" panose="020B0609020204030204" pitchFamily="49" charset="0"/>
+              </a:rPr>
+              <a:t>0_name/saludo.py</a:t>
+            </a:r>
+          </a:p>
+          <a:p>
+            <a:pPr marL="342900" indent="-342900" rtl="0">
+              <a:buFont typeface="Arial" panose="020B0604020202020204" pitchFamily="34" charset="0"/>
+              <a:buChar char="•"/>
+            </a:pPr>
+            <a:endParaRPr lang="es-CO" dirty="0">
+              <a:latin typeface="Consolas" panose="020B0609020204030204" pitchFamily="49" charset="0"/>
+            </a:endParaRPr>
+          </a:p>
+          <a:p>
+            <a:pPr marL="342900" indent="-342900" rtl="0">
+              <a:buFont typeface="Arial" panose="020B0604020202020204" pitchFamily="34" charset="0"/>
+              <a:buChar char="•"/>
+            </a:pPr>
+            <a:endParaRPr lang="es-CO" dirty="0"/>
+          </a:p>
+          <a:p>
+            <a:pPr marL="342900" indent="-342900">
+              <a:buFont typeface="Arial" panose="020B0604020202020204" pitchFamily="34" charset="0"/>
+              <a:buChar char="•"/>
+            </a:pPr>
+            <a:r>
+              <a:rPr lang="es-CO" sz="2000" b="1" dirty="0"/>
+              <a:t>Archivo</a:t>
+            </a:r>
+            <a:r>
+              <a:rPr lang="es-CO" sz="2000" dirty="0"/>
+              <a:t>: </a:t>
+            </a:r>
+            <a:r>
+              <a:rPr lang="es-CO" dirty="0">
+                <a:latin typeface="Consolas" panose="020B0609020204030204" pitchFamily="49" charset="0"/>
+              </a:rPr>
+              <a:t>0_name/principal.py</a:t>
+            </a:r>
+          </a:p>
+          <a:p>
+            <a:pPr marL="342900" indent="-342900" rtl="0">
+              <a:buFont typeface="Arial" panose="020B0604020202020204" pitchFamily="34" charset="0"/>
+              <a:buChar char="•"/>
+            </a:pPr>
+            <a:endParaRPr lang="es-CO" sz="2000" dirty="0"/>
+          </a:p>
+        </p:txBody>
+      </p:sp>
+      <p:sp>
+        <p:nvSpPr>
+          <p:cNvPr id="9" name="CuadroTexto 8">
+            <a:extLst>
+              <a:ext uri="{FF2B5EF4-FFF2-40B4-BE49-F238E27FC236}">
+                <a16:creationId xmlns:a16="http://schemas.microsoft.com/office/drawing/2014/main" id="{CEC4C591-D670-4243-B7E9-14D4E839D6C7}"/>
+              </a:ext>
+            </a:extLst>
+          </p:cNvPr>
+          <p:cNvSpPr txBox="1"/>
+          <p:nvPr/>
+        </p:nvSpPr>
+        <p:spPr>
+          <a:xfrm>
+            <a:off x="2366882" y="4606619"/>
+            <a:ext cx="4770276" cy="276999"/>
+          </a:xfrm>
+          <a:prstGeom prst="rect">
+            <a:avLst/>
+          </a:prstGeom>
+          <a:noFill/>
+          <a:ln>
+            <a:solidFill>
+              <a:schemeClr val="tx1"/>
+            </a:solidFill>
+          </a:ln>
+        </p:spPr>
+        <p:txBody>
+          <a:bodyPr wrap="square">
+            <a:spAutoFit/>
+          </a:bodyPr>
+          <a:lstStyle/>
+          <a:p>
+            <a:r>
+              <a:rPr lang="nl-NL" sz="1200" dirty="0">
+                <a:latin typeface="Consolas" panose="020B0609020204030204" pitchFamily="49" charset="0"/>
+              </a:rPr>
+              <a:t>1  print("En saludo.py, __name__ vale:", __name__)</a:t>
+            </a:r>
+            <a:endParaRPr lang="es-CO" sz="1200" dirty="0">
+              <a:latin typeface="Consolas" panose="020B0609020204030204" pitchFamily="49" charset="0"/>
+            </a:endParaRPr>
+          </a:p>
+        </p:txBody>
+      </p:sp>
+      <p:sp>
+        <p:nvSpPr>
+          <p:cNvPr id="10" name="CuadroTexto 9">
+            <a:extLst>
+              <a:ext uri="{FF2B5EF4-FFF2-40B4-BE49-F238E27FC236}">
+                <a16:creationId xmlns:a16="http://schemas.microsoft.com/office/drawing/2014/main" id="{71EF99D5-BFD2-4E0D-9096-B360583F1740}"/>
+              </a:ext>
+            </a:extLst>
+          </p:cNvPr>
+          <p:cNvSpPr txBox="1"/>
+          <p:nvPr/>
+        </p:nvSpPr>
+        <p:spPr>
+          <a:xfrm>
+            <a:off x="56639" y="6444044"/>
+            <a:ext cx="9045797" cy="369332"/>
+          </a:xfrm>
+          <a:prstGeom prst="rect">
+            <a:avLst/>
+          </a:prstGeom>
+          <a:solidFill>
+            <a:schemeClr val="bg2"/>
+          </a:solidFill>
+        </p:spPr>
+        <p:txBody>
+          <a:bodyPr wrap="square">
+            <a:spAutoFit/>
+          </a:bodyPr>
+          <a:lstStyle/>
+          <a:p>
+            <a:r>
+              <a:rPr lang="es-MX" b="1" dirty="0"/>
+              <a:t>Idea clave</a:t>
+            </a:r>
+            <a:r>
+              <a:rPr lang="es-MX" dirty="0"/>
+              <a:t>: el mismo archivo </a:t>
+            </a:r>
+            <a:r>
+              <a:rPr lang="es-MX" sz="1600" b="1" dirty="0">
+                <a:latin typeface="Consolas" panose="020B0609020204030204" pitchFamily="49" charset="0"/>
+              </a:rPr>
+              <a:t>saludo.py</a:t>
+            </a:r>
+            <a:r>
+              <a:rPr lang="es-MX" dirty="0"/>
+              <a:t> imprime valores distintos según cómo se ejecute. </a:t>
+            </a:r>
           </a:p>
         </p:txBody>
       </p:sp>
       <p:pic>
         <p:nvPicPr>
-          <p:cNvPr id="4" name="Picture 4">
+          <p:cNvPr id="3" name="Imagen 2">
             <a:extLst>
               <a:ext uri="{FF2B5EF4-FFF2-40B4-BE49-F238E27FC236}">
-                <a16:creationId xmlns:a16="http://schemas.microsoft.com/office/drawing/2014/main" id="{7F35EEF4-F126-467F-A5BB-259AA64991BD}"/>
+                <a16:creationId xmlns:a16="http://schemas.microsoft.com/office/drawing/2014/main" id="{3108AD38-D839-4488-A3CF-AA91A617BFB7}"/>
               </a:ext>
             </a:extLst>
           </p:cNvPr>
           <p:cNvPicPr>
-            <a:picLocks noChangeAspect="1" noChangeArrowheads="1"/>
+            <a:picLocks noChangeAspect="1"/>
           </p:cNvPicPr>
           <p:nvPr/>
         </p:nvPicPr>
@@ -39522,51 +38851,46 @@
               </a:ext>
             </a:extLst>
           </a:blip>
-          <a:srcRect/>
           <a:stretch>
             <a:fillRect/>
           </a:stretch>
         </p:blipFill>
-        <p:spPr bwMode="auto">
+        <p:spPr>
           <a:xfrm>
-            <a:off x="4211960" y="912200"/>
-            <a:ext cx="4113633" cy="5868856"/>
+            <a:off x="201667" y="1772816"/>
+            <a:ext cx="8708561" cy="2274335"/>
+          </a:xfrm>
+          <a:prstGeom prst="rect">
+            <a:avLst/>
+          </a:prstGeom>
+        </p:spPr>
+      </p:pic>
+      <p:sp>
+        <p:nvSpPr>
+          <p:cNvPr id="15" name="CuadroTexto 14">
+            <a:extLst>
+              <a:ext uri="{FF2B5EF4-FFF2-40B4-BE49-F238E27FC236}">
+                <a16:creationId xmlns:a16="http://schemas.microsoft.com/office/drawing/2014/main" id="{F74A0C38-9351-4A4D-B73C-952B2720623C}"/>
+              </a:ext>
+            </a:extLst>
+          </p:cNvPr>
+          <p:cNvSpPr txBox="1"/>
+          <p:nvPr/>
+        </p:nvSpPr>
+        <p:spPr>
+          <a:xfrm>
+            <a:off x="2366882" y="5500102"/>
+            <a:ext cx="4770276" cy="461665"/>
           </a:xfrm>
           <a:prstGeom prst="rect">
             <a:avLst/>
           </a:prstGeom>
           <a:noFill/>
-          <a:extLst>
-            <a:ext uri="{909E8E84-426E-40DD-AFC4-6F175D3DCCD1}">
-              <a14:hiddenFill xmlns:a14="http://schemas.microsoft.com/office/drawing/2010/main">
-                <a:solidFill>
-                  <a:srgbClr val="FFFFFF"/>
-                </a:solidFill>
-              </a14:hiddenFill>
-            </a:ext>
-          </a:extLst>
-        </p:spPr>
-      </p:pic>
-      <p:sp>
-        <p:nvSpPr>
-          <p:cNvPr id="5" name="7 Rectángulo">
-            <a:extLst>
-              <a:ext uri="{FF2B5EF4-FFF2-40B4-BE49-F238E27FC236}">
-                <a16:creationId xmlns:a16="http://schemas.microsoft.com/office/drawing/2014/main" id="{27C7AA4C-274E-4F17-B614-41C209AA98D3}"/>
-              </a:ext>
-            </a:extLst>
-          </p:cNvPr>
-          <p:cNvSpPr/>
-          <p:nvPr/>
-        </p:nvSpPr>
-        <p:spPr>
-          <a:xfrm>
-            <a:off x="101021" y="6519446"/>
-            <a:ext cx="3678892" cy="261610"/>
-          </a:xfrm>
-          <a:prstGeom prst="rect">
-            <a:avLst/>
-          </a:prstGeom>
+          <a:ln>
+            <a:solidFill>
+              <a:schemeClr val="tx1"/>
+            </a:solidFill>
+          </a:ln>
         </p:spPr>
         <p:txBody>
           <a:bodyPr wrap="square">
@@ -39575,69 +38899,29 @@
           <a:lstStyle/>
           <a:p>
             <a:r>
-              <a:rPr lang="es-CO" sz="1100" dirty="0">
-                <a:hlinkClick r:id="rId3"/>
-              </a:rPr>
-              <a:t>https://phdcomics.com/comics/archive.php?comicid=1431</a:t>
-            </a:r>
-            <a:r>
-              <a:rPr lang="es-CO" sz="1100" dirty="0"/>
-              <a:t> </a:t>
-            </a:r>
+              <a:rPr lang="nl-NL" sz="1200" dirty="0">
+                <a:latin typeface="Consolas" panose="020B0609020204030204" pitchFamily="49" charset="0"/>
+              </a:rPr>
+              <a:t>1  import saludo</a:t>
+            </a:r>
+          </a:p>
+          <a:p>
+            <a:r>
+              <a:rPr lang="nl-NL" sz="1200" dirty="0">
+                <a:latin typeface="Consolas" panose="020B0609020204030204" pitchFamily="49" charset="0"/>
+              </a:rPr>
+              <a:t>2  print("En principal.py, __name__ vale:", __name__)</a:t>
+            </a:r>
+            <a:endParaRPr lang="es-CO" sz="1200" dirty="0">
+              <a:latin typeface="Consolas" panose="020B0609020204030204" pitchFamily="49" charset="0"/>
+            </a:endParaRPr>
           </a:p>
         </p:txBody>
       </p:sp>
-      <p:pic>
-        <p:nvPicPr>
-          <p:cNvPr id="2050" name="Picture 2" descr="Ouch Images – Browse 81,244 Stock Photos, Vectors, and Video | Adobe Stock">
-            <a:extLst>
-              <a:ext uri="{FF2B5EF4-FFF2-40B4-BE49-F238E27FC236}">
-                <a16:creationId xmlns:a16="http://schemas.microsoft.com/office/drawing/2014/main" id="{190AEE93-FCB4-45D0-A740-34697C5E7782}"/>
-              </a:ext>
-            </a:extLst>
-          </p:cNvPr>
-          <p:cNvPicPr>
-            <a:picLocks noChangeAspect="1" noChangeArrowheads="1"/>
-          </p:cNvPicPr>
-          <p:nvPr/>
-        </p:nvPicPr>
-        <p:blipFill>
-          <a:blip r:embed="rId4">
-            <a:extLst>
-              <a:ext uri="{28A0092B-C50C-407E-A947-70E740481C1C}">
-                <a14:useLocalDpi xmlns:a14="http://schemas.microsoft.com/office/drawing/2010/main" val="0"/>
-              </a:ext>
-            </a:extLst>
-          </a:blip>
-          <a:srcRect/>
-          <a:stretch>
-            <a:fillRect/>
-          </a:stretch>
-        </p:blipFill>
-        <p:spPr bwMode="auto">
-          <a:xfrm>
-            <a:off x="297451" y="2496793"/>
-            <a:ext cx="3563955" cy="2434580"/>
-          </a:xfrm>
-          <a:prstGeom prst="rect">
-            <a:avLst/>
-          </a:prstGeom>
-          <a:noFill/>
-          <a:extLst>
-            <a:ext uri="{909E8E84-426E-40DD-AFC4-6F175D3DCCD1}">
-              <a14:hiddenFill xmlns:a14="http://schemas.microsoft.com/office/drawing/2010/main">
-                <a:solidFill>
-                  <a:srgbClr val="FFFFFF"/>
-                </a:solidFill>
-              </a14:hiddenFill>
-            </a:ext>
-          </a:extLst>
-        </p:spPr>
-      </p:pic>
     </p:spTree>
     <p:extLst>
       <p:ext uri="{BB962C8B-B14F-4D97-AF65-F5344CB8AC3E}">
-        <p14:creationId xmlns:p14="http://schemas.microsoft.com/office/powerpoint/2010/main" val="3024962735"/>
+        <p14:creationId xmlns:p14="http://schemas.microsoft.com/office/powerpoint/2010/main" val="1999487133"/>
       </p:ext>
     </p:extLst>
   </p:cSld>
@@ -40141,6 +39425,5713 @@
 </p:sld>
 </file>
 
+<file path=ppt/slides/slide50.xml><?xml version="1.0" encoding="utf-8"?>
+<p:sld xmlns:a="http://schemas.openxmlformats.org/drawingml/2006/main" xmlns:r="http://schemas.openxmlformats.org/officeDocument/2006/relationships" xmlns:p="http://schemas.openxmlformats.org/presentationml/2006/main">
+  <p:cSld>
+    <p:spTree>
+      <p:nvGrpSpPr>
+        <p:cNvPr id="1" name=""/>
+        <p:cNvGrpSpPr/>
+        <p:nvPr/>
+      </p:nvGrpSpPr>
+      <p:grpSpPr>
+        <a:xfrm>
+          <a:off x="0" y="0"/>
+          <a:ext cx="0" cy="0"/>
+          <a:chOff x="0" y="0"/>
+          <a:chExt cx="0" cy="0"/>
+        </a:xfrm>
+      </p:grpSpPr>
+      <p:sp>
+        <p:nvSpPr>
+          <p:cNvPr id="5" name="4 Título"/>
+          <p:cNvSpPr>
+            <a:spLocks noGrp="1"/>
+          </p:cNvSpPr>
+          <p:nvPr>
+            <p:ph type="title"/>
+          </p:nvPr>
+        </p:nvSpPr>
+        <p:spPr>
+          <a:xfrm>
+            <a:off x="323528" y="116632"/>
+            <a:ext cx="8675832" cy="794653"/>
+          </a:xfrm>
+        </p:spPr>
+        <p:txBody>
+          <a:bodyPr>
+            <a:noAutofit/>
+          </a:bodyPr>
+          <a:lstStyle/>
+          <a:p>
+            <a:r>
+              <a:rPr lang="es-MX" sz="3600" dirty="0"/>
+              <a:t>Opción 1: proteger las pruebas con la guarda</a:t>
+            </a:r>
+            <a:endParaRPr lang="es-MX" sz="3200" dirty="0">
+              <a:latin typeface="Consolas" panose="020B0609020204030204" pitchFamily="49" charset="0"/>
+            </a:endParaRPr>
+          </a:p>
+        </p:txBody>
+      </p:sp>
+      <p:sp>
+        <p:nvSpPr>
+          <p:cNvPr id="13" name="12 Rectángulo"/>
+          <p:cNvSpPr/>
+          <p:nvPr/>
+        </p:nvSpPr>
+        <p:spPr>
+          <a:xfrm>
+            <a:off x="144639" y="692696"/>
+            <a:ext cx="8835218" cy="4093428"/>
+          </a:xfrm>
+          <a:prstGeom prst="rect">
+            <a:avLst/>
+          </a:prstGeom>
+        </p:spPr>
+        <p:txBody>
+          <a:bodyPr wrap="square">
+            <a:spAutoFit/>
+          </a:bodyPr>
+          <a:lstStyle/>
+          <a:p>
+            <a:pPr marL="342900" indent="-342900" rtl="0">
+              <a:buFont typeface="Arial" panose="020B0604020202020204" pitchFamily="34" charset="0"/>
+              <a:buChar char="•"/>
+            </a:pPr>
+            <a:r>
+              <a:rPr lang="es-MX" sz="2000" dirty="0"/>
+              <a:t>Las pruebas se colocan dentro de </a:t>
+            </a:r>
+            <a:r>
+              <a:rPr lang="es-MX" b="1" dirty="0">
+                <a:latin typeface="Consolas" panose="020B0609020204030204" pitchFamily="49" charset="0"/>
+              </a:rPr>
+              <a:t>if __name__ == "__main__":</a:t>
+            </a:r>
+            <a:r>
+              <a:rPr lang="es-MX" sz="2000" dirty="0"/>
+              <a:t>.</a:t>
+            </a:r>
+          </a:p>
+          <a:p>
+            <a:pPr marL="342900" indent="-342900" rtl="0">
+              <a:buFont typeface="Arial" panose="020B0604020202020204" pitchFamily="34" charset="0"/>
+              <a:buChar char="•"/>
+            </a:pPr>
+            <a:r>
+              <a:rPr lang="es-MX" sz="2000" dirty="0"/>
+              <a:t>Así solo se ejecutan cuando el módulo se corre directamente, y no cuando otro archivo lo importa.</a:t>
+            </a:r>
+          </a:p>
+          <a:p>
+            <a:pPr marL="342900" indent="-342900" rtl="0">
+              <a:buFont typeface="Arial" panose="020B0604020202020204" pitchFamily="34" charset="0"/>
+              <a:buChar char="•"/>
+            </a:pPr>
+            <a:endParaRPr lang="es-MX" sz="2000" dirty="0"/>
+          </a:p>
+          <a:p>
+            <a:pPr marL="342900" indent="-342900" rtl="0">
+              <a:buFont typeface="Arial" panose="020B0604020202020204" pitchFamily="34" charset="0"/>
+              <a:buChar char="•"/>
+            </a:pPr>
+            <a:endParaRPr lang="es-MX" sz="2000" dirty="0"/>
+          </a:p>
+          <a:p>
+            <a:pPr marL="342900" indent="-342900" rtl="0">
+              <a:buFont typeface="Arial" panose="020B0604020202020204" pitchFamily="34" charset="0"/>
+              <a:buChar char="•"/>
+            </a:pPr>
+            <a:endParaRPr lang="es-MX" sz="2000" dirty="0"/>
+          </a:p>
+          <a:p>
+            <a:pPr marL="342900" indent="-342900" rtl="0">
+              <a:buFont typeface="Arial" panose="020B0604020202020204" pitchFamily="34" charset="0"/>
+              <a:buChar char="•"/>
+            </a:pPr>
+            <a:endParaRPr lang="es-MX" sz="2000" dirty="0"/>
+          </a:p>
+          <a:p>
+            <a:pPr marL="342900" indent="-342900" rtl="0">
+              <a:buFont typeface="Arial" panose="020B0604020202020204" pitchFamily="34" charset="0"/>
+              <a:buChar char="•"/>
+            </a:pPr>
+            <a:endParaRPr lang="es-MX" sz="2000" dirty="0"/>
+          </a:p>
+          <a:p>
+            <a:pPr marL="342900" indent="-342900" rtl="0">
+              <a:buFont typeface="Arial" panose="020B0604020202020204" pitchFamily="34" charset="0"/>
+              <a:buChar char="•"/>
+            </a:pPr>
+            <a:endParaRPr lang="es-MX" sz="2000" dirty="0"/>
+          </a:p>
+          <a:p>
+            <a:pPr marL="342900" indent="-342900" rtl="0">
+              <a:buFont typeface="Arial" panose="020B0604020202020204" pitchFamily="34" charset="0"/>
+              <a:buChar char="•"/>
+            </a:pPr>
+            <a:endParaRPr lang="es-MX" sz="2000" dirty="0"/>
+          </a:p>
+          <a:p>
+            <a:pPr marL="342900" indent="-342900" rtl="0">
+              <a:buFont typeface="Arial" panose="020B0604020202020204" pitchFamily="34" charset="0"/>
+              <a:buChar char="•"/>
+            </a:pPr>
+            <a:endParaRPr lang="es-MX" sz="2000" dirty="0"/>
+          </a:p>
+          <a:p>
+            <a:pPr marL="342900" indent="-342900" rtl="0">
+              <a:buFont typeface="Arial" panose="020B0604020202020204" pitchFamily="34" charset="0"/>
+              <a:buChar char="•"/>
+            </a:pPr>
+            <a:endParaRPr lang="es-MX" sz="2000" dirty="0"/>
+          </a:p>
+          <a:p>
+            <a:pPr marL="342900" indent="-342900">
+              <a:buFont typeface="Arial" panose="020B0604020202020204" pitchFamily="34" charset="0"/>
+              <a:buChar char="•"/>
+            </a:pPr>
+            <a:r>
+              <a:rPr lang="es-CO" sz="2000" b="1" dirty="0"/>
+              <a:t>Archivo</a:t>
+            </a:r>
+            <a:r>
+              <a:rPr lang="es-CO" sz="2000" dirty="0"/>
+              <a:t>: </a:t>
+            </a:r>
+            <a:r>
+              <a:rPr lang="it-IT" dirty="0">
+                <a:latin typeface="Consolas" panose="020B0609020204030204" pitchFamily="49" charset="0"/>
+              </a:rPr>
+              <a:t> 2_con_guarda/conversiones.py</a:t>
+            </a:r>
+            <a:endParaRPr lang="es-CO" sz="2000" dirty="0"/>
+          </a:p>
+        </p:txBody>
+      </p:sp>
+      <p:sp>
+        <p:nvSpPr>
+          <p:cNvPr id="10" name="CuadroTexto 9">
+            <a:extLst>
+              <a:ext uri="{FF2B5EF4-FFF2-40B4-BE49-F238E27FC236}">
+                <a16:creationId xmlns:a16="http://schemas.microsoft.com/office/drawing/2014/main" id="{71EF99D5-BFD2-4E0D-9096-B360583F1740}"/>
+              </a:ext>
+            </a:extLst>
+          </p:cNvPr>
+          <p:cNvSpPr txBox="1"/>
+          <p:nvPr/>
+        </p:nvSpPr>
+        <p:spPr>
+          <a:xfrm>
+            <a:off x="98203" y="6228601"/>
+            <a:ext cx="9045797" cy="584775"/>
+          </a:xfrm>
+          <a:prstGeom prst="rect">
+            <a:avLst/>
+          </a:prstGeom>
+          <a:solidFill>
+            <a:schemeClr val="bg2"/>
+          </a:solidFill>
+        </p:spPr>
+        <p:txBody>
+          <a:bodyPr wrap="square">
+            <a:spAutoFit/>
+          </a:bodyPr>
+          <a:lstStyle/>
+          <a:p>
+            <a:pPr marL="285750" indent="-285750">
+              <a:buFont typeface="Arial" panose="020B0604020202020204" pitchFamily="34" charset="0"/>
+              <a:buChar char="•"/>
+            </a:pPr>
+            <a:r>
+              <a:rPr lang="es-MX" sz="1600" b="1" dirty="0"/>
+              <a:t>Ventaja</a:t>
+            </a:r>
+            <a:r>
+              <a:rPr lang="es-MX" sz="1600" dirty="0"/>
+              <a:t>: las pruebas quedan junto a las funciones que prueban. </a:t>
+            </a:r>
+          </a:p>
+          <a:p>
+            <a:pPr marL="285750" indent="-285750">
+              <a:buFont typeface="Arial" panose="020B0604020202020204" pitchFamily="34" charset="0"/>
+              <a:buChar char="•"/>
+            </a:pPr>
+            <a:r>
+              <a:rPr lang="es-MX" sz="1600" b="1" dirty="0"/>
+              <a:t>Desventaja</a:t>
+            </a:r>
+            <a:r>
+              <a:rPr lang="es-MX" sz="1600" dirty="0"/>
+              <a:t>: el módulo crece, porque funciones y pruebas comparten el mismo archivo.</a:t>
+            </a:r>
+          </a:p>
+        </p:txBody>
+      </p:sp>
+      <p:sp>
+        <p:nvSpPr>
+          <p:cNvPr id="15" name="CuadroTexto 14">
+            <a:extLst>
+              <a:ext uri="{FF2B5EF4-FFF2-40B4-BE49-F238E27FC236}">
+                <a16:creationId xmlns:a16="http://schemas.microsoft.com/office/drawing/2014/main" id="{F74A0C38-9351-4A4D-B73C-952B2720623C}"/>
+              </a:ext>
+            </a:extLst>
+          </p:cNvPr>
+          <p:cNvSpPr txBox="1"/>
+          <p:nvPr/>
+        </p:nvSpPr>
+        <p:spPr>
+          <a:xfrm>
+            <a:off x="1403648" y="4725144"/>
+            <a:ext cx="6336704" cy="1384995"/>
+          </a:xfrm>
+          <a:prstGeom prst="rect">
+            <a:avLst/>
+          </a:prstGeom>
+          <a:noFill/>
+          <a:ln>
+            <a:solidFill>
+              <a:schemeClr val="tx1"/>
+            </a:solidFill>
+          </a:ln>
+        </p:spPr>
+        <p:txBody>
+          <a:bodyPr wrap="square">
+            <a:spAutoFit/>
+          </a:bodyPr>
+          <a:lstStyle/>
+          <a:p>
+            <a:r>
+              <a:rPr lang="nl-NL" sz="1200" dirty="0">
+                <a:latin typeface="Consolas" panose="020B0609020204030204" pitchFamily="49" charset="0"/>
+              </a:rPr>
+              <a:t>31  ############ Pruebas ##############</a:t>
+            </a:r>
+          </a:p>
+          <a:p>
+            <a:r>
+              <a:rPr lang="nl-NL" sz="1200" dirty="0">
+                <a:latin typeface="Consolas" panose="020B0609020204030204" pitchFamily="49" charset="0"/>
+              </a:rPr>
+              <a:t>32  if __name__ == "__main__":</a:t>
+            </a:r>
+          </a:p>
+          <a:p>
+            <a:r>
+              <a:rPr lang="nl-NL" sz="1200" dirty="0">
+                <a:latin typeface="Consolas" panose="020B0609020204030204" pitchFamily="49" charset="0"/>
+              </a:rPr>
+              <a:t>33      assert round(celsius_a_fahrenheit(100), 2) == 212.0</a:t>
+            </a:r>
+          </a:p>
+          <a:p>
+            <a:r>
+              <a:rPr lang="nl-NL" sz="1200" dirty="0">
+                <a:latin typeface="Consolas" panose="020B0609020204030204" pitchFamily="49" charset="0"/>
+              </a:rPr>
+              <a:t>34      assert round(celsius_a_fahrenheit(0), 2) == 32.0</a:t>
+            </a:r>
+          </a:p>
+          <a:p>
+            <a:r>
+              <a:rPr lang="nl-NL" sz="1200" dirty="0">
+                <a:latin typeface="Consolas" panose="020B0609020204030204" pitchFamily="49" charset="0"/>
+              </a:rPr>
+              <a:t>35      assert round(celsius_a_kelvin(25), 2) == 298.15</a:t>
+            </a:r>
+          </a:p>
+          <a:p>
+            <a:r>
+              <a:rPr lang="nl-NL" sz="1200" dirty="0">
+                <a:latin typeface="Consolas" panose="020B0609020204030204" pitchFamily="49" charset="0"/>
+              </a:rPr>
+              <a:t>36      assert round(celsius_a_kelvin(-273.15), 2) == 0.0</a:t>
+            </a:r>
+          </a:p>
+          <a:p>
+            <a:r>
+              <a:rPr lang="nl-NL" sz="1200" dirty="0">
+                <a:latin typeface="Consolas" panose="020B0609020204030204" pitchFamily="49" charset="0"/>
+              </a:rPr>
+              <a:t>37      print("Pruebas de conversiones: todas pasaron")</a:t>
+            </a:r>
+            <a:endParaRPr lang="es-CO" sz="1200" dirty="0">
+              <a:latin typeface="Consolas" panose="020B0609020204030204" pitchFamily="49" charset="0"/>
+            </a:endParaRPr>
+          </a:p>
+        </p:txBody>
+      </p:sp>
+      <p:pic>
+        <p:nvPicPr>
+          <p:cNvPr id="4" name="Imagen 3">
+            <a:extLst>
+              <a:ext uri="{FF2B5EF4-FFF2-40B4-BE49-F238E27FC236}">
+                <a16:creationId xmlns:a16="http://schemas.microsoft.com/office/drawing/2014/main" id="{A70BE533-2C5C-481C-A3E1-2A8747B70FF1}"/>
+              </a:ext>
+            </a:extLst>
+          </p:cNvPr>
+          <p:cNvPicPr>
+            <a:picLocks noChangeAspect="1"/>
+          </p:cNvPicPr>
+          <p:nvPr/>
+        </p:nvPicPr>
+        <p:blipFill>
+          <a:blip r:embed="rId2" cstate="print">
+            <a:extLst>
+              <a:ext uri="{28A0092B-C50C-407E-A947-70E740481C1C}">
+                <a14:useLocalDpi xmlns:a14="http://schemas.microsoft.com/office/drawing/2010/main" val="0"/>
+              </a:ext>
+            </a:extLst>
+          </a:blip>
+          <a:stretch>
+            <a:fillRect/>
+          </a:stretch>
+        </p:blipFill>
+        <p:spPr>
+          <a:xfrm>
+            <a:off x="971600" y="1628800"/>
+            <a:ext cx="7036327" cy="2705110"/>
+          </a:xfrm>
+          <a:prstGeom prst="rect">
+            <a:avLst/>
+          </a:prstGeom>
+        </p:spPr>
+      </p:pic>
+    </p:spTree>
+    <p:extLst>
+      <p:ext uri="{BB962C8B-B14F-4D97-AF65-F5344CB8AC3E}">
+        <p14:creationId xmlns:p14="http://schemas.microsoft.com/office/powerpoint/2010/main" val="2629279088"/>
+      </p:ext>
+    </p:extLst>
+  </p:cSld>
+  <p:clrMapOvr>
+    <a:masterClrMapping/>
+  </p:clrMapOvr>
+</p:sld>
+</file>
+
+<file path=ppt/slides/slide51.xml><?xml version="1.0" encoding="utf-8"?>
+<p:sld xmlns:a="http://schemas.openxmlformats.org/drawingml/2006/main" xmlns:r="http://schemas.openxmlformats.org/officeDocument/2006/relationships" xmlns:p="http://schemas.openxmlformats.org/presentationml/2006/main">
+  <p:cSld>
+    <p:spTree>
+      <p:nvGrpSpPr>
+        <p:cNvPr id="1" name=""/>
+        <p:cNvGrpSpPr/>
+        <p:nvPr/>
+      </p:nvGrpSpPr>
+      <p:grpSpPr>
+        <a:xfrm>
+          <a:off x="0" y="0"/>
+          <a:ext cx="0" cy="0"/>
+          <a:chOff x="0" y="0"/>
+          <a:chExt cx="0" cy="0"/>
+        </a:xfrm>
+      </p:grpSpPr>
+      <p:sp>
+        <p:nvSpPr>
+          <p:cNvPr id="5" name="4 Título"/>
+          <p:cNvSpPr>
+            <a:spLocks noGrp="1"/>
+          </p:cNvSpPr>
+          <p:nvPr>
+            <p:ph type="title"/>
+          </p:nvPr>
+        </p:nvSpPr>
+        <p:spPr>
+          <a:xfrm>
+            <a:off x="323528" y="116632"/>
+            <a:ext cx="8675832" cy="794653"/>
+          </a:xfrm>
+        </p:spPr>
+        <p:txBody>
+          <a:bodyPr>
+            <a:noAutofit/>
+          </a:bodyPr>
+          <a:lstStyle/>
+          <a:p>
+            <a:r>
+              <a:rPr lang="es-MX" sz="3600" dirty="0"/>
+              <a:t>Opción 2: un archivo de pruebas aparte</a:t>
+            </a:r>
+            <a:endParaRPr lang="es-MX" sz="3200" dirty="0">
+              <a:latin typeface="Consolas" panose="020B0609020204030204" pitchFamily="49" charset="0"/>
+            </a:endParaRPr>
+          </a:p>
+        </p:txBody>
+      </p:sp>
+      <p:sp>
+        <p:nvSpPr>
+          <p:cNvPr id="13" name="12 Rectángulo"/>
+          <p:cNvSpPr/>
+          <p:nvPr/>
+        </p:nvSpPr>
+        <p:spPr>
+          <a:xfrm>
+            <a:off x="144638" y="692696"/>
+            <a:ext cx="8854721" cy="4401205"/>
+          </a:xfrm>
+          <a:prstGeom prst="rect">
+            <a:avLst/>
+          </a:prstGeom>
+        </p:spPr>
+        <p:txBody>
+          <a:bodyPr wrap="square">
+            <a:spAutoFit/>
+          </a:bodyPr>
+          <a:lstStyle/>
+          <a:p>
+            <a:pPr marL="342900" indent="-342900" rtl="0">
+              <a:buFont typeface="Arial" panose="020B0604020202020204" pitchFamily="34" charset="0"/>
+              <a:buChar char="•"/>
+            </a:pPr>
+            <a:r>
+              <a:rPr lang="es-MX" sz="2000" dirty="0"/>
+              <a:t>Las pruebas se trasladan a un archivo propio, que importa el módulo igual que lo hace </a:t>
+            </a:r>
+            <a:r>
+              <a:rPr lang="es-MX" b="1" dirty="0">
+                <a:latin typeface="Consolas" panose="020B0609020204030204" pitchFamily="49" charset="0"/>
+              </a:rPr>
+              <a:t>main.py</a:t>
+            </a:r>
+            <a:r>
+              <a:rPr lang="es-MX" sz="2000" dirty="0"/>
+              <a:t>.</a:t>
+            </a:r>
+          </a:p>
+          <a:p>
+            <a:pPr marL="342900" indent="-342900" rtl="0">
+              <a:buFont typeface="Arial" panose="020B0604020202020204" pitchFamily="34" charset="0"/>
+              <a:buChar char="•"/>
+            </a:pPr>
+            <a:r>
+              <a:rPr lang="es-MX" sz="2000" dirty="0"/>
+              <a:t>La convención es nombrarlo </a:t>
+            </a:r>
+            <a:r>
+              <a:rPr lang="es-MX" b="1" dirty="0">
+                <a:latin typeface="Consolas" panose="020B0609020204030204" pitchFamily="49" charset="0"/>
+              </a:rPr>
+              <a:t>test_&lt;modulo&gt;.py</a:t>
+            </a:r>
+            <a:r>
+              <a:rPr lang="es-MX" sz="2000" dirty="0"/>
+              <a:t>. Herramientas como </a:t>
+            </a:r>
+            <a:r>
+              <a:rPr lang="es-MX" b="1" dirty="0" err="1">
+                <a:latin typeface="Consolas" panose="020B0609020204030204" pitchFamily="49" charset="0"/>
+              </a:rPr>
+              <a:t>pytest</a:t>
+            </a:r>
+            <a:r>
+              <a:rPr lang="es-MX" sz="2000" dirty="0"/>
+              <a:t> reconocen ese nombre.</a:t>
+            </a:r>
+          </a:p>
+          <a:p>
+            <a:pPr marL="342900" indent="-342900" rtl="0">
+              <a:buFont typeface="Arial" panose="020B0604020202020204" pitchFamily="34" charset="0"/>
+              <a:buChar char="•"/>
+            </a:pPr>
+            <a:endParaRPr lang="es-MX" sz="2000" dirty="0"/>
+          </a:p>
+          <a:p>
+            <a:pPr marL="342900" indent="-342900" rtl="0">
+              <a:buFont typeface="Arial" panose="020B0604020202020204" pitchFamily="34" charset="0"/>
+              <a:buChar char="•"/>
+            </a:pPr>
+            <a:endParaRPr lang="es-MX" sz="2000" dirty="0"/>
+          </a:p>
+          <a:p>
+            <a:pPr marL="342900" indent="-342900" rtl="0">
+              <a:buFont typeface="Arial" panose="020B0604020202020204" pitchFamily="34" charset="0"/>
+              <a:buChar char="•"/>
+            </a:pPr>
+            <a:endParaRPr lang="es-MX" sz="2000" dirty="0"/>
+          </a:p>
+          <a:p>
+            <a:pPr marL="342900" indent="-342900" rtl="0">
+              <a:buFont typeface="Arial" panose="020B0604020202020204" pitchFamily="34" charset="0"/>
+              <a:buChar char="•"/>
+            </a:pPr>
+            <a:endParaRPr lang="es-MX" sz="2000" dirty="0"/>
+          </a:p>
+          <a:p>
+            <a:pPr marL="342900" indent="-342900" rtl="0">
+              <a:buFont typeface="Arial" panose="020B0604020202020204" pitchFamily="34" charset="0"/>
+              <a:buChar char="•"/>
+            </a:pPr>
+            <a:endParaRPr lang="es-MX" sz="2000" dirty="0"/>
+          </a:p>
+          <a:p>
+            <a:pPr marL="342900" indent="-342900" rtl="0">
+              <a:buFont typeface="Arial" panose="020B0604020202020204" pitchFamily="34" charset="0"/>
+              <a:buChar char="•"/>
+            </a:pPr>
+            <a:endParaRPr lang="es-MX" sz="2000" dirty="0"/>
+          </a:p>
+          <a:p>
+            <a:pPr marL="342900" indent="-342900" rtl="0">
+              <a:buFont typeface="Arial" panose="020B0604020202020204" pitchFamily="34" charset="0"/>
+              <a:buChar char="•"/>
+            </a:pPr>
+            <a:endParaRPr lang="es-MX" sz="2000" dirty="0"/>
+          </a:p>
+          <a:p>
+            <a:pPr marL="342900" indent="-342900" rtl="0">
+              <a:buFont typeface="Arial" panose="020B0604020202020204" pitchFamily="34" charset="0"/>
+              <a:buChar char="•"/>
+            </a:pPr>
+            <a:endParaRPr lang="es-MX" sz="2000" dirty="0"/>
+          </a:p>
+          <a:p>
+            <a:pPr marL="342900" indent="-342900">
+              <a:buFont typeface="Arial" panose="020B0604020202020204" pitchFamily="34" charset="0"/>
+              <a:buChar char="•"/>
+            </a:pPr>
+            <a:endParaRPr lang="es-CO" sz="2000" b="1" dirty="0"/>
+          </a:p>
+          <a:p>
+            <a:pPr marL="342900" indent="-342900">
+              <a:buFont typeface="Arial" panose="020B0604020202020204" pitchFamily="34" charset="0"/>
+              <a:buChar char="•"/>
+            </a:pPr>
+            <a:r>
+              <a:rPr lang="es-CO" sz="2000" b="1" dirty="0"/>
+              <a:t>Archivo</a:t>
+            </a:r>
+            <a:r>
+              <a:rPr lang="es-CO" sz="2000" dirty="0"/>
+              <a:t>: </a:t>
+            </a:r>
+            <a:r>
+              <a:rPr lang="es-MX" dirty="0">
+                <a:latin typeface="Consolas" panose="020B0609020204030204" pitchFamily="49" charset="0"/>
+              </a:rPr>
+              <a:t>3_archivo_pruebas/test_conversiones.py</a:t>
+            </a:r>
+            <a:endParaRPr lang="es-CO" sz="2000" dirty="0"/>
+          </a:p>
+        </p:txBody>
+      </p:sp>
+      <p:sp>
+        <p:nvSpPr>
+          <p:cNvPr id="15" name="CuadroTexto 14">
+            <a:extLst>
+              <a:ext uri="{FF2B5EF4-FFF2-40B4-BE49-F238E27FC236}">
+                <a16:creationId xmlns:a16="http://schemas.microsoft.com/office/drawing/2014/main" id="{F74A0C38-9351-4A4D-B73C-952B2720623C}"/>
+              </a:ext>
+            </a:extLst>
+          </p:cNvPr>
+          <p:cNvSpPr txBox="1"/>
+          <p:nvPr/>
+        </p:nvSpPr>
+        <p:spPr>
+          <a:xfrm>
+            <a:off x="1403648" y="5140349"/>
+            <a:ext cx="6336704" cy="1384995"/>
+          </a:xfrm>
+          <a:prstGeom prst="rect">
+            <a:avLst/>
+          </a:prstGeom>
+          <a:noFill/>
+          <a:ln>
+            <a:solidFill>
+              <a:schemeClr val="tx1"/>
+            </a:solidFill>
+          </a:ln>
+        </p:spPr>
+        <p:txBody>
+          <a:bodyPr wrap="square">
+            <a:spAutoFit/>
+          </a:bodyPr>
+          <a:lstStyle/>
+          <a:p>
+            <a:r>
+              <a:rPr lang="nl-NL" sz="1200" dirty="0">
+                <a:latin typeface="Consolas" panose="020B0609020204030204" pitchFamily="49" charset="0"/>
+              </a:rPr>
+              <a:t> 4  import conversiones</a:t>
+            </a:r>
+          </a:p>
+          <a:p>
+            <a:r>
+              <a:rPr lang="nl-NL" sz="1200" dirty="0">
+                <a:latin typeface="Consolas" panose="020B0609020204030204" pitchFamily="49" charset="0"/>
+              </a:rPr>
+              <a:t> 5</a:t>
+            </a:r>
+          </a:p>
+          <a:p>
+            <a:r>
+              <a:rPr lang="nl-NL" sz="1200" dirty="0">
+                <a:latin typeface="Consolas" panose="020B0609020204030204" pitchFamily="49" charset="0"/>
+              </a:rPr>
+              <a:t> 6  assert round(conversiones.celsius_a_fahrenheit(100), 2) == 212.0</a:t>
+            </a:r>
+          </a:p>
+          <a:p>
+            <a:r>
+              <a:rPr lang="nl-NL" sz="1200" dirty="0">
+                <a:latin typeface="Consolas" panose="020B0609020204030204" pitchFamily="49" charset="0"/>
+              </a:rPr>
+              <a:t> 7  assert round(conversiones.celsius_a_fahrenheit(0), 2) == 32.0</a:t>
+            </a:r>
+          </a:p>
+          <a:p>
+            <a:r>
+              <a:rPr lang="nl-NL" sz="1200" dirty="0">
+                <a:latin typeface="Consolas" panose="020B0609020204030204" pitchFamily="49" charset="0"/>
+              </a:rPr>
+              <a:t> 8  assert round(conversiones.celsius_a_kelvin(25), 2) == 298.15</a:t>
+            </a:r>
+          </a:p>
+          <a:p>
+            <a:r>
+              <a:rPr lang="nl-NL" sz="1200" dirty="0">
+                <a:latin typeface="Consolas" panose="020B0609020204030204" pitchFamily="49" charset="0"/>
+              </a:rPr>
+              <a:t> 9  assert round(conversiones.celsius_a_kelvin(-273.15), 2) == 0.0</a:t>
+            </a:r>
+          </a:p>
+          <a:p>
+            <a:r>
+              <a:rPr lang="nl-NL" sz="1200" dirty="0">
+                <a:latin typeface="Consolas" panose="020B0609020204030204" pitchFamily="49" charset="0"/>
+              </a:rPr>
+              <a:t>10  print("Pruebas de conversiones: todas pasaron")</a:t>
+            </a:r>
+            <a:endParaRPr lang="es-CO" sz="1200" dirty="0">
+              <a:latin typeface="Consolas" panose="020B0609020204030204" pitchFamily="49" charset="0"/>
+            </a:endParaRPr>
+          </a:p>
+        </p:txBody>
+      </p:sp>
+      <p:pic>
+        <p:nvPicPr>
+          <p:cNvPr id="3" name="Imagen 2">
+            <a:extLst>
+              <a:ext uri="{FF2B5EF4-FFF2-40B4-BE49-F238E27FC236}">
+                <a16:creationId xmlns:a16="http://schemas.microsoft.com/office/drawing/2014/main" id="{DAC65FEA-B45B-4CC6-A7AA-0C30F4836451}"/>
+              </a:ext>
+            </a:extLst>
+          </p:cNvPr>
+          <p:cNvPicPr>
+            <a:picLocks noChangeAspect="1"/>
+          </p:cNvPicPr>
+          <p:nvPr/>
+        </p:nvPicPr>
+        <p:blipFill>
+          <a:blip r:embed="rId2">
+            <a:extLst>
+              <a:ext uri="{28A0092B-C50C-407E-A947-70E740481C1C}">
+                <a14:useLocalDpi xmlns:a14="http://schemas.microsoft.com/office/drawing/2010/main" val="0"/>
+              </a:ext>
+            </a:extLst>
+          </a:blip>
+          <a:stretch>
+            <a:fillRect/>
+          </a:stretch>
+        </p:blipFill>
+        <p:spPr>
+          <a:xfrm>
+            <a:off x="146871" y="1988840"/>
+            <a:ext cx="8892480" cy="2540708"/>
+          </a:xfrm>
+          <a:prstGeom prst="rect">
+            <a:avLst/>
+          </a:prstGeom>
+        </p:spPr>
+      </p:pic>
+    </p:spTree>
+    <p:extLst>
+      <p:ext uri="{BB962C8B-B14F-4D97-AF65-F5344CB8AC3E}">
+        <p14:creationId xmlns:p14="http://schemas.microsoft.com/office/powerpoint/2010/main" val="2056326162"/>
+      </p:ext>
+    </p:extLst>
+  </p:cSld>
+  <p:clrMapOvr>
+    <a:masterClrMapping/>
+  </p:clrMapOvr>
+</p:sld>
+</file>
+
+<file path=ppt/slides/slide52.xml><?xml version="1.0" encoding="utf-8"?>
+<p:sld xmlns:a="http://schemas.openxmlformats.org/drawingml/2006/main" xmlns:r="http://schemas.openxmlformats.org/officeDocument/2006/relationships" xmlns:p="http://schemas.openxmlformats.org/presentationml/2006/main">
+  <p:cSld>
+    <p:spTree>
+      <p:nvGrpSpPr>
+        <p:cNvPr id="1" name=""/>
+        <p:cNvGrpSpPr/>
+        <p:nvPr/>
+      </p:nvGrpSpPr>
+      <p:grpSpPr>
+        <a:xfrm>
+          <a:off x="0" y="0"/>
+          <a:ext cx="0" cy="0"/>
+          <a:chOff x="0" y="0"/>
+          <a:chExt cx="0" cy="0"/>
+        </a:xfrm>
+      </p:grpSpPr>
+      <p:sp>
+        <p:nvSpPr>
+          <p:cNvPr id="5" name="4 Título"/>
+          <p:cNvSpPr>
+            <a:spLocks noGrp="1"/>
+          </p:cNvSpPr>
+          <p:nvPr>
+            <p:ph type="title"/>
+          </p:nvPr>
+        </p:nvSpPr>
+        <p:spPr>
+          <a:xfrm>
+            <a:off x="323528" y="116632"/>
+            <a:ext cx="8675832" cy="794653"/>
+          </a:xfrm>
+        </p:spPr>
+        <p:txBody>
+          <a:bodyPr>
+            <a:noAutofit/>
+          </a:bodyPr>
+          <a:lstStyle/>
+          <a:p>
+            <a:r>
+              <a:rPr lang="es-MX" sz="3600" dirty="0"/>
+              <a:t>¿Dónde se ubican las pruebas? Comparación</a:t>
+            </a:r>
+            <a:endParaRPr lang="es-MX" sz="3200" dirty="0">
+              <a:latin typeface="Consolas" panose="020B0609020204030204" pitchFamily="49" charset="0"/>
+            </a:endParaRPr>
+          </a:p>
+        </p:txBody>
+      </p:sp>
+      <p:graphicFrame>
+        <p:nvGraphicFramePr>
+          <p:cNvPr id="2" name="Tabla 1">
+            <a:extLst>
+              <a:ext uri="{FF2B5EF4-FFF2-40B4-BE49-F238E27FC236}">
+                <a16:creationId xmlns:a16="http://schemas.microsoft.com/office/drawing/2014/main" id="{91C78EF3-3138-4061-AF21-ACA4F97CD3A1}"/>
+              </a:ext>
+            </a:extLst>
+          </p:cNvPr>
+          <p:cNvGraphicFramePr>
+            <a:graphicFrameLocks noGrp="1"/>
+          </p:cNvGraphicFramePr>
+          <p:nvPr>
+            <p:extLst>
+              <p:ext uri="{D42A27DB-BD31-4B8C-83A1-F6EECF244321}">
+                <p14:modId xmlns:p14="http://schemas.microsoft.com/office/powerpoint/2010/main" val="4014140373"/>
+              </p:ext>
+            </p:extLst>
+          </p:nvPr>
+        </p:nvGraphicFramePr>
+        <p:xfrm>
+          <a:off x="395536" y="764704"/>
+          <a:ext cx="8496944" cy="4308669"/>
+        </p:xfrm>
+        <a:graphic>
+          <a:graphicData uri="http://schemas.openxmlformats.org/drawingml/2006/table">
+            <a:tbl>
+              <a:tblPr/>
+              <a:tblGrid>
+                <a:gridCol w="1670339">
+                  <a:extLst>
+                    <a:ext uri="{9D8B030D-6E8A-4147-A177-3AD203B41FA5}">
+                      <a16:colId xmlns:a16="http://schemas.microsoft.com/office/drawing/2014/main" val="958968307"/>
+                    </a:ext>
+                  </a:extLst>
+                </a:gridCol>
+                <a:gridCol w="2178704">
+                  <a:extLst>
+                    <a:ext uri="{9D8B030D-6E8A-4147-A177-3AD203B41FA5}">
+                      <a16:colId xmlns:a16="http://schemas.microsoft.com/office/drawing/2014/main" val="3782664435"/>
+                    </a:ext>
+                  </a:extLst>
+                </a:gridCol>
+                <a:gridCol w="2559669">
+                  <a:extLst>
+                    <a:ext uri="{9D8B030D-6E8A-4147-A177-3AD203B41FA5}">
+                      <a16:colId xmlns:a16="http://schemas.microsoft.com/office/drawing/2014/main" val="4017312991"/>
+                    </a:ext>
+                  </a:extLst>
+                </a:gridCol>
+                <a:gridCol w="2088232">
+                  <a:extLst>
+                    <a:ext uri="{9D8B030D-6E8A-4147-A177-3AD203B41FA5}">
+                      <a16:colId xmlns:a16="http://schemas.microsoft.com/office/drawing/2014/main" val="3073672876"/>
+                    </a:ext>
+                  </a:extLst>
+                </a:gridCol>
+              </a:tblGrid>
+              <a:tr h="323901">
+                <a:tc>
+                  <a:txBody>
+                    <a:bodyPr/>
+                    <a:lstStyle/>
+                    <a:p>
+                      <a:endParaRPr lang="es-CO" sz="1600"/>
+                    </a:p>
+                  </a:txBody>
+                  <a:tcPr marL="59607" marR="59607" marT="29804" marB="29804" anchor="ctr">
+                    <a:lnL>
+                      <a:noFill/>
+                    </a:lnL>
+                    <a:lnR w="12700" cap="flat" cmpd="sng" algn="ctr">
+                      <a:solidFill>
+                        <a:schemeClr val="tx1"/>
+                      </a:solidFill>
+                      <a:prstDash val="solid"/>
+                      <a:round/>
+                      <a:headEnd type="none" w="med" len="med"/>
+                      <a:tailEnd type="none" w="med" len="med"/>
+                    </a:lnR>
+                    <a:lnT>
+                      <a:noFill/>
+                    </a:lnT>
+                    <a:lnB w="12700" cap="flat" cmpd="sng" algn="ctr">
+                      <a:solidFill>
+                        <a:schemeClr val="tx1"/>
+                      </a:solidFill>
+                      <a:prstDash val="solid"/>
+                      <a:round/>
+                      <a:headEnd type="none" w="med" len="med"/>
+                      <a:tailEnd type="none" w="med" len="med"/>
+                    </a:lnB>
+                  </a:tcPr>
+                </a:tc>
+                <a:tc>
+                  <a:txBody>
+                    <a:bodyPr/>
+                    <a:lstStyle/>
+                    <a:p>
+                      <a:r>
+                        <a:rPr lang="es-CO" sz="1600" b="1" dirty="0"/>
+                        <a:t>1. Sin guarda</a:t>
+                      </a:r>
+                    </a:p>
+                  </a:txBody>
+                  <a:tcPr marL="59607" marR="59607" marT="29804" marB="29804" anchor="ctr">
+                    <a:lnL w="12700" cap="flat" cmpd="sng" algn="ctr">
+                      <a:solidFill>
+                        <a:schemeClr val="tx1"/>
+                      </a:solidFill>
+                      <a:prstDash val="solid"/>
+                      <a:round/>
+                      <a:headEnd type="none" w="med" len="med"/>
+                      <a:tailEnd type="none" w="med" len="med"/>
+                    </a:lnL>
+                    <a:lnR w="12700" cap="flat" cmpd="sng" algn="ctr">
+                      <a:solidFill>
+                        <a:schemeClr val="tx1"/>
+                      </a:solidFill>
+                      <a:prstDash val="solid"/>
+                      <a:round/>
+                      <a:headEnd type="none" w="med" len="med"/>
+                      <a:tailEnd type="none" w="med" len="med"/>
+                    </a:lnR>
+                    <a:lnT w="12700" cap="flat" cmpd="sng" algn="ctr">
+                      <a:solidFill>
+                        <a:schemeClr val="tx1"/>
+                      </a:solidFill>
+                      <a:prstDash val="solid"/>
+                      <a:round/>
+                      <a:headEnd type="none" w="med" len="med"/>
+                      <a:tailEnd type="none" w="med" len="med"/>
+                    </a:lnT>
+                    <a:lnB w="12700" cap="flat" cmpd="sng" algn="ctr">
+                      <a:solidFill>
+                        <a:schemeClr val="tx1"/>
+                      </a:solidFill>
+                      <a:prstDash val="solid"/>
+                      <a:round/>
+                      <a:headEnd type="none" w="med" len="med"/>
+                      <a:tailEnd type="none" w="med" len="med"/>
+                    </a:lnB>
+                    <a:solidFill>
+                      <a:schemeClr val="bg2"/>
+                    </a:solidFill>
+                  </a:tcPr>
+                </a:tc>
+                <a:tc>
+                  <a:txBody>
+                    <a:bodyPr/>
+                    <a:lstStyle/>
+                    <a:p>
+                      <a:r>
+                        <a:rPr lang="es-MX" sz="1600" b="1" dirty="0"/>
+                        <a:t>2. Guarda en el módulo</a:t>
+                      </a:r>
+                    </a:p>
+                  </a:txBody>
+                  <a:tcPr marL="59607" marR="59607" marT="29804" marB="29804" anchor="ctr">
+                    <a:lnL w="12700" cap="flat" cmpd="sng" algn="ctr">
+                      <a:solidFill>
+                        <a:schemeClr val="tx1"/>
+                      </a:solidFill>
+                      <a:prstDash val="solid"/>
+                      <a:round/>
+                      <a:headEnd type="none" w="med" len="med"/>
+                      <a:tailEnd type="none" w="med" len="med"/>
+                    </a:lnL>
+                    <a:lnR w="12700" cap="flat" cmpd="sng" algn="ctr">
+                      <a:solidFill>
+                        <a:schemeClr val="tx1"/>
+                      </a:solidFill>
+                      <a:prstDash val="solid"/>
+                      <a:round/>
+                      <a:headEnd type="none" w="med" len="med"/>
+                      <a:tailEnd type="none" w="med" len="med"/>
+                    </a:lnR>
+                    <a:lnT w="12700" cap="flat" cmpd="sng" algn="ctr">
+                      <a:solidFill>
+                        <a:schemeClr val="tx1"/>
+                      </a:solidFill>
+                      <a:prstDash val="solid"/>
+                      <a:round/>
+                      <a:headEnd type="none" w="med" len="med"/>
+                      <a:tailEnd type="none" w="med" len="med"/>
+                    </a:lnT>
+                    <a:lnB w="12700" cap="flat" cmpd="sng" algn="ctr">
+                      <a:solidFill>
+                        <a:schemeClr val="tx1"/>
+                      </a:solidFill>
+                      <a:prstDash val="solid"/>
+                      <a:round/>
+                      <a:headEnd type="none" w="med" len="med"/>
+                      <a:tailEnd type="none" w="med" len="med"/>
+                    </a:lnB>
+                    <a:solidFill>
+                      <a:schemeClr val="bg2"/>
+                    </a:solidFill>
+                  </a:tcPr>
+                </a:tc>
+                <a:tc>
+                  <a:txBody>
+                    <a:bodyPr/>
+                    <a:lstStyle/>
+                    <a:p>
+                      <a:r>
+                        <a:rPr lang="es-CO" sz="1600" b="1" dirty="0"/>
+                        <a:t>3. Archivo aparte</a:t>
+                      </a:r>
+                    </a:p>
+                  </a:txBody>
+                  <a:tcPr marL="59607" marR="59607" marT="29804" marB="29804" anchor="ctr">
+                    <a:lnL w="12700" cap="flat" cmpd="sng" algn="ctr">
+                      <a:solidFill>
+                        <a:schemeClr val="tx1"/>
+                      </a:solidFill>
+                      <a:prstDash val="solid"/>
+                      <a:round/>
+                      <a:headEnd type="none" w="med" len="med"/>
+                      <a:tailEnd type="none" w="med" len="med"/>
+                    </a:lnL>
+                    <a:lnR w="12700" cap="flat" cmpd="sng" algn="ctr">
+                      <a:solidFill>
+                        <a:schemeClr val="tx1"/>
+                      </a:solidFill>
+                      <a:prstDash val="solid"/>
+                      <a:round/>
+                      <a:headEnd type="none" w="med" len="med"/>
+                      <a:tailEnd type="none" w="med" len="med"/>
+                    </a:lnR>
+                    <a:lnT w="12700" cap="flat" cmpd="sng" algn="ctr">
+                      <a:solidFill>
+                        <a:schemeClr val="tx1"/>
+                      </a:solidFill>
+                      <a:prstDash val="solid"/>
+                      <a:round/>
+                      <a:headEnd type="none" w="med" len="med"/>
+                      <a:tailEnd type="none" w="med" len="med"/>
+                    </a:lnT>
+                    <a:lnB w="12700" cap="flat" cmpd="sng" algn="ctr">
+                      <a:solidFill>
+                        <a:schemeClr val="tx1"/>
+                      </a:solidFill>
+                      <a:prstDash val="solid"/>
+                      <a:round/>
+                      <a:headEnd type="none" w="med" len="med"/>
+                      <a:tailEnd type="none" w="med" len="med"/>
+                    </a:lnB>
+                    <a:solidFill>
+                      <a:schemeClr val="bg2"/>
+                    </a:solidFill>
+                  </a:tcPr>
+                </a:tc>
+                <a:extLst>
+                  <a:ext uri="{0D108BD9-81ED-4DB2-BD59-A6C34878D82A}">
+                    <a16:rowId xmlns:a16="http://schemas.microsoft.com/office/drawing/2014/main" val="3773116605"/>
+                  </a:ext>
+                </a:extLst>
+              </a:tr>
+              <a:tr h="756835">
+                <a:tc>
+                  <a:txBody>
+                    <a:bodyPr/>
+                    <a:lstStyle/>
+                    <a:p>
+                      <a:r>
+                        <a:rPr lang="es-CO" sz="1600" b="1" dirty="0"/>
+                        <a:t>Ubicación de las pruebas</a:t>
+                      </a:r>
+                      <a:endParaRPr lang="es-CO" sz="1600" dirty="0"/>
+                    </a:p>
+                  </a:txBody>
+                  <a:tcPr marL="59607" marR="59607" marT="29804" marB="29804" anchor="ctr">
+                    <a:lnL w="12700" cap="flat" cmpd="sng" algn="ctr">
+                      <a:solidFill>
+                        <a:schemeClr val="tx1"/>
+                      </a:solidFill>
+                      <a:prstDash val="solid"/>
+                      <a:round/>
+                      <a:headEnd type="none" w="med" len="med"/>
+                      <a:tailEnd type="none" w="med" len="med"/>
+                    </a:lnL>
+                    <a:lnR w="12700" cap="flat" cmpd="sng" algn="ctr">
+                      <a:solidFill>
+                        <a:schemeClr val="tx1"/>
+                      </a:solidFill>
+                      <a:prstDash val="solid"/>
+                      <a:round/>
+                      <a:headEnd type="none" w="med" len="med"/>
+                      <a:tailEnd type="none" w="med" len="med"/>
+                    </a:lnR>
+                    <a:lnT w="12700" cap="flat" cmpd="sng" algn="ctr">
+                      <a:solidFill>
+                        <a:schemeClr val="tx1"/>
+                      </a:solidFill>
+                      <a:prstDash val="solid"/>
+                      <a:round/>
+                      <a:headEnd type="none" w="med" len="med"/>
+                      <a:tailEnd type="none" w="med" len="med"/>
+                    </a:lnT>
+                    <a:lnB w="12700" cap="flat" cmpd="sng" algn="ctr">
+                      <a:solidFill>
+                        <a:schemeClr val="tx1"/>
+                      </a:solidFill>
+                      <a:prstDash val="solid"/>
+                      <a:round/>
+                      <a:headEnd type="none" w="med" len="med"/>
+                      <a:tailEnd type="none" w="med" len="med"/>
+                    </a:lnB>
+                    <a:solidFill>
+                      <a:schemeClr val="bg2"/>
+                    </a:solidFill>
+                  </a:tcPr>
+                </a:tc>
+                <a:tc>
+                  <a:txBody>
+                    <a:bodyPr/>
+                    <a:lstStyle/>
+                    <a:p>
+                      <a:r>
+                        <a:rPr lang="es-CO" sz="1600" dirty="0"/>
+                        <a:t>Final de </a:t>
+                      </a:r>
+                      <a:r>
+                        <a:rPr lang="es-CO" sz="1400" b="1" dirty="0">
+                          <a:latin typeface="Consolas" panose="020B0609020204030204" pitchFamily="49" charset="0"/>
+                        </a:rPr>
+                        <a:t>conversiones.py</a:t>
+                      </a:r>
+                    </a:p>
+                  </a:txBody>
+                  <a:tcPr marL="59607" marR="59607" marT="29804" marB="29804" anchor="ctr">
+                    <a:lnL w="12700" cap="flat" cmpd="sng" algn="ctr">
+                      <a:solidFill>
+                        <a:schemeClr val="tx1"/>
+                      </a:solidFill>
+                      <a:prstDash val="solid"/>
+                      <a:round/>
+                      <a:headEnd type="none" w="med" len="med"/>
+                      <a:tailEnd type="none" w="med" len="med"/>
+                    </a:lnL>
+                    <a:lnR w="12700" cap="flat" cmpd="sng" algn="ctr">
+                      <a:solidFill>
+                        <a:schemeClr val="tx1"/>
+                      </a:solidFill>
+                      <a:prstDash val="solid"/>
+                      <a:round/>
+                      <a:headEnd type="none" w="med" len="med"/>
+                      <a:tailEnd type="none" w="med" len="med"/>
+                    </a:lnR>
+                    <a:lnT w="12700" cap="flat" cmpd="sng" algn="ctr">
+                      <a:solidFill>
+                        <a:schemeClr val="tx1"/>
+                      </a:solidFill>
+                      <a:prstDash val="solid"/>
+                      <a:round/>
+                      <a:headEnd type="none" w="med" len="med"/>
+                      <a:tailEnd type="none" w="med" len="med"/>
+                    </a:lnT>
+                    <a:lnB w="12700" cap="flat" cmpd="sng" algn="ctr">
+                      <a:solidFill>
+                        <a:schemeClr val="tx1"/>
+                      </a:solidFill>
+                      <a:prstDash val="solid"/>
+                      <a:round/>
+                      <a:headEnd type="none" w="med" len="med"/>
+                      <a:tailEnd type="none" w="med" len="med"/>
+                    </a:lnB>
+                  </a:tcPr>
+                </a:tc>
+                <a:tc>
+                  <a:txBody>
+                    <a:bodyPr/>
+                    <a:lstStyle/>
+                    <a:p>
+                      <a:r>
+                        <a:rPr lang="es-CO" sz="1600" dirty="0"/>
+                        <a:t>Final de conversiones.py, dentro de </a:t>
+                      </a:r>
+                      <a:r>
+                        <a:rPr lang="es-CO" sz="1400" b="1" dirty="0" err="1">
+                          <a:latin typeface="Consolas" panose="020B0609020204030204" pitchFamily="49" charset="0"/>
+                        </a:rPr>
+                        <a:t>if</a:t>
+                      </a:r>
+                      <a:r>
+                        <a:rPr lang="es-CO" sz="1400" b="1" dirty="0">
+                          <a:latin typeface="Consolas" panose="020B0609020204030204" pitchFamily="49" charset="0"/>
+                        </a:rPr>
+                        <a:t> __</a:t>
+                      </a:r>
+                      <a:r>
+                        <a:rPr lang="es-CO" sz="1400" b="1" dirty="0" err="1">
+                          <a:latin typeface="Consolas" panose="020B0609020204030204" pitchFamily="49" charset="0"/>
+                        </a:rPr>
+                        <a:t>name</a:t>
+                      </a:r>
+                      <a:r>
+                        <a:rPr lang="es-CO" sz="1400" b="1" dirty="0">
+                          <a:latin typeface="Consolas" panose="020B0609020204030204" pitchFamily="49" charset="0"/>
+                        </a:rPr>
+                        <a:t>__ == "__</a:t>
+                      </a:r>
+                      <a:r>
+                        <a:rPr lang="es-CO" sz="1400" b="1" dirty="0" err="1">
+                          <a:latin typeface="Consolas" panose="020B0609020204030204" pitchFamily="49" charset="0"/>
+                        </a:rPr>
+                        <a:t>main</a:t>
+                      </a:r>
+                      <a:r>
+                        <a:rPr lang="es-CO" sz="1400" b="1" dirty="0">
+                          <a:latin typeface="Consolas" panose="020B0609020204030204" pitchFamily="49" charset="0"/>
+                        </a:rPr>
+                        <a:t>__":</a:t>
+                      </a:r>
+                      <a:endParaRPr lang="es-CO" sz="1600" b="1" dirty="0">
+                        <a:latin typeface="Consolas" panose="020B0609020204030204" pitchFamily="49" charset="0"/>
+                      </a:endParaRPr>
+                    </a:p>
+                  </a:txBody>
+                  <a:tcPr marL="59607" marR="59607" marT="29804" marB="29804" anchor="ctr">
+                    <a:lnL w="12700" cap="flat" cmpd="sng" algn="ctr">
+                      <a:solidFill>
+                        <a:schemeClr val="tx1"/>
+                      </a:solidFill>
+                      <a:prstDash val="solid"/>
+                      <a:round/>
+                      <a:headEnd type="none" w="med" len="med"/>
+                      <a:tailEnd type="none" w="med" len="med"/>
+                    </a:lnL>
+                    <a:lnR w="12700" cap="flat" cmpd="sng" algn="ctr">
+                      <a:solidFill>
+                        <a:schemeClr val="tx1"/>
+                      </a:solidFill>
+                      <a:prstDash val="solid"/>
+                      <a:round/>
+                      <a:headEnd type="none" w="med" len="med"/>
+                      <a:tailEnd type="none" w="med" len="med"/>
+                    </a:lnR>
+                    <a:lnT w="12700" cap="flat" cmpd="sng" algn="ctr">
+                      <a:solidFill>
+                        <a:schemeClr val="tx1"/>
+                      </a:solidFill>
+                      <a:prstDash val="solid"/>
+                      <a:round/>
+                      <a:headEnd type="none" w="med" len="med"/>
+                      <a:tailEnd type="none" w="med" len="med"/>
+                    </a:lnT>
+                    <a:lnB w="12700" cap="flat" cmpd="sng" algn="ctr">
+                      <a:solidFill>
+                        <a:schemeClr val="tx1"/>
+                      </a:solidFill>
+                      <a:prstDash val="solid"/>
+                      <a:round/>
+                      <a:headEnd type="none" w="med" len="med"/>
+                      <a:tailEnd type="none" w="med" len="med"/>
+                    </a:lnB>
+                  </a:tcPr>
+                </a:tc>
+                <a:tc>
+                  <a:txBody>
+                    <a:bodyPr/>
+                    <a:lstStyle/>
+                    <a:p>
+                      <a:r>
+                        <a:rPr lang="es-CO" sz="1400" b="1" dirty="0">
+                          <a:latin typeface="Consolas" panose="020B0609020204030204" pitchFamily="49" charset="0"/>
+                        </a:rPr>
+                        <a:t>test_conversiones.py</a:t>
+                      </a:r>
+                    </a:p>
+                  </a:txBody>
+                  <a:tcPr marL="59607" marR="59607" marT="29804" marB="29804" anchor="ctr">
+                    <a:lnL w="12700" cap="flat" cmpd="sng" algn="ctr">
+                      <a:solidFill>
+                        <a:schemeClr val="tx1"/>
+                      </a:solidFill>
+                      <a:prstDash val="solid"/>
+                      <a:round/>
+                      <a:headEnd type="none" w="med" len="med"/>
+                      <a:tailEnd type="none" w="med" len="med"/>
+                    </a:lnL>
+                    <a:lnR w="12700" cap="flat" cmpd="sng" algn="ctr">
+                      <a:solidFill>
+                        <a:schemeClr val="tx1"/>
+                      </a:solidFill>
+                      <a:prstDash val="solid"/>
+                      <a:round/>
+                      <a:headEnd type="none" w="med" len="med"/>
+                      <a:tailEnd type="none" w="med" len="med"/>
+                    </a:lnR>
+                    <a:lnT w="12700" cap="flat" cmpd="sng" algn="ctr">
+                      <a:solidFill>
+                        <a:schemeClr val="tx1"/>
+                      </a:solidFill>
+                      <a:prstDash val="solid"/>
+                      <a:round/>
+                      <a:headEnd type="none" w="med" len="med"/>
+                      <a:tailEnd type="none" w="med" len="med"/>
+                    </a:lnT>
+                    <a:lnB w="12700" cap="flat" cmpd="sng" algn="ctr">
+                      <a:solidFill>
+                        <a:schemeClr val="tx1"/>
+                      </a:solidFill>
+                      <a:prstDash val="solid"/>
+                      <a:round/>
+                      <a:headEnd type="none" w="med" len="med"/>
+                      <a:tailEnd type="none" w="med" len="med"/>
+                    </a:lnB>
+                  </a:tcPr>
+                </a:tc>
+                <a:extLst>
+                  <a:ext uri="{0D108BD9-81ED-4DB2-BD59-A6C34878D82A}">
+                    <a16:rowId xmlns:a16="http://schemas.microsoft.com/office/drawing/2014/main" val="788594796"/>
+                  </a:ext>
+                </a:extLst>
+              </a:tr>
+              <a:tr h="323901">
+                <a:tc>
+                  <a:txBody>
+                    <a:bodyPr/>
+                    <a:lstStyle/>
+                    <a:p>
+                      <a:r>
+                        <a:rPr lang="es-CO" sz="1600" b="1" dirty="0"/>
+                        <a:t>¿Se ejecutan al importar?</a:t>
+                      </a:r>
+                      <a:endParaRPr lang="es-CO" sz="1600" dirty="0"/>
+                    </a:p>
+                  </a:txBody>
+                  <a:tcPr marL="59607" marR="59607" marT="29804" marB="29804" anchor="ctr">
+                    <a:lnL w="12700" cap="flat" cmpd="sng" algn="ctr">
+                      <a:solidFill>
+                        <a:schemeClr val="tx1"/>
+                      </a:solidFill>
+                      <a:prstDash val="solid"/>
+                      <a:round/>
+                      <a:headEnd type="none" w="med" len="med"/>
+                      <a:tailEnd type="none" w="med" len="med"/>
+                    </a:lnL>
+                    <a:lnR w="12700" cap="flat" cmpd="sng" algn="ctr">
+                      <a:solidFill>
+                        <a:schemeClr val="tx1"/>
+                      </a:solidFill>
+                      <a:prstDash val="solid"/>
+                      <a:round/>
+                      <a:headEnd type="none" w="med" len="med"/>
+                      <a:tailEnd type="none" w="med" len="med"/>
+                    </a:lnR>
+                    <a:lnT w="12700" cap="flat" cmpd="sng" algn="ctr">
+                      <a:solidFill>
+                        <a:schemeClr val="tx1"/>
+                      </a:solidFill>
+                      <a:prstDash val="solid"/>
+                      <a:round/>
+                      <a:headEnd type="none" w="med" len="med"/>
+                      <a:tailEnd type="none" w="med" len="med"/>
+                    </a:lnT>
+                    <a:lnB w="12700" cap="flat" cmpd="sng" algn="ctr">
+                      <a:solidFill>
+                        <a:schemeClr val="tx1"/>
+                      </a:solidFill>
+                      <a:prstDash val="solid"/>
+                      <a:round/>
+                      <a:headEnd type="none" w="med" len="med"/>
+                      <a:tailEnd type="none" w="med" len="med"/>
+                    </a:lnB>
+                    <a:solidFill>
+                      <a:schemeClr val="bg2"/>
+                    </a:solidFill>
+                  </a:tcPr>
+                </a:tc>
+                <a:tc>
+                  <a:txBody>
+                    <a:bodyPr/>
+                    <a:lstStyle/>
+                    <a:p>
+                      <a:r>
+                        <a:rPr lang="es-CO" sz="1600" dirty="0"/>
+                        <a:t>❌ Sí (problema)</a:t>
+                      </a:r>
+                    </a:p>
+                  </a:txBody>
+                  <a:tcPr marL="59607" marR="59607" marT="29804" marB="29804" anchor="ctr">
+                    <a:lnL w="12700" cap="flat" cmpd="sng" algn="ctr">
+                      <a:solidFill>
+                        <a:schemeClr val="tx1"/>
+                      </a:solidFill>
+                      <a:prstDash val="solid"/>
+                      <a:round/>
+                      <a:headEnd type="none" w="med" len="med"/>
+                      <a:tailEnd type="none" w="med" len="med"/>
+                    </a:lnL>
+                    <a:lnR w="12700" cap="flat" cmpd="sng" algn="ctr">
+                      <a:solidFill>
+                        <a:schemeClr val="tx1"/>
+                      </a:solidFill>
+                      <a:prstDash val="solid"/>
+                      <a:round/>
+                      <a:headEnd type="none" w="med" len="med"/>
+                      <a:tailEnd type="none" w="med" len="med"/>
+                    </a:lnR>
+                    <a:lnT w="12700" cap="flat" cmpd="sng" algn="ctr">
+                      <a:solidFill>
+                        <a:schemeClr val="tx1"/>
+                      </a:solidFill>
+                      <a:prstDash val="solid"/>
+                      <a:round/>
+                      <a:headEnd type="none" w="med" len="med"/>
+                      <a:tailEnd type="none" w="med" len="med"/>
+                    </a:lnT>
+                    <a:lnB w="12700" cap="flat" cmpd="sng" algn="ctr">
+                      <a:solidFill>
+                        <a:schemeClr val="tx1"/>
+                      </a:solidFill>
+                      <a:prstDash val="solid"/>
+                      <a:round/>
+                      <a:headEnd type="none" w="med" len="med"/>
+                      <a:tailEnd type="none" w="med" len="med"/>
+                    </a:lnB>
+                  </a:tcPr>
+                </a:tc>
+                <a:tc>
+                  <a:txBody>
+                    <a:bodyPr/>
+                    <a:lstStyle/>
+                    <a:p>
+                      <a:r>
+                        <a:rPr lang="es-CO" sz="1600"/>
+                        <a:t>✔ No</a:t>
+                      </a:r>
+                    </a:p>
+                  </a:txBody>
+                  <a:tcPr marL="59607" marR="59607" marT="29804" marB="29804" anchor="ctr">
+                    <a:lnL w="12700" cap="flat" cmpd="sng" algn="ctr">
+                      <a:solidFill>
+                        <a:schemeClr val="tx1"/>
+                      </a:solidFill>
+                      <a:prstDash val="solid"/>
+                      <a:round/>
+                      <a:headEnd type="none" w="med" len="med"/>
+                      <a:tailEnd type="none" w="med" len="med"/>
+                    </a:lnL>
+                    <a:lnR w="12700" cap="flat" cmpd="sng" algn="ctr">
+                      <a:solidFill>
+                        <a:schemeClr val="tx1"/>
+                      </a:solidFill>
+                      <a:prstDash val="solid"/>
+                      <a:round/>
+                      <a:headEnd type="none" w="med" len="med"/>
+                      <a:tailEnd type="none" w="med" len="med"/>
+                    </a:lnR>
+                    <a:lnT w="12700" cap="flat" cmpd="sng" algn="ctr">
+                      <a:solidFill>
+                        <a:schemeClr val="tx1"/>
+                      </a:solidFill>
+                      <a:prstDash val="solid"/>
+                      <a:round/>
+                      <a:headEnd type="none" w="med" len="med"/>
+                      <a:tailEnd type="none" w="med" len="med"/>
+                    </a:lnT>
+                    <a:lnB w="12700" cap="flat" cmpd="sng" algn="ctr">
+                      <a:solidFill>
+                        <a:schemeClr val="tx1"/>
+                      </a:solidFill>
+                      <a:prstDash val="solid"/>
+                      <a:round/>
+                      <a:headEnd type="none" w="med" len="med"/>
+                      <a:tailEnd type="none" w="med" len="med"/>
+                    </a:lnB>
+                  </a:tcPr>
+                </a:tc>
+                <a:tc>
+                  <a:txBody>
+                    <a:bodyPr/>
+                    <a:lstStyle/>
+                    <a:p>
+                      <a:r>
+                        <a:rPr lang="es-CO" sz="1600"/>
+                        <a:t>✔ No</a:t>
+                      </a:r>
+                    </a:p>
+                  </a:txBody>
+                  <a:tcPr marL="59607" marR="59607" marT="29804" marB="29804" anchor="ctr">
+                    <a:lnL w="12700" cap="flat" cmpd="sng" algn="ctr">
+                      <a:solidFill>
+                        <a:schemeClr val="tx1"/>
+                      </a:solidFill>
+                      <a:prstDash val="solid"/>
+                      <a:round/>
+                      <a:headEnd type="none" w="med" len="med"/>
+                      <a:tailEnd type="none" w="med" len="med"/>
+                    </a:lnL>
+                    <a:lnR w="12700" cap="flat" cmpd="sng" algn="ctr">
+                      <a:solidFill>
+                        <a:schemeClr val="tx1"/>
+                      </a:solidFill>
+                      <a:prstDash val="solid"/>
+                      <a:round/>
+                      <a:headEnd type="none" w="med" len="med"/>
+                      <a:tailEnd type="none" w="med" len="med"/>
+                    </a:lnR>
+                    <a:lnT w="12700" cap="flat" cmpd="sng" algn="ctr">
+                      <a:solidFill>
+                        <a:schemeClr val="tx1"/>
+                      </a:solidFill>
+                      <a:prstDash val="solid"/>
+                      <a:round/>
+                      <a:headEnd type="none" w="med" len="med"/>
+                      <a:tailEnd type="none" w="med" len="med"/>
+                    </a:lnT>
+                    <a:lnB w="12700" cap="flat" cmpd="sng" algn="ctr">
+                      <a:solidFill>
+                        <a:schemeClr val="tx1"/>
+                      </a:solidFill>
+                      <a:prstDash val="solid"/>
+                      <a:round/>
+                      <a:headEnd type="none" w="med" len="med"/>
+                      <a:tailEnd type="none" w="med" len="med"/>
+                    </a:lnB>
+                  </a:tcPr>
+                </a:tc>
+                <a:extLst>
+                  <a:ext uri="{0D108BD9-81ED-4DB2-BD59-A6C34878D82A}">
+                    <a16:rowId xmlns:a16="http://schemas.microsoft.com/office/drawing/2014/main" val="795590049"/>
+                  </a:ext>
+                </a:extLst>
+              </a:tr>
+              <a:tr h="323901">
+                <a:tc>
+                  <a:txBody>
+                    <a:bodyPr/>
+                    <a:lstStyle/>
+                    <a:p>
+                      <a:r>
+                        <a:rPr lang="es-MX" sz="1600" b="1" dirty="0"/>
+                        <a:t>Cómo se ejecutan las pruebas</a:t>
+                      </a:r>
+                      <a:endParaRPr lang="es-MX" sz="1600" dirty="0"/>
+                    </a:p>
+                  </a:txBody>
+                  <a:tcPr marL="59607" marR="59607" marT="29804" marB="29804" anchor="ctr">
+                    <a:lnL w="12700" cap="flat" cmpd="sng" algn="ctr">
+                      <a:solidFill>
+                        <a:schemeClr val="tx1"/>
+                      </a:solidFill>
+                      <a:prstDash val="solid"/>
+                      <a:round/>
+                      <a:headEnd type="none" w="med" len="med"/>
+                      <a:tailEnd type="none" w="med" len="med"/>
+                    </a:lnL>
+                    <a:lnR w="12700" cap="flat" cmpd="sng" algn="ctr">
+                      <a:solidFill>
+                        <a:schemeClr val="tx1"/>
+                      </a:solidFill>
+                      <a:prstDash val="solid"/>
+                      <a:round/>
+                      <a:headEnd type="none" w="med" len="med"/>
+                      <a:tailEnd type="none" w="med" len="med"/>
+                    </a:lnR>
+                    <a:lnT w="12700" cap="flat" cmpd="sng" algn="ctr">
+                      <a:solidFill>
+                        <a:schemeClr val="tx1"/>
+                      </a:solidFill>
+                      <a:prstDash val="solid"/>
+                      <a:round/>
+                      <a:headEnd type="none" w="med" len="med"/>
+                      <a:tailEnd type="none" w="med" len="med"/>
+                    </a:lnT>
+                    <a:lnB w="12700" cap="flat" cmpd="sng" algn="ctr">
+                      <a:solidFill>
+                        <a:schemeClr val="tx1"/>
+                      </a:solidFill>
+                      <a:prstDash val="solid"/>
+                      <a:round/>
+                      <a:headEnd type="none" w="med" len="med"/>
+                      <a:tailEnd type="none" w="med" len="med"/>
+                    </a:lnB>
+                    <a:solidFill>
+                      <a:schemeClr val="bg2"/>
+                    </a:solidFill>
+                  </a:tcPr>
+                </a:tc>
+                <a:tc>
+                  <a:txBody>
+                    <a:bodyPr/>
+                    <a:lstStyle/>
+                    <a:p>
+                      <a:r>
+                        <a:rPr lang="es-CO" sz="1400" b="1" dirty="0" err="1">
+                          <a:latin typeface="Consolas" panose="020B0609020204030204" pitchFamily="49" charset="0"/>
+                        </a:rPr>
+                        <a:t>python</a:t>
+                      </a:r>
+                      <a:r>
+                        <a:rPr lang="es-CO" sz="1400" b="1" dirty="0">
+                          <a:latin typeface="Consolas" panose="020B0609020204030204" pitchFamily="49" charset="0"/>
+                        </a:rPr>
+                        <a:t> conversiones.py</a:t>
+                      </a:r>
+                    </a:p>
+                  </a:txBody>
+                  <a:tcPr marL="59607" marR="59607" marT="29804" marB="29804" anchor="ctr">
+                    <a:lnL w="12700" cap="flat" cmpd="sng" algn="ctr">
+                      <a:solidFill>
+                        <a:schemeClr val="tx1"/>
+                      </a:solidFill>
+                      <a:prstDash val="solid"/>
+                      <a:round/>
+                      <a:headEnd type="none" w="med" len="med"/>
+                      <a:tailEnd type="none" w="med" len="med"/>
+                    </a:lnL>
+                    <a:lnR w="12700" cap="flat" cmpd="sng" algn="ctr">
+                      <a:solidFill>
+                        <a:schemeClr val="tx1"/>
+                      </a:solidFill>
+                      <a:prstDash val="solid"/>
+                      <a:round/>
+                      <a:headEnd type="none" w="med" len="med"/>
+                      <a:tailEnd type="none" w="med" len="med"/>
+                    </a:lnR>
+                    <a:lnT w="12700" cap="flat" cmpd="sng" algn="ctr">
+                      <a:solidFill>
+                        <a:schemeClr val="tx1"/>
+                      </a:solidFill>
+                      <a:prstDash val="solid"/>
+                      <a:round/>
+                      <a:headEnd type="none" w="med" len="med"/>
+                      <a:tailEnd type="none" w="med" len="med"/>
+                    </a:lnT>
+                    <a:lnB w="12700" cap="flat" cmpd="sng" algn="ctr">
+                      <a:solidFill>
+                        <a:schemeClr val="tx1"/>
+                      </a:solidFill>
+                      <a:prstDash val="solid"/>
+                      <a:round/>
+                      <a:headEnd type="none" w="med" len="med"/>
+                      <a:tailEnd type="none" w="med" len="med"/>
+                    </a:lnB>
+                  </a:tcPr>
+                </a:tc>
+                <a:tc>
+                  <a:txBody>
+                    <a:bodyPr/>
+                    <a:lstStyle/>
+                    <a:p>
+                      <a:r>
+                        <a:rPr lang="es-CO" sz="1400" b="1" dirty="0" err="1">
+                          <a:latin typeface="Consolas" panose="020B0609020204030204" pitchFamily="49" charset="0"/>
+                        </a:rPr>
+                        <a:t>python</a:t>
+                      </a:r>
+                      <a:r>
+                        <a:rPr lang="es-CO" sz="1400" b="1" dirty="0">
+                          <a:latin typeface="Consolas" panose="020B0609020204030204" pitchFamily="49" charset="0"/>
+                        </a:rPr>
+                        <a:t> conversiones.py</a:t>
+                      </a:r>
+                    </a:p>
+                  </a:txBody>
+                  <a:tcPr marL="59607" marR="59607" marT="29804" marB="29804" anchor="ctr">
+                    <a:lnL w="12700" cap="flat" cmpd="sng" algn="ctr">
+                      <a:solidFill>
+                        <a:schemeClr val="tx1"/>
+                      </a:solidFill>
+                      <a:prstDash val="solid"/>
+                      <a:round/>
+                      <a:headEnd type="none" w="med" len="med"/>
+                      <a:tailEnd type="none" w="med" len="med"/>
+                    </a:lnL>
+                    <a:lnR w="12700" cap="flat" cmpd="sng" algn="ctr">
+                      <a:solidFill>
+                        <a:schemeClr val="tx1"/>
+                      </a:solidFill>
+                      <a:prstDash val="solid"/>
+                      <a:round/>
+                      <a:headEnd type="none" w="med" len="med"/>
+                      <a:tailEnd type="none" w="med" len="med"/>
+                    </a:lnR>
+                    <a:lnT w="12700" cap="flat" cmpd="sng" algn="ctr">
+                      <a:solidFill>
+                        <a:schemeClr val="tx1"/>
+                      </a:solidFill>
+                      <a:prstDash val="solid"/>
+                      <a:round/>
+                      <a:headEnd type="none" w="med" len="med"/>
+                      <a:tailEnd type="none" w="med" len="med"/>
+                    </a:lnT>
+                    <a:lnB w="12700" cap="flat" cmpd="sng" algn="ctr">
+                      <a:solidFill>
+                        <a:schemeClr val="tx1"/>
+                      </a:solidFill>
+                      <a:prstDash val="solid"/>
+                      <a:round/>
+                      <a:headEnd type="none" w="med" len="med"/>
+                      <a:tailEnd type="none" w="med" len="med"/>
+                    </a:lnB>
+                  </a:tcPr>
+                </a:tc>
+                <a:tc>
+                  <a:txBody>
+                    <a:bodyPr/>
+                    <a:lstStyle/>
+                    <a:p>
+                      <a:r>
+                        <a:rPr lang="es-CO" sz="1400" b="1" dirty="0" err="1">
+                          <a:latin typeface="Consolas" panose="020B0609020204030204" pitchFamily="49" charset="0"/>
+                        </a:rPr>
+                        <a:t>python</a:t>
+                      </a:r>
+                      <a:r>
+                        <a:rPr lang="es-CO" sz="1400" b="1" dirty="0">
+                          <a:latin typeface="Consolas" panose="020B0609020204030204" pitchFamily="49" charset="0"/>
+                        </a:rPr>
+                        <a:t> test_conversiones.py</a:t>
+                      </a:r>
+                    </a:p>
+                  </a:txBody>
+                  <a:tcPr marL="59607" marR="59607" marT="29804" marB="29804" anchor="ctr">
+                    <a:lnL w="12700" cap="flat" cmpd="sng" algn="ctr">
+                      <a:solidFill>
+                        <a:schemeClr val="tx1"/>
+                      </a:solidFill>
+                      <a:prstDash val="solid"/>
+                      <a:round/>
+                      <a:headEnd type="none" w="med" len="med"/>
+                      <a:tailEnd type="none" w="med" len="med"/>
+                    </a:lnL>
+                    <a:lnR w="12700" cap="flat" cmpd="sng" algn="ctr">
+                      <a:solidFill>
+                        <a:schemeClr val="tx1"/>
+                      </a:solidFill>
+                      <a:prstDash val="solid"/>
+                      <a:round/>
+                      <a:headEnd type="none" w="med" len="med"/>
+                      <a:tailEnd type="none" w="med" len="med"/>
+                    </a:lnR>
+                    <a:lnT w="12700" cap="flat" cmpd="sng" algn="ctr">
+                      <a:solidFill>
+                        <a:schemeClr val="tx1"/>
+                      </a:solidFill>
+                      <a:prstDash val="solid"/>
+                      <a:round/>
+                      <a:headEnd type="none" w="med" len="med"/>
+                      <a:tailEnd type="none" w="med" len="med"/>
+                    </a:lnT>
+                    <a:lnB w="12700" cap="flat" cmpd="sng" algn="ctr">
+                      <a:solidFill>
+                        <a:schemeClr val="tx1"/>
+                      </a:solidFill>
+                      <a:prstDash val="solid"/>
+                      <a:round/>
+                      <a:headEnd type="none" w="med" len="med"/>
+                      <a:tailEnd type="none" w="med" len="med"/>
+                    </a:lnB>
+                  </a:tcPr>
+                </a:tc>
+                <a:extLst>
+                  <a:ext uri="{0D108BD9-81ED-4DB2-BD59-A6C34878D82A}">
+                    <a16:rowId xmlns:a16="http://schemas.microsoft.com/office/drawing/2014/main" val="1653452463"/>
+                  </a:ext>
+                </a:extLst>
+              </a:tr>
+              <a:tr h="468212">
+                <a:tc>
+                  <a:txBody>
+                    <a:bodyPr/>
+                    <a:lstStyle/>
+                    <a:p>
+                      <a:r>
+                        <a:rPr lang="es-CO" sz="1600" b="1" dirty="0"/>
+                        <a:t>Ventaja</a:t>
+                      </a:r>
+                      <a:endParaRPr lang="es-CO" sz="1600" dirty="0"/>
+                    </a:p>
+                  </a:txBody>
+                  <a:tcPr marL="59607" marR="59607" marT="29804" marB="29804" anchor="ctr">
+                    <a:lnL w="12700" cap="flat" cmpd="sng" algn="ctr">
+                      <a:solidFill>
+                        <a:schemeClr val="tx1"/>
+                      </a:solidFill>
+                      <a:prstDash val="solid"/>
+                      <a:round/>
+                      <a:headEnd type="none" w="med" len="med"/>
+                      <a:tailEnd type="none" w="med" len="med"/>
+                    </a:lnL>
+                    <a:lnR w="12700" cap="flat" cmpd="sng" algn="ctr">
+                      <a:solidFill>
+                        <a:schemeClr val="tx1"/>
+                      </a:solidFill>
+                      <a:prstDash val="solid"/>
+                      <a:round/>
+                      <a:headEnd type="none" w="med" len="med"/>
+                      <a:tailEnd type="none" w="med" len="med"/>
+                    </a:lnR>
+                    <a:lnT w="12700" cap="flat" cmpd="sng" algn="ctr">
+                      <a:solidFill>
+                        <a:schemeClr val="tx1"/>
+                      </a:solidFill>
+                      <a:prstDash val="solid"/>
+                      <a:round/>
+                      <a:headEnd type="none" w="med" len="med"/>
+                      <a:tailEnd type="none" w="med" len="med"/>
+                    </a:lnT>
+                    <a:lnB w="12700" cap="flat" cmpd="sng" algn="ctr">
+                      <a:solidFill>
+                        <a:schemeClr val="tx1"/>
+                      </a:solidFill>
+                      <a:prstDash val="solid"/>
+                      <a:round/>
+                      <a:headEnd type="none" w="med" len="med"/>
+                      <a:tailEnd type="none" w="med" len="med"/>
+                    </a:lnB>
+                    <a:solidFill>
+                      <a:schemeClr val="bg2"/>
+                    </a:solidFill>
+                  </a:tcPr>
+                </a:tc>
+                <a:tc>
+                  <a:txBody>
+                    <a:bodyPr/>
+                    <a:lstStyle/>
+                    <a:p>
+                      <a:r>
+                        <a:rPr lang="es-MX" sz="1600"/>
+                        <a:t>Ninguna frente a las otras dos</a:t>
+                      </a:r>
+                    </a:p>
+                  </a:txBody>
+                  <a:tcPr marL="59607" marR="59607" marT="29804" marB="29804" anchor="ctr">
+                    <a:lnL w="12700" cap="flat" cmpd="sng" algn="ctr">
+                      <a:solidFill>
+                        <a:schemeClr val="tx1"/>
+                      </a:solidFill>
+                      <a:prstDash val="solid"/>
+                      <a:round/>
+                      <a:headEnd type="none" w="med" len="med"/>
+                      <a:tailEnd type="none" w="med" len="med"/>
+                    </a:lnL>
+                    <a:lnR w="12700" cap="flat" cmpd="sng" algn="ctr">
+                      <a:solidFill>
+                        <a:schemeClr val="tx1"/>
+                      </a:solidFill>
+                      <a:prstDash val="solid"/>
+                      <a:round/>
+                      <a:headEnd type="none" w="med" len="med"/>
+                      <a:tailEnd type="none" w="med" len="med"/>
+                    </a:lnR>
+                    <a:lnT w="12700" cap="flat" cmpd="sng" algn="ctr">
+                      <a:solidFill>
+                        <a:schemeClr val="tx1"/>
+                      </a:solidFill>
+                      <a:prstDash val="solid"/>
+                      <a:round/>
+                      <a:headEnd type="none" w="med" len="med"/>
+                      <a:tailEnd type="none" w="med" len="med"/>
+                    </a:lnT>
+                    <a:lnB w="12700" cap="flat" cmpd="sng" algn="ctr">
+                      <a:solidFill>
+                        <a:schemeClr val="tx1"/>
+                      </a:solidFill>
+                      <a:prstDash val="solid"/>
+                      <a:round/>
+                      <a:headEnd type="none" w="med" len="med"/>
+                      <a:tailEnd type="none" w="med" len="med"/>
+                    </a:lnB>
+                  </a:tcPr>
+                </a:tc>
+                <a:tc>
+                  <a:txBody>
+                    <a:bodyPr/>
+                    <a:lstStyle/>
+                    <a:p>
+                      <a:r>
+                        <a:rPr lang="es-MX" sz="1600"/>
+                        <a:t>Pruebas junto a las funciones que prueban</a:t>
+                      </a:r>
+                    </a:p>
+                  </a:txBody>
+                  <a:tcPr marL="59607" marR="59607" marT="29804" marB="29804" anchor="ctr">
+                    <a:lnL w="12700" cap="flat" cmpd="sng" algn="ctr">
+                      <a:solidFill>
+                        <a:schemeClr val="tx1"/>
+                      </a:solidFill>
+                      <a:prstDash val="solid"/>
+                      <a:round/>
+                      <a:headEnd type="none" w="med" len="med"/>
+                      <a:tailEnd type="none" w="med" len="med"/>
+                    </a:lnL>
+                    <a:lnR w="12700" cap="flat" cmpd="sng" algn="ctr">
+                      <a:solidFill>
+                        <a:schemeClr val="tx1"/>
+                      </a:solidFill>
+                      <a:prstDash val="solid"/>
+                      <a:round/>
+                      <a:headEnd type="none" w="med" len="med"/>
+                      <a:tailEnd type="none" w="med" len="med"/>
+                    </a:lnR>
+                    <a:lnT w="12700" cap="flat" cmpd="sng" algn="ctr">
+                      <a:solidFill>
+                        <a:schemeClr val="tx1"/>
+                      </a:solidFill>
+                      <a:prstDash val="solid"/>
+                      <a:round/>
+                      <a:headEnd type="none" w="med" len="med"/>
+                      <a:tailEnd type="none" w="med" len="med"/>
+                    </a:lnT>
+                    <a:lnB w="12700" cap="flat" cmpd="sng" algn="ctr">
+                      <a:solidFill>
+                        <a:schemeClr val="tx1"/>
+                      </a:solidFill>
+                      <a:prstDash val="solid"/>
+                      <a:round/>
+                      <a:headEnd type="none" w="med" len="med"/>
+                      <a:tailEnd type="none" w="med" len="med"/>
+                    </a:lnB>
+                  </a:tcPr>
+                </a:tc>
+                <a:tc>
+                  <a:txBody>
+                    <a:bodyPr/>
+                    <a:lstStyle/>
+                    <a:p>
+                      <a:r>
+                        <a:rPr lang="es-CO" sz="1600" dirty="0"/>
+                        <a:t>Módulo limpio: solo funciones</a:t>
+                      </a:r>
+                    </a:p>
+                  </a:txBody>
+                  <a:tcPr marL="59607" marR="59607" marT="29804" marB="29804" anchor="ctr">
+                    <a:lnL w="12700" cap="flat" cmpd="sng" algn="ctr">
+                      <a:solidFill>
+                        <a:schemeClr val="tx1"/>
+                      </a:solidFill>
+                      <a:prstDash val="solid"/>
+                      <a:round/>
+                      <a:headEnd type="none" w="med" len="med"/>
+                      <a:tailEnd type="none" w="med" len="med"/>
+                    </a:lnL>
+                    <a:lnR w="12700" cap="flat" cmpd="sng" algn="ctr">
+                      <a:solidFill>
+                        <a:schemeClr val="tx1"/>
+                      </a:solidFill>
+                      <a:prstDash val="solid"/>
+                      <a:round/>
+                      <a:headEnd type="none" w="med" len="med"/>
+                      <a:tailEnd type="none" w="med" len="med"/>
+                    </a:lnR>
+                    <a:lnT w="12700" cap="flat" cmpd="sng" algn="ctr">
+                      <a:solidFill>
+                        <a:schemeClr val="tx1"/>
+                      </a:solidFill>
+                      <a:prstDash val="solid"/>
+                      <a:round/>
+                      <a:headEnd type="none" w="med" len="med"/>
+                      <a:tailEnd type="none" w="med" len="med"/>
+                    </a:lnT>
+                    <a:lnB w="12700" cap="flat" cmpd="sng" algn="ctr">
+                      <a:solidFill>
+                        <a:schemeClr val="tx1"/>
+                      </a:solidFill>
+                      <a:prstDash val="solid"/>
+                      <a:round/>
+                      <a:headEnd type="none" w="med" len="med"/>
+                      <a:tailEnd type="none" w="med" len="med"/>
+                    </a:lnB>
+                  </a:tcPr>
+                </a:tc>
+                <a:extLst>
+                  <a:ext uri="{0D108BD9-81ED-4DB2-BD59-A6C34878D82A}">
+                    <a16:rowId xmlns:a16="http://schemas.microsoft.com/office/drawing/2014/main" val="632582744"/>
+                  </a:ext>
+                </a:extLst>
+              </a:tr>
+              <a:tr h="612524">
+                <a:tc>
+                  <a:txBody>
+                    <a:bodyPr/>
+                    <a:lstStyle/>
+                    <a:p>
+                      <a:r>
+                        <a:rPr lang="es-CO" sz="1600" b="1" dirty="0"/>
+                        <a:t>Desventaja</a:t>
+                      </a:r>
+                      <a:endParaRPr lang="es-CO" sz="1600" dirty="0"/>
+                    </a:p>
+                  </a:txBody>
+                  <a:tcPr marL="59607" marR="59607" marT="29804" marB="29804" anchor="ctr">
+                    <a:lnL w="12700" cap="flat" cmpd="sng" algn="ctr">
+                      <a:solidFill>
+                        <a:schemeClr val="tx1"/>
+                      </a:solidFill>
+                      <a:prstDash val="solid"/>
+                      <a:round/>
+                      <a:headEnd type="none" w="med" len="med"/>
+                      <a:tailEnd type="none" w="med" len="med"/>
+                    </a:lnL>
+                    <a:lnR w="12700" cap="flat" cmpd="sng" algn="ctr">
+                      <a:solidFill>
+                        <a:schemeClr val="tx1"/>
+                      </a:solidFill>
+                      <a:prstDash val="solid"/>
+                      <a:round/>
+                      <a:headEnd type="none" w="med" len="med"/>
+                      <a:tailEnd type="none" w="med" len="med"/>
+                    </a:lnR>
+                    <a:lnT w="12700" cap="flat" cmpd="sng" algn="ctr">
+                      <a:solidFill>
+                        <a:schemeClr val="tx1"/>
+                      </a:solidFill>
+                      <a:prstDash val="solid"/>
+                      <a:round/>
+                      <a:headEnd type="none" w="med" len="med"/>
+                      <a:tailEnd type="none" w="med" len="med"/>
+                    </a:lnT>
+                    <a:lnB w="12700" cap="flat" cmpd="sng" algn="ctr">
+                      <a:solidFill>
+                        <a:schemeClr val="tx1"/>
+                      </a:solidFill>
+                      <a:prstDash val="solid"/>
+                      <a:round/>
+                      <a:headEnd type="none" w="med" len="med"/>
+                      <a:tailEnd type="none" w="med" len="med"/>
+                    </a:lnB>
+                    <a:solidFill>
+                      <a:schemeClr val="bg2"/>
+                    </a:solidFill>
+                  </a:tcPr>
+                </a:tc>
+                <a:tc>
+                  <a:txBody>
+                    <a:bodyPr/>
+                    <a:lstStyle/>
+                    <a:p>
+                      <a:r>
+                        <a:rPr lang="es-MX" sz="1600" dirty="0"/>
+                        <a:t>Ensucia la salida del programa y puede detenerlo</a:t>
+                      </a:r>
+                    </a:p>
+                  </a:txBody>
+                  <a:tcPr marL="59607" marR="59607" marT="29804" marB="29804" anchor="ctr">
+                    <a:lnL w="12700" cap="flat" cmpd="sng" algn="ctr">
+                      <a:solidFill>
+                        <a:schemeClr val="tx1"/>
+                      </a:solidFill>
+                      <a:prstDash val="solid"/>
+                      <a:round/>
+                      <a:headEnd type="none" w="med" len="med"/>
+                      <a:tailEnd type="none" w="med" len="med"/>
+                    </a:lnL>
+                    <a:lnR w="12700" cap="flat" cmpd="sng" algn="ctr">
+                      <a:solidFill>
+                        <a:schemeClr val="tx1"/>
+                      </a:solidFill>
+                      <a:prstDash val="solid"/>
+                      <a:round/>
+                      <a:headEnd type="none" w="med" len="med"/>
+                      <a:tailEnd type="none" w="med" len="med"/>
+                    </a:lnR>
+                    <a:lnT w="12700" cap="flat" cmpd="sng" algn="ctr">
+                      <a:solidFill>
+                        <a:schemeClr val="tx1"/>
+                      </a:solidFill>
+                      <a:prstDash val="solid"/>
+                      <a:round/>
+                      <a:headEnd type="none" w="med" len="med"/>
+                      <a:tailEnd type="none" w="med" len="med"/>
+                    </a:lnT>
+                    <a:lnB w="12700" cap="flat" cmpd="sng" algn="ctr">
+                      <a:solidFill>
+                        <a:schemeClr val="tx1"/>
+                      </a:solidFill>
+                      <a:prstDash val="solid"/>
+                      <a:round/>
+                      <a:headEnd type="none" w="med" len="med"/>
+                      <a:tailEnd type="none" w="med" len="med"/>
+                    </a:lnB>
+                  </a:tcPr>
+                </a:tc>
+                <a:tc>
+                  <a:txBody>
+                    <a:bodyPr/>
+                    <a:lstStyle/>
+                    <a:p>
+                      <a:r>
+                        <a:rPr lang="es-CO" sz="1600"/>
+                        <a:t>El módulo crece</a:t>
+                      </a:r>
+                    </a:p>
+                  </a:txBody>
+                  <a:tcPr marL="59607" marR="59607" marT="29804" marB="29804" anchor="ctr">
+                    <a:lnL w="12700" cap="flat" cmpd="sng" algn="ctr">
+                      <a:solidFill>
+                        <a:schemeClr val="tx1"/>
+                      </a:solidFill>
+                      <a:prstDash val="solid"/>
+                      <a:round/>
+                      <a:headEnd type="none" w="med" len="med"/>
+                      <a:tailEnd type="none" w="med" len="med"/>
+                    </a:lnL>
+                    <a:lnR w="12700" cap="flat" cmpd="sng" algn="ctr">
+                      <a:solidFill>
+                        <a:schemeClr val="tx1"/>
+                      </a:solidFill>
+                      <a:prstDash val="solid"/>
+                      <a:round/>
+                      <a:headEnd type="none" w="med" len="med"/>
+                      <a:tailEnd type="none" w="med" len="med"/>
+                    </a:lnR>
+                    <a:lnT w="12700" cap="flat" cmpd="sng" algn="ctr">
+                      <a:solidFill>
+                        <a:schemeClr val="tx1"/>
+                      </a:solidFill>
+                      <a:prstDash val="solid"/>
+                      <a:round/>
+                      <a:headEnd type="none" w="med" len="med"/>
+                      <a:tailEnd type="none" w="med" len="med"/>
+                    </a:lnT>
+                    <a:lnB w="12700" cap="flat" cmpd="sng" algn="ctr">
+                      <a:solidFill>
+                        <a:schemeClr val="tx1"/>
+                      </a:solidFill>
+                      <a:prstDash val="solid"/>
+                      <a:round/>
+                      <a:headEnd type="none" w="med" len="med"/>
+                      <a:tailEnd type="none" w="med" len="med"/>
+                    </a:lnB>
+                  </a:tcPr>
+                </a:tc>
+                <a:tc>
+                  <a:txBody>
+                    <a:bodyPr/>
+                    <a:lstStyle/>
+                    <a:p>
+                      <a:r>
+                        <a:rPr lang="es-MX" sz="1600" dirty="0"/>
+                        <a:t>Un archivo más, y hay que escribir </a:t>
+                      </a:r>
+                      <a:r>
+                        <a:rPr lang="es-MX" sz="1400" b="1" dirty="0">
+                          <a:latin typeface="Consolas" panose="020B0609020204030204" pitchFamily="49" charset="0"/>
+                        </a:rPr>
+                        <a:t>conversiones</a:t>
+                      </a:r>
+                      <a:r>
+                        <a:rPr lang="es-MX" sz="1600" dirty="0"/>
+                        <a:t>. antes de cada función</a:t>
+                      </a:r>
+                    </a:p>
+                  </a:txBody>
+                  <a:tcPr marL="59607" marR="59607" marT="29804" marB="29804" anchor="ctr">
+                    <a:lnL w="12700" cap="flat" cmpd="sng" algn="ctr">
+                      <a:solidFill>
+                        <a:schemeClr val="tx1"/>
+                      </a:solidFill>
+                      <a:prstDash val="solid"/>
+                      <a:round/>
+                      <a:headEnd type="none" w="med" len="med"/>
+                      <a:tailEnd type="none" w="med" len="med"/>
+                    </a:lnL>
+                    <a:lnR w="12700" cap="flat" cmpd="sng" algn="ctr">
+                      <a:solidFill>
+                        <a:schemeClr val="tx1"/>
+                      </a:solidFill>
+                      <a:prstDash val="solid"/>
+                      <a:round/>
+                      <a:headEnd type="none" w="med" len="med"/>
+                      <a:tailEnd type="none" w="med" len="med"/>
+                    </a:lnR>
+                    <a:lnT w="12700" cap="flat" cmpd="sng" algn="ctr">
+                      <a:solidFill>
+                        <a:schemeClr val="tx1"/>
+                      </a:solidFill>
+                      <a:prstDash val="solid"/>
+                      <a:round/>
+                      <a:headEnd type="none" w="med" len="med"/>
+                      <a:tailEnd type="none" w="med" len="med"/>
+                    </a:lnT>
+                    <a:lnB w="12700" cap="flat" cmpd="sng" algn="ctr">
+                      <a:solidFill>
+                        <a:schemeClr val="tx1"/>
+                      </a:solidFill>
+                      <a:prstDash val="solid"/>
+                      <a:round/>
+                      <a:headEnd type="none" w="med" len="med"/>
+                      <a:tailEnd type="none" w="med" len="med"/>
+                    </a:lnB>
+                  </a:tcPr>
+                </a:tc>
+                <a:extLst>
+                  <a:ext uri="{0D108BD9-81ED-4DB2-BD59-A6C34878D82A}">
+                    <a16:rowId xmlns:a16="http://schemas.microsoft.com/office/drawing/2014/main" val="4195596853"/>
+                  </a:ext>
+                </a:extLst>
+              </a:tr>
+              <a:tr h="323901">
+                <a:tc>
+                  <a:txBody>
+                    <a:bodyPr/>
+                    <a:lstStyle/>
+                    <a:p>
+                      <a:r>
+                        <a:rPr lang="es-CO" sz="1600" b="1" dirty="0"/>
+                        <a:t>Conveniente para</a:t>
+                      </a:r>
+                      <a:endParaRPr lang="es-CO" sz="1600" dirty="0"/>
+                    </a:p>
+                  </a:txBody>
+                  <a:tcPr marL="59607" marR="59607" marT="29804" marB="29804" anchor="ctr">
+                    <a:lnL w="12700" cap="flat" cmpd="sng" algn="ctr">
+                      <a:solidFill>
+                        <a:schemeClr val="tx1"/>
+                      </a:solidFill>
+                      <a:prstDash val="solid"/>
+                      <a:round/>
+                      <a:headEnd type="none" w="med" len="med"/>
+                      <a:tailEnd type="none" w="med" len="med"/>
+                    </a:lnL>
+                    <a:lnR w="12700" cap="flat" cmpd="sng" algn="ctr">
+                      <a:solidFill>
+                        <a:schemeClr val="tx1"/>
+                      </a:solidFill>
+                      <a:prstDash val="solid"/>
+                      <a:round/>
+                      <a:headEnd type="none" w="med" len="med"/>
+                      <a:tailEnd type="none" w="med" len="med"/>
+                    </a:lnR>
+                    <a:lnT w="12700" cap="flat" cmpd="sng" algn="ctr">
+                      <a:solidFill>
+                        <a:schemeClr val="tx1"/>
+                      </a:solidFill>
+                      <a:prstDash val="solid"/>
+                      <a:round/>
+                      <a:headEnd type="none" w="med" len="med"/>
+                      <a:tailEnd type="none" w="med" len="med"/>
+                    </a:lnT>
+                    <a:lnB w="12700" cap="flat" cmpd="sng" algn="ctr">
+                      <a:solidFill>
+                        <a:schemeClr val="tx1"/>
+                      </a:solidFill>
+                      <a:prstDash val="solid"/>
+                      <a:round/>
+                      <a:headEnd type="none" w="med" len="med"/>
+                      <a:tailEnd type="none" w="med" len="med"/>
+                    </a:lnB>
+                    <a:solidFill>
+                      <a:schemeClr val="bg2"/>
+                    </a:solidFill>
+                  </a:tcPr>
+                </a:tc>
+                <a:tc>
+                  <a:txBody>
+                    <a:bodyPr/>
+                    <a:lstStyle/>
+                    <a:p>
+                      <a:r>
+                        <a:rPr lang="es-CO" sz="1600" dirty="0"/>
+                        <a:t>No se recomienda</a:t>
+                      </a:r>
+                    </a:p>
+                  </a:txBody>
+                  <a:tcPr marL="59607" marR="59607" marT="29804" marB="29804" anchor="ctr">
+                    <a:lnL w="12700" cap="flat" cmpd="sng" algn="ctr">
+                      <a:solidFill>
+                        <a:schemeClr val="tx1"/>
+                      </a:solidFill>
+                      <a:prstDash val="solid"/>
+                      <a:round/>
+                      <a:headEnd type="none" w="med" len="med"/>
+                      <a:tailEnd type="none" w="med" len="med"/>
+                    </a:lnL>
+                    <a:lnR w="12700" cap="flat" cmpd="sng" algn="ctr">
+                      <a:solidFill>
+                        <a:schemeClr val="tx1"/>
+                      </a:solidFill>
+                      <a:prstDash val="solid"/>
+                      <a:round/>
+                      <a:headEnd type="none" w="med" len="med"/>
+                      <a:tailEnd type="none" w="med" len="med"/>
+                    </a:lnR>
+                    <a:lnT w="12700" cap="flat" cmpd="sng" algn="ctr">
+                      <a:solidFill>
+                        <a:schemeClr val="tx1"/>
+                      </a:solidFill>
+                      <a:prstDash val="solid"/>
+                      <a:round/>
+                      <a:headEnd type="none" w="med" len="med"/>
+                      <a:tailEnd type="none" w="med" len="med"/>
+                    </a:lnT>
+                    <a:lnB w="12700" cap="flat" cmpd="sng" algn="ctr">
+                      <a:solidFill>
+                        <a:schemeClr val="tx1"/>
+                      </a:solidFill>
+                      <a:prstDash val="solid"/>
+                      <a:round/>
+                      <a:headEnd type="none" w="med" len="med"/>
+                      <a:tailEnd type="none" w="med" len="med"/>
+                    </a:lnB>
+                  </a:tcPr>
+                </a:tc>
+                <a:tc>
+                  <a:txBody>
+                    <a:bodyPr/>
+                    <a:lstStyle/>
+                    <a:p>
+                      <a:r>
+                        <a:rPr lang="es-CO" sz="1600"/>
+                        <a:t>Módulos pequeños</a:t>
+                      </a:r>
+                    </a:p>
+                  </a:txBody>
+                  <a:tcPr marL="59607" marR="59607" marT="29804" marB="29804" anchor="ctr">
+                    <a:lnL w="12700" cap="flat" cmpd="sng" algn="ctr">
+                      <a:solidFill>
+                        <a:schemeClr val="tx1"/>
+                      </a:solidFill>
+                      <a:prstDash val="solid"/>
+                      <a:round/>
+                      <a:headEnd type="none" w="med" len="med"/>
+                      <a:tailEnd type="none" w="med" len="med"/>
+                    </a:lnL>
+                    <a:lnR w="12700" cap="flat" cmpd="sng" algn="ctr">
+                      <a:solidFill>
+                        <a:schemeClr val="tx1"/>
+                      </a:solidFill>
+                      <a:prstDash val="solid"/>
+                      <a:round/>
+                      <a:headEnd type="none" w="med" len="med"/>
+                      <a:tailEnd type="none" w="med" len="med"/>
+                    </a:lnR>
+                    <a:lnT w="12700" cap="flat" cmpd="sng" algn="ctr">
+                      <a:solidFill>
+                        <a:schemeClr val="tx1"/>
+                      </a:solidFill>
+                      <a:prstDash val="solid"/>
+                      <a:round/>
+                      <a:headEnd type="none" w="med" len="med"/>
+                      <a:tailEnd type="none" w="med" len="med"/>
+                    </a:lnT>
+                    <a:lnB w="12700" cap="flat" cmpd="sng" algn="ctr">
+                      <a:solidFill>
+                        <a:schemeClr val="tx1"/>
+                      </a:solidFill>
+                      <a:prstDash val="solid"/>
+                      <a:round/>
+                      <a:headEnd type="none" w="med" len="med"/>
+                      <a:tailEnd type="none" w="med" len="med"/>
+                    </a:lnB>
+                  </a:tcPr>
+                </a:tc>
+                <a:tc>
+                  <a:txBody>
+                    <a:bodyPr/>
+                    <a:lstStyle/>
+                    <a:p>
+                      <a:r>
+                        <a:rPr lang="es-CO" sz="1600" dirty="0"/>
+                        <a:t>Módulos con muchas pruebas</a:t>
+                      </a:r>
+                    </a:p>
+                  </a:txBody>
+                  <a:tcPr marL="59607" marR="59607" marT="29804" marB="29804" anchor="ctr">
+                    <a:lnL w="12700" cap="flat" cmpd="sng" algn="ctr">
+                      <a:solidFill>
+                        <a:schemeClr val="tx1"/>
+                      </a:solidFill>
+                      <a:prstDash val="solid"/>
+                      <a:round/>
+                      <a:headEnd type="none" w="med" len="med"/>
+                      <a:tailEnd type="none" w="med" len="med"/>
+                    </a:lnL>
+                    <a:lnR w="12700" cap="flat" cmpd="sng" algn="ctr">
+                      <a:solidFill>
+                        <a:schemeClr val="tx1"/>
+                      </a:solidFill>
+                      <a:prstDash val="solid"/>
+                      <a:round/>
+                      <a:headEnd type="none" w="med" len="med"/>
+                      <a:tailEnd type="none" w="med" len="med"/>
+                    </a:lnR>
+                    <a:lnT w="12700" cap="flat" cmpd="sng" algn="ctr">
+                      <a:solidFill>
+                        <a:schemeClr val="tx1"/>
+                      </a:solidFill>
+                      <a:prstDash val="solid"/>
+                      <a:round/>
+                      <a:headEnd type="none" w="med" len="med"/>
+                      <a:tailEnd type="none" w="med" len="med"/>
+                    </a:lnT>
+                    <a:lnB w="12700" cap="flat" cmpd="sng" algn="ctr">
+                      <a:solidFill>
+                        <a:schemeClr val="tx1"/>
+                      </a:solidFill>
+                      <a:prstDash val="solid"/>
+                      <a:round/>
+                      <a:headEnd type="none" w="med" len="med"/>
+                      <a:tailEnd type="none" w="med" len="med"/>
+                    </a:lnB>
+                  </a:tcPr>
+                </a:tc>
+                <a:extLst>
+                  <a:ext uri="{0D108BD9-81ED-4DB2-BD59-A6C34878D82A}">
+                    <a16:rowId xmlns:a16="http://schemas.microsoft.com/office/drawing/2014/main" val="3507076388"/>
+                  </a:ext>
+                </a:extLst>
+              </a:tr>
+            </a:tbl>
+          </a:graphicData>
+        </a:graphic>
+      </p:graphicFrame>
+      <p:sp>
+        <p:nvSpPr>
+          <p:cNvPr id="8" name="CuadroTexto 7">
+            <a:extLst>
+              <a:ext uri="{FF2B5EF4-FFF2-40B4-BE49-F238E27FC236}">
+                <a16:creationId xmlns:a16="http://schemas.microsoft.com/office/drawing/2014/main" id="{1F4C7737-1236-44F9-840C-7EB47A030FDC}"/>
+              </a:ext>
+            </a:extLst>
+          </p:cNvPr>
+          <p:cNvSpPr txBox="1"/>
+          <p:nvPr/>
+        </p:nvSpPr>
+        <p:spPr>
+          <a:xfrm>
+            <a:off x="179512" y="5229200"/>
+            <a:ext cx="8819848" cy="830997"/>
+          </a:xfrm>
+          <a:prstGeom prst="rect">
+            <a:avLst/>
+          </a:prstGeom>
+          <a:solidFill>
+            <a:schemeClr val="accent6">
+              <a:lumMod val="20000"/>
+              <a:lumOff val="80000"/>
+            </a:schemeClr>
+          </a:solidFill>
+        </p:spPr>
+        <p:txBody>
+          <a:bodyPr wrap="square">
+            <a:spAutoFit/>
+          </a:bodyPr>
+          <a:lstStyle/>
+          <a:p>
+            <a:r>
+              <a:rPr lang="es-CO" sz="1600" b="1" dirty="0"/>
+              <a:t>Recomendación para este curso</a:t>
+            </a:r>
+            <a:r>
+              <a:rPr lang="es-CO" sz="1600" dirty="0"/>
+              <a:t>: se utiliza la guarda en el módulo mientras haya pocas pruebas. Cuando las pruebas crecen, se trasladan a </a:t>
+            </a:r>
+            <a:r>
+              <a:rPr lang="es-CO" sz="1400" b="1" dirty="0">
+                <a:latin typeface="Consolas" panose="020B0609020204030204" pitchFamily="49" charset="0"/>
+              </a:rPr>
+              <a:t>test_&lt;módulo&gt;.</a:t>
+            </a:r>
+            <a:r>
+              <a:rPr lang="es-CO" sz="1400" b="1" dirty="0" err="1">
+                <a:latin typeface="Consolas" panose="020B0609020204030204" pitchFamily="49" charset="0"/>
+              </a:rPr>
+              <a:t>py</a:t>
+            </a:r>
+            <a:r>
+              <a:rPr lang="es-CO" sz="1600" dirty="0"/>
+              <a:t>. En ambos casos, el programa principal (</a:t>
+            </a:r>
+            <a:r>
+              <a:rPr lang="es-CO" sz="1400" b="1" dirty="0">
+                <a:latin typeface="Consolas" panose="020B0609020204030204" pitchFamily="49" charset="0"/>
+              </a:rPr>
+              <a:t>main.py</a:t>
+            </a:r>
+            <a:r>
+              <a:rPr lang="es-CO" sz="1600" dirty="0"/>
+              <a:t>) nunca muestra las pruebas.</a:t>
+            </a:r>
+          </a:p>
+        </p:txBody>
+      </p:sp>
+      <p:sp>
+        <p:nvSpPr>
+          <p:cNvPr id="9" name="CuadroTexto 8">
+            <a:extLst>
+              <a:ext uri="{FF2B5EF4-FFF2-40B4-BE49-F238E27FC236}">
+                <a16:creationId xmlns:a16="http://schemas.microsoft.com/office/drawing/2014/main" id="{25C24812-7738-4097-A5C9-7B1D5571770F}"/>
+              </a:ext>
+            </a:extLst>
+          </p:cNvPr>
+          <p:cNvSpPr txBox="1"/>
+          <p:nvPr/>
+        </p:nvSpPr>
+        <p:spPr>
+          <a:xfrm>
+            <a:off x="191522" y="6156593"/>
+            <a:ext cx="8819848" cy="584775"/>
+          </a:xfrm>
+          <a:prstGeom prst="rect">
+            <a:avLst/>
+          </a:prstGeom>
+          <a:solidFill>
+            <a:schemeClr val="accent2">
+              <a:lumMod val="20000"/>
+              <a:lumOff val="80000"/>
+            </a:schemeClr>
+          </a:solidFill>
+        </p:spPr>
+        <p:txBody>
+          <a:bodyPr wrap="square">
+            <a:spAutoFit/>
+          </a:bodyPr>
+          <a:lstStyle/>
+          <a:p>
+            <a:r>
+              <a:rPr lang="es-MX" sz="1600" b="1" dirty="0"/>
+              <a:t>Tip</a:t>
+            </a:r>
+            <a:r>
+              <a:rPr lang="es-MX" sz="1600" dirty="0"/>
+              <a:t>: En la industria, las pruebas se escriben dentro de funciones </a:t>
+            </a:r>
+            <a:r>
+              <a:rPr lang="es-MX" sz="1400" b="1" dirty="0">
+                <a:latin typeface="Consolas" panose="020B0609020204030204" pitchFamily="49" charset="0"/>
+              </a:rPr>
+              <a:t>def test_...():</a:t>
+            </a:r>
+            <a:r>
+              <a:rPr lang="es-MX" sz="1600" dirty="0"/>
+              <a:t> y se ejecutan con la herramienta </a:t>
+            </a:r>
+            <a:r>
+              <a:rPr lang="es-MX" sz="1400" b="1" dirty="0" err="1">
+                <a:latin typeface="Consolas" panose="020B0609020204030204" pitchFamily="49" charset="0"/>
+              </a:rPr>
+              <a:t>pytest</a:t>
+            </a:r>
+            <a:r>
+              <a:rPr lang="es-MX" sz="1600" dirty="0"/>
+              <a:t>. Ver </a:t>
+            </a:r>
+            <a:r>
+              <a:rPr lang="es-MX" sz="1600" b="1" dirty="0"/>
+              <a:t>CS50P, </a:t>
+            </a:r>
+            <a:r>
+              <a:rPr lang="es-MX" sz="1600" b="1" dirty="0" err="1"/>
+              <a:t>Lecture</a:t>
+            </a:r>
+            <a:r>
+              <a:rPr lang="es-MX" sz="1600" b="1" dirty="0"/>
+              <a:t> 5</a:t>
+            </a:r>
+            <a:r>
+              <a:rPr lang="es-MX" sz="1600" dirty="0"/>
+              <a:t>: </a:t>
+            </a:r>
+            <a:r>
+              <a:rPr lang="es-MX" sz="1600" b="1" dirty="0" err="1"/>
+              <a:t>Unit</a:t>
+            </a:r>
+            <a:r>
+              <a:rPr lang="es-MX" sz="1600" b="1" dirty="0"/>
+              <a:t> </a:t>
+            </a:r>
+            <a:r>
+              <a:rPr lang="es-MX" sz="1600" b="1" dirty="0" err="1"/>
+              <a:t>Tests</a:t>
+            </a:r>
+            <a:r>
+              <a:rPr lang="es-MX" sz="1600" b="1" dirty="0"/>
+              <a:t> </a:t>
+            </a:r>
+            <a:r>
+              <a:rPr lang="es-MX" sz="1600" dirty="0">
+                <a:hlinkClick r:id="rId2"/>
+              </a:rPr>
+              <a:t>[notas]</a:t>
+            </a:r>
+            <a:r>
+              <a:rPr lang="es-MX" sz="1600" dirty="0"/>
+              <a:t> </a:t>
+            </a:r>
+            <a:r>
+              <a:rPr lang="es-MX" sz="1600" dirty="0">
+                <a:hlinkClick r:id="rId3"/>
+              </a:rPr>
+              <a:t>[video]</a:t>
+            </a:r>
+            <a:endParaRPr lang="es-CO" sz="1600" dirty="0"/>
+          </a:p>
+        </p:txBody>
+      </p:sp>
+    </p:spTree>
+    <p:extLst>
+      <p:ext uri="{BB962C8B-B14F-4D97-AF65-F5344CB8AC3E}">
+        <p14:creationId xmlns:p14="http://schemas.microsoft.com/office/powerpoint/2010/main" val="104062456"/>
+      </p:ext>
+    </p:extLst>
+  </p:cSld>
+  <p:clrMapOvr>
+    <a:masterClrMapping/>
+  </p:clrMapOvr>
+</p:sld>
+</file>
+
+<file path=ppt/slides/slide53.xml><?xml version="1.0" encoding="utf-8"?>
+<p:sld xmlns:a="http://schemas.openxmlformats.org/drawingml/2006/main" xmlns:r="http://schemas.openxmlformats.org/officeDocument/2006/relationships" xmlns:p="http://schemas.openxmlformats.org/presentationml/2006/main">
+  <p:cSld>
+    <p:spTree>
+      <p:nvGrpSpPr>
+        <p:cNvPr id="1" name=""/>
+        <p:cNvGrpSpPr/>
+        <p:nvPr/>
+      </p:nvGrpSpPr>
+      <p:grpSpPr>
+        <a:xfrm>
+          <a:off x="0" y="0"/>
+          <a:ext cx="0" cy="0"/>
+          <a:chOff x="0" y="0"/>
+          <a:chExt cx="0" cy="0"/>
+        </a:xfrm>
+      </p:grpSpPr>
+      <p:sp>
+        <p:nvSpPr>
+          <p:cNvPr id="5" name="4 Título"/>
+          <p:cNvSpPr>
+            <a:spLocks noGrp="1"/>
+          </p:cNvSpPr>
+          <p:nvPr>
+            <p:ph type="title"/>
+          </p:nvPr>
+        </p:nvSpPr>
+        <p:spPr>
+          <a:xfrm>
+            <a:off x="323528" y="116632"/>
+            <a:ext cx="8675832" cy="794653"/>
+          </a:xfrm>
+        </p:spPr>
+        <p:txBody>
+          <a:bodyPr>
+            <a:noAutofit/>
+          </a:bodyPr>
+          <a:lstStyle/>
+          <a:p>
+            <a:r>
+              <a:rPr lang="es-MX" sz="2800" b="1" dirty="0">
+                <a:latin typeface="Consolas" panose="020B0609020204030204" pitchFamily="49" charset="0"/>
+              </a:rPr>
+              <a:t>def main()</a:t>
+            </a:r>
+            <a:r>
+              <a:rPr lang="es-MX" sz="3200" dirty="0"/>
+              <a:t> y la guarda en el programa principal</a:t>
+            </a:r>
+            <a:endParaRPr lang="es-MX" sz="2800" dirty="0">
+              <a:latin typeface="Consolas" panose="020B0609020204030204" pitchFamily="49" charset="0"/>
+            </a:endParaRPr>
+          </a:p>
+        </p:txBody>
+      </p:sp>
+      <p:sp>
+        <p:nvSpPr>
+          <p:cNvPr id="9" name="CuadroTexto 8">
+            <a:extLst>
+              <a:ext uri="{FF2B5EF4-FFF2-40B4-BE49-F238E27FC236}">
+                <a16:creationId xmlns:a16="http://schemas.microsoft.com/office/drawing/2014/main" id="{25C24812-7738-4097-A5C9-7B1D5571770F}"/>
+              </a:ext>
+            </a:extLst>
+          </p:cNvPr>
+          <p:cNvSpPr txBox="1"/>
+          <p:nvPr/>
+        </p:nvSpPr>
+        <p:spPr>
+          <a:xfrm>
+            <a:off x="191522" y="5786100"/>
+            <a:ext cx="8819848" cy="523220"/>
+          </a:xfrm>
+          <a:prstGeom prst="rect">
+            <a:avLst/>
+          </a:prstGeom>
+          <a:solidFill>
+            <a:schemeClr val="accent6">
+              <a:lumMod val="20000"/>
+              <a:lumOff val="80000"/>
+            </a:schemeClr>
+          </a:solidFill>
+        </p:spPr>
+        <p:txBody>
+          <a:bodyPr wrap="square">
+            <a:spAutoFit/>
+          </a:bodyPr>
+          <a:lstStyle/>
+          <a:p>
+            <a:r>
+              <a:rPr lang="es-MX" sz="1400" dirty="0"/>
+              <a:t>Convención: esta estructura (</a:t>
+            </a:r>
+            <a:r>
+              <a:rPr lang="es-MX" sz="1200" b="1" dirty="0" err="1">
+                <a:latin typeface="Consolas" panose="020B0609020204030204" pitchFamily="49" charset="0"/>
+              </a:rPr>
+              <a:t>import</a:t>
+            </a:r>
+            <a:r>
+              <a:rPr lang="es-MX" sz="1400" b="1" dirty="0"/>
+              <a:t> → funciones → </a:t>
+            </a:r>
+            <a:r>
+              <a:rPr lang="es-MX" sz="1200" b="1" dirty="0">
+                <a:latin typeface="Consolas" panose="020B0609020204030204" pitchFamily="49" charset="0"/>
+              </a:rPr>
+              <a:t>def main()</a:t>
+            </a:r>
+            <a:r>
+              <a:rPr lang="es-MX" sz="1400" b="1" dirty="0"/>
+              <a:t> → guarda</a:t>
+            </a:r>
+            <a:r>
+              <a:rPr lang="es-MX" sz="1400" dirty="0"/>
+              <a:t>) es la forma habitual de organizar un programa en Python. Se recomienda usarla en todos los programas de aquí en adelante.</a:t>
+            </a:r>
+            <a:endParaRPr lang="es-CO" sz="1400" dirty="0"/>
+          </a:p>
+        </p:txBody>
+      </p:sp>
+      <p:sp>
+        <p:nvSpPr>
+          <p:cNvPr id="6" name="12 Rectángulo">
+            <a:extLst>
+              <a:ext uri="{FF2B5EF4-FFF2-40B4-BE49-F238E27FC236}">
+                <a16:creationId xmlns:a16="http://schemas.microsoft.com/office/drawing/2014/main" id="{AE954C63-B987-4F4B-926C-C0DEBF70C005}"/>
+              </a:ext>
+            </a:extLst>
+          </p:cNvPr>
+          <p:cNvSpPr/>
+          <p:nvPr/>
+        </p:nvSpPr>
+        <p:spPr>
+          <a:xfrm>
+            <a:off x="144638" y="692696"/>
+            <a:ext cx="8854721" cy="3477875"/>
+          </a:xfrm>
+          <a:prstGeom prst="rect">
+            <a:avLst/>
+          </a:prstGeom>
+        </p:spPr>
+        <p:txBody>
+          <a:bodyPr wrap="square">
+            <a:spAutoFit/>
+          </a:bodyPr>
+          <a:lstStyle/>
+          <a:p>
+            <a:pPr marL="342900" indent="-342900" rtl="0">
+              <a:buFont typeface="Arial" panose="020B0604020202020204" pitchFamily="34" charset="0"/>
+              <a:buChar char="•"/>
+            </a:pPr>
+            <a:r>
+              <a:rPr lang="es-MX" sz="2000" dirty="0"/>
+              <a:t>El código del programa principal se agrupa en una función llamada </a:t>
+            </a:r>
+            <a:r>
+              <a:rPr lang="es-MX" b="1" dirty="0">
+                <a:latin typeface="Consolas" panose="020B0609020204030204" pitchFamily="49" charset="0"/>
+              </a:rPr>
+              <a:t>main()</a:t>
+            </a:r>
+            <a:r>
+              <a:rPr lang="es-MX" sz="2000" dirty="0"/>
+              <a:t>.</a:t>
+            </a:r>
+          </a:p>
+          <a:p>
+            <a:pPr marL="342900" indent="-342900" rtl="0">
+              <a:buFont typeface="Arial" panose="020B0604020202020204" pitchFamily="34" charset="0"/>
+              <a:buChar char="•"/>
+            </a:pPr>
+            <a:r>
+              <a:rPr lang="es-MX" sz="2000" dirty="0"/>
+              <a:t>La llamada </a:t>
+            </a:r>
+            <a:r>
+              <a:rPr lang="es-MX" b="1" dirty="0">
+                <a:latin typeface="Consolas" panose="020B0609020204030204" pitchFamily="49" charset="0"/>
+              </a:rPr>
+              <a:t>main()</a:t>
+            </a:r>
+            <a:r>
+              <a:rPr lang="es-MX" sz="2000" dirty="0"/>
+              <a:t> se coloca dentro de </a:t>
+            </a:r>
+            <a:r>
+              <a:rPr lang="es-MX" b="1" dirty="0">
+                <a:latin typeface="Consolas" panose="020B0609020204030204" pitchFamily="49" charset="0"/>
+              </a:rPr>
+              <a:t>if __name__ == "__main__":</a:t>
+            </a:r>
+            <a:r>
+              <a:rPr lang="es-MX" sz="2000" dirty="0"/>
+              <a:t>.</a:t>
+            </a:r>
+          </a:p>
+          <a:p>
+            <a:pPr marL="342900" indent="-342900" rtl="0">
+              <a:buFont typeface="Arial" panose="020B0604020202020204" pitchFamily="34" charset="0"/>
+              <a:buChar char="•"/>
+            </a:pPr>
+            <a:r>
+              <a:rPr lang="es-MX" sz="2000" dirty="0"/>
+              <a:t>Así el programa solo arranca cuando el archivo se ejecuta directamente.</a:t>
+            </a:r>
+          </a:p>
+          <a:p>
+            <a:pPr marL="342900" indent="-342900" rtl="0">
+              <a:buFont typeface="Arial" panose="020B0604020202020204" pitchFamily="34" charset="0"/>
+              <a:buChar char="•"/>
+            </a:pPr>
+            <a:endParaRPr lang="es-MX" sz="2000" dirty="0"/>
+          </a:p>
+          <a:p>
+            <a:pPr marL="342900" indent="-342900" rtl="0">
+              <a:buFont typeface="Arial" panose="020B0604020202020204" pitchFamily="34" charset="0"/>
+              <a:buChar char="•"/>
+            </a:pPr>
+            <a:endParaRPr lang="es-MX" sz="2000" dirty="0"/>
+          </a:p>
+          <a:p>
+            <a:pPr marL="342900" indent="-342900" rtl="0">
+              <a:buFont typeface="Arial" panose="020B0604020202020204" pitchFamily="34" charset="0"/>
+              <a:buChar char="•"/>
+            </a:pPr>
+            <a:endParaRPr lang="es-MX" sz="2000" dirty="0"/>
+          </a:p>
+          <a:p>
+            <a:pPr marL="342900" indent="-342900" rtl="0">
+              <a:buFont typeface="Arial" panose="020B0604020202020204" pitchFamily="34" charset="0"/>
+              <a:buChar char="•"/>
+            </a:pPr>
+            <a:endParaRPr lang="es-MX" sz="2000" dirty="0"/>
+          </a:p>
+          <a:p>
+            <a:pPr marL="342900" indent="-342900">
+              <a:buFont typeface="Arial" panose="020B0604020202020204" pitchFamily="34" charset="0"/>
+              <a:buChar char="•"/>
+            </a:pPr>
+            <a:endParaRPr lang="es-CO" sz="2000" b="1" dirty="0"/>
+          </a:p>
+          <a:p>
+            <a:pPr marL="342900" indent="-342900">
+              <a:buFont typeface="Arial" panose="020B0604020202020204" pitchFamily="34" charset="0"/>
+              <a:buChar char="•"/>
+            </a:pPr>
+            <a:endParaRPr lang="es-CO" sz="2000" b="1" dirty="0"/>
+          </a:p>
+          <a:p>
+            <a:pPr marL="342900" indent="-342900">
+              <a:buFont typeface="Arial" panose="020B0604020202020204" pitchFamily="34" charset="0"/>
+              <a:buChar char="•"/>
+            </a:pPr>
+            <a:endParaRPr lang="es-CO" sz="2000" b="1" dirty="0"/>
+          </a:p>
+          <a:p>
+            <a:pPr marL="342900" indent="-342900">
+              <a:buFont typeface="Arial" panose="020B0604020202020204" pitchFamily="34" charset="0"/>
+              <a:buChar char="•"/>
+            </a:pPr>
+            <a:r>
+              <a:rPr lang="es-CO" sz="2000" b="1" dirty="0"/>
+              <a:t>Archivo</a:t>
+            </a:r>
+            <a:r>
+              <a:rPr lang="es-CO" sz="2000" dirty="0"/>
+              <a:t>: </a:t>
+            </a:r>
+            <a:r>
+              <a:rPr lang="es-MX" dirty="0">
+                <a:latin typeface="Consolas" panose="020B0609020204030204" pitchFamily="49" charset="0"/>
+              </a:rPr>
+              <a:t>2_con_guarda/main.py</a:t>
+            </a:r>
+            <a:r>
+              <a:rPr lang="es-MX" sz="2000" dirty="0"/>
+              <a:t> (líneas 4–8 y 30–31)</a:t>
+            </a:r>
+            <a:endParaRPr lang="es-CO" sz="2000" dirty="0"/>
+          </a:p>
+        </p:txBody>
+      </p:sp>
+      <p:sp>
+        <p:nvSpPr>
+          <p:cNvPr id="10" name="CuadroTexto 9">
+            <a:extLst>
+              <a:ext uri="{FF2B5EF4-FFF2-40B4-BE49-F238E27FC236}">
+                <a16:creationId xmlns:a16="http://schemas.microsoft.com/office/drawing/2014/main" id="{6CE94C09-2A1C-40F2-B844-E9571E920681}"/>
+              </a:ext>
+            </a:extLst>
+          </p:cNvPr>
+          <p:cNvSpPr txBox="1"/>
+          <p:nvPr/>
+        </p:nvSpPr>
+        <p:spPr>
+          <a:xfrm>
+            <a:off x="1619672" y="4174228"/>
+            <a:ext cx="5328592" cy="1569660"/>
+          </a:xfrm>
+          <a:prstGeom prst="rect">
+            <a:avLst/>
+          </a:prstGeom>
+          <a:noFill/>
+          <a:ln>
+            <a:solidFill>
+              <a:schemeClr val="tx1"/>
+            </a:solidFill>
+          </a:ln>
+        </p:spPr>
+        <p:txBody>
+          <a:bodyPr wrap="square">
+            <a:spAutoFit/>
+          </a:bodyPr>
+          <a:lstStyle/>
+          <a:p>
+            <a:r>
+              <a:rPr lang="es-CO" sz="1200" dirty="0">
+                <a:latin typeface="Consolas" panose="020B0609020204030204" pitchFamily="49" charset="0"/>
+              </a:rPr>
+              <a:t> 4  </a:t>
+            </a:r>
+            <a:r>
+              <a:rPr lang="es-CO" sz="1200" dirty="0" err="1">
+                <a:latin typeface="Consolas" panose="020B0609020204030204" pitchFamily="49" charset="0"/>
+              </a:rPr>
+              <a:t>import</a:t>
+            </a:r>
+            <a:r>
+              <a:rPr lang="es-CO" sz="1200" dirty="0">
+                <a:latin typeface="Consolas" panose="020B0609020204030204" pitchFamily="49" charset="0"/>
+              </a:rPr>
+              <a:t> conversiones</a:t>
+            </a:r>
+          </a:p>
+          <a:p>
+            <a:r>
+              <a:rPr lang="es-CO" sz="1200" dirty="0">
+                <a:latin typeface="Consolas" panose="020B0609020204030204" pitchFamily="49" charset="0"/>
+              </a:rPr>
+              <a:t> 5</a:t>
+            </a:r>
+          </a:p>
+          <a:p>
+            <a:r>
+              <a:rPr lang="es-CO" sz="1200" dirty="0">
+                <a:latin typeface="Consolas" panose="020B0609020204030204" pitchFamily="49" charset="0"/>
+              </a:rPr>
+              <a:t> 6</a:t>
+            </a:r>
+          </a:p>
+          <a:p>
+            <a:r>
+              <a:rPr lang="es-CO" sz="1200" dirty="0">
+                <a:latin typeface="Consolas" panose="020B0609020204030204" pitchFamily="49" charset="0"/>
+              </a:rPr>
+              <a:t> 7  </a:t>
+            </a:r>
+            <a:r>
+              <a:rPr lang="es-CO" sz="1200" dirty="0" err="1">
+                <a:latin typeface="Consolas" panose="020B0609020204030204" pitchFamily="49" charset="0"/>
+              </a:rPr>
+              <a:t>def</a:t>
+            </a:r>
+            <a:r>
+              <a:rPr lang="es-CO" sz="1200" dirty="0">
+                <a:latin typeface="Consolas" panose="020B0609020204030204" pitchFamily="49" charset="0"/>
+              </a:rPr>
+              <a:t> </a:t>
+            </a:r>
+            <a:r>
+              <a:rPr lang="es-CO" sz="1200" dirty="0" err="1">
+                <a:latin typeface="Consolas" panose="020B0609020204030204" pitchFamily="49" charset="0"/>
+              </a:rPr>
+              <a:t>main</a:t>
+            </a:r>
+            <a:r>
+              <a:rPr lang="es-CO" sz="1200" dirty="0">
+                <a:latin typeface="Consolas" panose="020B0609020204030204" pitchFamily="49" charset="0"/>
+              </a:rPr>
+              <a:t>():</a:t>
+            </a:r>
+          </a:p>
+          <a:p>
+            <a:r>
+              <a:rPr lang="es-CO" sz="1200" dirty="0">
+                <a:latin typeface="Consolas" panose="020B0609020204030204" pitchFamily="49" charset="0"/>
+              </a:rPr>
+              <a:t> 8      </a:t>
+            </a:r>
+            <a:r>
+              <a:rPr lang="es-CO" sz="1200" dirty="0" err="1">
+                <a:latin typeface="Consolas" panose="020B0609020204030204" pitchFamily="49" charset="0"/>
+              </a:rPr>
+              <a:t>print</a:t>
+            </a:r>
+            <a:r>
+              <a:rPr lang="es-CO" sz="1200" dirty="0">
+                <a:latin typeface="Consolas" panose="020B0609020204030204" pitchFamily="49" charset="0"/>
+              </a:rPr>
+              <a:t>("Programa de </a:t>
+            </a:r>
+            <a:r>
+              <a:rPr lang="es-CO" sz="1200" dirty="0" err="1">
+                <a:latin typeface="Consolas" panose="020B0609020204030204" pitchFamily="49" charset="0"/>
+              </a:rPr>
+              <a:t>conversion</a:t>
+            </a:r>
+            <a:r>
+              <a:rPr lang="es-CO" sz="1200" dirty="0">
+                <a:latin typeface="Consolas" panose="020B0609020204030204" pitchFamily="49" charset="0"/>
+              </a:rPr>
+              <a:t> de °C a °F y </a:t>
+            </a:r>
+            <a:r>
+              <a:rPr lang="es-CO" sz="1200" dirty="0" err="1">
+                <a:latin typeface="Consolas" panose="020B0609020204030204" pitchFamily="49" charset="0"/>
+              </a:rPr>
+              <a:t>°K</a:t>
+            </a:r>
+            <a:r>
+              <a:rPr lang="es-CO" sz="1200" dirty="0">
+                <a:latin typeface="Consolas" panose="020B0609020204030204" pitchFamily="49" charset="0"/>
+              </a:rPr>
+              <a:t>")</a:t>
+            </a:r>
+          </a:p>
+          <a:p>
+            <a:r>
+              <a:rPr lang="es-CO" sz="1200" dirty="0">
+                <a:latin typeface="Consolas" panose="020B0609020204030204" pitchFamily="49" charset="0"/>
+              </a:rPr>
+              <a:t>...</a:t>
+            </a:r>
+          </a:p>
+          <a:p>
+            <a:r>
+              <a:rPr lang="es-CO" sz="1200" dirty="0">
+                <a:latin typeface="Consolas" panose="020B0609020204030204" pitchFamily="49" charset="0"/>
+              </a:rPr>
+              <a:t>30  </a:t>
+            </a:r>
+            <a:r>
+              <a:rPr lang="es-CO" sz="1200" dirty="0" err="1">
+                <a:latin typeface="Consolas" panose="020B0609020204030204" pitchFamily="49" charset="0"/>
+              </a:rPr>
+              <a:t>if</a:t>
+            </a:r>
+            <a:r>
+              <a:rPr lang="es-CO" sz="1200" dirty="0">
+                <a:latin typeface="Consolas" panose="020B0609020204030204" pitchFamily="49" charset="0"/>
+              </a:rPr>
+              <a:t> __</a:t>
+            </a:r>
+            <a:r>
+              <a:rPr lang="es-CO" sz="1200" dirty="0" err="1">
+                <a:latin typeface="Consolas" panose="020B0609020204030204" pitchFamily="49" charset="0"/>
+              </a:rPr>
+              <a:t>name</a:t>
+            </a:r>
+            <a:r>
+              <a:rPr lang="es-CO" sz="1200" dirty="0">
+                <a:latin typeface="Consolas" panose="020B0609020204030204" pitchFamily="49" charset="0"/>
+              </a:rPr>
+              <a:t>__ == "__</a:t>
+            </a:r>
+            <a:r>
+              <a:rPr lang="es-CO" sz="1200" dirty="0" err="1">
+                <a:latin typeface="Consolas" panose="020B0609020204030204" pitchFamily="49" charset="0"/>
+              </a:rPr>
+              <a:t>main</a:t>
+            </a:r>
+            <a:r>
+              <a:rPr lang="es-CO" sz="1200" dirty="0">
+                <a:latin typeface="Consolas" panose="020B0609020204030204" pitchFamily="49" charset="0"/>
+              </a:rPr>
+              <a:t>__":</a:t>
+            </a:r>
+          </a:p>
+          <a:p>
+            <a:r>
+              <a:rPr lang="es-CO" sz="1200" dirty="0">
+                <a:latin typeface="Consolas" panose="020B0609020204030204" pitchFamily="49" charset="0"/>
+              </a:rPr>
+              <a:t>31      </a:t>
+            </a:r>
+            <a:r>
+              <a:rPr lang="es-CO" sz="1200" dirty="0" err="1">
+                <a:latin typeface="Consolas" panose="020B0609020204030204" pitchFamily="49" charset="0"/>
+              </a:rPr>
+              <a:t>main</a:t>
+            </a:r>
+            <a:r>
+              <a:rPr lang="es-CO" sz="1200" dirty="0">
+                <a:latin typeface="Consolas" panose="020B0609020204030204" pitchFamily="49" charset="0"/>
+              </a:rPr>
+              <a:t>()</a:t>
+            </a:r>
+          </a:p>
+        </p:txBody>
+      </p:sp>
+      <p:pic>
+        <p:nvPicPr>
+          <p:cNvPr id="7" name="Imagen 6">
+            <a:extLst>
+              <a:ext uri="{FF2B5EF4-FFF2-40B4-BE49-F238E27FC236}">
+                <a16:creationId xmlns:a16="http://schemas.microsoft.com/office/drawing/2014/main" id="{96B949C7-38F6-49D4-80E1-FE9C088E9D7F}"/>
+              </a:ext>
+            </a:extLst>
+          </p:cNvPr>
+          <p:cNvPicPr>
+            <a:picLocks noChangeAspect="1"/>
+          </p:cNvPicPr>
+          <p:nvPr/>
+        </p:nvPicPr>
+        <p:blipFill>
+          <a:blip r:embed="rId2" cstate="print">
+            <a:extLst>
+              <a:ext uri="{28A0092B-C50C-407E-A947-70E740481C1C}">
+                <a14:useLocalDpi xmlns:a14="http://schemas.microsoft.com/office/drawing/2010/main" val="0"/>
+              </a:ext>
+            </a:extLst>
+          </a:blip>
+          <a:stretch>
+            <a:fillRect/>
+          </a:stretch>
+        </p:blipFill>
+        <p:spPr>
+          <a:xfrm>
+            <a:off x="1526437" y="1639000"/>
+            <a:ext cx="5515062" cy="2150040"/>
+          </a:xfrm>
+          <a:prstGeom prst="rect">
+            <a:avLst/>
+          </a:prstGeom>
+        </p:spPr>
+      </p:pic>
+      <p:sp>
+        <p:nvSpPr>
+          <p:cNvPr id="11" name="CuadroTexto 10">
+            <a:extLst>
+              <a:ext uri="{FF2B5EF4-FFF2-40B4-BE49-F238E27FC236}">
+                <a16:creationId xmlns:a16="http://schemas.microsoft.com/office/drawing/2014/main" id="{688FC587-B925-4872-9176-CBAE616BD677}"/>
+              </a:ext>
+            </a:extLst>
+          </p:cNvPr>
+          <p:cNvSpPr txBox="1"/>
+          <p:nvPr/>
+        </p:nvSpPr>
+        <p:spPr>
+          <a:xfrm>
+            <a:off x="177845" y="6361583"/>
+            <a:ext cx="8819848" cy="307777"/>
+          </a:xfrm>
+          <a:prstGeom prst="rect">
+            <a:avLst/>
+          </a:prstGeom>
+          <a:solidFill>
+            <a:schemeClr val="accent2">
+              <a:lumMod val="20000"/>
+              <a:lumOff val="80000"/>
+            </a:schemeClr>
+          </a:solidFill>
+        </p:spPr>
+        <p:txBody>
+          <a:bodyPr wrap="square">
+            <a:spAutoFit/>
+          </a:bodyPr>
+          <a:lstStyle/>
+          <a:p>
+            <a:r>
+              <a:rPr lang="es-MX" sz="1400" b="1" dirty="0"/>
+              <a:t>Tip</a:t>
+            </a:r>
+            <a:r>
+              <a:rPr lang="es-MX" sz="1400" dirty="0"/>
+              <a:t>: ver </a:t>
+            </a:r>
+            <a:r>
+              <a:rPr lang="es-MX" sz="1400" b="1" dirty="0"/>
+              <a:t>CS50P, </a:t>
+            </a:r>
+            <a:r>
+              <a:rPr lang="es-MX" sz="1400" b="1" dirty="0" err="1"/>
+              <a:t>Lecture</a:t>
+            </a:r>
+            <a:r>
+              <a:rPr lang="es-MX" sz="1400" b="1" dirty="0"/>
+              <a:t> 4: </a:t>
+            </a:r>
+            <a:r>
+              <a:rPr lang="es-MX" sz="1400" b="1" dirty="0" err="1"/>
+              <a:t>Libraries</a:t>
+            </a:r>
+            <a:r>
+              <a:rPr lang="es-MX" sz="1400" dirty="0"/>
+              <a:t>, donde se usa la misma estructura con </a:t>
+            </a:r>
+            <a:r>
+              <a:rPr lang="es-MX" sz="1200" dirty="0">
+                <a:latin typeface="Consolas" panose="020B0609020204030204" pitchFamily="49" charset="0"/>
+              </a:rPr>
+              <a:t>def main()</a:t>
+            </a:r>
+            <a:r>
+              <a:rPr lang="es-MX" sz="1400" dirty="0"/>
+              <a:t> y la guarda. </a:t>
+            </a:r>
+            <a:r>
+              <a:rPr lang="es-MX" sz="1400" dirty="0">
+                <a:hlinkClick r:id="rId3"/>
+              </a:rPr>
+              <a:t>[notas]</a:t>
+            </a:r>
+            <a:r>
+              <a:rPr lang="es-MX" sz="1400" dirty="0"/>
+              <a:t> </a:t>
+            </a:r>
+            <a:r>
+              <a:rPr lang="es-MX" sz="1400" dirty="0">
+                <a:hlinkClick r:id="rId4"/>
+              </a:rPr>
+              <a:t>[video]</a:t>
+            </a:r>
+            <a:endParaRPr lang="es-MX" sz="1400" dirty="0"/>
+          </a:p>
+        </p:txBody>
+      </p:sp>
+    </p:spTree>
+    <p:extLst>
+      <p:ext uri="{BB962C8B-B14F-4D97-AF65-F5344CB8AC3E}">
+        <p14:creationId xmlns:p14="http://schemas.microsoft.com/office/powerpoint/2010/main" val="381250114"/>
+      </p:ext>
+    </p:extLst>
+  </p:cSld>
+  <p:clrMapOvr>
+    <a:masterClrMapping/>
+  </p:clrMapOvr>
+</p:sld>
+</file>
+
+<file path=ppt/slides/slide54.xml><?xml version="1.0" encoding="utf-8"?>
+<p:sld xmlns:a="http://schemas.openxmlformats.org/drawingml/2006/main" xmlns:r="http://schemas.openxmlformats.org/officeDocument/2006/relationships" xmlns:p="http://schemas.openxmlformats.org/presentationml/2006/main">
+  <p:cSld>
+    <p:spTree>
+      <p:nvGrpSpPr>
+        <p:cNvPr id="1" name=""/>
+        <p:cNvGrpSpPr/>
+        <p:nvPr/>
+      </p:nvGrpSpPr>
+      <p:grpSpPr>
+        <a:xfrm>
+          <a:off x="0" y="0"/>
+          <a:ext cx="0" cy="0"/>
+          <a:chOff x="0" y="0"/>
+          <a:chExt cx="0" cy="0"/>
+        </a:xfrm>
+      </p:grpSpPr>
+      <p:sp>
+        <p:nvSpPr>
+          <p:cNvPr id="5" name="4 Título"/>
+          <p:cNvSpPr>
+            <a:spLocks noGrp="1"/>
+          </p:cNvSpPr>
+          <p:nvPr>
+            <p:ph type="title"/>
+          </p:nvPr>
+        </p:nvSpPr>
+        <p:spPr>
+          <a:xfrm>
+            <a:off x="323528" y="116632"/>
+            <a:ext cx="8675832" cy="794653"/>
+          </a:xfrm>
+        </p:spPr>
+        <p:txBody>
+          <a:bodyPr>
+            <a:noAutofit/>
+          </a:bodyPr>
+          <a:lstStyle/>
+          <a:p>
+            <a:r>
+              <a:rPr lang="es-MX" sz="3200" dirty="0"/>
+              <a:t> Errores frecuentes al trabajar con varios archivos</a:t>
+            </a:r>
+            <a:endParaRPr lang="es-MX" sz="2800" dirty="0">
+              <a:latin typeface="Consolas" panose="020B0609020204030204" pitchFamily="49" charset="0"/>
+            </a:endParaRPr>
+          </a:p>
+        </p:txBody>
+      </p:sp>
+      <p:sp>
+        <p:nvSpPr>
+          <p:cNvPr id="11" name="CuadroTexto 10">
+            <a:extLst>
+              <a:ext uri="{FF2B5EF4-FFF2-40B4-BE49-F238E27FC236}">
+                <a16:creationId xmlns:a16="http://schemas.microsoft.com/office/drawing/2014/main" id="{688FC587-B925-4872-9176-CBAE616BD677}"/>
+              </a:ext>
+            </a:extLst>
+          </p:cNvPr>
+          <p:cNvSpPr txBox="1"/>
+          <p:nvPr/>
+        </p:nvSpPr>
+        <p:spPr>
+          <a:xfrm>
+            <a:off x="185517" y="6218148"/>
+            <a:ext cx="8819848" cy="523220"/>
+          </a:xfrm>
+          <a:prstGeom prst="rect">
+            <a:avLst/>
+          </a:prstGeom>
+          <a:solidFill>
+            <a:schemeClr val="bg2"/>
+          </a:solidFill>
+        </p:spPr>
+        <p:txBody>
+          <a:bodyPr wrap="square">
+            <a:spAutoFit/>
+          </a:bodyPr>
+          <a:lstStyle/>
+          <a:p>
+            <a:r>
+              <a:rPr lang="es-MX" sz="1400" b="1" dirty="0"/>
+              <a:t>Nota</a:t>
+            </a:r>
+            <a:r>
+              <a:rPr lang="es-MX" sz="1400" dirty="0"/>
+              <a:t>: al importar un módulo propio aparece la carpeta </a:t>
+            </a:r>
+            <a:r>
+              <a:rPr lang="es-MX" sz="1200" b="1" dirty="0">
+                <a:latin typeface="Consolas" panose="020B0609020204030204" pitchFamily="49" charset="0"/>
+              </a:rPr>
+              <a:t>__</a:t>
+            </a:r>
+            <a:r>
+              <a:rPr lang="es-MX" sz="1200" b="1" dirty="0" err="1">
+                <a:latin typeface="Consolas" panose="020B0609020204030204" pitchFamily="49" charset="0"/>
+              </a:rPr>
+              <a:t>pycache</a:t>
+            </a:r>
+            <a:r>
+              <a:rPr lang="es-MX" sz="1200" b="1" dirty="0">
+                <a:latin typeface="Consolas" panose="020B0609020204030204" pitchFamily="49" charset="0"/>
+              </a:rPr>
+              <a:t>__/</a:t>
+            </a:r>
+            <a:r>
+              <a:rPr lang="es-MX" sz="1400" dirty="0"/>
+              <a:t>. Python la crea automáticamente para cargar el módulo más rápido. Puede ignorarse y no debe entregarse</a:t>
+            </a:r>
+          </a:p>
+        </p:txBody>
+      </p:sp>
+      <p:pic>
+        <p:nvPicPr>
+          <p:cNvPr id="3" name="Imagen 2">
+            <a:extLst>
+              <a:ext uri="{FF2B5EF4-FFF2-40B4-BE49-F238E27FC236}">
+                <a16:creationId xmlns:a16="http://schemas.microsoft.com/office/drawing/2014/main" id="{6B039576-56D2-4AF6-ABFE-4B7A4B1EEDF2}"/>
+              </a:ext>
+            </a:extLst>
+          </p:cNvPr>
+          <p:cNvPicPr>
+            <a:picLocks noChangeAspect="1"/>
+          </p:cNvPicPr>
+          <p:nvPr/>
+        </p:nvPicPr>
+        <p:blipFill>
+          <a:blip r:embed="rId2" cstate="print">
+            <a:extLst>
+              <a:ext uri="{28A0092B-C50C-407E-A947-70E740481C1C}">
+                <a14:useLocalDpi xmlns:a14="http://schemas.microsoft.com/office/drawing/2010/main" val="0"/>
+              </a:ext>
+            </a:extLst>
+          </a:blip>
+          <a:stretch>
+            <a:fillRect/>
+          </a:stretch>
+        </p:blipFill>
+        <p:spPr>
+          <a:xfrm>
+            <a:off x="1043608" y="764704"/>
+            <a:ext cx="6804248" cy="2665444"/>
+          </a:xfrm>
+          <a:prstGeom prst="rect">
+            <a:avLst/>
+          </a:prstGeom>
+        </p:spPr>
+      </p:pic>
+      <p:graphicFrame>
+        <p:nvGraphicFramePr>
+          <p:cNvPr id="4" name="Tabla 3">
+            <a:extLst>
+              <a:ext uri="{FF2B5EF4-FFF2-40B4-BE49-F238E27FC236}">
+                <a16:creationId xmlns:a16="http://schemas.microsoft.com/office/drawing/2014/main" id="{CD664005-D744-4A81-AAF8-3108A854EB5C}"/>
+              </a:ext>
+            </a:extLst>
+          </p:cNvPr>
+          <p:cNvGraphicFramePr>
+            <a:graphicFrameLocks noGrp="1"/>
+          </p:cNvGraphicFramePr>
+          <p:nvPr>
+            <p:extLst>
+              <p:ext uri="{D42A27DB-BD31-4B8C-83A1-F6EECF244321}">
+                <p14:modId xmlns:p14="http://schemas.microsoft.com/office/powerpoint/2010/main" val="2027698030"/>
+              </p:ext>
+            </p:extLst>
+          </p:nvPr>
+        </p:nvGraphicFramePr>
+        <p:xfrm>
+          <a:off x="396370" y="3501008"/>
+          <a:ext cx="8530148" cy="2607852"/>
+        </p:xfrm>
+        <a:graphic>
+          <a:graphicData uri="http://schemas.openxmlformats.org/drawingml/2006/table">
+            <a:tbl>
+              <a:tblPr/>
+              <a:tblGrid>
+                <a:gridCol w="3240359">
+                  <a:extLst>
+                    <a:ext uri="{9D8B030D-6E8A-4147-A177-3AD203B41FA5}">
+                      <a16:colId xmlns:a16="http://schemas.microsoft.com/office/drawing/2014/main" val="3099165565"/>
+                    </a:ext>
+                  </a:extLst>
+                </a:gridCol>
+                <a:gridCol w="5289789">
+                  <a:extLst>
+                    <a:ext uri="{9D8B030D-6E8A-4147-A177-3AD203B41FA5}">
+                      <a16:colId xmlns:a16="http://schemas.microsoft.com/office/drawing/2014/main" val="556112726"/>
+                    </a:ext>
+                  </a:extLst>
+                </a:gridCol>
+              </a:tblGrid>
+              <a:tr h="309860">
+                <a:tc>
+                  <a:txBody>
+                    <a:bodyPr/>
+                    <a:lstStyle/>
+                    <a:p>
+                      <a:r>
+                        <a:rPr lang="es-CO" sz="1600" b="1"/>
+                        <a:t>Situación</a:t>
+                      </a:r>
+                    </a:p>
+                  </a:txBody>
+                  <a:tcPr anchor="ctr">
+                    <a:lnL w="12700" cap="flat" cmpd="sng" algn="ctr">
+                      <a:solidFill>
+                        <a:schemeClr val="tx1"/>
+                      </a:solidFill>
+                      <a:prstDash val="solid"/>
+                      <a:round/>
+                      <a:headEnd type="none" w="med" len="med"/>
+                      <a:tailEnd type="none" w="med" len="med"/>
+                    </a:lnL>
+                    <a:lnR w="12700" cap="flat" cmpd="sng" algn="ctr">
+                      <a:solidFill>
+                        <a:schemeClr val="tx1"/>
+                      </a:solidFill>
+                      <a:prstDash val="solid"/>
+                      <a:round/>
+                      <a:headEnd type="none" w="med" len="med"/>
+                      <a:tailEnd type="none" w="med" len="med"/>
+                    </a:lnR>
+                    <a:lnT w="12700" cap="flat" cmpd="sng" algn="ctr">
+                      <a:solidFill>
+                        <a:schemeClr val="tx1"/>
+                      </a:solidFill>
+                      <a:prstDash val="solid"/>
+                      <a:round/>
+                      <a:headEnd type="none" w="med" len="med"/>
+                      <a:tailEnd type="none" w="med" len="med"/>
+                    </a:lnT>
+                    <a:lnB w="12700" cap="flat" cmpd="sng" algn="ctr">
+                      <a:solidFill>
+                        <a:schemeClr val="tx1"/>
+                      </a:solidFill>
+                      <a:prstDash val="solid"/>
+                      <a:round/>
+                      <a:headEnd type="none" w="med" len="med"/>
+                      <a:tailEnd type="none" w="med" len="med"/>
+                    </a:lnB>
+                    <a:solidFill>
+                      <a:schemeClr val="bg2"/>
+                    </a:solidFill>
+                  </a:tcPr>
+                </a:tc>
+                <a:tc>
+                  <a:txBody>
+                    <a:bodyPr/>
+                    <a:lstStyle/>
+                    <a:p>
+                      <a:r>
+                        <a:rPr lang="es-CO" sz="1600" b="1" dirty="0"/>
+                        <a:t>Mensaje de Python</a:t>
+                      </a:r>
+                    </a:p>
+                  </a:txBody>
+                  <a:tcPr anchor="ctr">
+                    <a:lnL w="12700" cap="flat" cmpd="sng" algn="ctr">
+                      <a:solidFill>
+                        <a:schemeClr val="tx1"/>
+                      </a:solidFill>
+                      <a:prstDash val="solid"/>
+                      <a:round/>
+                      <a:headEnd type="none" w="med" len="med"/>
+                      <a:tailEnd type="none" w="med" len="med"/>
+                    </a:lnL>
+                    <a:lnR w="12700" cap="flat" cmpd="sng" algn="ctr">
+                      <a:solidFill>
+                        <a:schemeClr val="tx1"/>
+                      </a:solidFill>
+                      <a:prstDash val="solid"/>
+                      <a:round/>
+                      <a:headEnd type="none" w="med" len="med"/>
+                      <a:tailEnd type="none" w="med" len="med"/>
+                    </a:lnR>
+                    <a:lnT w="12700" cap="flat" cmpd="sng" algn="ctr">
+                      <a:solidFill>
+                        <a:schemeClr val="tx1"/>
+                      </a:solidFill>
+                      <a:prstDash val="solid"/>
+                      <a:round/>
+                      <a:headEnd type="none" w="med" len="med"/>
+                      <a:tailEnd type="none" w="med" len="med"/>
+                    </a:lnT>
+                    <a:lnB w="12700" cap="flat" cmpd="sng" algn="ctr">
+                      <a:solidFill>
+                        <a:schemeClr val="tx1"/>
+                      </a:solidFill>
+                      <a:prstDash val="solid"/>
+                      <a:round/>
+                      <a:headEnd type="none" w="med" len="med"/>
+                      <a:tailEnd type="none" w="med" len="med"/>
+                    </a:lnB>
+                    <a:solidFill>
+                      <a:schemeClr val="bg2"/>
+                    </a:solidFill>
+                  </a:tcPr>
+                </a:tc>
+                <a:extLst>
+                  <a:ext uri="{0D108BD9-81ED-4DB2-BD59-A6C34878D82A}">
+                    <a16:rowId xmlns:a16="http://schemas.microsoft.com/office/drawing/2014/main" val="2024888355"/>
+                  </a:ext>
+                </a:extLst>
+              </a:tr>
+              <a:tr h="535212">
+                <a:tc>
+                  <a:txBody>
+                    <a:bodyPr/>
+                    <a:lstStyle/>
+                    <a:p>
+                      <a:r>
+                        <a:rPr lang="es-MX" sz="1400" dirty="0">
+                          <a:latin typeface="Consolas" panose="020B0609020204030204" pitchFamily="49" charset="0"/>
+                        </a:rPr>
+                        <a:t>main.py</a:t>
+                      </a:r>
+                      <a:r>
+                        <a:rPr lang="es-MX" sz="1600" dirty="0"/>
+                        <a:t> y </a:t>
+                      </a:r>
+                      <a:r>
+                        <a:rPr lang="es-MX" sz="1400" dirty="0">
+                          <a:latin typeface="Consolas" panose="020B0609020204030204" pitchFamily="49" charset="0"/>
+                        </a:rPr>
+                        <a:t>conversiones.py</a:t>
+                      </a:r>
+                      <a:r>
+                        <a:rPr lang="es-MX" sz="1600" dirty="0"/>
+                        <a:t> en carpetas distintas</a:t>
+                      </a:r>
+                    </a:p>
+                  </a:txBody>
+                  <a:tcPr anchor="ctr">
+                    <a:lnL w="12700" cap="flat" cmpd="sng" algn="ctr">
+                      <a:solidFill>
+                        <a:schemeClr val="tx1"/>
+                      </a:solidFill>
+                      <a:prstDash val="solid"/>
+                      <a:round/>
+                      <a:headEnd type="none" w="med" len="med"/>
+                      <a:tailEnd type="none" w="med" len="med"/>
+                    </a:lnL>
+                    <a:lnR w="12700" cap="flat" cmpd="sng" algn="ctr">
+                      <a:solidFill>
+                        <a:schemeClr val="tx1"/>
+                      </a:solidFill>
+                      <a:prstDash val="solid"/>
+                      <a:round/>
+                      <a:headEnd type="none" w="med" len="med"/>
+                      <a:tailEnd type="none" w="med" len="med"/>
+                    </a:lnR>
+                    <a:lnT w="12700" cap="flat" cmpd="sng" algn="ctr">
+                      <a:solidFill>
+                        <a:schemeClr val="tx1"/>
+                      </a:solidFill>
+                      <a:prstDash val="solid"/>
+                      <a:round/>
+                      <a:headEnd type="none" w="med" len="med"/>
+                      <a:tailEnd type="none" w="med" len="med"/>
+                    </a:lnT>
+                    <a:lnB w="12700" cap="flat" cmpd="sng" algn="ctr">
+                      <a:solidFill>
+                        <a:schemeClr val="tx1"/>
+                      </a:solidFill>
+                      <a:prstDash val="solid"/>
+                      <a:round/>
+                      <a:headEnd type="none" w="med" len="med"/>
+                      <a:tailEnd type="none" w="med" len="med"/>
+                    </a:lnB>
+                  </a:tcPr>
+                </a:tc>
+                <a:tc>
+                  <a:txBody>
+                    <a:bodyPr/>
+                    <a:lstStyle/>
+                    <a:p>
+                      <a:r>
+                        <a:rPr lang="es-CO" sz="1400">
+                          <a:latin typeface="Consolas" panose="020B0609020204030204" pitchFamily="49" charset="0"/>
+                        </a:rPr>
+                        <a:t>ModuleNotFoundError: No module named 'conversiones'</a:t>
+                      </a:r>
+                    </a:p>
+                  </a:txBody>
+                  <a:tcPr anchor="ctr">
+                    <a:lnL w="12700" cap="flat" cmpd="sng" algn="ctr">
+                      <a:solidFill>
+                        <a:schemeClr val="tx1"/>
+                      </a:solidFill>
+                      <a:prstDash val="solid"/>
+                      <a:round/>
+                      <a:headEnd type="none" w="med" len="med"/>
+                      <a:tailEnd type="none" w="med" len="med"/>
+                    </a:lnL>
+                    <a:lnR w="12700" cap="flat" cmpd="sng" algn="ctr">
+                      <a:solidFill>
+                        <a:schemeClr val="tx1"/>
+                      </a:solidFill>
+                      <a:prstDash val="solid"/>
+                      <a:round/>
+                      <a:headEnd type="none" w="med" len="med"/>
+                      <a:tailEnd type="none" w="med" len="med"/>
+                    </a:lnR>
+                    <a:lnT w="12700" cap="flat" cmpd="sng" algn="ctr">
+                      <a:solidFill>
+                        <a:schemeClr val="tx1"/>
+                      </a:solidFill>
+                      <a:prstDash val="solid"/>
+                      <a:round/>
+                      <a:headEnd type="none" w="med" len="med"/>
+                      <a:tailEnd type="none" w="med" len="med"/>
+                    </a:lnT>
+                    <a:lnB w="12700" cap="flat" cmpd="sng" algn="ctr">
+                      <a:solidFill>
+                        <a:schemeClr val="tx1"/>
+                      </a:solidFill>
+                      <a:prstDash val="solid"/>
+                      <a:round/>
+                      <a:headEnd type="none" w="med" len="med"/>
+                      <a:tailEnd type="none" w="med" len="med"/>
+                    </a:lnB>
+                  </a:tcPr>
+                </a:tc>
+                <a:extLst>
+                  <a:ext uri="{0D108BD9-81ED-4DB2-BD59-A6C34878D82A}">
+                    <a16:rowId xmlns:a16="http://schemas.microsoft.com/office/drawing/2014/main" val="1457085462"/>
+                  </a:ext>
+                </a:extLst>
+              </a:tr>
+              <a:tr h="535212">
+                <a:tc>
+                  <a:txBody>
+                    <a:bodyPr/>
+                    <a:lstStyle/>
+                    <a:p>
+                      <a:r>
+                        <a:rPr lang="es-CO" sz="1600" dirty="0"/>
+                        <a:t>Escribir </a:t>
+                      </a:r>
+                      <a:r>
+                        <a:rPr lang="es-CO" sz="1400" dirty="0" err="1">
+                          <a:latin typeface="Consolas" panose="020B0609020204030204" pitchFamily="49" charset="0"/>
+                        </a:rPr>
+                        <a:t>import</a:t>
+                      </a:r>
+                      <a:r>
+                        <a:rPr lang="es-CO" sz="1400" dirty="0">
+                          <a:latin typeface="Consolas" panose="020B0609020204030204" pitchFamily="49" charset="0"/>
+                        </a:rPr>
+                        <a:t> conversiones.py</a:t>
+                      </a:r>
+                      <a:endParaRPr lang="es-CO" sz="1600" dirty="0">
+                        <a:latin typeface="Consolas" panose="020B0609020204030204" pitchFamily="49" charset="0"/>
+                      </a:endParaRPr>
+                    </a:p>
+                  </a:txBody>
+                  <a:tcPr anchor="ctr">
+                    <a:lnL w="12700" cap="flat" cmpd="sng" algn="ctr">
+                      <a:solidFill>
+                        <a:schemeClr val="tx1"/>
+                      </a:solidFill>
+                      <a:prstDash val="solid"/>
+                      <a:round/>
+                      <a:headEnd type="none" w="med" len="med"/>
+                      <a:tailEnd type="none" w="med" len="med"/>
+                    </a:lnL>
+                    <a:lnR w="12700" cap="flat" cmpd="sng" algn="ctr">
+                      <a:solidFill>
+                        <a:schemeClr val="tx1"/>
+                      </a:solidFill>
+                      <a:prstDash val="solid"/>
+                      <a:round/>
+                      <a:headEnd type="none" w="med" len="med"/>
+                      <a:tailEnd type="none" w="med" len="med"/>
+                    </a:lnR>
+                    <a:lnT w="12700" cap="flat" cmpd="sng" algn="ctr">
+                      <a:solidFill>
+                        <a:schemeClr val="tx1"/>
+                      </a:solidFill>
+                      <a:prstDash val="solid"/>
+                      <a:round/>
+                      <a:headEnd type="none" w="med" len="med"/>
+                      <a:tailEnd type="none" w="med" len="med"/>
+                    </a:lnT>
+                    <a:lnB w="12700" cap="flat" cmpd="sng" algn="ctr">
+                      <a:solidFill>
+                        <a:schemeClr val="tx1"/>
+                      </a:solidFill>
+                      <a:prstDash val="solid"/>
+                      <a:round/>
+                      <a:headEnd type="none" w="med" len="med"/>
+                      <a:tailEnd type="none" w="med" len="med"/>
+                    </a:lnB>
+                  </a:tcPr>
+                </a:tc>
+                <a:tc>
+                  <a:txBody>
+                    <a:bodyPr/>
+                    <a:lstStyle/>
+                    <a:p>
+                      <a:r>
+                        <a:rPr lang="en-US" sz="1400" dirty="0" err="1">
+                          <a:latin typeface="Consolas" panose="020B0609020204030204" pitchFamily="49" charset="0"/>
+                        </a:rPr>
+                        <a:t>ModuleNotFoundError</a:t>
+                      </a:r>
+                      <a:r>
+                        <a:rPr lang="en-US" sz="1400" dirty="0">
+                          <a:latin typeface="Consolas" panose="020B0609020204030204" pitchFamily="49" charset="0"/>
+                        </a:rPr>
+                        <a:t>: No module named 'conversiones.py'; '</a:t>
+                      </a:r>
+                      <a:r>
+                        <a:rPr lang="en-US" sz="1400" dirty="0" err="1">
+                          <a:latin typeface="Consolas" panose="020B0609020204030204" pitchFamily="49" charset="0"/>
+                        </a:rPr>
+                        <a:t>conversiones</a:t>
+                      </a:r>
+                      <a:r>
+                        <a:rPr lang="en-US" sz="1400" dirty="0">
+                          <a:latin typeface="Consolas" panose="020B0609020204030204" pitchFamily="49" charset="0"/>
+                        </a:rPr>
+                        <a:t>' is not a package</a:t>
+                      </a:r>
+                    </a:p>
+                  </a:txBody>
+                  <a:tcPr anchor="ctr">
+                    <a:lnL w="12700" cap="flat" cmpd="sng" algn="ctr">
+                      <a:solidFill>
+                        <a:schemeClr val="tx1"/>
+                      </a:solidFill>
+                      <a:prstDash val="solid"/>
+                      <a:round/>
+                      <a:headEnd type="none" w="med" len="med"/>
+                      <a:tailEnd type="none" w="med" len="med"/>
+                    </a:lnL>
+                    <a:lnR w="12700" cap="flat" cmpd="sng" algn="ctr">
+                      <a:solidFill>
+                        <a:schemeClr val="tx1"/>
+                      </a:solidFill>
+                      <a:prstDash val="solid"/>
+                      <a:round/>
+                      <a:headEnd type="none" w="med" len="med"/>
+                      <a:tailEnd type="none" w="med" len="med"/>
+                    </a:lnR>
+                    <a:lnT w="12700" cap="flat" cmpd="sng" algn="ctr">
+                      <a:solidFill>
+                        <a:schemeClr val="tx1"/>
+                      </a:solidFill>
+                      <a:prstDash val="solid"/>
+                      <a:round/>
+                      <a:headEnd type="none" w="med" len="med"/>
+                      <a:tailEnd type="none" w="med" len="med"/>
+                    </a:lnT>
+                    <a:lnB w="12700" cap="flat" cmpd="sng" algn="ctr">
+                      <a:solidFill>
+                        <a:schemeClr val="tx1"/>
+                      </a:solidFill>
+                      <a:prstDash val="solid"/>
+                      <a:round/>
+                      <a:headEnd type="none" w="med" len="med"/>
+                      <a:tailEnd type="none" w="med" len="med"/>
+                    </a:lnB>
+                  </a:tcPr>
+                </a:tc>
+                <a:extLst>
+                  <a:ext uri="{0D108BD9-81ED-4DB2-BD59-A6C34878D82A}">
+                    <a16:rowId xmlns:a16="http://schemas.microsoft.com/office/drawing/2014/main" val="925574772"/>
+                  </a:ext>
+                </a:extLst>
+              </a:tr>
+              <a:tr h="535212">
+                <a:tc>
+                  <a:txBody>
+                    <a:bodyPr/>
+                    <a:lstStyle/>
+                    <a:p>
+                      <a:r>
+                        <a:rPr lang="es-MX" sz="1600" dirty="0"/>
+                        <a:t>Llamar </a:t>
+                      </a:r>
+                      <a:r>
+                        <a:rPr lang="es-MX" sz="1400" dirty="0" err="1">
+                          <a:latin typeface="Consolas" panose="020B0609020204030204" pitchFamily="49" charset="0"/>
+                        </a:rPr>
+                        <a:t>celsius_a_fahrenheit</a:t>
+                      </a:r>
+                      <a:r>
+                        <a:rPr lang="es-MX" sz="1400" dirty="0">
+                          <a:latin typeface="Consolas" panose="020B0609020204030204" pitchFamily="49" charset="0"/>
+                        </a:rPr>
+                        <a:t>(10)</a:t>
+                      </a:r>
+                      <a:r>
+                        <a:rPr lang="es-MX" sz="1600" dirty="0"/>
+                        <a:t> sin el prefijo conversiones.</a:t>
+                      </a:r>
+                    </a:p>
+                  </a:txBody>
+                  <a:tcPr anchor="ctr">
+                    <a:lnL w="12700" cap="flat" cmpd="sng" algn="ctr">
+                      <a:solidFill>
+                        <a:schemeClr val="tx1"/>
+                      </a:solidFill>
+                      <a:prstDash val="solid"/>
+                      <a:round/>
+                      <a:headEnd type="none" w="med" len="med"/>
+                      <a:tailEnd type="none" w="med" len="med"/>
+                    </a:lnL>
+                    <a:lnR w="12700" cap="flat" cmpd="sng" algn="ctr">
+                      <a:solidFill>
+                        <a:schemeClr val="tx1"/>
+                      </a:solidFill>
+                      <a:prstDash val="solid"/>
+                      <a:round/>
+                      <a:headEnd type="none" w="med" len="med"/>
+                      <a:tailEnd type="none" w="med" len="med"/>
+                    </a:lnR>
+                    <a:lnT w="12700" cap="flat" cmpd="sng" algn="ctr">
+                      <a:solidFill>
+                        <a:schemeClr val="tx1"/>
+                      </a:solidFill>
+                      <a:prstDash val="solid"/>
+                      <a:round/>
+                      <a:headEnd type="none" w="med" len="med"/>
+                      <a:tailEnd type="none" w="med" len="med"/>
+                    </a:lnT>
+                    <a:lnB w="12700" cap="flat" cmpd="sng" algn="ctr">
+                      <a:solidFill>
+                        <a:schemeClr val="tx1"/>
+                      </a:solidFill>
+                      <a:prstDash val="solid"/>
+                      <a:round/>
+                      <a:headEnd type="none" w="med" len="med"/>
+                      <a:tailEnd type="none" w="med" len="med"/>
+                    </a:lnB>
+                  </a:tcPr>
+                </a:tc>
+                <a:tc>
+                  <a:txBody>
+                    <a:bodyPr/>
+                    <a:lstStyle/>
+                    <a:p>
+                      <a:r>
+                        <a:rPr lang="en-US" sz="1400" dirty="0" err="1">
+                          <a:latin typeface="Consolas" panose="020B0609020204030204" pitchFamily="49" charset="0"/>
+                        </a:rPr>
+                        <a:t>NameError</a:t>
+                      </a:r>
+                      <a:r>
+                        <a:rPr lang="en-US" sz="1400" dirty="0">
+                          <a:latin typeface="Consolas" panose="020B0609020204030204" pitchFamily="49" charset="0"/>
+                        </a:rPr>
+                        <a:t>: name '</a:t>
+                      </a:r>
+                      <a:r>
+                        <a:rPr lang="en-US" sz="1400" dirty="0" err="1">
+                          <a:latin typeface="Consolas" panose="020B0609020204030204" pitchFamily="49" charset="0"/>
+                        </a:rPr>
+                        <a:t>celsius_a_fahrenheit</a:t>
+                      </a:r>
+                      <a:r>
+                        <a:rPr lang="en-US" sz="1400" dirty="0">
+                          <a:latin typeface="Consolas" panose="020B0609020204030204" pitchFamily="49" charset="0"/>
+                        </a:rPr>
+                        <a:t>' is not defined</a:t>
+                      </a:r>
+                    </a:p>
+                  </a:txBody>
+                  <a:tcPr anchor="ctr">
+                    <a:lnL w="12700" cap="flat" cmpd="sng" algn="ctr">
+                      <a:solidFill>
+                        <a:schemeClr val="tx1"/>
+                      </a:solidFill>
+                      <a:prstDash val="solid"/>
+                      <a:round/>
+                      <a:headEnd type="none" w="med" len="med"/>
+                      <a:tailEnd type="none" w="med" len="med"/>
+                    </a:lnL>
+                    <a:lnR w="12700" cap="flat" cmpd="sng" algn="ctr">
+                      <a:solidFill>
+                        <a:schemeClr val="tx1"/>
+                      </a:solidFill>
+                      <a:prstDash val="solid"/>
+                      <a:round/>
+                      <a:headEnd type="none" w="med" len="med"/>
+                      <a:tailEnd type="none" w="med" len="med"/>
+                    </a:lnR>
+                    <a:lnT w="12700" cap="flat" cmpd="sng" algn="ctr">
+                      <a:solidFill>
+                        <a:schemeClr val="tx1"/>
+                      </a:solidFill>
+                      <a:prstDash val="solid"/>
+                      <a:round/>
+                      <a:headEnd type="none" w="med" len="med"/>
+                      <a:tailEnd type="none" w="med" len="med"/>
+                    </a:lnT>
+                    <a:lnB w="12700" cap="flat" cmpd="sng" algn="ctr">
+                      <a:solidFill>
+                        <a:schemeClr val="tx1"/>
+                      </a:solidFill>
+                      <a:prstDash val="solid"/>
+                      <a:round/>
+                      <a:headEnd type="none" w="med" len="med"/>
+                      <a:tailEnd type="none" w="med" len="med"/>
+                    </a:lnB>
+                  </a:tcPr>
+                </a:tc>
+                <a:extLst>
+                  <a:ext uri="{0D108BD9-81ED-4DB2-BD59-A6C34878D82A}">
+                    <a16:rowId xmlns:a16="http://schemas.microsoft.com/office/drawing/2014/main" val="4046715900"/>
+                  </a:ext>
+                </a:extLst>
+              </a:tr>
+              <a:tr h="309860">
+                <a:tc>
+                  <a:txBody>
+                    <a:bodyPr/>
+                    <a:lstStyle/>
+                    <a:p>
+                      <a:r>
+                        <a:rPr lang="es-CO" sz="1600" dirty="0"/>
+                        <a:t>Nombrar un archivo propio </a:t>
+                      </a:r>
+                      <a:r>
+                        <a:rPr lang="es-CO" sz="1400" dirty="0">
+                          <a:latin typeface="Consolas" panose="020B0609020204030204" pitchFamily="49" charset="0"/>
+                        </a:rPr>
+                        <a:t>random.py</a:t>
+                      </a:r>
+                      <a:endParaRPr lang="es-CO" sz="1600" dirty="0">
+                        <a:latin typeface="Consolas" panose="020B0609020204030204" pitchFamily="49" charset="0"/>
+                      </a:endParaRPr>
+                    </a:p>
+                  </a:txBody>
+                  <a:tcPr anchor="ctr">
+                    <a:lnL w="12700" cap="flat" cmpd="sng" algn="ctr">
+                      <a:solidFill>
+                        <a:schemeClr val="tx1"/>
+                      </a:solidFill>
+                      <a:prstDash val="solid"/>
+                      <a:round/>
+                      <a:headEnd type="none" w="med" len="med"/>
+                      <a:tailEnd type="none" w="med" len="med"/>
+                    </a:lnL>
+                    <a:lnR w="12700" cap="flat" cmpd="sng" algn="ctr">
+                      <a:solidFill>
+                        <a:schemeClr val="tx1"/>
+                      </a:solidFill>
+                      <a:prstDash val="solid"/>
+                      <a:round/>
+                      <a:headEnd type="none" w="med" len="med"/>
+                      <a:tailEnd type="none" w="med" len="med"/>
+                    </a:lnR>
+                    <a:lnT w="12700" cap="flat" cmpd="sng" algn="ctr">
+                      <a:solidFill>
+                        <a:schemeClr val="tx1"/>
+                      </a:solidFill>
+                      <a:prstDash val="solid"/>
+                      <a:round/>
+                      <a:headEnd type="none" w="med" len="med"/>
+                      <a:tailEnd type="none" w="med" len="med"/>
+                    </a:lnT>
+                    <a:lnB w="12700" cap="flat" cmpd="sng" algn="ctr">
+                      <a:solidFill>
+                        <a:schemeClr val="tx1"/>
+                      </a:solidFill>
+                      <a:prstDash val="solid"/>
+                      <a:round/>
+                      <a:headEnd type="none" w="med" len="med"/>
+                      <a:tailEnd type="none" w="med" len="med"/>
+                    </a:lnB>
+                  </a:tcPr>
+                </a:tc>
+                <a:tc>
+                  <a:txBody>
+                    <a:bodyPr/>
+                    <a:lstStyle/>
+                    <a:p>
+                      <a:r>
+                        <a:rPr lang="es-MX" sz="1600" dirty="0"/>
+                        <a:t>Se oculta la librería estándar, pues Python importa el archivo propio en lugar del módulo random de la librería estándar.</a:t>
+                      </a:r>
+                    </a:p>
+                  </a:txBody>
+                  <a:tcPr anchor="ctr">
+                    <a:lnL w="12700" cap="flat" cmpd="sng" algn="ctr">
+                      <a:solidFill>
+                        <a:schemeClr val="tx1"/>
+                      </a:solidFill>
+                      <a:prstDash val="solid"/>
+                      <a:round/>
+                      <a:headEnd type="none" w="med" len="med"/>
+                      <a:tailEnd type="none" w="med" len="med"/>
+                    </a:lnL>
+                    <a:lnR w="12700" cap="flat" cmpd="sng" algn="ctr">
+                      <a:solidFill>
+                        <a:schemeClr val="tx1"/>
+                      </a:solidFill>
+                      <a:prstDash val="solid"/>
+                      <a:round/>
+                      <a:headEnd type="none" w="med" len="med"/>
+                      <a:tailEnd type="none" w="med" len="med"/>
+                    </a:lnR>
+                    <a:lnT w="12700" cap="flat" cmpd="sng" algn="ctr">
+                      <a:solidFill>
+                        <a:schemeClr val="tx1"/>
+                      </a:solidFill>
+                      <a:prstDash val="solid"/>
+                      <a:round/>
+                      <a:headEnd type="none" w="med" len="med"/>
+                      <a:tailEnd type="none" w="med" len="med"/>
+                    </a:lnT>
+                    <a:lnB w="12700" cap="flat" cmpd="sng" algn="ctr">
+                      <a:solidFill>
+                        <a:schemeClr val="tx1"/>
+                      </a:solidFill>
+                      <a:prstDash val="solid"/>
+                      <a:round/>
+                      <a:headEnd type="none" w="med" len="med"/>
+                      <a:tailEnd type="none" w="med" len="med"/>
+                    </a:lnB>
+                  </a:tcPr>
+                </a:tc>
+                <a:extLst>
+                  <a:ext uri="{0D108BD9-81ED-4DB2-BD59-A6C34878D82A}">
+                    <a16:rowId xmlns:a16="http://schemas.microsoft.com/office/drawing/2014/main" val="411439737"/>
+                  </a:ext>
+                </a:extLst>
+              </a:tr>
+            </a:tbl>
+          </a:graphicData>
+        </a:graphic>
+      </p:graphicFrame>
+    </p:spTree>
+    <p:extLst>
+      <p:ext uri="{BB962C8B-B14F-4D97-AF65-F5344CB8AC3E}">
+        <p14:creationId xmlns:p14="http://schemas.microsoft.com/office/powerpoint/2010/main" val="2144786334"/>
+      </p:ext>
+    </p:extLst>
+  </p:cSld>
+  <p:clrMapOvr>
+    <a:masterClrMapping/>
+  </p:clrMapOvr>
+</p:sld>
+</file>
+
+<file path=ppt/slides/slide55.xml><?xml version="1.0" encoding="utf-8"?>
+<p:sld xmlns:a="http://schemas.openxmlformats.org/drawingml/2006/main" xmlns:r="http://schemas.openxmlformats.org/officeDocument/2006/relationships" xmlns:p="http://schemas.openxmlformats.org/presentationml/2006/main">
+  <p:cSld>
+    <p:spTree>
+      <p:nvGrpSpPr>
+        <p:cNvPr id="1" name=""/>
+        <p:cNvGrpSpPr/>
+        <p:nvPr/>
+      </p:nvGrpSpPr>
+      <p:grpSpPr>
+        <a:xfrm>
+          <a:off x="0" y="0"/>
+          <a:ext cx="0" cy="0"/>
+          <a:chOff x="0" y="0"/>
+          <a:chExt cx="0" cy="0"/>
+        </a:xfrm>
+      </p:grpSpPr>
+      <p:sp>
+        <p:nvSpPr>
+          <p:cNvPr id="5" name="4 Título"/>
+          <p:cNvSpPr>
+            <a:spLocks noGrp="1"/>
+          </p:cNvSpPr>
+          <p:nvPr>
+            <p:ph type="title"/>
+          </p:nvPr>
+        </p:nvSpPr>
+        <p:spPr>
+          <a:xfrm>
+            <a:off x="323528" y="116632"/>
+            <a:ext cx="8675832" cy="794653"/>
+          </a:xfrm>
+        </p:spPr>
+        <p:txBody>
+          <a:bodyPr>
+            <a:noAutofit/>
+          </a:bodyPr>
+          <a:lstStyle/>
+          <a:p>
+            <a:r>
+              <a:rPr lang="es-MX" sz="3600" dirty="0"/>
+              <a:t>Resumen de la clase</a:t>
+            </a:r>
+          </a:p>
+        </p:txBody>
+      </p:sp>
+      <p:sp>
+        <p:nvSpPr>
+          <p:cNvPr id="11" name="CuadroTexto 10">
+            <a:extLst>
+              <a:ext uri="{FF2B5EF4-FFF2-40B4-BE49-F238E27FC236}">
+                <a16:creationId xmlns:a16="http://schemas.microsoft.com/office/drawing/2014/main" id="{688FC587-B925-4872-9176-CBAE616BD677}"/>
+              </a:ext>
+            </a:extLst>
+          </p:cNvPr>
+          <p:cNvSpPr txBox="1"/>
+          <p:nvPr/>
+        </p:nvSpPr>
+        <p:spPr>
+          <a:xfrm>
+            <a:off x="251520" y="4580332"/>
+            <a:ext cx="8640960" cy="646331"/>
+          </a:xfrm>
+          <a:prstGeom prst="rect">
+            <a:avLst/>
+          </a:prstGeom>
+          <a:solidFill>
+            <a:schemeClr val="bg2"/>
+          </a:solidFill>
+        </p:spPr>
+        <p:txBody>
+          <a:bodyPr wrap="square">
+            <a:spAutoFit/>
+          </a:bodyPr>
+          <a:lstStyle/>
+          <a:p>
+            <a:r>
+              <a:rPr lang="es-MX" b="1" dirty="0"/>
+              <a:t>Importante</a:t>
+            </a:r>
+            <a:r>
+              <a:rPr lang="es-MX" dirty="0"/>
+              <a:t>: Una función bien diseñada tiene un nombre claro, una especificación, pruebas, y no depende de variables globales.</a:t>
+            </a:r>
+          </a:p>
+        </p:txBody>
+      </p:sp>
+      <p:sp>
+        <p:nvSpPr>
+          <p:cNvPr id="6" name="12 Rectángulo">
+            <a:extLst>
+              <a:ext uri="{FF2B5EF4-FFF2-40B4-BE49-F238E27FC236}">
+                <a16:creationId xmlns:a16="http://schemas.microsoft.com/office/drawing/2014/main" id="{A73AFEAC-B223-4D7F-B142-1E206A88BEB3}"/>
+              </a:ext>
+            </a:extLst>
+          </p:cNvPr>
+          <p:cNvSpPr/>
+          <p:nvPr/>
+        </p:nvSpPr>
+        <p:spPr>
+          <a:xfrm>
+            <a:off x="144639" y="909650"/>
+            <a:ext cx="8854721" cy="3170099"/>
+          </a:xfrm>
+          <a:prstGeom prst="rect">
+            <a:avLst/>
+          </a:prstGeom>
+        </p:spPr>
+        <p:txBody>
+          <a:bodyPr wrap="square">
+            <a:spAutoFit/>
+          </a:bodyPr>
+          <a:lstStyle/>
+          <a:p>
+            <a:pPr marL="457200" indent="-457200" rtl="0">
+              <a:buFont typeface="+mj-lt"/>
+              <a:buAutoNum type="arabicPeriod"/>
+            </a:pPr>
+            <a:r>
+              <a:rPr lang="es-MX" sz="2000" b="1" dirty="0"/>
+              <a:t>Funciones propias</a:t>
+            </a:r>
+            <a:r>
+              <a:rPr lang="es-MX" sz="2000" dirty="0"/>
+              <a:t>: se definen con </a:t>
+            </a:r>
+            <a:r>
+              <a:rPr lang="es-MX" b="1" dirty="0">
+                <a:latin typeface="Consolas" panose="020B0609020204030204" pitchFamily="49" charset="0"/>
+              </a:rPr>
+              <a:t>def</a:t>
+            </a:r>
+            <a:r>
+              <a:rPr lang="es-MX" sz="2000" dirty="0"/>
+              <a:t> y retornan con </a:t>
+            </a:r>
+            <a:r>
+              <a:rPr lang="es-MX" b="1" dirty="0" err="1">
+                <a:latin typeface="Consolas" panose="020B0609020204030204" pitchFamily="49" charset="0"/>
+              </a:rPr>
+              <a:t>return</a:t>
+            </a:r>
+            <a:r>
+              <a:rPr lang="es-MX" sz="2000" dirty="0"/>
+              <a:t>.</a:t>
+            </a:r>
+          </a:p>
+          <a:p>
+            <a:pPr marL="457200" indent="-457200" rtl="0">
+              <a:buFont typeface="+mj-lt"/>
+              <a:buAutoNum type="arabicPeriod"/>
+            </a:pPr>
+            <a:r>
+              <a:rPr lang="es-MX" sz="2000" b="1" dirty="0"/>
+              <a:t>Especificación</a:t>
+            </a:r>
+            <a:r>
+              <a:rPr lang="es-MX" sz="2000" dirty="0"/>
+              <a:t>: cada función lleva un </a:t>
+            </a:r>
+            <a:r>
+              <a:rPr lang="es-MX" sz="2000" dirty="0" err="1"/>
+              <a:t>docstring</a:t>
+            </a:r>
+            <a:r>
+              <a:rPr lang="es-MX" sz="2000" dirty="0"/>
+              <a:t> con </a:t>
+            </a:r>
+            <a:r>
+              <a:rPr lang="es-MX" sz="2000" b="1" dirty="0"/>
+              <a:t>supone </a:t>
+            </a:r>
+            <a:r>
+              <a:rPr lang="es-MX" sz="2000" dirty="0"/>
+              <a:t>y</a:t>
+            </a:r>
+            <a:r>
+              <a:rPr lang="es-MX" sz="2000" b="1" dirty="0"/>
+              <a:t> garantiza</a:t>
+            </a:r>
+            <a:r>
+              <a:rPr lang="es-MX" sz="2000" dirty="0"/>
+              <a:t>, que se consulta con </a:t>
+            </a:r>
+            <a:r>
+              <a:rPr lang="es-MX" b="1" dirty="0" err="1">
+                <a:latin typeface="Consolas" panose="020B0609020204030204" pitchFamily="49" charset="0"/>
+              </a:rPr>
+              <a:t>help</a:t>
+            </a:r>
+            <a:r>
+              <a:rPr lang="es-MX" b="1" dirty="0">
+                <a:latin typeface="Consolas" panose="020B0609020204030204" pitchFamily="49" charset="0"/>
+              </a:rPr>
+              <a:t>()</a:t>
+            </a:r>
+            <a:r>
+              <a:rPr lang="es-MX" sz="2000" dirty="0"/>
+              <a:t>.</a:t>
+            </a:r>
+          </a:p>
+          <a:p>
+            <a:pPr marL="457200" indent="-457200" rtl="0">
+              <a:buFont typeface="+mj-lt"/>
+              <a:buAutoNum type="arabicPeriod"/>
+            </a:pPr>
+            <a:r>
+              <a:rPr lang="es-MX" sz="2000" b="1" dirty="0"/>
+              <a:t>Pruebas</a:t>
+            </a:r>
+            <a:r>
+              <a:rPr lang="es-MX" sz="2000" dirty="0"/>
+              <a:t>: se escriben con </a:t>
+            </a:r>
+            <a:r>
+              <a:rPr lang="es-MX" b="1" dirty="0" err="1">
+                <a:latin typeface="Consolas" panose="020B0609020204030204" pitchFamily="49" charset="0"/>
+              </a:rPr>
+              <a:t>assert</a:t>
+            </a:r>
+            <a:r>
+              <a:rPr lang="es-MX" sz="2000" dirty="0"/>
+              <a:t>. Ejecutar un programa no es lo mismo que probarlo.</a:t>
+            </a:r>
+          </a:p>
+          <a:p>
+            <a:pPr marL="457200" indent="-457200" rtl="0">
+              <a:buFont typeface="+mj-lt"/>
+              <a:buAutoNum type="arabicPeriod"/>
+            </a:pPr>
+            <a:r>
+              <a:rPr lang="es-MX" sz="2000" b="1" dirty="0"/>
+              <a:t>Ámbito</a:t>
+            </a:r>
+            <a:r>
+              <a:rPr lang="es-MX" sz="2000" dirty="0"/>
+              <a:t>: las variables locales solo existen dentro de su función.</a:t>
+            </a:r>
+          </a:p>
+          <a:p>
+            <a:pPr marL="457200" indent="-457200" rtl="0">
+              <a:buFont typeface="+mj-lt"/>
+              <a:buAutoNum type="arabicPeriod"/>
+            </a:pPr>
+            <a:r>
+              <a:rPr lang="es-MX" sz="2000" b="1" dirty="0"/>
+              <a:t>Parámetros por defecto, y funciones que llaman a otras funciones</a:t>
+            </a:r>
+            <a:r>
+              <a:rPr lang="es-MX" sz="2000" dirty="0"/>
+              <a:t>.</a:t>
+            </a:r>
+          </a:p>
+          <a:p>
+            <a:pPr marL="457200" indent="-457200" rtl="0">
+              <a:buFont typeface="+mj-lt"/>
+              <a:buAutoNum type="arabicPeriod"/>
+            </a:pPr>
+            <a:r>
+              <a:rPr lang="es-MX" sz="2000" b="1" dirty="0"/>
+              <a:t>Diseño top-</a:t>
+            </a:r>
+            <a:r>
+              <a:rPr lang="es-MX" sz="2000" b="1" dirty="0" err="1"/>
+              <a:t>down</a:t>
+            </a:r>
+            <a:r>
+              <a:rPr lang="es-MX" sz="2000" dirty="0"/>
+              <a:t>: del problema general a funciones pequeñas, usando </a:t>
+            </a:r>
+            <a:r>
+              <a:rPr lang="es-MX" sz="2000" dirty="0" err="1"/>
+              <a:t>stubs</a:t>
+            </a:r>
+            <a:r>
+              <a:rPr lang="es-MX" sz="2000" dirty="0"/>
+              <a:t>.</a:t>
+            </a:r>
+          </a:p>
+          <a:p>
+            <a:pPr marL="457200" indent="-457200" rtl="0">
+              <a:buFont typeface="+mj-lt"/>
+              <a:buAutoNum type="arabicPeriod"/>
+            </a:pPr>
+            <a:r>
+              <a:rPr lang="es-MX" sz="2000" b="1" dirty="0"/>
+              <a:t>Librerías</a:t>
+            </a:r>
+            <a:r>
+              <a:rPr lang="es-MX" sz="2000" dirty="0"/>
+              <a:t>: funciones integradas, </a:t>
+            </a:r>
+            <a:r>
+              <a:rPr lang="es-MX" b="1" dirty="0">
+                <a:latin typeface="Consolas" panose="020B0609020204030204" pitchFamily="49" charset="0"/>
+              </a:rPr>
+              <a:t>math</a:t>
+            </a:r>
+            <a:r>
+              <a:rPr lang="es-MX" sz="2000" dirty="0"/>
+              <a:t> y </a:t>
+            </a:r>
+            <a:r>
+              <a:rPr lang="es-MX" b="1" dirty="0">
+                <a:latin typeface="Consolas" panose="020B0609020204030204" pitchFamily="49" charset="0"/>
+              </a:rPr>
+              <a:t>random</a:t>
+            </a:r>
+            <a:r>
+              <a:rPr lang="es-MX" sz="2000" dirty="0"/>
+              <a:t>.</a:t>
+            </a:r>
+          </a:p>
+          <a:p>
+            <a:pPr marL="457200" indent="-457200" rtl="0">
+              <a:buFont typeface="+mj-lt"/>
+              <a:buAutoNum type="arabicPeriod"/>
+            </a:pPr>
+            <a:r>
+              <a:rPr lang="es-MX" sz="2000" b="1" dirty="0"/>
+              <a:t>Módulos propios</a:t>
+            </a:r>
+            <a:r>
+              <a:rPr lang="es-MX" sz="2000" dirty="0"/>
+              <a:t>: </a:t>
+            </a:r>
+            <a:r>
+              <a:rPr lang="es-MX" b="1" dirty="0" err="1">
+                <a:latin typeface="Consolas" panose="020B0609020204030204" pitchFamily="49" charset="0"/>
+              </a:rPr>
+              <a:t>import</a:t>
+            </a:r>
+            <a:r>
+              <a:rPr lang="es-MX" sz="2000" dirty="0"/>
+              <a:t>, </a:t>
+            </a:r>
+            <a:r>
+              <a:rPr lang="es-MX" b="1" dirty="0">
+                <a:latin typeface="Consolas" panose="020B0609020204030204" pitchFamily="49" charset="0"/>
+              </a:rPr>
+              <a:t>__name__</a:t>
+            </a:r>
+            <a:r>
+              <a:rPr lang="es-MX" sz="2000" dirty="0"/>
+              <a:t>, y </a:t>
+            </a:r>
+            <a:r>
+              <a:rPr lang="es-MX" b="1" dirty="0">
+                <a:latin typeface="Consolas" panose="020B0609020204030204" pitchFamily="49" charset="0"/>
+              </a:rPr>
+              <a:t>def main()</a:t>
+            </a:r>
+            <a:r>
+              <a:rPr lang="es-MX" sz="2000" dirty="0"/>
+              <a:t> con la guarda.</a:t>
+            </a:r>
+            <a:endParaRPr lang="es-CO" sz="2000" dirty="0"/>
+          </a:p>
+        </p:txBody>
+      </p:sp>
+    </p:spTree>
+    <p:extLst>
+      <p:ext uri="{BB962C8B-B14F-4D97-AF65-F5344CB8AC3E}">
+        <p14:creationId xmlns:p14="http://schemas.microsoft.com/office/powerpoint/2010/main" val="478727715"/>
+      </p:ext>
+    </p:extLst>
+  </p:cSld>
+  <p:clrMapOvr>
+    <a:masterClrMapping/>
+  </p:clrMapOvr>
+</p:sld>
+</file>
+
+<file path=ppt/slides/slide56.xml><?xml version="1.0" encoding="utf-8"?>
+<p:sld xmlns:a="http://schemas.openxmlformats.org/drawingml/2006/main" xmlns:r="http://schemas.openxmlformats.org/officeDocument/2006/relationships" xmlns:p="http://schemas.openxmlformats.org/presentationml/2006/main">
+  <p:cSld>
+    <p:spTree>
+      <p:nvGrpSpPr>
+        <p:cNvPr id="1" name=""/>
+        <p:cNvGrpSpPr/>
+        <p:nvPr/>
+      </p:nvGrpSpPr>
+      <p:grpSpPr>
+        <a:xfrm>
+          <a:off x="0" y="0"/>
+          <a:ext cx="0" cy="0"/>
+          <a:chOff x="0" y="0"/>
+          <a:chExt cx="0" cy="0"/>
+        </a:xfrm>
+      </p:grpSpPr>
+      <p:sp>
+        <p:nvSpPr>
+          <p:cNvPr id="5" name="4 Título"/>
+          <p:cNvSpPr>
+            <a:spLocks noGrp="1"/>
+          </p:cNvSpPr>
+          <p:nvPr>
+            <p:ph type="title"/>
+          </p:nvPr>
+        </p:nvSpPr>
+        <p:spPr>
+          <a:xfrm>
+            <a:off x="323528" y="116632"/>
+            <a:ext cx="8675832" cy="794653"/>
+          </a:xfrm>
+        </p:spPr>
+        <p:txBody>
+          <a:bodyPr>
+            <a:noAutofit/>
+          </a:bodyPr>
+          <a:lstStyle/>
+          <a:p>
+            <a:r>
+              <a:rPr lang="es-MX" sz="3200" dirty="0"/>
+              <a:t>Un problema que todavía no se puede resolver bien</a:t>
+            </a:r>
+          </a:p>
+        </p:txBody>
+      </p:sp>
+      <p:sp>
+        <p:nvSpPr>
+          <p:cNvPr id="11" name="CuadroTexto 10">
+            <a:extLst>
+              <a:ext uri="{FF2B5EF4-FFF2-40B4-BE49-F238E27FC236}">
+                <a16:creationId xmlns:a16="http://schemas.microsoft.com/office/drawing/2014/main" id="{688FC587-B925-4872-9176-CBAE616BD677}"/>
+              </a:ext>
+            </a:extLst>
+          </p:cNvPr>
+          <p:cNvSpPr txBox="1"/>
+          <p:nvPr/>
+        </p:nvSpPr>
+        <p:spPr>
+          <a:xfrm>
+            <a:off x="308007" y="5541382"/>
+            <a:ext cx="8512465" cy="923330"/>
+          </a:xfrm>
+          <a:prstGeom prst="rect">
+            <a:avLst/>
+          </a:prstGeom>
+          <a:solidFill>
+            <a:schemeClr val="bg2"/>
+          </a:solidFill>
+        </p:spPr>
+        <p:txBody>
+          <a:bodyPr wrap="square">
+            <a:spAutoFit/>
+          </a:bodyPr>
+          <a:lstStyle/>
+          <a:p>
+            <a:r>
+              <a:rPr lang="es-MX" b="1" dirty="0"/>
+              <a:t>Pregunta</a:t>
+            </a:r>
+            <a:r>
+              <a:rPr lang="es-MX" dirty="0"/>
+              <a:t>: El promedio solo se conoce después de leer todas las notas. ¿Cómo se compara cada nota con el promedio, si las anteriores ya se perdieron? ¿Qué pasaría si el curso tuviera 40 estudiantes y se usaran 40 variables?</a:t>
+            </a:r>
+          </a:p>
+        </p:txBody>
+      </p:sp>
+      <p:sp>
+        <p:nvSpPr>
+          <p:cNvPr id="6" name="12 Rectángulo">
+            <a:extLst>
+              <a:ext uri="{FF2B5EF4-FFF2-40B4-BE49-F238E27FC236}">
+                <a16:creationId xmlns:a16="http://schemas.microsoft.com/office/drawing/2014/main" id="{A73AFEAC-B223-4D7F-B142-1E206A88BEB3}"/>
+              </a:ext>
+            </a:extLst>
+          </p:cNvPr>
+          <p:cNvSpPr/>
+          <p:nvPr/>
+        </p:nvSpPr>
+        <p:spPr>
+          <a:xfrm>
+            <a:off x="144639" y="692696"/>
+            <a:ext cx="8854721" cy="4124206"/>
+          </a:xfrm>
+          <a:prstGeom prst="rect">
+            <a:avLst/>
+          </a:prstGeom>
+        </p:spPr>
+        <p:txBody>
+          <a:bodyPr wrap="square">
+            <a:spAutoFit/>
+          </a:bodyPr>
+          <a:lstStyle/>
+          <a:p>
+            <a:pPr rtl="0"/>
+            <a:r>
+              <a:rPr lang="es-MX" sz="2200" b="1" dirty="0"/>
+              <a:t>Enunciado</a:t>
+            </a:r>
+            <a:r>
+              <a:rPr lang="es-MX" sz="2200" dirty="0"/>
+              <a:t>:</a:t>
+            </a:r>
+          </a:p>
+          <a:p>
+            <a:pPr rtl="0"/>
+            <a:r>
+              <a:rPr lang="es-MX" sz="2000" dirty="0"/>
+              <a:t>Leer las notas de los estudiantes de un curso y mostrar </a:t>
+            </a:r>
+            <a:r>
+              <a:rPr lang="es-MX" sz="2000" b="1" dirty="0"/>
+              <a:t>cuántas notas son mayores que el promedio</a:t>
+            </a:r>
+            <a:r>
+              <a:rPr lang="es-MX" sz="2000" dirty="0"/>
+              <a:t>.</a:t>
+            </a:r>
+          </a:p>
+          <a:p>
+            <a:pPr marL="342900" indent="-342900" rtl="0">
+              <a:buFont typeface="Arial" panose="020B0604020202020204" pitchFamily="34" charset="0"/>
+              <a:buChar char="•"/>
+            </a:pPr>
+            <a:r>
+              <a:rPr lang="es-MX" sz="2000" b="1" dirty="0"/>
+              <a:t>Archivo</a:t>
+            </a:r>
+            <a:r>
+              <a:rPr lang="es-MX" sz="2000" dirty="0"/>
+              <a:t>: </a:t>
+            </a:r>
+            <a:r>
+              <a:rPr lang="es-MX" dirty="0">
+                <a:latin typeface="Consolas" panose="020B0609020204030204" pitchFamily="49" charset="0"/>
+              </a:rPr>
+              <a:t>notas_sin_arreglos.py</a:t>
+            </a:r>
+            <a:r>
+              <a:rPr lang="es-MX" sz="2000" dirty="0"/>
+              <a:t> (líneas 9–19)</a:t>
+            </a:r>
+          </a:p>
+          <a:p>
+            <a:pPr marL="342900" indent="-342900" rtl="0">
+              <a:buFont typeface="Arial" panose="020B0604020202020204" pitchFamily="34" charset="0"/>
+              <a:buChar char="•"/>
+            </a:pPr>
+            <a:endParaRPr lang="es-MX" sz="2000" dirty="0"/>
+          </a:p>
+          <a:p>
+            <a:pPr marL="342900" indent="-342900" rtl="0">
+              <a:buFont typeface="Arial" panose="020B0604020202020204" pitchFamily="34" charset="0"/>
+              <a:buChar char="•"/>
+            </a:pPr>
+            <a:endParaRPr lang="es-MX" sz="2000" dirty="0"/>
+          </a:p>
+          <a:p>
+            <a:pPr marL="342900" indent="-342900" rtl="0">
+              <a:buFont typeface="Arial" panose="020B0604020202020204" pitchFamily="34" charset="0"/>
+              <a:buChar char="•"/>
+            </a:pPr>
+            <a:endParaRPr lang="es-MX" sz="2000" dirty="0"/>
+          </a:p>
+          <a:p>
+            <a:pPr marL="342900" indent="-342900" rtl="0">
+              <a:buFont typeface="Arial" panose="020B0604020202020204" pitchFamily="34" charset="0"/>
+              <a:buChar char="•"/>
+            </a:pPr>
+            <a:endParaRPr lang="es-MX" sz="2000" dirty="0"/>
+          </a:p>
+          <a:p>
+            <a:pPr marL="342900" indent="-342900" rtl="0">
+              <a:buFont typeface="Arial" panose="020B0604020202020204" pitchFamily="34" charset="0"/>
+              <a:buChar char="•"/>
+            </a:pPr>
+            <a:endParaRPr lang="es-MX" sz="2000" dirty="0"/>
+          </a:p>
+          <a:p>
+            <a:pPr marL="342900" indent="-342900" rtl="0">
+              <a:buFont typeface="Arial" panose="020B0604020202020204" pitchFamily="34" charset="0"/>
+              <a:buChar char="•"/>
+            </a:pPr>
+            <a:endParaRPr lang="es-MX" sz="2000" dirty="0"/>
+          </a:p>
+          <a:p>
+            <a:pPr marL="342900" indent="-342900" rtl="0">
+              <a:buFont typeface="Arial" panose="020B0604020202020204" pitchFamily="34" charset="0"/>
+              <a:buChar char="•"/>
+            </a:pPr>
+            <a:endParaRPr lang="es-MX" sz="2000" dirty="0"/>
+          </a:p>
+          <a:p>
+            <a:pPr marL="342900" indent="-342900" rtl="0">
+              <a:buFont typeface="Arial" panose="020B0604020202020204" pitchFamily="34" charset="0"/>
+              <a:buChar char="•"/>
+            </a:pPr>
+            <a:endParaRPr lang="es-MX" sz="2000" dirty="0"/>
+          </a:p>
+          <a:p>
+            <a:pPr marL="342900" indent="-342900" rtl="0">
+              <a:buFont typeface="Arial" panose="020B0604020202020204" pitchFamily="34" charset="0"/>
+              <a:buChar char="•"/>
+            </a:pPr>
+            <a:r>
+              <a:rPr lang="es-MX" sz="2000" b="1" dirty="0"/>
+              <a:t>Salida</a:t>
+            </a:r>
+            <a:r>
+              <a:rPr lang="es-MX" sz="2000" dirty="0"/>
+              <a:t> (con 4 estudiantes: 3.0, 4.5, 2.0, 4.0):</a:t>
+            </a:r>
+          </a:p>
+        </p:txBody>
+      </p:sp>
+      <p:sp>
+        <p:nvSpPr>
+          <p:cNvPr id="7" name="CuadroTexto 6">
+            <a:extLst>
+              <a:ext uri="{FF2B5EF4-FFF2-40B4-BE49-F238E27FC236}">
+                <a16:creationId xmlns:a16="http://schemas.microsoft.com/office/drawing/2014/main" id="{41CE0D67-953B-4B33-BC21-F6E2079C93A0}"/>
+              </a:ext>
+            </a:extLst>
+          </p:cNvPr>
+          <p:cNvSpPr txBox="1"/>
+          <p:nvPr/>
+        </p:nvSpPr>
+        <p:spPr>
+          <a:xfrm>
+            <a:off x="1043607" y="2097430"/>
+            <a:ext cx="7056784" cy="2123658"/>
+          </a:xfrm>
+          <a:prstGeom prst="rect">
+            <a:avLst/>
+          </a:prstGeom>
+          <a:noFill/>
+          <a:ln>
+            <a:solidFill>
+              <a:schemeClr val="tx1"/>
+            </a:solidFill>
+          </a:ln>
+        </p:spPr>
+        <p:txBody>
+          <a:bodyPr wrap="square">
+            <a:spAutoFit/>
+          </a:bodyPr>
+          <a:lstStyle/>
+          <a:p>
+            <a:r>
+              <a:rPr lang="es-CO" sz="1200" dirty="0">
+                <a:latin typeface="Consolas" panose="020B0609020204030204" pitchFamily="49" charset="0"/>
+              </a:rPr>
+              <a:t> 9  </a:t>
+            </a:r>
+            <a:r>
+              <a:rPr lang="es-CO" sz="1200" dirty="0" err="1">
+                <a:latin typeface="Consolas" panose="020B0609020204030204" pitchFamily="49" charset="0"/>
+              </a:rPr>
+              <a:t>def</a:t>
+            </a:r>
+            <a:r>
+              <a:rPr lang="es-CO" sz="1200" dirty="0">
+                <a:latin typeface="Consolas" panose="020B0609020204030204" pitchFamily="49" charset="0"/>
+              </a:rPr>
+              <a:t> </a:t>
+            </a:r>
+            <a:r>
+              <a:rPr lang="es-CO" sz="1200" dirty="0" err="1">
+                <a:latin typeface="Consolas" panose="020B0609020204030204" pitchFamily="49" charset="0"/>
+              </a:rPr>
+              <a:t>main</a:t>
+            </a:r>
+            <a:r>
+              <a:rPr lang="es-CO" sz="1200" dirty="0">
+                <a:latin typeface="Consolas" panose="020B0609020204030204" pitchFamily="49" charset="0"/>
+              </a:rPr>
+              <a:t>():</a:t>
+            </a:r>
+          </a:p>
+          <a:p>
+            <a:r>
+              <a:rPr lang="es-CO" sz="1200" dirty="0">
+                <a:latin typeface="Consolas" panose="020B0609020204030204" pitchFamily="49" charset="0"/>
+              </a:rPr>
+              <a:t>10      cantidad = </a:t>
+            </a:r>
+            <a:r>
+              <a:rPr lang="es-CO" sz="1200" dirty="0" err="1">
+                <a:latin typeface="Consolas" panose="020B0609020204030204" pitchFamily="49" charset="0"/>
+              </a:rPr>
+              <a:t>int</a:t>
+            </a:r>
+            <a:r>
+              <a:rPr lang="es-CO" sz="1200" dirty="0">
+                <a:latin typeface="Consolas" panose="020B0609020204030204" pitchFamily="49" charset="0"/>
+              </a:rPr>
+              <a:t>(input("Cantidad de estudiantes: "))</a:t>
+            </a:r>
+          </a:p>
+          <a:p>
+            <a:r>
+              <a:rPr lang="es-CO" sz="1200" dirty="0">
+                <a:latin typeface="Consolas" panose="020B0609020204030204" pitchFamily="49" charset="0"/>
+              </a:rPr>
+              <a:t>11      suma = 0.0</a:t>
+            </a:r>
+          </a:p>
+          <a:p>
+            <a:r>
+              <a:rPr lang="es-CO" sz="1200" dirty="0">
+                <a:latin typeface="Consolas" panose="020B0609020204030204" pitchFamily="49" charset="0"/>
+              </a:rPr>
+              <a:t>12      </a:t>
+            </a:r>
+            <a:r>
+              <a:rPr lang="es-CO" sz="1200" dirty="0" err="1">
+                <a:latin typeface="Consolas" panose="020B0609020204030204" pitchFamily="49" charset="0"/>
+              </a:rPr>
+              <a:t>for</a:t>
+            </a:r>
+            <a:r>
+              <a:rPr lang="es-CO" sz="1200" dirty="0">
+                <a:latin typeface="Consolas" panose="020B0609020204030204" pitchFamily="49" charset="0"/>
+              </a:rPr>
+              <a:t> i in </a:t>
+            </a:r>
+            <a:r>
+              <a:rPr lang="es-CO" sz="1200" dirty="0" err="1">
+                <a:latin typeface="Consolas" panose="020B0609020204030204" pitchFamily="49" charset="0"/>
+              </a:rPr>
+              <a:t>range</a:t>
+            </a:r>
+            <a:r>
+              <a:rPr lang="es-CO" sz="1200" dirty="0">
+                <a:latin typeface="Consolas" panose="020B0609020204030204" pitchFamily="49" charset="0"/>
+              </a:rPr>
+              <a:t>(cantidad):</a:t>
+            </a:r>
+          </a:p>
+          <a:p>
+            <a:r>
+              <a:rPr lang="es-CO" sz="1200" dirty="0">
+                <a:latin typeface="Consolas" panose="020B0609020204030204" pitchFamily="49" charset="0"/>
+              </a:rPr>
+              <a:t>13          nota = </a:t>
+            </a:r>
+            <a:r>
+              <a:rPr lang="es-CO" sz="1200" dirty="0" err="1">
+                <a:latin typeface="Consolas" panose="020B0609020204030204" pitchFamily="49" charset="0"/>
+              </a:rPr>
+              <a:t>float</a:t>
+            </a:r>
+            <a:r>
+              <a:rPr lang="es-CO" sz="1200" dirty="0">
+                <a:latin typeface="Consolas" panose="020B0609020204030204" pitchFamily="49" charset="0"/>
+              </a:rPr>
+              <a:t>(input(</a:t>
+            </a:r>
+            <a:r>
+              <a:rPr lang="es-CO" sz="1200" dirty="0" err="1">
+                <a:latin typeface="Consolas" panose="020B0609020204030204" pitchFamily="49" charset="0"/>
+              </a:rPr>
+              <a:t>f"Nota</a:t>
+            </a:r>
+            <a:r>
+              <a:rPr lang="es-CO" sz="1200" dirty="0">
+                <a:latin typeface="Consolas" panose="020B0609020204030204" pitchFamily="49" charset="0"/>
+              </a:rPr>
+              <a:t> del estudiante {i + 1}: "))</a:t>
+            </a:r>
+          </a:p>
+          <a:p>
+            <a:r>
+              <a:rPr lang="es-CO" sz="1200" dirty="0">
+                <a:latin typeface="Consolas" panose="020B0609020204030204" pitchFamily="49" charset="0"/>
+              </a:rPr>
+              <a:t>14          suma += nota</a:t>
+            </a:r>
+          </a:p>
+          <a:p>
+            <a:r>
+              <a:rPr lang="es-CO" sz="1200" dirty="0">
+                <a:latin typeface="Consolas" panose="020B0609020204030204" pitchFamily="49" charset="0"/>
+              </a:rPr>
+              <a:t>15      promedio = suma / cantidad</a:t>
+            </a:r>
+          </a:p>
+          <a:p>
+            <a:r>
+              <a:rPr lang="es-CO" sz="1200" dirty="0">
+                <a:latin typeface="Consolas" panose="020B0609020204030204" pitchFamily="49" charset="0"/>
+              </a:rPr>
+              <a:t>16      </a:t>
+            </a:r>
+            <a:r>
+              <a:rPr lang="es-CO" sz="1200" dirty="0" err="1">
+                <a:latin typeface="Consolas" panose="020B0609020204030204" pitchFamily="49" charset="0"/>
+              </a:rPr>
+              <a:t>print</a:t>
+            </a:r>
+            <a:r>
+              <a:rPr lang="es-CO" sz="1200" dirty="0">
+                <a:latin typeface="Consolas" panose="020B0609020204030204" pitchFamily="49" charset="0"/>
+              </a:rPr>
+              <a:t>(</a:t>
+            </a:r>
+            <a:r>
+              <a:rPr lang="es-CO" sz="1200" dirty="0" err="1">
+                <a:latin typeface="Consolas" panose="020B0609020204030204" pitchFamily="49" charset="0"/>
+              </a:rPr>
+              <a:t>f"Promedio</a:t>
+            </a:r>
+            <a:r>
+              <a:rPr lang="es-CO" sz="1200" dirty="0">
+                <a:latin typeface="Consolas" panose="020B0609020204030204" pitchFamily="49" charset="0"/>
+              </a:rPr>
+              <a:t> del curso: {promedio:.2f}")</a:t>
+            </a:r>
+          </a:p>
+          <a:p>
+            <a:r>
+              <a:rPr lang="es-CO" sz="1200" dirty="0">
+                <a:latin typeface="Consolas" panose="020B0609020204030204" pitchFamily="49" charset="0"/>
+              </a:rPr>
+              <a:t>17      # ¿Cuántas notas son mayores que el promedio?</a:t>
+            </a:r>
+          </a:p>
+          <a:p>
+            <a:r>
+              <a:rPr lang="es-CO" sz="1200" dirty="0">
+                <a:latin typeface="Consolas" panose="020B0609020204030204" pitchFamily="49" charset="0"/>
+              </a:rPr>
+              <a:t>18      # Problema: la variable nota solo conserva la última nota leída.</a:t>
+            </a:r>
+          </a:p>
+          <a:p>
+            <a:r>
+              <a:rPr lang="es-CO" sz="1200" dirty="0">
+                <a:latin typeface="Consolas" panose="020B0609020204030204" pitchFamily="49" charset="0"/>
+              </a:rPr>
+              <a:t>19      </a:t>
+            </a:r>
+            <a:r>
+              <a:rPr lang="es-CO" sz="1200" dirty="0" err="1">
+                <a:latin typeface="Consolas" panose="020B0609020204030204" pitchFamily="49" charset="0"/>
+              </a:rPr>
+              <a:t>print</a:t>
+            </a:r>
+            <a:r>
+              <a:rPr lang="es-CO" sz="1200" dirty="0">
+                <a:latin typeface="Consolas" panose="020B0609020204030204" pitchFamily="49" charset="0"/>
+              </a:rPr>
+              <a:t>(</a:t>
+            </a:r>
+            <a:r>
+              <a:rPr lang="es-CO" sz="1200" dirty="0" err="1">
+                <a:latin typeface="Consolas" panose="020B0609020204030204" pitchFamily="49" charset="0"/>
+              </a:rPr>
+              <a:t>f"Nota</a:t>
+            </a:r>
+            <a:r>
+              <a:rPr lang="es-CO" sz="1200" dirty="0">
+                <a:latin typeface="Consolas" panose="020B0609020204030204" pitchFamily="49" charset="0"/>
+              </a:rPr>
+              <a:t> guardada en la variable nota: {nota}")</a:t>
+            </a:r>
+          </a:p>
+        </p:txBody>
+      </p:sp>
+      <p:sp>
+        <p:nvSpPr>
+          <p:cNvPr id="8" name="CuadroTexto 7">
+            <a:extLst>
+              <a:ext uri="{FF2B5EF4-FFF2-40B4-BE49-F238E27FC236}">
+                <a16:creationId xmlns:a16="http://schemas.microsoft.com/office/drawing/2014/main" id="{5B10E6FD-9F29-438D-815C-B2E85E0B9B12}"/>
+              </a:ext>
+            </a:extLst>
+          </p:cNvPr>
+          <p:cNvSpPr txBox="1"/>
+          <p:nvPr/>
+        </p:nvSpPr>
+        <p:spPr>
+          <a:xfrm>
+            <a:off x="1043607" y="4865680"/>
+            <a:ext cx="7056784" cy="461665"/>
+          </a:xfrm>
+          <a:prstGeom prst="rect">
+            <a:avLst/>
+          </a:prstGeom>
+          <a:noFill/>
+          <a:ln>
+            <a:solidFill>
+              <a:schemeClr val="tx1"/>
+            </a:solidFill>
+          </a:ln>
+        </p:spPr>
+        <p:txBody>
+          <a:bodyPr wrap="square">
+            <a:spAutoFit/>
+          </a:bodyPr>
+          <a:lstStyle/>
+          <a:p>
+            <a:r>
+              <a:rPr lang="es-MX" sz="1200" dirty="0">
+                <a:latin typeface="Consolas" panose="020B0609020204030204" pitchFamily="49" charset="0"/>
+              </a:rPr>
+              <a:t>Promedio del curso: 3.38</a:t>
+            </a:r>
+          </a:p>
+          <a:p>
+            <a:r>
+              <a:rPr lang="es-MX" sz="1200" dirty="0">
+                <a:latin typeface="Consolas" panose="020B0609020204030204" pitchFamily="49" charset="0"/>
+              </a:rPr>
+              <a:t>Nota guardada en la variable nota: 4.0</a:t>
+            </a:r>
+            <a:endParaRPr lang="es-CO" sz="1200" dirty="0">
+              <a:latin typeface="Consolas" panose="020B0609020204030204" pitchFamily="49" charset="0"/>
+            </a:endParaRPr>
+          </a:p>
+        </p:txBody>
+      </p:sp>
+    </p:spTree>
+    <p:extLst>
+      <p:ext uri="{BB962C8B-B14F-4D97-AF65-F5344CB8AC3E}">
+        <p14:creationId xmlns:p14="http://schemas.microsoft.com/office/powerpoint/2010/main" val="1887867090"/>
+      </p:ext>
+    </p:extLst>
+  </p:cSld>
+  <p:clrMapOvr>
+    <a:masterClrMapping/>
+  </p:clrMapOvr>
+</p:sld>
+</file>
+
+<file path=ppt/slides/slide57.xml><?xml version="1.0" encoding="utf-8"?>
+<p:sld xmlns:a="http://schemas.openxmlformats.org/drawingml/2006/main" xmlns:r="http://schemas.openxmlformats.org/officeDocument/2006/relationships" xmlns:p="http://schemas.openxmlformats.org/presentationml/2006/main">
+  <p:cSld>
+    <p:spTree>
+      <p:nvGrpSpPr>
+        <p:cNvPr id="1" name=""/>
+        <p:cNvGrpSpPr/>
+        <p:nvPr/>
+      </p:nvGrpSpPr>
+      <p:grpSpPr>
+        <a:xfrm>
+          <a:off x="0" y="0"/>
+          <a:ext cx="0" cy="0"/>
+          <a:chOff x="0" y="0"/>
+          <a:chExt cx="0" cy="0"/>
+        </a:xfrm>
+      </p:grpSpPr>
+      <p:sp>
+        <p:nvSpPr>
+          <p:cNvPr id="5" name="4 Título"/>
+          <p:cNvSpPr>
+            <a:spLocks noGrp="1"/>
+          </p:cNvSpPr>
+          <p:nvPr>
+            <p:ph type="title"/>
+          </p:nvPr>
+        </p:nvSpPr>
+        <p:spPr>
+          <a:xfrm>
+            <a:off x="323528" y="116632"/>
+            <a:ext cx="8675832" cy="794653"/>
+          </a:xfrm>
+        </p:spPr>
+        <p:txBody>
+          <a:bodyPr>
+            <a:noAutofit/>
+          </a:bodyPr>
+          <a:lstStyle/>
+          <a:p>
+            <a:r>
+              <a:rPr lang="es-MX" sz="3200" dirty="0"/>
+              <a:t>Próxima clase: arreglos (listas en Python)</a:t>
+            </a:r>
+          </a:p>
+        </p:txBody>
+      </p:sp>
+      <p:sp>
+        <p:nvSpPr>
+          <p:cNvPr id="6" name="12 Rectángulo">
+            <a:extLst>
+              <a:ext uri="{FF2B5EF4-FFF2-40B4-BE49-F238E27FC236}">
+                <a16:creationId xmlns:a16="http://schemas.microsoft.com/office/drawing/2014/main" id="{A73AFEAC-B223-4D7F-B142-1E206A88BEB3}"/>
+              </a:ext>
+            </a:extLst>
+          </p:cNvPr>
+          <p:cNvSpPr/>
+          <p:nvPr/>
+        </p:nvSpPr>
+        <p:spPr>
+          <a:xfrm>
+            <a:off x="181774" y="911285"/>
+            <a:ext cx="8854721" cy="1015663"/>
+          </a:xfrm>
+          <a:prstGeom prst="rect">
+            <a:avLst/>
+          </a:prstGeom>
+        </p:spPr>
+        <p:txBody>
+          <a:bodyPr wrap="square">
+            <a:spAutoFit/>
+          </a:bodyPr>
+          <a:lstStyle/>
+          <a:p>
+            <a:pPr marL="342900" indent="-342900" rtl="0">
+              <a:buFont typeface="Arial" panose="020B0604020202020204" pitchFamily="34" charset="0"/>
+              <a:buChar char="•"/>
+            </a:pPr>
+            <a:r>
+              <a:rPr lang="es-MX" sz="2000" dirty="0"/>
+              <a:t>Un arreglo es como una variable que guarda muchos valores, y a cada uno se accede por su posición.</a:t>
+            </a:r>
+          </a:p>
+          <a:p>
+            <a:pPr marL="342900" indent="-342900" rtl="0">
+              <a:buFont typeface="Arial" panose="020B0604020202020204" pitchFamily="34" charset="0"/>
+              <a:buChar char="•"/>
+            </a:pPr>
+            <a:r>
+              <a:rPr lang="es-MX" sz="2000" dirty="0"/>
+              <a:t>Las posiciones empiezan en 0.</a:t>
+            </a:r>
+          </a:p>
+        </p:txBody>
+      </p:sp>
+      <p:pic>
+        <p:nvPicPr>
+          <p:cNvPr id="3" name="Imagen 2">
+            <a:extLst>
+              <a:ext uri="{FF2B5EF4-FFF2-40B4-BE49-F238E27FC236}">
+                <a16:creationId xmlns:a16="http://schemas.microsoft.com/office/drawing/2014/main" id="{9E8A2A30-42A2-437D-8D64-422690A0DF3C}"/>
+              </a:ext>
+            </a:extLst>
+          </p:cNvPr>
+          <p:cNvPicPr>
+            <a:picLocks noChangeAspect="1"/>
+          </p:cNvPicPr>
+          <p:nvPr/>
+        </p:nvPicPr>
+        <p:blipFill>
+          <a:blip r:embed="rId2">
+            <a:extLst>
+              <a:ext uri="{28A0092B-C50C-407E-A947-70E740481C1C}">
+                <a14:useLocalDpi xmlns:a14="http://schemas.microsoft.com/office/drawing/2010/main" val="0"/>
+              </a:ext>
+            </a:extLst>
+          </a:blip>
+          <a:stretch>
+            <a:fillRect/>
+          </a:stretch>
+        </p:blipFill>
+        <p:spPr>
+          <a:xfrm>
+            <a:off x="525880" y="2488530"/>
+            <a:ext cx="8618120" cy="1880939"/>
+          </a:xfrm>
+          <a:prstGeom prst="rect">
+            <a:avLst/>
+          </a:prstGeom>
+        </p:spPr>
+      </p:pic>
+    </p:spTree>
+    <p:extLst>
+      <p:ext uri="{BB962C8B-B14F-4D97-AF65-F5344CB8AC3E}">
+        <p14:creationId xmlns:p14="http://schemas.microsoft.com/office/powerpoint/2010/main" val="2876184869"/>
+      </p:ext>
+    </p:extLst>
+  </p:cSld>
+  <p:clrMapOvr>
+    <a:masterClrMapping/>
+  </p:clrMapOvr>
+</p:sld>
+</file>
+
+<file path=ppt/slides/slide58.xml><?xml version="1.0" encoding="utf-8"?>
+<p:sld xmlns:a="http://schemas.openxmlformats.org/drawingml/2006/main" xmlns:r="http://schemas.openxmlformats.org/officeDocument/2006/relationships" xmlns:p="http://schemas.openxmlformats.org/presentationml/2006/main">
+  <p:cSld>
+    <p:spTree>
+      <p:nvGrpSpPr>
+        <p:cNvPr id="1" name=""/>
+        <p:cNvGrpSpPr/>
+        <p:nvPr/>
+      </p:nvGrpSpPr>
+      <p:grpSpPr>
+        <a:xfrm>
+          <a:off x="0" y="0"/>
+          <a:ext cx="0" cy="0"/>
+          <a:chOff x="0" y="0"/>
+          <a:chExt cx="0" cy="0"/>
+        </a:xfrm>
+      </p:grpSpPr>
+      <p:sp>
+        <p:nvSpPr>
+          <p:cNvPr id="5" name="Title 4"/>
+          <p:cNvSpPr>
+            <a:spLocks noGrp="1"/>
+          </p:cNvSpPr>
+          <p:nvPr>
+            <p:ph type="title"/>
+          </p:nvPr>
+        </p:nvSpPr>
+        <p:spPr>
+          <a:xfrm>
+            <a:off x="107504" y="23817"/>
+            <a:ext cx="7886700" cy="812895"/>
+          </a:xfrm>
+        </p:spPr>
+        <p:txBody>
+          <a:bodyPr>
+            <a:normAutofit/>
+          </a:bodyPr>
+          <a:lstStyle/>
+          <a:p>
+            <a:r>
+              <a:rPr lang="en-US" sz="4000" dirty="0"/>
+              <a:t>Referencias</a:t>
+            </a:r>
+          </a:p>
+        </p:txBody>
+      </p:sp>
+      <p:sp>
+        <p:nvSpPr>
+          <p:cNvPr id="2" name="Content Placeholder 1"/>
+          <p:cNvSpPr>
+            <a:spLocks noGrp="1"/>
+          </p:cNvSpPr>
+          <p:nvPr>
+            <p:ph idx="1"/>
+          </p:nvPr>
+        </p:nvSpPr>
+        <p:spPr>
+          <a:xfrm>
+            <a:off x="179512" y="692696"/>
+            <a:ext cx="8712968" cy="6048672"/>
+          </a:xfrm>
+        </p:spPr>
+        <p:txBody>
+          <a:bodyPr>
+            <a:noAutofit/>
+          </a:bodyPr>
+          <a:lstStyle/>
+          <a:p>
+            <a:pPr rtl="0">
+              <a:buFont typeface="Arial" panose="020B0604020202020204" pitchFamily="34" charset="0"/>
+              <a:buChar char="•"/>
+            </a:pPr>
+            <a:r>
+              <a:rPr lang="es-MX" sz="2000" dirty="0"/>
+              <a:t>Aprender a Programar: Abstracción en programación. Concepto. Diseño top-</a:t>
+            </a:r>
+            <a:r>
+              <a:rPr lang="es-MX" sz="2000" dirty="0" err="1"/>
+              <a:t>down</a:t>
+            </a:r>
+            <a:r>
+              <a:rPr lang="es-MX" sz="2000" dirty="0"/>
+              <a:t> de algoritmos y programas. Ejemplos (CU00225A) </a:t>
+            </a:r>
+            <a:r>
+              <a:rPr lang="es-MX" sz="2000" dirty="0">
+                <a:hlinkClick r:id="rId2"/>
+              </a:rPr>
+              <a:t>https://www.aprenderaprogramar.com/index.php?option=com_content&amp;view=category&amp;id=36&amp;Itemid=60</a:t>
+            </a:r>
+            <a:r>
+              <a:rPr lang="es-MX" sz="2000" dirty="0"/>
+              <a:t>  </a:t>
+            </a:r>
+          </a:p>
+          <a:p>
+            <a:pPr rtl="0">
+              <a:buFont typeface="Arial" panose="020B0604020202020204" pitchFamily="34" charset="0"/>
+              <a:buChar char="•"/>
+            </a:pPr>
+            <a:r>
+              <a:rPr lang="es-MX" sz="2000" dirty="0"/>
+              <a:t>Stanford CS106A, </a:t>
+            </a:r>
+            <a:r>
+              <a:rPr lang="es-MX" sz="2000" i="1" dirty="0"/>
+              <a:t>Karel Reader</a:t>
+            </a:r>
+            <a:r>
+              <a:rPr lang="es-MX" sz="2000" dirty="0"/>
+              <a:t>, cap. 8: </a:t>
+            </a:r>
+            <a:r>
+              <a:rPr lang="es-MX" sz="2000" i="1" dirty="0" err="1"/>
+              <a:t>Stepwise</a:t>
+            </a:r>
+            <a:r>
+              <a:rPr lang="es-MX" sz="2000" i="1" dirty="0"/>
+              <a:t> </a:t>
+            </a:r>
+            <a:r>
+              <a:rPr lang="es-MX" sz="2000" i="1" dirty="0" err="1"/>
+              <a:t>Refinement</a:t>
+            </a:r>
+            <a:br>
+              <a:rPr lang="es-MX" sz="2000" dirty="0"/>
+            </a:br>
+            <a:r>
+              <a:rPr lang="es-MX" sz="2000" dirty="0">
+                <a:hlinkClick r:id="rId3"/>
+              </a:rPr>
+              <a:t>https://compedu.stanford.edu/karel-reader/docs/python/en/chapter8.html</a:t>
+            </a:r>
+            <a:endParaRPr lang="es-MX" sz="2000" dirty="0"/>
+          </a:p>
+          <a:p>
+            <a:pPr rtl="0">
+              <a:buFont typeface="Arial" panose="020B0604020202020204" pitchFamily="34" charset="0"/>
+              <a:buChar char="•"/>
+            </a:pPr>
+            <a:r>
+              <a:rPr lang="es-MX" sz="2000" dirty="0"/>
+              <a:t>Stanford CS106A, lección 3: </a:t>
+            </a:r>
+            <a:r>
+              <a:rPr lang="es-MX" sz="2000" i="1" dirty="0" err="1"/>
+              <a:t>Decomposition</a:t>
+            </a:r>
+            <a:br>
+              <a:rPr lang="es-MX" sz="2000" dirty="0"/>
+            </a:br>
+            <a:r>
+              <a:rPr lang="es-MX" sz="2000" dirty="0">
+                <a:hlinkClick r:id="rId4"/>
+              </a:rPr>
+              <a:t>https://web.stanford.edu/class/archive/cs/cs106a/cs106a.1226/lectures/03-decomposition/3-Decomposition.pdf</a:t>
+            </a:r>
+            <a:endParaRPr lang="es-MX" sz="2000" dirty="0"/>
+          </a:p>
+          <a:p>
+            <a:pPr rtl="0">
+              <a:buFont typeface="Arial" panose="020B0604020202020204" pitchFamily="34" charset="0"/>
+              <a:buChar char="•"/>
+            </a:pPr>
+            <a:r>
+              <a:rPr lang="es-MX" sz="2000" dirty="0"/>
+              <a:t>MIT 6.100L, lección 7: </a:t>
+            </a:r>
+            <a:r>
+              <a:rPr lang="es-MX" sz="2000" i="1" dirty="0" err="1"/>
+              <a:t>Decomposition</a:t>
+            </a:r>
+            <a:r>
+              <a:rPr lang="es-MX" sz="2000" i="1" dirty="0"/>
+              <a:t>, </a:t>
+            </a:r>
+            <a:r>
+              <a:rPr lang="es-MX" sz="2000" i="1" dirty="0" err="1"/>
+              <a:t>Abstraction</a:t>
+            </a:r>
+            <a:r>
+              <a:rPr lang="es-MX" sz="2000" i="1" dirty="0"/>
+              <a:t>, </a:t>
+            </a:r>
+            <a:r>
+              <a:rPr lang="es-MX" sz="2000" i="1" dirty="0" err="1"/>
+              <a:t>Functions</a:t>
+            </a:r>
+            <a:r>
+              <a:rPr lang="es-MX" sz="2000" dirty="0"/>
+              <a:t> (diapositivas)</a:t>
+            </a:r>
+            <a:br>
+              <a:rPr lang="es-MX" sz="2000" dirty="0"/>
+            </a:br>
+            <a:r>
+              <a:rPr lang="es-MX" sz="2000" dirty="0">
+                <a:hlinkClick r:id="rId5"/>
+              </a:rPr>
+              <a:t>https://ocw.mit.edu/courses/6-100l-introduction-to-cs-and-programming-using-python-fall-2022/resources/mit6_100l_f22_lec07_pdf/</a:t>
+            </a:r>
+            <a:endParaRPr lang="es-MX" sz="2000" dirty="0"/>
+          </a:p>
+          <a:p>
+            <a:pPr rtl="0">
+              <a:buFont typeface="Arial" panose="020B0604020202020204" pitchFamily="34" charset="0"/>
+              <a:buChar char="•"/>
+            </a:pPr>
+            <a:r>
+              <a:rPr lang="es-MX" sz="2000" dirty="0"/>
+              <a:t>MIT 6.100L, lección 7 (video)</a:t>
+            </a:r>
+            <a:br>
+              <a:rPr lang="es-MX" sz="2000" dirty="0"/>
+            </a:br>
+            <a:r>
+              <a:rPr lang="es-MX" sz="2000" dirty="0">
+                <a:hlinkClick r:id="rId6"/>
+              </a:rPr>
+              <a:t>https://ocw.mit.edu/courses/6-100l-introduction-to-cs-and-programming-using-python-fall-2022/resources/6100l-lecture-7-multi_mp4/</a:t>
+            </a:r>
+            <a:endParaRPr lang="es-MX" sz="2000" dirty="0"/>
+          </a:p>
+          <a:p>
+            <a:pPr rtl="0">
+              <a:buFont typeface="Arial" panose="020B0604020202020204" pitchFamily="34" charset="0"/>
+              <a:buChar char="•"/>
+            </a:pPr>
+            <a:r>
+              <a:rPr lang="es-MX" sz="2000" dirty="0"/>
+              <a:t>CS50P, lección 0: </a:t>
+            </a:r>
+            <a:r>
+              <a:rPr lang="es-MX" sz="2000" i="1" dirty="0" err="1"/>
+              <a:t>Functions</a:t>
+            </a:r>
+            <a:r>
+              <a:rPr lang="es-MX" sz="2000" i="1" dirty="0"/>
+              <a:t>, Variables</a:t>
+            </a:r>
+            <a:br>
+              <a:rPr lang="es-MX" sz="2000" dirty="0"/>
+            </a:br>
+            <a:r>
+              <a:rPr lang="es-MX" sz="2000" dirty="0">
+                <a:hlinkClick r:id="rId7"/>
+              </a:rPr>
+              <a:t>https://cs50.harvard.edu/python/notes/0/</a:t>
+            </a:r>
+            <a:endParaRPr lang="es-MX" sz="2000" dirty="0"/>
+          </a:p>
+          <a:p>
+            <a:pPr rtl="0"/>
+            <a:r>
+              <a:rPr lang="en-US" sz="2000" dirty="0"/>
+              <a:t>Liang, Y. D. </a:t>
+            </a:r>
+            <a:r>
+              <a:rPr lang="en-US" sz="2000" i="1" dirty="0"/>
+              <a:t>Introduction to Programming Using Python</a:t>
+            </a:r>
+            <a:r>
+              <a:rPr lang="en-US" sz="2000" dirty="0"/>
+              <a:t>, §6.13 </a:t>
+            </a:r>
+            <a:r>
+              <a:rPr lang="en-US" sz="2000" i="1" dirty="0"/>
+              <a:t>Function Abstraction and Stepwise Refinement</a:t>
+            </a:r>
+            <a:endParaRPr lang="es-MX" sz="2000" dirty="0"/>
+          </a:p>
+        </p:txBody>
+      </p:sp>
+    </p:spTree>
+    <p:extLst>
+      <p:ext uri="{BB962C8B-B14F-4D97-AF65-F5344CB8AC3E}">
+        <p14:creationId xmlns:p14="http://schemas.microsoft.com/office/powerpoint/2010/main" val="1023164851"/>
+      </p:ext>
+    </p:extLst>
+  </p:cSld>
+  <p:clrMapOvr>
+    <a:masterClrMapping/>
+  </p:clrMapOvr>
+</p:sld>
+</file>
+
+<file path=ppt/slides/slide59.xml><?xml version="1.0" encoding="utf-8"?>
+<p:sld xmlns:a="http://schemas.openxmlformats.org/drawingml/2006/main" xmlns:r="http://schemas.openxmlformats.org/officeDocument/2006/relationships" xmlns:p="http://schemas.openxmlformats.org/presentationml/2006/main">
+  <p:cSld>
+    <p:spTree>
+      <p:nvGrpSpPr>
+        <p:cNvPr id="1" name=""/>
+        <p:cNvGrpSpPr/>
+        <p:nvPr/>
+      </p:nvGrpSpPr>
+      <p:grpSpPr>
+        <a:xfrm>
+          <a:off x="0" y="0"/>
+          <a:ext cx="0" cy="0"/>
+          <a:chOff x="0" y="0"/>
+          <a:chExt cx="0" cy="0"/>
+        </a:xfrm>
+      </p:grpSpPr>
+      <p:sp>
+        <p:nvSpPr>
+          <p:cNvPr id="5" name="Title 4"/>
+          <p:cNvSpPr>
+            <a:spLocks noGrp="1"/>
+          </p:cNvSpPr>
+          <p:nvPr>
+            <p:ph type="title"/>
+          </p:nvPr>
+        </p:nvSpPr>
+        <p:spPr>
+          <a:xfrm>
+            <a:off x="107504" y="23817"/>
+            <a:ext cx="7886700" cy="812895"/>
+          </a:xfrm>
+        </p:spPr>
+        <p:txBody>
+          <a:bodyPr>
+            <a:normAutofit/>
+          </a:bodyPr>
+          <a:lstStyle/>
+          <a:p>
+            <a:r>
+              <a:rPr lang="en-US" sz="4000" dirty="0"/>
+              <a:t>Referencias</a:t>
+            </a:r>
+          </a:p>
+        </p:txBody>
+      </p:sp>
+      <p:sp>
+        <p:nvSpPr>
+          <p:cNvPr id="2" name="Content Placeholder 1"/>
+          <p:cNvSpPr>
+            <a:spLocks noGrp="1"/>
+          </p:cNvSpPr>
+          <p:nvPr>
+            <p:ph idx="1"/>
+          </p:nvPr>
+        </p:nvSpPr>
+        <p:spPr>
+          <a:xfrm>
+            <a:off x="218875" y="836712"/>
+            <a:ext cx="8784976" cy="5832648"/>
+          </a:xfrm>
+        </p:spPr>
+        <p:txBody>
+          <a:bodyPr>
+            <a:noAutofit/>
+          </a:bodyPr>
+          <a:lstStyle/>
+          <a:p>
+            <a:r>
+              <a:rPr lang="es-CO" sz="1400" dirty="0">
+                <a:hlinkClick r:id="rId2"/>
+              </a:rPr>
+              <a:t>https://ellibrodepython.com/</a:t>
+            </a:r>
+            <a:endParaRPr lang="es-CO" sz="1400" dirty="0"/>
+          </a:p>
+          <a:p>
+            <a:r>
+              <a:rPr lang="es-CO" sz="1400" dirty="0">
+                <a:hlinkClick r:id="rId3"/>
+              </a:rPr>
+              <a:t>https://www.uvm.edu/~cbcafier/</a:t>
+            </a:r>
+            <a:endParaRPr lang="es-CO" sz="1400" dirty="0"/>
+          </a:p>
+          <a:p>
+            <a:r>
+              <a:rPr lang="es-CO" sz="1400" dirty="0">
+                <a:hlinkClick r:id="rId4"/>
+              </a:rPr>
+              <a:t>https://realpython.com/</a:t>
+            </a:r>
+            <a:endParaRPr lang="es-CO" sz="1400" dirty="0"/>
+          </a:p>
+          <a:p>
+            <a:r>
+              <a:rPr lang="es-CO" sz="1400" dirty="0">
+                <a:hlinkClick r:id="rId5"/>
+              </a:rPr>
+              <a:t>https://docs.python.org/es/3/tutorial/</a:t>
+            </a:r>
+            <a:endParaRPr lang="es-CO" sz="1400" dirty="0"/>
+          </a:p>
+          <a:p>
+            <a:r>
+              <a:rPr lang="es-CO" sz="1400" dirty="0">
+                <a:hlinkClick r:id="rId6"/>
+              </a:rPr>
+              <a:t>https://python-course.eu/</a:t>
+            </a:r>
+            <a:endParaRPr lang="es-CO" sz="1400" dirty="0"/>
+          </a:p>
+          <a:p>
+            <a:r>
+              <a:rPr lang="es-CO" sz="1400" dirty="0">
+                <a:hlinkClick r:id="rId7"/>
+              </a:rPr>
+              <a:t>https://www.teach.cs.toronto.edu/~csc110y/fall/notes/</a:t>
+            </a:r>
+            <a:endParaRPr lang="es-CO" sz="1400" dirty="0"/>
+          </a:p>
+          <a:p>
+            <a:r>
+              <a:rPr lang="es-CO" sz="1400" dirty="0">
+                <a:hlinkClick r:id="rId8"/>
+              </a:rPr>
+              <a:t>https://realpython.com/defining-your-own-python-function/</a:t>
+            </a:r>
+            <a:r>
+              <a:rPr lang="es-CO" sz="1400" dirty="0"/>
+              <a:t>    </a:t>
+            </a:r>
+          </a:p>
+          <a:p>
+            <a:r>
+              <a:rPr lang="es-CO" sz="1400" dirty="0">
+                <a:hlinkClick r:id="rId9"/>
+              </a:rPr>
+              <a:t>https://realpython.com/python-built-in-functions/</a:t>
+            </a:r>
+            <a:endParaRPr lang="es-CO" sz="1400" dirty="0"/>
+          </a:p>
+          <a:p>
+            <a:r>
+              <a:rPr lang="es-CO" sz="1400" dirty="0">
+                <a:hlinkClick r:id="rId10"/>
+              </a:rPr>
+              <a:t>https://realpython.com/ref/best-practices/functions/</a:t>
+            </a:r>
+            <a:r>
+              <a:rPr lang="es-CO" sz="1400" dirty="0"/>
+              <a:t> </a:t>
+            </a:r>
+          </a:p>
+          <a:p>
+            <a:r>
+              <a:rPr lang="en-US" sz="1400" dirty="0">
+                <a:hlinkClick r:id="rId11"/>
+              </a:rPr>
+              <a:t>https://realpython.com/python-while-loop/</a:t>
+            </a:r>
+            <a:endParaRPr lang="en-US" sz="1400" dirty="0"/>
+          </a:p>
+          <a:p>
+            <a:r>
+              <a:rPr lang="en-US" sz="1400" dirty="0">
+                <a:hlinkClick r:id="rId12"/>
+              </a:rPr>
+              <a:t>https://realpython.com/ref/keywords/while/</a:t>
+            </a:r>
+            <a:r>
+              <a:rPr lang="en-US" sz="1400" dirty="0"/>
+              <a:t> </a:t>
+            </a:r>
+          </a:p>
+          <a:p>
+            <a:r>
+              <a:rPr lang="en-US" sz="1400" dirty="0">
+                <a:hlinkClick r:id="rId13"/>
+              </a:rPr>
+              <a:t>https://cs.stanford.edu/people/nick/py/</a:t>
+            </a:r>
+            <a:r>
+              <a:rPr lang="en-US" sz="1400" dirty="0"/>
+              <a:t> </a:t>
+            </a:r>
+          </a:p>
+          <a:p>
+            <a:r>
+              <a:rPr lang="en-US" sz="1400" dirty="0">
+                <a:hlinkClick r:id="rId7"/>
+              </a:rPr>
+              <a:t>https://www.teach.cs.toronto.edu/~csc110y/fall/notes/</a:t>
+            </a:r>
+            <a:r>
+              <a:rPr lang="en-US" sz="1400" dirty="0"/>
+              <a:t> </a:t>
+            </a:r>
+          </a:p>
+          <a:p>
+            <a:r>
+              <a:rPr lang="en-US" sz="1400" dirty="0">
+                <a:hlinkClick r:id="rId14"/>
+              </a:rPr>
+              <a:t>https://github.com/rjherrera/IIC1103/tree/master</a:t>
+            </a:r>
+            <a:r>
+              <a:rPr lang="en-US" sz="1400" dirty="0"/>
+              <a:t> </a:t>
+            </a:r>
+          </a:p>
+          <a:p>
+            <a:r>
+              <a:rPr lang="en-US" sz="1400" dirty="0">
+                <a:hlinkClick r:id="rId15"/>
+              </a:rPr>
+              <a:t>https://web.stanford.edu/class/cs106a/</a:t>
+            </a:r>
+            <a:r>
+              <a:rPr lang="en-US" sz="1400" dirty="0"/>
+              <a:t> </a:t>
+            </a:r>
+          </a:p>
+          <a:p>
+            <a:r>
+              <a:rPr lang="en-US" sz="1400" dirty="0">
+                <a:hlinkClick r:id="rId16"/>
+              </a:rPr>
+              <a:t>https://web.stanford.edu/class/cs106a/section/section1/section1.html</a:t>
+            </a:r>
+            <a:r>
+              <a:rPr lang="en-US" sz="1400" dirty="0"/>
+              <a:t> </a:t>
+            </a:r>
+          </a:p>
+          <a:p>
+            <a:r>
+              <a:rPr lang="en-US" sz="1400" dirty="0">
+                <a:hlinkClick r:id="rId17"/>
+              </a:rPr>
+              <a:t>https://compedu.stanford.edu/karel-reader/docs/python/en/intro.html</a:t>
+            </a:r>
+            <a:r>
+              <a:rPr lang="en-US" sz="1400" dirty="0"/>
+              <a:t> </a:t>
+            </a:r>
+          </a:p>
+          <a:p>
+            <a:r>
+              <a:rPr lang="en-US" sz="1400" dirty="0">
+                <a:hlinkClick r:id="rId18"/>
+              </a:rPr>
+              <a:t>https://es.wikipedia.org/wiki/Karel_el_Robot</a:t>
+            </a:r>
+            <a:r>
+              <a:rPr lang="en-US" sz="1400" dirty="0"/>
+              <a:t> </a:t>
+            </a:r>
+          </a:p>
+        </p:txBody>
+      </p:sp>
+    </p:spTree>
+    <p:extLst>
+      <p:ext uri="{BB962C8B-B14F-4D97-AF65-F5344CB8AC3E}">
+        <p14:creationId xmlns:p14="http://schemas.microsoft.com/office/powerpoint/2010/main" val="568862748"/>
+      </p:ext>
+    </p:extLst>
+  </p:cSld>
+  <p:clrMapOvr>
+    <a:masterClrMapping/>
+  </p:clrMapOvr>
+</p:sld>
+</file>
+
 <file path=ppt/slides/slide6.xml><?xml version="1.0" encoding="utf-8"?>
 <p:sld xmlns:a="http://schemas.openxmlformats.org/drawingml/2006/main" xmlns:r="http://schemas.openxmlformats.org/officeDocument/2006/relationships" xmlns:p="http://schemas.openxmlformats.org/presentationml/2006/main">
   <p:cSld>
@@ -40221,7 +45212,7 @@
               <a:t>: Una función se define mediante la palabra clave </a:t>
             </a:r>
             <a:r>
-              <a:rPr lang="es-MX" b="1" dirty="0" err="1">
+              <a:rPr lang="es-MX" b="1" dirty="0">
                 <a:solidFill>
                   <a:srgbClr val="C00000"/>
                 </a:solidFill>
@@ -41009,6 +46000,198 @@
     <p:extLst>
       <p:ext uri="{BB962C8B-B14F-4D97-AF65-F5344CB8AC3E}">
         <p14:creationId xmlns:p14="http://schemas.microsoft.com/office/powerpoint/2010/main" val="542168941"/>
+      </p:ext>
+    </p:extLst>
+  </p:cSld>
+  <p:clrMapOvr>
+    <a:masterClrMapping/>
+  </p:clrMapOvr>
+</p:sld>
+</file>
+
+<file path=ppt/slides/slide60.xml><?xml version="1.0" encoding="utf-8"?>
+<p:sld xmlns:a="http://schemas.openxmlformats.org/drawingml/2006/main" xmlns:r="http://schemas.openxmlformats.org/officeDocument/2006/relationships" xmlns:p="http://schemas.openxmlformats.org/presentationml/2006/main">
+  <p:cSld>
+    <p:spTree>
+      <p:nvGrpSpPr>
+        <p:cNvPr id="1" name=""/>
+        <p:cNvGrpSpPr/>
+        <p:nvPr/>
+      </p:nvGrpSpPr>
+      <p:grpSpPr>
+        <a:xfrm>
+          <a:off x="0" y="0"/>
+          <a:ext cx="0" cy="0"/>
+          <a:chOff x="0" y="0"/>
+          <a:chExt cx="0" cy="0"/>
+        </a:xfrm>
+      </p:grpSpPr>
+      <p:sp>
+        <p:nvSpPr>
+          <p:cNvPr id="2" name="Title 1"/>
+          <p:cNvSpPr>
+            <a:spLocks noGrp="1"/>
+          </p:cNvSpPr>
+          <p:nvPr>
+            <p:ph type="title"/>
+          </p:nvPr>
+        </p:nvSpPr>
+        <p:spPr>
+          <a:xfrm>
+            <a:off x="323528" y="180617"/>
+            <a:ext cx="8191822" cy="728103"/>
+          </a:xfrm>
+        </p:spPr>
+        <p:txBody>
+          <a:bodyPr/>
+          <a:lstStyle/>
+          <a:p>
+            <a:r>
+              <a:rPr lang="es-CO" dirty="0"/>
+              <a:t>Eso es todo amigos</a:t>
+            </a:r>
+            <a:endParaRPr lang="en-US" dirty="0"/>
+          </a:p>
+        </p:txBody>
+      </p:sp>
+      <p:pic>
+        <p:nvPicPr>
+          <p:cNvPr id="4" name="Picture 4">
+            <a:extLst>
+              <a:ext uri="{FF2B5EF4-FFF2-40B4-BE49-F238E27FC236}">
+                <a16:creationId xmlns:a16="http://schemas.microsoft.com/office/drawing/2014/main" id="{7F35EEF4-F126-467F-A5BB-259AA64991BD}"/>
+              </a:ext>
+            </a:extLst>
+          </p:cNvPr>
+          <p:cNvPicPr>
+            <a:picLocks noChangeAspect="1" noChangeArrowheads="1"/>
+          </p:cNvPicPr>
+          <p:nvPr/>
+        </p:nvPicPr>
+        <p:blipFill>
+          <a:blip r:embed="rId2">
+            <a:extLst>
+              <a:ext uri="{28A0092B-C50C-407E-A947-70E740481C1C}">
+                <a14:useLocalDpi xmlns:a14="http://schemas.microsoft.com/office/drawing/2010/main" val="0"/>
+              </a:ext>
+            </a:extLst>
+          </a:blip>
+          <a:srcRect/>
+          <a:stretch>
+            <a:fillRect/>
+          </a:stretch>
+        </p:blipFill>
+        <p:spPr bwMode="auto">
+          <a:xfrm>
+            <a:off x="4211960" y="912200"/>
+            <a:ext cx="4113633" cy="5868856"/>
+          </a:xfrm>
+          <a:prstGeom prst="rect">
+            <a:avLst/>
+          </a:prstGeom>
+          <a:noFill/>
+          <a:extLst>
+            <a:ext uri="{909E8E84-426E-40DD-AFC4-6F175D3DCCD1}">
+              <a14:hiddenFill xmlns:a14="http://schemas.microsoft.com/office/drawing/2010/main">
+                <a:solidFill>
+                  <a:srgbClr val="FFFFFF"/>
+                </a:solidFill>
+              </a14:hiddenFill>
+            </a:ext>
+          </a:extLst>
+        </p:spPr>
+      </p:pic>
+      <p:sp>
+        <p:nvSpPr>
+          <p:cNvPr id="5" name="7 Rectángulo">
+            <a:extLst>
+              <a:ext uri="{FF2B5EF4-FFF2-40B4-BE49-F238E27FC236}">
+                <a16:creationId xmlns:a16="http://schemas.microsoft.com/office/drawing/2014/main" id="{27C7AA4C-274E-4F17-B614-41C209AA98D3}"/>
+              </a:ext>
+            </a:extLst>
+          </p:cNvPr>
+          <p:cNvSpPr/>
+          <p:nvPr/>
+        </p:nvSpPr>
+        <p:spPr>
+          <a:xfrm>
+            <a:off x="101021" y="6519446"/>
+            <a:ext cx="3678892" cy="261610"/>
+          </a:xfrm>
+          <a:prstGeom prst="rect">
+            <a:avLst/>
+          </a:prstGeom>
+        </p:spPr>
+        <p:txBody>
+          <a:bodyPr wrap="square">
+            <a:spAutoFit/>
+          </a:bodyPr>
+          <a:lstStyle/>
+          <a:p>
+            <a:r>
+              <a:rPr lang="es-CO" sz="1100" dirty="0">
+                <a:hlinkClick r:id="rId3"/>
+              </a:rPr>
+              <a:t>https://phdcomics.com/comics/archive.php?comicid=1431</a:t>
+            </a:r>
+            <a:r>
+              <a:rPr lang="es-CO" sz="1100" dirty="0"/>
+              <a:t> </a:t>
+            </a:r>
+          </a:p>
+        </p:txBody>
+      </p:sp>
+      <p:pic>
+        <p:nvPicPr>
+          <p:cNvPr id="2050" name="Picture 2" descr="Ouch Images – Browse 81,244 Stock Photos, Vectors, and Video | Adobe Stock">
+            <a:extLst>
+              <a:ext uri="{FF2B5EF4-FFF2-40B4-BE49-F238E27FC236}">
+                <a16:creationId xmlns:a16="http://schemas.microsoft.com/office/drawing/2014/main" id="{190AEE93-FCB4-45D0-A740-34697C5E7782}"/>
+              </a:ext>
+            </a:extLst>
+          </p:cNvPr>
+          <p:cNvPicPr>
+            <a:picLocks noChangeAspect="1" noChangeArrowheads="1"/>
+          </p:cNvPicPr>
+          <p:nvPr/>
+        </p:nvPicPr>
+        <p:blipFill>
+          <a:blip r:embed="rId4">
+            <a:extLst>
+              <a:ext uri="{28A0092B-C50C-407E-A947-70E740481C1C}">
+                <a14:useLocalDpi xmlns:a14="http://schemas.microsoft.com/office/drawing/2010/main" val="0"/>
+              </a:ext>
+            </a:extLst>
+          </a:blip>
+          <a:srcRect/>
+          <a:stretch>
+            <a:fillRect/>
+          </a:stretch>
+        </p:blipFill>
+        <p:spPr bwMode="auto">
+          <a:xfrm>
+            <a:off x="297451" y="2496793"/>
+            <a:ext cx="3563955" cy="2434580"/>
+          </a:xfrm>
+          <a:prstGeom prst="rect">
+            <a:avLst/>
+          </a:prstGeom>
+          <a:noFill/>
+          <a:extLst>
+            <a:ext uri="{909E8E84-426E-40DD-AFC4-6F175D3DCCD1}">
+              <a14:hiddenFill xmlns:a14="http://schemas.microsoft.com/office/drawing/2010/main">
+                <a:solidFill>
+                  <a:srgbClr val="FFFFFF"/>
+                </a:solidFill>
+              </a14:hiddenFill>
+            </a:ext>
+          </a:extLst>
+        </p:spPr>
+      </p:pic>
+    </p:spTree>
+    <p:extLst>
+      <p:ext uri="{BB962C8B-B14F-4D97-AF65-F5344CB8AC3E}">
+        <p14:creationId xmlns:p14="http://schemas.microsoft.com/office/powerpoint/2010/main" val="3024962735"/>
       </p:ext>
     </p:extLst>
   </p:cSld>
